--- a/11-forecasting-drift-and-governance/slides.pptx
+++ b/11-forecasting-drift-and-governance/slides.pptx
@@ -937,7 +937,7 @@
           <a:bodyPr anchor="t"/>
           <a:lstStyle>
             <a:lvl1pPr algn="l">
-              <a:defRPr sz="3000" b="1" cap="all"/>
+              <a:defRPr sz="2350" b="1" cap="all"/>
             </a:lvl1pPr>
           </a:lstStyle>
           <a:p>
@@ -969,7 +969,7 @@
           <a:lstStyle>
             <a:lvl1pPr marL="0" indent="0">
               <a:buNone/>
-              <a:defRPr sz="1500">
+              <a:defRPr sz="1150">
                 <a:solidFill>
                   <a:schemeClr val="tx1">
                     <a:tint val="75000"/>
@@ -979,7 +979,7 @@
             </a:lvl1pPr>
             <a:lvl2pPr marL="342900" indent="0">
               <a:buNone/>
-              <a:defRPr sz="1350">
+              <a:defRPr sz="1050">
                 <a:solidFill>
                   <a:schemeClr val="tx1">
                     <a:tint val="75000"/>
@@ -989,7 +989,7 @@
             </a:lvl2pPr>
             <a:lvl3pPr marL="685800" indent="0">
               <a:buNone/>
-              <a:defRPr sz="1200">
+              <a:defRPr sz="950">
                 <a:solidFill>
                   <a:schemeClr val="tx1">
                     <a:tint val="75000"/>
@@ -999,7 +999,7 @@
             </a:lvl3pPr>
             <a:lvl4pPr marL="1028700" indent="0">
               <a:buNone/>
-              <a:defRPr sz="1050">
+              <a:defRPr sz="800">
                 <a:solidFill>
                   <a:schemeClr val="tx1">
                     <a:tint val="75000"/>
@@ -1009,7 +1009,7 @@
             </a:lvl4pPr>
             <a:lvl5pPr marL="1371600" indent="0">
               <a:buNone/>
-              <a:defRPr sz="1050">
+              <a:defRPr sz="800">
                 <a:solidFill>
                   <a:schemeClr val="tx1">
                     <a:tint val="75000"/>
@@ -1019,7 +1019,7 @@
             </a:lvl5pPr>
             <a:lvl6pPr marL="1714500" indent="0">
               <a:buNone/>
-              <a:defRPr sz="1050">
+              <a:defRPr sz="800">
                 <a:solidFill>
                   <a:schemeClr val="tx1">
                     <a:tint val="75000"/>
@@ -1029,7 +1029,7 @@
             </a:lvl6pPr>
             <a:lvl7pPr marL="2057400" indent="0">
               <a:buNone/>
-              <a:defRPr sz="1050">
+              <a:defRPr sz="800">
                 <a:solidFill>
                   <a:schemeClr val="tx1">
                     <a:tint val="75000"/>
@@ -1039,7 +1039,7 @@
             </a:lvl7pPr>
             <a:lvl8pPr marL="2400300" indent="0">
               <a:buNone/>
-              <a:defRPr sz="1050">
+              <a:defRPr sz="800">
                 <a:solidFill>
                   <a:schemeClr val="tx1">
                     <a:tint val="75000"/>
@@ -1049,7 +1049,7 @@
             </a:lvl8pPr>
             <a:lvl9pPr marL="2743200" indent="0">
               <a:buNone/>
-              <a:defRPr sz="1050">
+              <a:defRPr sz="800">
                 <a:solidFill>
                   <a:schemeClr val="tx1">
                     <a:tint val="75000"/>
@@ -1204,31 +1204,31 @@
           <a:bodyPr/>
           <a:lstStyle>
             <a:lvl1pPr>
-              <a:defRPr sz="2100"/>
+              <a:defRPr sz="1650"/>
             </a:lvl1pPr>
             <a:lvl2pPr>
-              <a:defRPr sz="1800"/>
+              <a:defRPr sz="1400"/>
             </a:lvl2pPr>
             <a:lvl3pPr>
-              <a:defRPr sz="1500"/>
+              <a:defRPr sz="1150"/>
             </a:lvl3pPr>
             <a:lvl4pPr>
-              <a:defRPr sz="1350"/>
+              <a:defRPr sz="1050"/>
             </a:lvl4pPr>
             <a:lvl5pPr>
-              <a:defRPr sz="1350"/>
+              <a:defRPr sz="1050"/>
             </a:lvl5pPr>
             <a:lvl6pPr>
-              <a:defRPr sz="1350"/>
+              <a:defRPr sz="1050"/>
             </a:lvl6pPr>
             <a:lvl7pPr>
-              <a:defRPr sz="1350"/>
+              <a:defRPr sz="1050"/>
             </a:lvl7pPr>
             <a:lvl8pPr>
-              <a:defRPr sz="1350"/>
+              <a:defRPr sz="1050"/>
             </a:lvl8pPr>
             <a:lvl9pPr>
-              <a:defRPr sz="1350"/>
+              <a:defRPr sz="1050"/>
             </a:lvl9pPr>
           </a:lstStyle>
           <a:p>
@@ -1288,31 +1288,31 @@
           <a:bodyPr/>
           <a:lstStyle>
             <a:lvl1pPr>
-              <a:defRPr sz="2100"/>
+              <a:defRPr sz="1650"/>
             </a:lvl1pPr>
             <a:lvl2pPr>
-              <a:defRPr sz="1800"/>
+              <a:defRPr sz="1400"/>
             </a:lvl2pPr>
             <a:lvl3pPr>
-              <a:defRPr sz="1500"/>
+              <a:defRPr sz="1150"/>
             </a:lvl3pPr>
             <a:lvl4pPr>
-              <a:defRPr sz="1350"/>
+              <a:defRPr sz="1050"/>
             </a:lvl4pPr>
             <a:lvl5pPr>
-              <a:defRPr sz="1350"/>
+              <a:defRPr sz="1050"/>
             </a:lvl5pPr>
             <a:lvl6pPr>
-              <a:defRPr sz="1350"/>
+              <a:defRPr sz="1050"/>
             </a:lvl6pPr>
             <a:lvl7pPr>
-              <a:defRPr sz="1350"/>
+              <a:defRPr sz="1050"/>
             </a:lvl7pPr>
             <a:lvl8pPr>
-              <a:defRPr sz="1350"/>
+              <a:defRPr sz="1050"/>
             </a:lvl8pPr>
             <a:lvl9pPr>
-              <a:defRPr sz="1350"/>
+              <a:defRPr sz="1050"/>
             </a:lvl9pPr>
           </a:lstStyle>
           <a:p>
@@ -1494,39 +1494,39 @@
           <a:lstStyle>
             <a:lvl1pPr marL="0" indent="0">
               <a:buNone/>
-              <a:defRPr sz="1800" b="1"/>
+              <a:defRPr sz="1400" b="1"/>
             </a:lvl1pPr>
             <a:lvl2pPr marL="342900" indent="0">
               <a:buNone/>
-              <a:defRPr sz="1500" b="1"/>
+              <a:defRPr sz="1150" b="1"/>
             </a:lvl2pPr>
             <a:lvl3pPr marL="685800" indent="0">
               <a:buNone/>
-              <a:defRPr sz="1350" b="1"/>
+              <a:defRPr sz="1050" b="1"/>
             </a:lvl3pPr>
             <a:lvl4pPr marL="1028700" indent="0">
               <a:buNone/>
-              <a:defRPr sz="1200" b="1"/>
+              <a:defRPr sz="950" b="1"/>
             </a:lvl4pPr>
             <a:lvl5pPr marL="1371600" indent="0">
               <a:buNone/>
-              <a:defRPr sz="1200" b="1"/>
+              <a:defRPr sz="950" b="1"/>
             </a:lvl5pPr>
             <a:lvl6pPr marL="1714500" indent="0">
               <a:buNone/>
-              <a:defRPr sz="1200" b="1"/>
+              <a:defRPr sz="950" b="1"/>
             </a:lvl6pPr>
             <a:lvl7pPr marL="2057400" indent="0">
               <a:buNone/>
-              <a:defRPr sz="1200" b="1"/>
+              <a:defRPr sz="950" b="1"/>
             </a:lvl7pPr>
             <a:lvl8pPr marL="2400300" indent="0">
               <a:buNone/>
-              <a:defRPr sz="1200" b="1"/>
+              <a:defRPr sz="950" b="1"/>
             </a:lvl8pPr>
             <a:lvl9pPr marL="2743200" indent="0">
               <a:buNone/>
-              <a:defRPr sz="1200" b="1"/>
+              <a:defRPr sz="950" b="1"/>
             </a:lvl9pPr>
           </a:lstStyle>
           <a:p>
@@ -1558,31 +1558,31 @@
           <a:bodyPr/>
           <a:lstStyle>
             <a:lvl1pPr>
-              <a:defRPr sz="1800"/>
+              <a:defRPr sz="1400"/>
             </a:lvl1pPr>
             <a:lvl2pPr>
-              <a:defRPr sz="1500"/>
+              <a:defRPr sz="1150"/>
             </a:lvl2pPr>
             <a:lvl3pPr>
-              <a:defRPr sz="1350"/>
+              <a:defRPr sz="1050"/>
             </a:lvl3pPr>
             <a:lvl4pPr>
-              <a:defRPr sz="1200"/>
+              <a:defRPr sz="950"/>
             </a:lvl4pPr>
             <a:lvl5pPr>
-              <a:defRPr sz="1200"/>
+              <a:defRPr sz="950"/>
             </a:lvl5pPr>
             <a:lvl6pPr>
-              <a:defRPr sz="1200"/>
+              <a:defRPr sz="950"/>
             </a:lvl6pPr>
             <a:lvl7pPr>
-              <a:defRPr sz="1200"/>
+              <a:defRPr sz="950"/>
             </a:lvl7pPr>
             <a:lvl8pPr>
-              <a:defRPr sz="1200"/>
+              <a:defRPr sz="950"/>
             </a:lvl8pPr>
             <a:lvl9pPr>
-              <a:defRPr sz="1200"/>
+              <a:defRPr sz="950"/>
             </a:lvl9pPr>
           </a:lstStyle>
           <a:p>
@@ -1643,39 +1643,39 @@
           <a:lstStyle>
             <a:lvl1pPr marL="0" indent="0">
               <a:buNone/>
-              <a:defRPr sz="1800" b="1"/>
+              <a:defRPr sz="1400" b="1"/>
             </a:lvl1pPr>
             <a:lvl2pPr marL="342900" indent="0">
               <a:buNone/>
-              <a:defRPr sz="1500" b="1"/>
+              <a:defRPr sz="1150" b="1"/>
             </a:lvl2pPr>
             <a:lvl3pPr marL="685800" indent="0">
               <a:buNone/>
-              <a:defRPr sz="1350" b="1"/>
+              <a:defRPr sz="1050" b="1"/>
             </a:lvl3pPr>
             <a:lvl4pPr marL="1028700" indent="0">
               <a:buNone/>
-              <a:defRPr sz="1200" b="1"/>
+              <a:defRPr sz="950" b="1"/>
             </a:lvl4pPr>
             <a:lvl5pPr marL="1371600" indent="0">
               <a:buNone/>
-              <a:defRPr sz="1200" b="1"/>
+              <a:defRPr sz="950" b="1"/>
             </a:lvl5pPr>
             <a:lvl6pPr marL="1714500" indent="0">
               <a:buNone/>
-              <a:defRPr sz="1200" b="1"/>
+              <a:defRPr sz="950" b="1"/>
             </a:lvl6pPr>
             <a:lvl7pPr marL="2057400" indent="0">
               <a:buNone/>
-              <a:defRPr sz="1200" b="1"/>
+              <a:defRPr sz="950" b="1"/>
             </a:lvl7pPr>
             <a:lvl8pPr marL="2400300" indent="0">
               <a:buNone/>
-              <a:defRPr sz="1200" b="1"/>
+              <a:defRPr sz="950" b="1"/>
             </a:lvl8pPr>
             <a:lvl9pPr marL="2743200" indent="0">
               <a:buNone/>
-              <a:defRPr sz="1200" b="1"/>
+              <a:defRPr sz="950" b="1"/>
             </a:lvl9pPr>
           </a:lstStyle>
           <a:p>
@@ -1707,31 +1707,31 @@
           <a:bodyPr/>
           <a:lstStyle>
             <a:lvl1pPr>
-              <a:defRPr sz="1800"/>
+              <a:defRPr sz="1400"/>
             </a:lvl1pPr>
             <a:lvl2pPr>
-              <a:defRPr sz="1500"/>
+              <a:defRPr sz="1150"/>
             </a:lvl2pPr>
             <a:lvl3pPr>
-              <a:defRPr sz="1350"/>
+              <a:defRPr sz="1050"/>
             </a:lvl3pPr>
             <a:lvl4pPr>
-              <a:defRPr sz="1200"/>
+              <a:defRPr sz="950"/>
             </a:lvl4pPr>
             <a:lvl5pPr>
-              <a:defRPr sz="1200"/>
+              <a:defRPr sz="950"/>
             </a:lvl5pPr>
             <a:lvl6pPr>
-              <a:defRPr sz="1200"/>
+              <a:defRPr sz="950"/>
             </a:lvl6pPr>
             <a:lvl7pPr>
-              <a:defRPr sz="1200"/>
+              <a:defRPr sz="950"/>
             </a:lvl7pPr>
             <a:lvl8pPr>
-              <a:defRPr sz="1200"/>
+              <a:defRPr sz="950"/>
             </a:lvl8pPr>
             <a:lvl9pPr>
-              <a:defRPr sz="1200"/>
+              <a:defRPr sz="950"/>
             </a:lvl9pPr>
           </a:lstStyle>
           <a:p>
@@ -2098,7 +2098,7 @@
           <a:bodyPr anchor="b"/>
           <a:lstStyle>
             <a:lvl1pPr algn="l">
-              <a:defRPr sz="1500" b="1"/>
+              <a:defRPr sz="1150" b="1"/>
             </a:lvl1pPr>
           </a:lstStyle>
           <a:p>
@@ -2129,31 +2129,31 @@
           <a:bodyPr/>
           <a:lstStyle>
             <a:lvl1pPr>
-              <a:defRPr sz="2400"/>
+              <a:defRPr sz="1850"/>
             </a:lvl1pPr>
             <a:lvl2pPr>
-              <a:defRPr sz="2100"/>
+              <a:defRPr sz="1650"/>
             </a:lvl2pPr>
             <a:lvl3pPr>
-              <a:defRPr sz="1800"/>
+              <a:defRPr sz="1400"/>
             </a:lvl3pPr>
             <a:lvl4pPr>
-              <a:defRPr sz="1500"/>
+              <a:defRPr sz="1150"/>
             </a:lvl4pPr>
             <a:lvl5pPr>
-              <a:defRPr sz="1500"/>
+              <a:defRPr sz="1150"/>
             </a:lvl5pPr>
             <a:lvl6pPr>
-              <a:defRPr sz="1500"/>
+              <a:defRPr sz="1150"/>
             </a:lvl6pPr>
             <a:lvl7pPr>
-              <a:defRPr sz="1500"/>
+              <a:defRPr sz="1150"/>
             </a:lvl7pPr>
             <a:lvl8pPr>
-              <a:defRPr sz="1500"/>
+              <a:defRPr sz="1150"/>
             </a:lvl8pPr>
             <a:lvl9pPr>
-              <a:defRPr sz="1500"/>
+              <a:defRPr sz="1150"/>
             </a:lvl9pPr>
           </a:lstStyle>
           <a:p>
@@ -2214,39 +2214,39 @@
           <a:lstStyle>
             <a:lvl1pPr marL="0" indent="0">
               <a:buNone/>
-              <a:defRPr sz="1050"/>
+              <a:defRPr sz="800"/>
             </a:lvl1pPr>
             <a:lvl2pPr marL="342900" indent="0">
               <a:buNone/>
-              <a:defRPr sz="900"/>
+              <a:defRPr sz="700"/>
             </a:lvl2pPr>
             <a:lvl3pPr marL="685800" indent="0">
               <a:buNone/>
-              <a:defRPr sz="750"/>
+              <a:defRPr sz="700"/>
             </a:lvl3pPr>
             <a:lvl4pPr marL="1028700" indent="0">
               <a:buNone/>
-              <a:defRPr sz="675"/>
+              <a:defRPr sz="700"/>
             </a:lvl4pPr>
             <a:lvl5pPr marL="1371600" indent="0">
               <a:buNone/>
-              <a:defRPr sz="675"/>
+              <a:defRPr sz="700"/>
             </a:lvl5pPr>
             <a:lvl6pPr marL="1714500" indent="0">
               <a:buNone/>
-              <a:defRPr sz="675"/>
+              <a:defRPr sz="700"/>
             </a:lvl6pPr>
             <a:lvl7pPr marL="2057400" indent="0">
               <a:buNone/>
-              <a:defRPr sz="675"/>
+              <a:defRPr sz="700"/>
             </a:lvl7pPr>
             <a:lvl8pPr marL="2400300" indent="0">
               <a:buNone/>
-              <a:defRPr sz="675"/>
+              <a:defRPr sz="700"/>
             </a:lvl8pPr>
             <a:lvl9pPr marL="2743200" indent="0">
               <a:buNone/>
-              <a:defRPr sz="675"/>
+              <a:defRPr sz="700"/>
             </a:lvl9pPr>
           </a:lstStyle>
           <a:p>
@@ -2373,7 +2373,7 @@
           <a:bodyPr anchor="b"/>
           <a:lstStyle>
             <a:lvl1pPr algn="l">
-              <a:defRPr sz="1500" b="1"/>
+              <a:defRPr sz="1150" b="1"/>
             </a:lvl1pPr>
           </a:lstStyle>
           <a:p>
@@ -2405,39 +2405,39 @@
           <a:lstStyle>
             <a:lvl1pPr marL="0" indent="0">
               <a:buNone/>
-              <a:defRPr sz="2400"/>
+              <a:defRPr sz="1850"/>
             </a:lvl1pPr>
             <a:lvl2pPr marL="342900" indent="0">
               <a:buNone/>
-              <a:defRPr sz="2100"/>
+              <a:defRPr sz="1650"/>
             </a:lvl2pPr>
             <a:lvl3pPr marL="685800" indent="0">
               <a:buNone/>
-              <a:defRPr sz="1800"/>
+              <a:defRPr sz="1400"/>
             </a:lvl3pPr>
             <a:lvl4pPr marL="1028700" indent="0">
               <a:buNone/>
-              <a:defRPr sz="1500"/>
+              <a:defRPr sz="1150"/>
             </a:lvl4pPr>
             <a:lvl5pPr marL="1371600" indent="0">
               <a:buNone/>
-              <a:defRPr sz="1500"/>
+              <a:defRPr sz="1150"/>
             </a:lvl5pPr>
             <a:lvl6pPr marL="1714500" indent="0">
               <a:buNone/>
-              <a:defRPr sz="1500"/>
+              <a:defRPr sz="1150"/>
             </a:lvl6pPr>
             <a:lvl7pPr marL="2057400" indent="0">
               <a:buNone/>
-              <a:defRPr sz="1500"/>
+              <a:defRPr sz="1150"/>
             </a:lvl7pPr>
             <a:lvl8pPr marL="2400300" indent="0">
               <a:buNone/>
-              <a:defRPr sz="1500"/>
+              <a:defRPr sz="1150"/>
             </a:lvl8pPr>
             <a:lvl9pPr marL="2743200" indent="0">
               <a:buNone/>
-              <a:defRPr sz="1500"/>
+              <a:defRPr sz="1150"/>
             </a:lvl9pPr>
           </a:lstStyle>
           <a:p>
@@ -2466,39 +2466,39 @@
           <a:lstStyle>
             <a:lvl1pPr marL="0" indent="0">
               <a:buNone/>
-              <a:defRPr sz="1050"/>
+              <a:defRPr sz="800"/>
             </a:lvl1pPr>
             <a:lvl2pPr marL="342900" indent="0">
               <a:buNone/>
-              <a:defRPr sz="900"/>
+              <a:defRPr sz="700"/>
             </a:lvl2pPr>
             <a:lvl3pPr marL="685800" indent="0">
               <a:buNone/>
-              <a:defRPr sz="750"/>
+              <a:defRPr sz="700"/>
             </a:lvl3pPr>
             <a:lvl4pPr marL="1028700" indent="0">
               <a:buNone/>
-              <a:defRPr sz="675"/>
+              <a:defRPr sz="700"/>
             </a:lvl4pPr>
             <a:lvl5pPr marL="1371600" indent="0">
               <a:buNone/>
-              <a:defRPr sz="675"/>
+              <a:defRPr sz="700"/>
             </a:lvl5pPr>
             <a:lvl6pPr marL="1714500" indent="0">
               <a:buNone/>
-              <a:defRPr sz="675"/>
+              <a:defRPr sz="700"/>
             </a:lvl6pPr>
             <a:lvl7pPr marL="2057400" indent="0">
               <a:buNone/>
-              <a:defRPr sz="675"/>
+              <a:defRPr sz="700"/>
             </a:lvl7pPr>
             <a:lvl8pPr marL="2400300" indent="0">
               <a:buNone/>
-              <a:defRPr sz="675"/>
+              <a:defRPr sz="700"/>
             </a:lvl8pPr>
             <a:lvl9pPr marL="2743200" indent="0">
               <a:buNone/>
-              <a:defRPr sz="675"/>
+              <a:defRPr sz="700"/>
             </a:lvl9pPr>
           </a:lstStyle>
           <a:p>
@@ -2726,7 +2726,7 @@
           <a:bodyPr anchor="ctr" bIns="45720" lIns="91440" rIns="91440" rtlCol="0" tIns="45720" vert="horz"/>
           <a:lstStyle>
             <a:lvl1pPr algn="l">
-              <a:defRPr sz="900">
+              <a:defRPr sz="700">
                 <a:solidFill>
                   <a:schemeClr val="tx1">
                     <a:tint val="75000"/>
@@ -2767,7 +2767,7 @@
           <a:bodyPr anchor="ctr" bIns="45720" lIns="91440" rIns="91440" rtlCol="0" tIns="45720" vert="horz"/>
           <a:lstStyle>
             <a:lvl1pPr algn="ctr">
-              <a:defRPr sz="900">
+              <a:defRPr sz="700">
                 <a:solidFill>
                   <a:schemeClr val="tx1">
                     <a:tint val="75000"/>
@@ -2804,7 +2804,7 @@
           <a:bodyPr anchor="ctr" bIns="45720" lIns="91440" rIns="91440" rtlCol="0" tIns="45720" vert="horz"/>
           <a:lstStyle>
             <a:lvl1pPr algn="r">
-              <a:defRPr sz="900">
+              <a:defRPr sz="700">
                 <a:solidFill>
                   <a:schemeClr val="tx1">
                     <a:tint val="75000"/>
@@ -2850,7 +2850,7 @@
           <a:spcPct val="0"/>
         </a:spcBef>
         <a:buNone/>
-        <a:defRPr kern="1200" sz="3300">
+        <a:defRPr kern="1200" sz="2550">
           <a:solidFill>
             <a:schemeClr val="tx1"/>
           </a:solidFill>
@@ -2867,7 +2867,7 @@
         </a:spcBef>
         <a:buFont typeface="Arial"/>
         <a:buChar char="•"/>
-        <a:defRPr kern="1200" sz="2400">
+        <a:defRPr kern="1200" sz="1850">
           <a:solidFill>
             <a:schemeClr val="tx1"/>
           </a:solidFill>
@@ -2882,7 +2882,7 @@
         </a:spcBef>
         <a:buFont typeface="Arial"/>
         <a:buChar char="–"/>
-        <a:defRPr kern="1200" sz="2100">
+        <a:defRPr kern="1200" sz="1650">
           <a:solidFill>
             <a:schemeClr val="tx1"/>
           </a:solidFill>
@@ -2897,7 +2897,7 @@
         </a:spcBef>
         <a:buFont typeface="Arial"/>
         <a:buChar char="•"/>
-        <a:defRPr kern="1200" sz="1800">
+        <a:defRPr kern="1200" sz="1400">
           <a:solidFill>
             <a:schemeClr val="tx1"/>
           </a:solidFill>
@@ -2912,7 +2912,7 @@
         </a:spcBef>
         <a:buFont typeface="Arial"/>
         <a:buChar char="–"/>
-        <a:defRPr kern="1200" sz="1500">
+        <a:defRPr kern="1200" sz="1150">
           <a:solidFill>
             <a:schemeClr val="tx1"/>
           </a:solidFill>
@@ -2927,7 +2927,7 @@
         </a:spcBef>
         <a:buFont typeface="Arial"/>
         <a:buChar char="»"/>
-        <a:defRPr kern="1200" sz="1500">
+        <a:defRPr kern="1200" sz="1150">
           <a:solidFill>
             <a:schemeClr val="tx1"/>
           </a:solidFill>
@@ -2942,7 +2942,7 @@
         </a:spcBef>
         <a:buFont typeface="Arial"/>
         <a:buChar char="•"/>
-        <a:defRPr kern="1200" sz="1500">
+        <a:defRPr kern="1200" sz="1150">
           <a:solidFill>
             <a:schemeClr val="tx1"/>
           </a:solidFill>
@@ -2957,7 +2957,7 @@
         </a:spcBef>
         <a:buFont typeface="Arial"/>
         <a:buChar char="•"/>
-        <a:defRPr kern="1200" sz="1500">
+        <a:defRPr kern="1200" sz="1150">
           <a:solidFill>
             <a:schemeClr val="tx1"/>
           </a:solidFill>
@@ -2972,7 +2972,7 @@
         </a:spcBef>
         <a:buFont typeface="Arial"/>
         <a:buChar char="•"/>
-        <a:defRPr kern="1200" sz="1500">
+        <a:defRPr kern="1200" sz="1150">
           <a:solidFill>
             <a:schemeClr val="tx1"/>
           </a:solidFill>
@@ -2987,7 +2987,7 @@
         </a:spcBef>
         <a:buFont typeface="Arial"/>
         <a:buChar char="•"/>
-        <a:defRPr kern="1200" sz="1500">
+        <a:defRPr kern="1200" sz="1150">
           <a:solidFill>
             <a:schemeClr val="tx1"/>
           </a:solidFill>
@@ -3002,7 +3002,7 @@
         <a:defRPr lang="en-US"/>
       </a:defPPr>
       <a:lvl1pPr algn="l" defTabSz="342900" eaLnBrk="1" hangingPunct="1" latinLnBrk="0" marL="0" rtl="0">
-        <a:defRPr kern="1200" sz="1350">
+        <a:defRPr kern="1200" sz="1050">
           <a:solidFill>
             <a:schemeClr val="tx1"/>
           </a:solidFill>
@@ -3012,7 +3012,7 @@
         </a:defRPr>
       </a:lvl1pPr>
       <a:lvl2pPr algn="l" defTabSz="342900" eaLnBrk="1" hangingPunct="1" latinLnBrk="0" marL="342900" rtl="0">
-        <a:defRPr kern="1200" sz="1350">
+        <a:defRPr kern="1200" sz="1050">
           <a:solidFill>
             <a:schemeClr val="tx1"/>
           </a:solidFill>
@@ -3022,7 +3022,7 @@
         </a:defRPr>
       </a:lvl2pPr>
       <a:lvl3pPr algn="l" defTabSz="342900" eaLnBrk="1" hangingPunct="1" latinLnBrk="0" marL="685800" rtl="0">
-        <a:defRPr kern="1200" sz="1350">
+        <a:defRPr kern="1200" sz="1050">
           <a:solidFill>
             <a:schemeClr val="tx1"/>
           </a:solidFill>
@@ -3032,7 +3032,7 @@
         </a:defRPr>
       </a:lvl3pPr>
       <a:lvl4pPr algn="l" defTabSz="342900" eaLnBrk="1" hangingPunct="1" latinLnBrk="0" marL="1028700" rtl="0">
-        <a:defRPr kern="1200" sz="1350">
+        <a:defRPr kern="1200" sz="1050">
           <a:solidFill>
             <a:schemeClr val="tx1"/>
           </a:solidFill>
@@ -3042,7 +3042,7 @@
         </a:defRPr>
       </a:lvl4pPr>
       <a:lvl5pPr algn="l" defTabSz="342900" eaLnBrk="1" hangingPunct="1" latinLnBrk="0" marL="1371600" rtl="0">
-        <a:defRPr kern="1200" sz="1350">
+        <a:defRPr kern="1200" sz="1050">
           <a:solidFill>
             <a:schemeClr val="tx1"/>
           </a:solidFill>
@@ -3052,7 +3052,7 @@
         </a:defRPr>
       </a:lvl5pPr>
       <a:lvl6pPr algn="l" defTabSz="342900" eaLnBrk="1" hangingPunct="1" latinLnBrk="0" marL="1714500" rtl="0">
-        <a:defRPr kern="1200" sz="1350">
+        <a:defRPr kern="1200" sz="1050">
           <a:solidFill>
             <a:schemeClr val="tx1"/>
           </a:solidFill>
@@ -3062,7 +3062,7 @@
         </a:defRPr>
       </a:lvl6pPr>
       <a:lvl7pPr algn="l" defTabSz="342900" eaLnBrk="1" hangingPunct="1" latinLnBrk="0" marL="2057400" rtl="0">
-        <a:defRPr kern="1200" sz="1350">
+        <a:defRPr kern="1200" sz="1050">
           <a:solidFill>
             <a:schemeClr val="tx1"/>
           </a:solidFill>
@@ -3072,7 +3072,7 @@
         </a:defRPr>
       </a:lvl7pPr>
       <a:lvl8pPr algn="l" defTabSz="342900" eaLnBrk="1" hangingPunct="1" latinLnBrk="0" marL="2400300" rtl="0">
-        <a:defRPr kern="1200" sz="1350">
+        <a:defRPr kern="1200" sz="1050">
           <a:solidFill>
             <a:schemeClr val="tx1"/>
           </a:solidFill>
@@ -3082,7 +3082,7 @@
         </a:defRPr>
       </a:lvl8pPr>
       <a:lvl9pPr algn="l" defTabSz="342900" eaLnBrk="1" hangingPunct="1" latinLnBrk="0" marL="2743200" rtl="0">
-        <a:defRPr kern="1200" sz="1350">
+        <a:defRPr kern="1200" sz="1050">
           <a:solidFill>
             <a:schemeClr val="tx1"/>
           </a:solidFill>

--- a/11-forecasting-drift-and-governance/slides.pptx
+++ b/11-forecasting-drift-and-governance/slides.pptx
@@ -937,7 +937,7 @@
           <a:bodyPr anchor="t"/>
           <a:lstStyle>
             <a:lvl1pPr algn="l">
-              <a:defRPr sz="2350" b="1" cap="all"/>
+              <a:defRPr sz="1850" b="1" cap="all"/>
             </a:lvl1pPr>
           </a:lstStyle>
           <a:p>
@@ -969,7 +969,7 @@
           <a:lstStyle>
             <a:lvl1pPr marL="0" indent="0">
               <a:buNone/>
-              <a:defRPr sz="1150">
+              <a:defRPr sz="950">
                 <a:solidFill>
                   <a:schemeClr val="tx1">
                     <a:tint val="75000"/>
@@ -979,7 +979,7 @@
             </a:lvl1pPr>
             <a:lvl2pPr marL="342900" indent="0">
               <a:buNone/>
-              <a:defRPr sz="1050">
+              <a:defRPr sz="850">
                 <a:solidFill>
                   <a:schemeClr val="tx1">
                     <a:tint val="75000"/>
@@ -989,7 +989,7 @@
             </a:lvl2pPr>
             <a:lvl3pPr marL="685800" indent="0">
               <a:buNone/>
-              <a:defRPr sz="950">
+              <a:defRPr sz="750">
                 <a:solidFill>
                   <a:schemeClr val="tx1">
                     <a:tint val="75000"/>
@@ -999,7 +999,7 @@
             </a:lvl3pPr>
             <a:lvl4pPr marL="1028700" indent="0">
               <a:buNone/>
-              <a:defRPr sz="800">
+              <a:defRPr sz="650">
                 <a:solidFill>
                   <a:schemeClr val="tx1">
                     <a:tint val="75000"/>
@@ -1009,7 +1009,7 @@
             </a:lvl4pPr>
             <a:lvl5pPr marL="1371600" indent="0">
               <a:buNone/>
-              <a:defRPr sz="800">
+              <a:defRPr sz="650">
                 <a:solidFill>
                   <a:schemeClr val="tx1">
                     <a:tint val="75000"/>
@@ -1019,7 +1019,7 @@
             </a:lvl5pPr>
             <a:lvl6pPr marL="1714500" indent="0">
               <a:buNone/>
-              <a:defRPr sz="800">
+              <a:defRPr sz="650">
                 <a:solidFill>
                   <a:schemeClr val="tx1">
                     <a:tint val="75000"/>
@@ -1029,7 +1029,7 @@
             </a:lvl6pPr>
             <a:lvl7pPr marL="2057400" indent="0">
               <a:buNone/>
-              <a:defRPr sz="800">
+              <a:defRPr sz="650">
                 <a:solidFill>
                   <a:schemeClr val="tx1">
                     <a:tint val="75000"/>
@@ -1039,7 +1039,7 @@
             </a:lvl7pPr>
             <a:lvl8pPr marL="2400300" indent="0">
               <a:buNone/>
-              <a:defRPr sz="800">
+              <a:defRPr sz="650">
                 <a:solidFill>
                   <a:schemeClr val="tx1">
                     <a:tint val="75000"/>
@@ -1049,7 +1049,7 @@
             </a:lvl8pPr>
             <a:lvl9pPr marL="2743200" indent="0">
               <a:buNone/>
-              <a:defRPr sz="800">
+              <a:defRPr sz="650">
                 <a:solidFill>
                   <a:schemeClr val="tx1">
                     <a:tint val="75000"/>
@@ -1204,31 +1204,31 @@
           <a:bodyPr/>
           <a:lstStyle>
             <a:lvl1pPr>
-              <a:defRPr sz="1650"/>
+              <a:defRPr sz="1300"/>
             </a:lvl1pPr>
             <a:lvl2pPr>
-              <a:defRPr sz="1400"/>
+              <a:defRPr sz="1100"/>
             </a:lvl2pPr>
             <a:lvl3pPr>
-              <a:defRPr sz="1150"/>
+              <a:defRPr sz="950"/>
             </a:lvl3pPr>
             <a:lvl4pPr>
-              <a:defRPr sz="1050"/>
+              <a:defRPr sz="850"/>
             </a:lvl4pPr>
             <a:lvl5pPr>
-              <a:defRPr sz="1050"/>
+              <a:defRPr sz="850"/>
             </a:lvl5pPr>
             <a:lvl6pPr>
-              <a:defRPr sz="1050"/>
+              <a:defRPr sz="850"/>
             </a:lvl6pPr>
             <a:lvl7pPr>
-              <a:defRPr sz="1050"/>
+              <a:defRPr sz="850"/>
             </a:lvl7pPr>
             <a:lvl8pPr>
-              <a:defRPr sz="1050"/>
+              <a:defRPr sz="850"/>
             </a:lvl8pPr>
             <a:lvl9pPr>
-              <a:defRPr sz="1050"/>
+              <a:defRPr sz="850"/>
             </a:lvl9pPr>
           </a:lstStyle>
           <a:p>
@@ -1288,31 +1288,31 @@
           <a:bodyPr/>
           <a:lstStyle>
             <a:lvl1pPr>
-              <a:defRPr sz="1650"/>
+              <a:defRPr sz="1300"/>
             </a:lvl1pPr>
             <a:lvl2pPr>
-              <a:defRPr sz="1400"/>
+              <a:defRPr sz="1100"/>
             </a:lvl2pPr>
             <a:lvl3pPr>
-              <a:defRPr sz="1150"/>
+              <a:defRPr sz="950"/>
             </a:lvl3pPr>
             <a:lvl4pPr>
-              <a:defRPr sz="1050"/>
+              <a:defRPr sz="850"/>
             </a:lvl4pPr>
             <a:lvl5pPr>
-              <a:defRPr sz="1050"/>
+              <a:defRPr sz="850"/>
             </a:lvl5pPr>
             <a:lvl6pPr>
-              <a:defRPr sz="1050"/>
+              <a:defRPr sz="850"/>
             </a:lvl6pPr>
             <a:lvl7pPr>
-              <a:defRPr sz="1050"/>
+              <a:defRPr sz="850"/>
             </a:lvl7pPr>
             <a:lvl8pPr>
-              <a:defRPr sz="1050"/>
+              <a:defRPr sz="850"/>
             </a:lvl8pPr>
             <a:lvl9pPr>
-              <a:defRPr sz="1050"/>
+              <a:defRPr sz="850"/>
             </a:lvl9pPr>
           </a:lstStyle>
           <a:p>
@@ -1494,39 +1494,39 @@
           <a:lstStyle>
             <a:lvl1pPr marL="0" indent="0">
               <a:buNone/>
-              <a:defRPr sz="1400" b="1"/>
+              <a:defRPr sz="1100" b="1"/>
             </a:lvl1pPr>
             <a:lvl2pPr marL="342900" indent="0">
               <a:buNone/>
-              <a:defRPr sz="1150" b="1"/>
+              <a:defRPr sz="950" b="1"/>
             </a:lvl2pPr>
             <a:lvl3pPr marL="685800" indent="0">
               <a:buNone/>
-              <a:defRPr sz="1050" b="1"/>
+              <a:defRPr sz="850" b="1"/>
             </a:lvl3pPr>
             <a:lvl4pPr marL="1028700" indent="0">
               <a:buNone/>
-              <a:defRPr sz="950" b="1"/>
+              <a:defRPr sz="750" b="1"/>
             </a:lvl4pPr>
             <a:lvl5pPr marL="1371600" indent="0">
               <a:buNone/>
-              <a:defRPr sz="950" b="1"/>
+              <a:defRPr sz="750" b="1"/>
             </a:lvl5pPr>
             <a:lvl6pPr marL="1714500" indent="0">
               <a:buNone/>
-              <a:defRPr sz="950" b="1"/>
+              <a:defRPr sz="750" b="1"/>
             </a:lvl6pPr>
             <a:lvl7pPr marL="2057400" indent="0">
               <a:buNone/>
-              <a:defRPr sz="950" b="1"/>
+              <a:defRPr sz="750" b="1"/>
             </a:lvl7pPr>
             <a:lvl8pPr marL="2400300" indent="0">
               <a:buNone/>
-              <a:defRPr sz="950" b="1"/>
+              <a:defRPr sz="750" b="1"/>
             </a:lvl8pPr>
             <a:lvl9pPr marL="2743200" indent="0">
               <a:buNone/>
-              <a:defRPr sz="950" b="1"/>
+              <a:defRPr sz="750" b="1"/>
             </a:lvl9pPr>
           </a:lstStyle>
           <a:p>
@@ -1558,31 +1558,31 @@
           <a:bodyPr/>
           <a:lstStyle>
             <a:lvl1pPr>
-              <a:defRPr sz="1400"/>
+              <a:defRPr sz="1100"/>
             </a:lvl1pPr>
             <a:lvl2pPr>
-              <a:defRPr sz="1150"/>
+              <a:defRPr sz="950"/>
             </a:lvl2pPr>
             <a:lvl3pPr>
-              <a:defRPr sz="1050"/>
+              <a:defRPr sz="850"/>
             </a:lvl3pPr>
             <a:lvl4pPr>
-              <a:defRPr sz="950"/>
+              <a:defRPr sz="750"/>
             </a:lvl4pPr>
             <a:lvl5pPr>
-              <a:defRPr sz="950"/>
+              <a:defRPr sz="750"/>
             </a:lvl5pPr>
             <a:lvl6pPr>
-              <a:defRPr sz="950"/>
+              <a:defRPr sz="750"/>
             </a:lvl6pPr>
             <a:lvl7pPr>
-              <a:defRPr sz="950"/>
+              <a:defRPr sz="750"/>
             </a:lvl7pPr>
             <a:lvl8pPr>
-              <a:defRPr sz="950"/>
+              <a:defRPr sz="750"/>
             </a:lvl8pPr>
             <a:lvl9pPr>
-              <a:defRPr sz="950"/>
+              <a:defRPr sz="750"/>
             </a:lvl9pPr>
           </a:lstStyle>
           <a:p>
@@ -1643,39 +1643,39 @@
           <a:lstStyle>
             <a:lvl1pPr marL="0" indent="0">
               <a:buNone/>
-              <a:defRPr sz="1400" b="1"/>
+              <a:defRPr sz="1100" b="1"/>
             </a:lvl1pPr>
             <a:lvl2pPr marL="342900" indent="0">
               <a:buNone/>
-              <a:defRPr sz="1150" b="1"/>
+              <a:defRPr sz="950" b="1"/>
             </a:lvl2pPr>
             <a:lvl3pPr marL="685800" indent="0">
               <a:buNone/>
-              <a:defRPr sz="1050" b="1"/>
+              <a:defRPr sz="850" b="1"/>
             </a:lvl3pPr>
             <a:lvl4pPr marL="1028700" indent="0">
               <a:buNone/>
-              <a:defRPr sz="950" b="1"/>
+              <a:defRPr sz="750" b="1"/>
             </a:lvl4pPr>
             <a:lvl5pPr marL="1371600" indent="0">
               <a:buNone/>
-              <a:defRPr sz="950" b="1"/>
+              <a:defRPr sz="750" b="1"/>
             </a:lvl5pPr>
             <a:lvl6pPr marL="1714500" indent="0">
               <a:buNone/>
-              <a:defRPr sz="950" b="1"/>
+              <a:defRPr sz="750" b="1"/>
             </a:lvl6pPr>
             <a:lvl7pPr marL="2057400" indent="0">
               <a:buNone/>
-              <a:defRPr sz="950" b="1"/>
+              <a:defRPr sz="750" b="1"/>
             </a:lvl7pPr>
             <a:lvl8pPr marL="2400300" indent="0">
               <a:buNone/>
-              <a:defRPr sz="950" b="1"/>
+              <a:defRPr sz="750" b="1"/>
             </a:lvl8pPr>
             <a:lvl9pPr marL="2743200" indent="0">
               <a:buNone/>
-              <a:defRPr sz="950" b="1"/>
+              <a:defRPr sz="750" b="1"/>
             </a:lvl9pPr>
           </a:lstStyle>
           <a:p>
@@ -1707,31 +1707,31 @@
           <a:bodyPr/>
           <a:lstStyle>
             <a:lvl1pPr>
-              <a:defRPr sz="1400"/>
+              <a:defRPr sz="1100"/>
             </a:lvl1pPr>
             <a:lvl2pPr>
-              <a:defRPr sz="1150"/>
+              <a:defRPr sz="950"/>
             </a:lvl2pPr>
             <a:lvl3pPr>
-              <a:defRPr sz="1050"/>
+              <a:defRPr sz="850"/>
             </a:lvl3pPr>
             <a:lvl4pPr>
-              <a:defRPr sz="950"/>
+              <a:defRPr sz="750"/>
             </a:lvl4pPr>
             <a:lvl5pPr>
-              <a:defRPr sz="950"/>
+              <a:defRPr sz="750"/>
             </a:lvl5pPr>
             <a:lvl6pPr>
-              <a:defRPr sz="950"/>
+              <a:defRPr sz="750"/>
             </a:lvl6pPr>
             <a:lvl7pPr>
-              <a:defRPr sz="950"/>
+              <a:defRPr sz="750"/>
             </a:lvl7pPr>
             <a:lvl8pPr>
-              <a:defRPr sz="950"/>
+              <a:defRPr sz="750"/>
             </a:lvl8pPr>
             <a:lvl9pPr>
-              <a:defRPr sz="950"/>
+              <a:defRPr sz="750"/>
             </a:lvl9pPr>
           </a:lstStyle>
           <a:p>
@@ -2098,7 +2098,7 @@
           <a:bodyPr anchor="b"/>
           <a:lstStyle>
             <a:lvl1pPr algn="l">
-              <a:defRPr sz="1150" b="1"/>
+              <a:defRPr sz="950" b="1"/>
             </a:lvl1pPr>
           </a:lstStyle>
           <a:p>
@@ -2129,31 +2129,31 @@
           <a:bodyPr/>
           <a:lstStyle>
             <a:lvl1pPr>
-              <a:defRPr sz="1850"/>
+              <a:defRPr sz="1500"/>
             </a:lvl1pPr>
             <a:lvl2pPr>
-              <a:defRPr sz="1650"/>
+              <a:defRPr sz="1300"/>
             </a:lvl2pPr>
             <a:lvl3pPr>
-              <a:defRPr sz="1400"/>
+              <a:defRPr sz="1100"/>
             </a:lvl3pPr>
             <a:lvl4pPr>
-              <a:defRPr sz="1150"/>
+              <a:defRPr sz="950"/>
             </a:lvl4pPr>
             <a:lvl5pPr>
-              <a:defRPr sz="1150"/>
+              <a:defRPr sz="950"/>
             </a:lvl5pPr>
             <a:lvl6pPr>
-              <a:defRPr sz="1150"/>
+              <a:defRPr sz="950"/>
             </a:lvl6pPr>
             <a:lvl7pPr>
-              <a:defRPr sz="1150"/>
+              <a:defRPr sz="950"/>
             </a:lvl7pPr>
             <a:lvl8pPr>
-              <a:defRPr sz="1150"/>
+              <a:defRPr sz="950"/>
             </a:lvl8pPr>
             <a:lvl9pPr>
-              <a:defRPr sz="1150"/>
+              <a:defRPr sz="950"/>
             </a:lvl9pPr>
           </a:lstStyle>
           <a:p>
@@ -2214,39 +2214,39 @@
           <a:lstStyle>
             <a:lvl1pPr marL="0" indent="0">
               <a:buNone/>
-              <a:defRPr sz="800"/>
+              <a:defRPr sz="650"/>
             </a:lvl1pPr>
             <a:lvl2pPr marL="342900" indent="0">
               <a:buNone/>
-              <a:defRPr sz="700"/>
+              <a:defRPr sz="550"/>
             </a:lvl2pPr>
             <a:lvl3pPr marL="685800" indent="0">
               <a:buNone/>
-              <a:defRPr sz="700"/>
+              <a:defRPr sz="550"/>
             </a:lvl3pPr>
             <a:lvl4pPr marL="1028700" indent="0">
               <a:buNone/>
-              <a:defRPr sz="700"/>
+              <a:defRPr sz="550"/>
             </a:lvl4pPr>
             <a:lvl5pPr marL="1371600" indent="0">
               <a:buNone/>
-              <a:defRPr sz="700"/>
+              <a:defRPr sz="550"/>
             </a:lvl5pPr>
             <a:lvl6pPr marL="1714500" indent="0">
               <a:buNone/>
-              <a:defRPr sz="700"/>
+              <a:defRPr sz="550"/>
             </a:lvl6pPr>
             <a:lvl7pPr marL="2057400" indent="0">
               <a:buNone/>
-              <a:defRPr sz="700"/>
+              <a:defRPr sz="550"/>
             </a:lvl7pPr>
             <a:lvl8pPr marL="2400300" indent="0">
               <a:buNone/>
-              <a:defRPr sz="700"/>
+              <a:defRPr sz="550"/>
             </a:lvl8pPr>
             <a:lvl9pPr marL="2743200" indent="0">
               <a:buNone/>
-              <a:defRPr sz="700"/>
+              <a:defRPr sz="550"/>
             </a:lvl9pPr>
           </a:lstStyle>
           <a:p>
@@ -2373,7 +2373,7 @@
           <a:bodyPr anchor="b"/>
           <a:lstStyle>
             <a:lvl1pPr algn="l">
-              <a:defRPr sz="1150" b="1"/>
+              <a:defRPr sz="950" b="1"/>
             </a:lvl1pPr>
           </a:lstStyle>
           <a:p>
@@ -2405,39 +2405,39 @@
           <a:lstStyle>
             <a:lvl1pPr marL="0" indent="0">
               <a:buNone/>
-              <a:defRPr sz="1850"/>
+              <a:defRPr sz="1500"/>
             </a:lvl1pPr>
             <a:lvl2pPr marL="342900" indent="0">
               <a:buNone/>
-              <a:defRPr sz="1650"/>
+              <a:defRPr sz="1300"/>
             </a:lvl2pPr>
             <a:lvl3pPr marL="685800" indent="0">
               <a:buNone/>
-              <a:defRPr sz="1400"/>
+              <a:defRPr sz="1100"/>
             </a:lvl3pPr>
             <a:lvl4pPr marL="1028700" indent="0">
               <a:buNone/>
-              <a:defRPr sz="1150"/>
+              <a:defRPr sz="950"/>
             </a:lvl4pPr>
             <a:lvl5pPr marL="1371600" indent="0">
               <a:buNone/>
-              <a:defRPr sz="1150"/>
+              <a:defRPr sz="950"/>
             </a:lvl5pPr>
             <a:lvl6pPr marL="1714500" indent="0">
               <a:buNone/>
-              <a:defRPr sz="1150"/>
+              <a:defRPr sz="950"/>
             </a:lvl6pPr>
             <a:lvl7pPr marL="2057400" indent="0">
               <a:buNone/>
-              <a:defRPr sz="1150"/>
+              <a:defRPr sz="950"/>
             </a:lvl7pPr>
             <a:lvl8pPr marL="2400300" indent="0">
               <a:buNone/>
-              <a:defRPr sz="1150"/>
+              <a:defRPr sz="950"/>
             </a:lvl8pPr>
             <a:lvl9pPr marL="2743200" indent="0">
               <a:buNone/>
-              <a:defRPr sz="1150"/>
+              <a:defRPr sz="950"/>
             </a:lvl9pPr>
           </a:lstStyle>
           <a:p>
@@ -2466,39 +2466,39 @@
           <a:lstStyle>
             <a:lvl1pPr marL="0" indent="0">
               <a:buNone/>
-              <a:defRPr sz="800"/>
+              <a:defRPr sz="650"/>
             </a:lvl1pPr>
             <a:lvl2pPr marL="342900" indent="0">
               <a:buNone/>
-              <a:defRPr sz="700"/>
+              <a:defRPr sz="550"/>
             </a:lvl2pPr>
             <a:lvl3pPr marL="685800" indent="0">
               <a:buNone/>
-              <a:defRPr sz="700"/>
+              <a:defRPr sz="550"/>
             </a:lvl3pPr>
             <a:lvl4pPr marL="1028700" indent="0">
               <a:buNone/>
-              <a:defRPr sz="700"/>
+              <a:defRPr sz="550"/>
             </a:lvl4pPr>
             <a:lvl5pPr marL="1371600" indent="0">
               <a:buNone/>
-              <a:defRPr sz="700"/>
+              <a:defRPr sz="550"/>
             </a:lvl5pPr>
             <a:lvl6pPr marL="1714500" indent="0">
               <a:buNone/>
-              <a:defRPr sz="700"/>
+              <a:defRPr sz="550"/>
             </a:lvl6pPr>
             <a:lvl7pPr marL="2057400" indent="0">
               <a:buNone/>
-              <a:defRPr sz="700"/>
+              <a:defRPr sz="550"/>
             </a:lvl7pPr>
             <a:lvl8pPr marL="2400300" indent="0">
               <a:buNone/>
-              <a:defRPr sz="700"/>
+              <a:defRPr sz="550"/>
             </a:lvl8pPr>
             <a:lvl9pPr marL="2743200" indent="0">
               <a:buNone/>
-              <a:defRPr sz="700"/>
+              <a:defRPr sz="550"/>
             </a:lvl9pPr>
           </a:lstStyle>
           <a:p>
@@ -2726,7 +2726,7 @@
           <a:bodyPr anchor="ctr" bIns="45720" lIns="91440" rIns="91440" rtlCol="0" tIns="45720" vert="horz"/>
           <a:lstStyle>
             <a:lvl1pPr algn="l">
-              <a:defRPr sz="700">
+              <a:defRPr sz="550">
                 <a:solidFill>
                   <a:schemeClr val="tx1">
                     <a:tint val="75000"/>
@@ -2767,7 +2767,7 @@
           <a:bodyPr anchor="ctr" bIns="45720" lIns="91440" rIns="91440" rtlCol="0" tIns="45720" vert="horz"/>
           <a:lstStyle>
             <a:lvl1pPr algn="ctr">
-              <a:defRPr sz="700">
+              <a:defRPr sz="550">
                 <a:solidFill>
                   <a:schemeClr val="tx1">
                     <a:tint val="75000"/>
@@ -2804,7 +2804,7 @@
           <a:bodyPr anchor="ctr" bIns="45720" lIns="91440" rIns="91440" rtlCol="0" tIns="45720" vert="horz"/>
           <a:lstStyle>
             <a:lvl1pPr algn="r">
-              <a:defRPr sz="700">
+              <a:defRPr sz="550">
                 <a:solidFill>
                   <a:schemeClr val="tx1">
                     <a:tint val="75000"/>
@@ -2850,7 +2850,7 @@
           <a:spcPct val="0"/>
         </a:spcBef>
         <a:buNone/>
-        <a:defRPr kern="1200" sz="2550">
+        <a:defRPr kern="1200" sz="2050">
           <a:solidFill>
             <a:schemeClr val="tx1"/>
           </a:solidFill>
@@ -2867,7 +2867,7 @@
         </a:spcBef>
         <a:buFont typeface="Arial"/>
         <a:buChar char="•"/>
-        <a:defRPr kern="1200" sz="1850">
+        <a:defRPr kern="1200" sz="1500">
           <a:solidFill>
             <a:schemeClr val="tx1"/>
           </a:solidFill>
@@ -2882,7 +2882,7 @@
         </a:spcBef>
         <a:buFont typeface="Arial"/>
         <a:buChar char="–"/>
-        <a:defRPr kern="1200" sz="1650">
+        <a:defRPr kern="1200" sz="1300">
           <a:solidFill>
             <a:schemeClr val="tx1"/>
           </a:solidFill>
@@ -2897,7 +2897,7 @@
         </a:spcBef>
         <a:buFont typeface="Arial"/>
         <a:buChar char="•"/>
-        <a:defRPr kern="1200" sz="1400">
+        <a:defRPr kern="1200" sz="1100">
           <a:solidFill>
             <a:schemeClr val="tx1"/>
           </a:solidFill>
@@ -2912,7 +2912,7 @@
         </a:spcBef>
         <a:buFont typeface="Arial"/>
         <a:buChar char="–"/>
-        <a:defRPr kern="1200" sz="1150">
+        <a:defRPr kern="1200" sz="950">
           <a:solidFill>
             <a:schemeClr val="tx1"/>
           </a:solidFill>
@@ -2927,7 +2927,7 @@
         </a:spcBef>
         <a:buFont typeface="Arial"/>
         <a:buChar char="»"/>
-        <a:defRPr kern="1200" sz="1150">
+        <a:defRPr kern="1200" sz="950">
           <a:solidFill>
             <a:schemeClr val="tx1"/>
           </a:solidFill>
@@ -2942,7 +2942,7 @@
         </a:spcBef>
         <a:buFont typeface="Arial"/>
         <a:buChar char="•"/>
-        <a:defRPr kern="1200" sz="1150">
+        <a:defRPr kern="1200" sz="950">
           <a:solidFill>
             <a:schemeClr val="tx1"/>
           </a:solidFill>
@@ -2957,7 +2957,7 @@
         </a:spcBef>
         <a:buFont typeface="Arial"/>
         <a:buChar char="•"/>
-        <a:defRPr kern="1200" sz="1150">
+        <a:defRPr kern="1200" sz="950">
           <a:solidFill>
             <a:schemeClr val="tx1"/>
           </a:solidFill>
@@ -2972,7 +2972,7 @@
         </a:spcBef>
         <a:buFont typeface="Arial"/>
         <a:buChar char="•"/>
-        <a:defRPr kern="1200" sz="1150">
+        <a:defRPr kern="1200" sz="950">
           <a:solidFill>
             <a:schemeClr val="tx1"/>
           </a:solidFill>
@@ -2987,7 +2987,7 @@
         </a:spcBef>
         <a:buFont typeface="Arial"/>
         <a:buChar char="•"/>
-        <a:defRPr kern="1200" sz="1150">
+        <a:defRPr kern="1200" sz="950">
           <a:solidFill>
             <a:schemeClr val="tx1"/>
           </a:solidFill>
@@ -3002,7 +3002,7 @@
         <a:defRPr lang="en-US"/>
       </a:defPPr>
       <a:lvl1pPr algn="l" defTabSz="342900" eaLnBrk="1" hangingPunct="1" latinLnBrk="0" marL="0" rtl="0">
-        <a:defRPr kern="1200" sz="1050">
+        <a:defRPr kern="1200" sz="850">
           <a:solidFill>
             <a:schemeClr val="tx1"/>
           </a:solidFill>
@@ -3012,7 +3012,7 @@
         </a:defRPr>
       </a:lvl1pPr>
       <a:lvl2pPr algn="l" defTabSz="342900" eaLnBrk="1" hangingPunct="1" latinLnBrk="0" marL="342900" rtl="0">
-        <a:defRPr kern="1200" sz="1050">
+        <a:defRPr kern="1200" sz="850">
           <a:solidFill>
             <a:schemeClr val="tx1"/>
           </a:solidFill>
@@ -3022,7 +3022,7 @@
         </a:defRPr>
       </a:lvl2pPr>
       <a:lvl3pPr algn="l" defTabSz="342900" eaLnBrk="1" hangingPunct="1" latinLnBrk="0" marL="685800" rtl="0">
-        <a:defRPr kern="1200" sz="1050">
+        <a:defRPr kern="1200" sz="850">
           <a:solidFill>
             <a:schemeClr val="tx1"/>
           </a:solidFill>
@@ -3032,7 +3032,7 @@
         </a:defRPr>
       </a:lvl3pPr>
       <a:lvl4pPr algn="l" defTabSz="342900" eaLnBrk="1" hangingPunct="1" latinLnBrk="0" marL="1028700" rtl="0">
-        <a:defRPr kern="1200" sz="1050">
+        <a:defRPr kern="1200" sz="850">
           <a:solidFill>
             <a:schemeClr val="tx1"/>
           </a:solidFill>
@@ -3042,7 +3042,7 @@
         </a:defRPr>
       </a:lvl4pPr>
       <a:lvl5pPr algn="l" defTabSz="342900" eaLnBrk="1" hangingPunct="1" latinLnBrk="0" marL="1371600" rtl="0">
-        <a:defRPr kern="1200" sz="1050">
+        <a:defRPr kern="1200" sz="850">
           <a:solidFill>
             <a:schemeClr val="tx1"/>
           </a:solidFill>
@@ -3052,7 +3052,7 @@
         </a:defRPr>
       </a:lvl5pPr>
       <a:lvl6pPr algn="l" defTabSz="342900" eaLnBrk="1" hangingPunct="1" latinLnBrk="0" marL="1714500" rtl="0">
-        <a:defRPr kern="1200" sz="1050">
+        <a:defRPr kern="1200" sz="850">
           <a:solidFill>
             <a:schemeClr val="tx1"/>
           </a:solidFill>
@@ -3062,7 +3062,7 @@
         </a:defRPr>
       </a:lvl6pPr>
       <a:lvl7pPr algn="l" defTabSz="342900" eaLnBrk="1" hangingPunct="1" latinLnBrk="0" marL="2057400" rtl="0">
-        <a:defRPr kern="1200" sz="1050">
+        <a:defRPr kern="1200" sz="850">
           <a:solidFill>
             <a:schemeClr val="tx1"/>
           </a:solidFill>
@@ -3072,7 +3072,7 @@
         </a:defRPr>
       </a:lvl7pPr>
       <a:lvl8pPr algn="l" defTabSz="342900" eaLnBrk="1" hangingPunct="1" latinLnBrk="0" marL="2400300" rtl="0">
-        <a:defRPr kern="1200" sz="1050">
+        <a:defRPr kern="1200" sz="850">
           <a:solidFill>
             <a:schemeClr val="tx1"/>
           </a:solidFill>
@@ -3082,7 +3082,7 @@
         </a:defRPr>
       </a:lvl8pPr>
       <a:lvl9pPr algn="l" defTabSz="342900" eaLnBrk="1" hangingPunct="1" latinLnBrk="0" marL="2743200" rtl="0">
-        <a:defRPr kern="1200" sz="1050">
+        <a:defRPr kern="1200" sz="850">
           <a:solidFill>
             <a:schemeClr val="tx1"/>
           </a:solidFill>

--- a/11-forecasting-drift-and-governance/slides.pptx
+++ b/11-forecasting-drift-and-governance/slides.pptx
@@ -2819,6 +2819,72 @@
               <a:t>‹#›</a:t>
             </a:fld>
             <a:endParaRPr lang="en-US"/>
+          </a:p>
+        </p:txBody>
+      </p:sp>
+      <p:sp>
+        <p:nvSpPr>
+          <p:cNvPr id="7" name="Author Footer"/>
+          <p:cNvSpPr txBox="1"/>
+          <p:nvPr/>
+        </p:nvSpPr>
+        <p:spPr>
+          <a:xfrm>
+            <a:off x="457200" y="4735000"/>
+            <a:ext cx="5000000" cy="260000"/>
+          </a:xfrm>
+          <a:prstGeom prst="rect">
+            <a:avLst/>
+          </a:prstGeom>
+          <a:noFill/>
+        </p:spPr>
+        <p:txBody>
+          <a:bodyPr anchor="ctr" bIns="0" lIns="0" rIns="0" tIns="0" wrap="square"/>
+          <a:lstStyle/>
+          <a:p>
+            <a:pPr algn="l"/>
+            <a:r>
+              <a:rPr dirty="0" lang="en-US" sz="900">
+                <a:solidFill>
+                  <a:srgbClr val="6E7275"/>
+                </a:solidFill>
+                <a:latin typeface="+mn-lt"/>
+              </a:rPr>
+              <a:t>Thierry Warin, PhD</a:t>
+            </a:r>
+          </a:p>
+        </p:txBody>
+      </p:sp>
+      <p:sp>
+        <p:nvSpPr>
+          <p:cNvPr id="8" name="Slide Number Footer"/>
+          <p:cNvSpPr txBox="1"/>
+          <p:nvPr/>
+        </p:nvSpPr>
+        <p:spPr>
+          <a:xfrm>
+            <a:off x="7200000" y="4735000"/>
+            <a:ext cx="1486800" cy="260000"/>
+          </a:xfrm>
+          <a:prstGeom prst="rect">
+            <a:avLst/>
+          </a:prstGeom>
+          <a:noFill/>
+        </p:spPr>
+        <p:txBody>
+          <a:bodyPr anchor="ctr" bIns="0" lIns="0" rIns="0" tIns="0" wrap="square"/>
+          <a:lstStyle/>
+          <a:p>
+            <a:pPr algn="r"/>
+            <a:fld id="{9B1A2C3D-4E5F-6A7B-8C9D-0E1F2A3B4C5D}" type="slidenum">
+              <a:rPr dirty="0" lang="en-US" sz="900">
+                <a:solidFill>
+                  <a:srgbClr val="6E7275"/>
+                </a:solidFill>
+                <a:latin typeface="+mn-lt"/>
+              </a:rPr>
+              <a:t>2</a:t>
+            </a:fld>
           </a:p>
         </p:txBody>
       </p:sp>
@@ -3199,7 +3265,7 @@
             </a:pPr>
             <a:r>
               <a:rPr/>
-              <a:t>18 August 2026</a:t>
+              <a:t>19 August 2026</a:t>
             </a:r>
           </a:p>
         </p:txBody>

--- a/11-forecasting-drift-and-governance/slides.pptx
+++ b/11-forecasting-drift-and-governance/slides.pptx
@@ -29,6 +29,16 @@
     <p:sldId id="277" r:id="rId23"/>
     <p:sldId id="278" r:id="rId24"/>
     <p:sldId id="279" r:id="rId25"/>
+    <p:sldId id="280" r:id="rId26"/>
+    <p:sldId id="281" r:id="rId27"/>
+    <p:sldId id="282" r:id="rId28"/>
+    <p:sldId id="283" r:id="rId29"/>
+    <p:sldId id="284" r:id="rId30"/>
+    <p:sldId id="285" r:id="rId31"/>
+    <p:sldId id="286" r:id="rId32"/>
+    <p:sldId id="287" r:id="rId33"/>
+    <p:sldId id="288" r:id="rId34"/>
+    <p:sldId id="289" r:id="rId35"/>
   </p:sldIdLst>
   <p:sldSz cx="9144000" cy="5143500" type="screen16x9"/>
   <p:notesSz cx="6858000" cy="9144000"/>
@@ -3204,7 +3214,7 @@
             </a:pPr>
             <a:r>
               <a:rPr/>
-              <a:t>Forecasting, Drift, and Governance</a:t>
+              <a:t>Forecasting, Distribution Shift, and Model Governance</a:t>
             </a:r>
           </a:p>
         </p:txBody>
@@ -3234,7 +3244,7 @@
             </a:pPr>
             <a:r>
               <a:rPr/>
-              <a:t>Session 11 · What happens to a model after you publish it</a:t>
+              <a:t>Session 11 · Lecture, first half</a:t>
             </a:r>
             <a:br/>
             <a:br/>
@@ -3265,7 +3275,7 @@
             </a:pPr>
             <a:r>
               <a:rPr/>
-              <a:t>19 August 2026</a:t>
+              <a:t>20 August 2026</a:t>
             </a:r>
           </a:p>
         </p:txBody>
@@ -3302,7 +3312,12 @@
             <p:ph type="title"/>
           </p:nvPr>
         </p:nvSpPr>
-        <p:spPr/>
+        <p:spPr>
+          <a:xfrm>
+            <a:off x="722313" y="3305176"/>
+            <a:ext cx="7772400" cy="1021556"/>
+          </a:xfrm>
+        </p:spPr>
         <p:txBody>
           <a:bodyPr/>
           <a:lstStyle/>
@@ -3312,584 +3327,7 @@
             </a:pPr>
             <a:r>
               <a:rPr/>
-              <a:t>Roll the origin forward</a:t>
-            </a:r>
-          </a:p>
-        </p:txBody>
-      </p:sp>
-      <p:sp>
-        <p:nvSpPr>
-          <p:cNvPr id="3" name="Content Placeholder 2"/>
-          <p:cNvSpPr>
-            <a:spLocks noGrp="1"/>
-          </p:cNvSpPr>
-          <p:nvPr>
-            <p:ph idx="1"/>
-          </p:nvPr>
-        </p:nvSpPr>
-        <p:spPr/>
-        <p:txBody>
-          <a:bodyPr/>
-          <a:lstStyle/>
-          <a:p>
-            <a:pPr lvl="0" indent="0">
-              <a:buNone/>
-            </a:pPr>
-            <a:r>
-              <a:rPr>
-                <a:latin typeface="Courier"/>
-              </a:rPr>
-              <a:t>rows </a:t>
-            </a:r>
-            <a:r>
-              <a:rPr>
-                <a:solidFill>
-                  <a:srgbClr val="666666"/>
-                </a:solidFill>
-                <a:latin typeface="Courier"/>
-              </a:rPr>
-              <a:t>=</a:t>
-            </a:r>
-            <a:r>
-              <a:rPr>
-                <a:latin typeface="Courier"/>
-              </a:rPr>
-              <a:t> []</a:t>
-            </a:r>
-            <a:br/>
-            <a:r>
-              <a:rPr b="1">
-                <a:solidFill>
-                  <a:srgbClr val="007020"/>
-                </a:solidFill>
-                <a:latin typeface="Courier"/>
-              </a:rPr>
-              <a:t>for</a:t>
-            </a:r>
-            <a:r>
-              <a:rPr>
-                <a:latin typeface="Courier"/>
-              </a:rPr>
-              <a:t> cut </a:t>
-            </a:r>
-            <a:r>
-              <a:rPr b="1">
-                <a:solidFill>
-                  <a:srgbClr val="007020"/>
-                </a:solidFill>
-                <a:latin typeface="Courier"/>
-              </a:rPr>
-              <a:t>in</a:t>
-            </a:r>
-            <a:r>
-              <a:rPr>
-                <a:latin typeface="Courier"/>
-              </a:rPr>
-              <a:t> </a:t>
-            </a:r>
-            <a:r>
-              <a:rPr>
-                <a:solidFill>
-                  <a:srgbClr val="008000"/>
-                </a:solidFill>
-                <a:latin typeface="Courier"/>
-              </a:rPr>
-              <a:t>range</a:t>
-            </a:r>
-            <a:r>
-              <a:rPr>
-                <a:latin typeface="Courier"/>
-              </a:rPr>
-              <a:t>(</a:t>
-            </a:r>
-            <a:r>
-              <a:rPr>
-                <a:solidFill>
-                  <a:srgbClr val="40A070"/>
-                </a:solidFill>
-                <a:latin typeface="Courier"/>
-              </a:rPr>
-              <a:t>2016</a:t>
-            </a:r>
-            <a:r>
-              <a:rPr>
-                <a:latin typeface="Courier"/>
-              </a:rPr>
-              <a:t>, </a:t>
-            </a:r>
-            <a:r>
-              <a:rPr>
-                <a:solidFill>
-                  <a:srgbClr val="40A070"/>
-                </a:solidFill>
-                <a:latin typeface="Courier"/>
-              </a:rPr>
-              <a:t>2024</a:t>
-            </a:r>
-            <a:r>
-              <a:rPr>
-                <a:latin typeface="Courier"/>
-              </a:rPr>
-              <a:t>):</a:t>
-            </a:r>
-            <a:br/>
-            <a:r>
-              <a:rPr>
-                <a:latin typeface="Courier"/>
-              </a:rPr>
-              <a:t>    tr, te </a:t>
-            </a:r>
-            <a:r>
-              <a:rPr>
-                <a:solidFill>
-                  <a:srgbClr val="666666"/>
-                </a:solidFill>
-                <a:latin typeface="Courier"/>
-              </a:rPr>
-              <a:t>=</a:t>
-            </a:r>
-            <a:r>
-              <a:rPr>
-                <a:latin typeface="Courier"/>
-              </a:rPr>
-              <a:t> d[d.time </a:t>
-            </a:r>
-            <a:r>
-              <a:rPr>
-                <a:solidFill>
-                  <a:srgbClr val="666666"/>
-                </a:solidFill>
-                <a:latin typeface="Courier"/>
-              </a:rPr>
-              <a:t>&lt;=</a:t>
-            </a:r>
-            <a:r>
-              <a:rPr>
-                <a:latin typeface="Courier"/>
-              </a:rPr>
-              <a:t> cut], d[d.time </a:t>
-            </a:r>
-            <a:r>
-              <a:rPr>
-                <a:solidFill>
-                  <a:srgbClr val="666666"/>
-                </a:solidFill>
-                <a:latin typeface="Courier"/>
-              </a:rPr>
-              <a:t>==</a:t>
-            </a:r>
-            <a:r>
-              <a:rPr>
-                <a:latin typeface="Courier"/>
-              </a:rPr>
-              <a:t> cut </a:t>
-            </a:r>
-            <a:r>
-              <a:rPr>
-                <a:solidFill>
-                  <a:srgbClr val="666666"/>
-                </a:solidFill>
-                <a:latin typeface="Courier"/>
-              </a:rPr>
-              <a:t>+</a:t>
-            </a:r>
-            <a:r>
-              <a:rPr>
-                <a:latin typeface="Courier"/>
-              </a:rPr>
-              <a:t> </a:t>
-            </a:r>
-            <a:r>
-              <a:rPr>
-                <a:solidFill>
-                  <a:srgbClr val="40A070"/>
-                </a:solidFill>
-                <a:latin typeface="Courier"/>
-              </a:rPr>
-              <a:t>1</a:t>
-            </a:r>
-            <a:r>
-              <a:rPr>
-                <a:latin typeface="Courier"/>
-              </a:rPr>
-              <a:t>]</a:t>
-            </a:r>
-            <a:br/>
-            <a:r>
-              <a:rPr>
-                <a:latin typeface="Courier"/>
-              </a:rPr>
-              <a:t>    </a:t>
-            </a:r>
-            <a:r>
-              <a:rPr b="1">
-                <a:solidFill>
-                  <a:srgbClr val="007020"/>
-                </a:solidFill>
-                <a:latin typeface="Courier"/>
-              </a:rPr>
-              <a:t>if</a:t>
-            </a:r>
-            <a:r>
-              <a:rPr>
-                <a:latin typeface="Courier"/>
-              </a:rPr>
-              <a:t> </a:t>
-            </a:r>
-            <a:r>
-              <a:rPr>
-                <a:solidFill>
-                  <a:srgbClr val="008000"/>
-                </a:solidFill>
-                <a:latin typeface="Courier"/>
-              </a:rPr>
-              <a:t>len</a:t>
-            </a:r>
-            <a:r>
-              <a:rPr>
-                <a:latin typeface="Courier"/>
-              </a:rPr>
-              <a:t>(te) </a:t>
-            </a:r>
-            <a:r>
-              <a:rPr>
-                <a:solidFill>
-                  <a:srgbClr val="666666"/>
-                </a:solidFill>
-                <a:latin typeface="Courier"/>
-              </a:rPr>
-              <a:t>==</a:t>
-            </a:r>
-            <a:r>
-              <a:rPr>
-                <a:latin typeface="Courier"/>
-              </a:rPr>
-              <a:t> </a:t>
-            </a:r>
-            <a:r>
-              <a:rPr>
-                <a:solidFill>
-                  <a:srgbClr val="40A070"/>
-                </a:solidFill>
-                <a:latin typeface="Courier"/>
-              </a:rPr>
-              <a:t>0</a:t>
-            </a:r>
-            <a:r>
-              <a:rPr>
-                <a:latin typeface="Courier"/>
-              </a:rPr>
-              <a:t>:</a:t>
-            </a:r>
-            <a:br/>
-            <a:r>
-              <a:rPr>
-                <a:latin typeface="Courier"/>
-              </a:rPr>
-              <a:t>        </a:t>
-            </a:r>
-            <a:r>
-              <a:rPr b="1">
-                <a:solidFill>
-                  <a:srgbClr val="007020"/>
-                </a:solidFill>
-                <a:latin typeface="Courier"/>
-              </a:rPr>
-              <a:t>continue</a:t>
-            </a:r>
-            <a:br/>
-            <a:r>
-              <a:rPr>
-                <a:latin typeface="Courier"/>
-              </a:rPr>
-              <a:t>    m </a:t>
-            </a:r>
-            <a:r>
-              <a:rPr>
-                <a:solidFill>
-                  <a:srgbClr val="666666"/>
-                </a:solidFill>
-                <a:latin typeface="Courier"/>
-              </a:rPr>
-              <a:t>=</a:t>
-            </a:r>
-            <a:r>
-              <a:rPr>
-                <a:latin typeface="Courier"/>
-              </a:rPr>
-              <a:t> RandomForestRegressor(</a:t>
-            </a:r>
-            <a:r>
-              <a:rPr>
-                <a:solidFill>
-                  <a:srgbClr val="40A070"/>
-                </a:solidFill>
-                <a:latin typeface="Courier"/>
-              </a:rPr>
-              <a:t>300</a:t>
-            </a:r>
-            <a:r>
-              <a:rPr>
-                <a:latin typeface="Courier"/>
-              </a:rPr>
-              <a:t>, random_state</a:t>
-            </a:r>
-            <a:r>
-              <a:rPr>
-                <a:solidFill>
-                  <a:srgbClr val="666666"/>
-                </a:solidFill>
-                <a:latin typeface="Courier"/>
-              </a:rPr>
-              <a:t>=</a:t>
-            </a:r>
-            <a:r>
-              <a:rPr>
-                <a:solidFill>
-                  <a:srgbClr val="40A070"/>
-                </a:solidFill>
-                <a:latin typeface="Courier"/>
-              </a:rPr>
-              <a:t>60033</a:t>
-            </a:r>
-            <a:r>
-              <a:rPr>
-                <a:latin typeface="Courier"/>
-              </a:rPr>
-              <a:t>).fit(</a:t>
-            </a:r>
-            <a:br/>
-            <a:r>
-              <a:rPr>
-                <a:latin typeface="Courier"/>
-              </a:rPr>
-              <a:t>        tr[feat].fillna(</a:t>
-            </a:r>
-            <a:r>
-              <a:rPr>
-                <a:solidFill>
-                  <a:srgbClr val="40A070"/>
-                </a:solidFill>
-                <a:latin typeface="Courier"/>
-              </a:rPr>
-              <a:t>0</a:t>
-            </a:r>
-            <a:r>
-              <a:rPr>
-                <a:latin typeface="Courier"/>
-              </a:rPr>
-              <a:t>), tr.prod_growth)</a:t>
-            </a:r>
-            <a:br/>
-            <a:r>
-              <a:rPr>
-                <a:latin typeface="Courier"/>
-              </a:rPr>
-              <a:t>    err </a:t>
-            </a:r>
-            <a:r>
-              <a:rPr>
-                <a:solidFill>
-                  <a:srgbClr val="666666"/>
-                </a:solidFill>
-                <a:latin typeface="Courier"/>
-              </a:rPr>
-              <a:t>=</a:t>
-            </a:r>
-            <a:r>
-              <a:rPr>
-                <a:latin typeface="Courier"/>
-              </a:rPr>
-              <a:t> te.prod_growth </a:t>
-            </a:r>
-            <a:r>
-              <a:rPr>
-                <a:solidFill>
-                  <a:srgbClr val="666666"/>
-                </a:solidFill>
-                <a:latin typeface="Courier"/>
-              </a:rPr>
-              <a:t>-</a:t>
-            </a:r>
-            <a:r>
-              <a:rPr>
-                <a:latin typeface="Courier"/>
-              </a:rPr>
-              <a:t> m.predict(te[feat].fillna(</a:t>
-            </a:r>
-            <a:r>
-              <a:rPr>
-                <a:solidFill>
-                  <a:srgbClr val="40A070"/>
-                </a:solidFill>
-                <a:latin typeface="Courier"/>
-              </a:rPr>
-              <a:t>0</a:t>
-            </a:r>
-            <a:r>
-              <a:rPr>
-                <a:latin typeface="Courier"/>
-              </a:rPr>
-              <a:t>))</a:t>
-            </a:r>
-            <a:br/>
-            <a:r>
-              <a:rPr>
-                <a:latin typeface="Courier"/>
-              </a:rPr>
-              <a:t>    rows.append((cut </a:t>
-            </a:r>
-            <a:r>
-              <a:rPr>
-                <a:solidFill>
-                  <a:srgbClr val="666666"/>
-                </a:solidFill>
-                <a:latin typeface="Courier"/>
-              </a:rPr>
-              <a:t>+</a:t>
-            </a:r>
-            <a:r>
-              <a:rPr>
-                <a:latin typeface="Courier"/>
-              </a:rPr>
-              <a:t> </a:t>
-            </a:r>
-            <a:r>
-              <a:rPr>
-                <a:solidFill>
-                  <a:srgbClr val="40A070"/>
-                </a:solidFill>
-                <a:latin typeface="Courier"/>
-              </a:rPr>
-              <a:t>1</a:t>
-            </a:r>
-            <a:r>
-              <a:rPr>
-                <a:latin typeface="Courier"/>
-              </a:rPr>
-              <a:t>, np.sqrt((err </a:t>
-            </a:r>
-            <a:r>
-              <a:rPr>
-                <a:solidFill>
-                  <a:srgbClr val="666666"/>
-                </a:solidFill>
-                <a:latin typeface="Courier"/>
-              </a:rPr>
-              <a:t>**</a:t>
-            </a:r>
-            <a:r>
-              <a:rPr>
-                <a:latin typeface="Courier"/>
-              </a:rPr>
-              <a:t> </a:t>
-            </a:r>
-            <a:r>
-              <a:rPr>
-                <a:solidFill>
-                  <a:srgbClr val="40A070"/>
-                </a:solidFill>
-                <a:latin typeface="Courier"/>
-              </a:rPr>
-              <a:t>2</a:t>
-            </a:r>
-            <a:r>
-              <a:rPr>
-                <a:latin typeface="Courier"/>
-              </a:rPr>
-              <a:t>).mean())))</a:t>
-            </a:r>
-            <a:br/>
-            <a:br/>
-            <a:r>
-              <a:rPr>
-                <a:solidFill>
-                  <a:srgbClr val="008000"/>
-                </a:solidFill>
-                <a:latin typeface="Courier"/>
-              </a:rPr>
-              <a:t>print</a:t>
-            </a:r>
-            <a:r>
-              <a:rPr>
-                <a:latin typeface="Courier"/>
-              </a:rPr>
-              <a:t>(pd.DataFrame(rows, columns</a:t>
-            </a:r>
-            <a:r>
-              <a:rPr>
-                <a:solidFill>
-                  <a:srgbClr val="666666"/>
-                </a:solidFill>
-                <a:latin typeface="Courier"/>
-              </a:rPr>
-              <a:t>=</a:t>
-            </a:r>
-            <a:r>
-              <a:rPr>
-                <a:latin typeface="Courier"/>
-              </a:rPr>
-              <a:t>[</a:t>
-            </a:r>
-            <a:r>
-              <a:rPr>
-                <a:solidFill>
-                  <a:srgbClr val="4070A0"/>
-                </a:solidFill>
-                <a:latin typeface="Courier"/>
-              </a:rPr>
-              <a:t>"year"</a:t>
-            </a:r>
-            <a:r>
-              <a:rPr>
-                <a:latin typeface="Courier"/>
-              </a:rPr>
-              <a:t>, </a:t>
-            </a:r>
-            <a:r>
-              <a:rPr>
-                <a:solidFill>
-                  <a:srgbClr val="4070A0"/>
-                </a:solidFill>
-                <a:latin typeface="Courier"/>
-              </a:rPr>
-              <a:t>"rmse"</a:t>
-            </a:r>
-            <a:r>
-              <a:rPr>
-                <a:latin typeface="Courier"/>
-              </a:rPr>
-              <a:t>]).</a:t>
-            </a:r>
-            <a:r>
-              <a:rPr>
-                <a:solidFill>
-                  <a:srgbClr val="008000"/>
-                </a:solidFill>
-                <a:latin typeface="Courier"/>
-              </a:rPr>
-              <a:t>round</a:t>
-            </a:r>
-            <a:r>
-              <a:rPr>
-                <a:latin typeface="Courier"/>
-              </a:rPr>
-              <a:t>(</a:t>
-            </a:r>
-            <a:r>
-              <a:rPr>
-                <a:solidFill>
-                  <a:srgbClr val="40A070"/>
-                </a:solidFill>
-                <a:latin typeface="Courier"/>
-              </a:rPr>
-              <a:t>3</a:t>
-            </a:r>
-            <a:r>
-              <a:rPr>
-                <a:latin typeface="Courier"/>
-              </a:rPr>
-              <a:t>))</a:t>
+              <a:t>11.2 Comparing honestly</a:t>
             </a:r>
           </a:p>
         </p:txBody>
@@ -3936,53 +3374,60 @@
             </a:pPr>
             <a:r>
               <a:rPr/>
-              <a:t>Read the sequence, not the average</a:t>
-            </a:r>
-          </a:p>
-        </p:txBody>
-      </p:sp>
-      <p:sp>
-        <p:nvSpPr>
-          <p:cNvPr id="3" name="Content Placeholder 2"/>
-          <p:cNvSpPr>
-            <a:spLocks noGrp="1"/>
-          </p:cNvSpPr>
-          <p:nvPr>
-            <p:ph idx="1"/>
-          </p:nvPr>
-        </p:nvSpPr>
-        <p:spPr/>
-        <p:txBody>
-          <a:bodyPr/>
-          <a:lstStyle/>
-          <a:p>
-            <a:pPr lvl="0" indent="0" marL="0">
-              <a:buNone/>
-            </a:pPr>
-            <a:r>
-              <a:rPr/>
-              <a:t>One RMSE over the whole backtest hides everything. Look at the </a:t>
-            </a:r>
-            <a:r>
-              <a:rPr b="1"/>
-              <a:t>year-by-year series</a:t>
-            </a:r>
-            <a:r>
-              <a:rPr/>
-              <a:t>: a model that was excellent until 2021 and poor after is a different object from one that is mediocre throughout.</a:t>
-            </a:r>
-          </a:p>
-          <a:p>
-            <a:pPr lvl="0" indent="0" marL="0">
-              <a:buNone/>
-            </a:pPr>
-            <a:r>
-              <a:rPr/>
-              <a:t>The spine carries a deliberate shift after 2021. You should be able to see it in that table without being told where to look.</a:t>
-            </a:r>
-          </a:p>
-        </p:txBody>
-      </p:sp>
+              <a:t>Against a benchmark that is hard to beat</a:t>
+            </a:r>
+          </a:p>
+        </p:txBody>
+      </p:sp>
+      <mc:AlternateContent xmlns:mc="http://schemas.openxmlformats.org/markup-compatibility/2006">
+        <mc:Choice xmlns:a14="http://schemas.microsoft.com/office/drawing/2010/main" Requires="a14">
+          <p:sp>
+            <p:nvSpPr>
+              <p:cNvPr id="3" name="Content Placeholder 2"/>
+              <p:cNvSpPr>
+                <a:spLocks noGrp="1"/>
+              </p:cNvSpPr>
+              <p:nvPr>
+                <p:ph idx="1"/>
+              </p:nvPr>
+            </p:nvSpPr>
+            <p:spPr/>
+            <p:txBody>
+              <a:bodyPr/>
+              <a:lstStyle/>
+              <a:p>
+                <a:pPr lvl="0" indent="0" marL="0">
+                  <a:buNone/>
+                </a:pPr>
+                <a:r>
+                  <a:rPr/>
+                  <a:t>A random walk, an AR(</a:t>
+                </a:r>
+                <a14:m>
+                  <m:oMath xmlns:m="http://schemas.openxmlformats.org/officeDocument/2006/math">
+                    <m:r>
+                      <m:t>p</m:t>
+                    </m:r>
+                  </m:oMath>
+                </a14:m>
+                <a:r>
+                  <a:rPr/>
+                  <a:t>), or the consensus forecast.</a:t>
+                </a:r>
+              </a:p>
+              <a:p>
+                <a:pPr lvl="0" indent="0" marL="0">
+                  <a:buNone/>
+                </a:pPr>
+                <a:r>
+                  <a:rPr b="1"/>
+                  <a:t>A lower RMSE without a significance statement is an anecdote.</a:t>
+                </a:r>
+              </a:p>
+            </p:txBody>
+          </p:sp>
+        </mc:Choice>
+      </mc:AlternateContent>
     </p:spTree>
   </p:cSld>
 </p:sld>
@@ -4015,12 +3460,7 @@
             <p:ph type="title"/>
           </p:nvPr>
         </p:nvSpPr>
-        <p:spPr>
-          <a:xfrm>
-            <a:off x="722313" y="3305176"/>
-            <a:ext cx="7772400" cy="1021556"/>
-          </a:xfrm>
-        </p:spPr>
+        <p:spPr/>
         <p:txBody>
           <a:bodyPr/>
           <a:lstStyle/>
@@ -4030,17 +3470,533 @@
             </a:pPr>
             <a:r>
               <a:rPr/>
-              <a:t>Drift</a:t>
-            </a:r>
-          </a:p>
-        </p:txBody>
-      </p:sp>
+              <a:t>Diebold–Mariano</a:t>
+            </a:r>
+          </a:p>
+        </p:txBody>
+      </p:sp>
+      <mc:AlternateContent xmlns:mc="http://schemas.openxmlformats.org/markup-compatibility/2006">
+        <mc:Choice xmlns:a14="http://schemas.microsoft.com/office/drawing/2010/main" Requires="a14">
+          <p:sp>
+            <p:nvSpPr>
+              <p:cNvPr id="3" name="Content Placeholder 2"/>
+              <p:cNvSpPr>
+                <a:spLocks noGrp="1"/>
+              </p:cNvSpPr>
+              <p:nvPr>
+                <p:ph idx="1"/>
+              </p:nvPr>
+            </p:nvSpPr>
+            <p:spPr/>
+            <p:txBody>
+              <a:bodyPr/>
+              <a:lstStyle/>
+              <a:p>
+                <a:pPr lvl="0" indent="0" marL="0">
+                  <a:buNone/>
+                </a:pPr>
+                <a:r>
+                  <a:rPr/>
+                  <a:t>Let </a:t>
+                </a:r>
+                <a14:m>
+                  <m:oMath xmlns:m="http://schemas.openxmlformats.org/officeDocument/2006/math">
+                    <m:sSub>
+                      <m:e>
+                        <m:r>
+                          <m:t>e</m:t>
+                        </m:r>
+                      </m:e>
+                      <m:sub>
+                        <m:r>
+                          <m:t>1</m:t>
+                        </m:r>
+                        <m:r>
+                          <m:t>t</m:t>
+                        </m:r>
+                      </m:sub>
+                    </m:sSub>
+                    <m:r>
+                      <m:rPr>
+                        <m:sty m:val="p"/>
+                      </m:rPr>
+                      <m:t>,</m:t>
+                    </m:r>
+                    <m:sSub>
+                      <m:e>
+                        <m:r>
+                          <m:t>e</m:t>
+                        </m:r>
+                      </m:e>
+                      <m:sub>
+                        <m:r>
+                          <m:t>2</m:t>
+                        </m:r>
+                        <m:r>
+                          <m:t>t</m:t>
+                        </m:r>
+                      </m:sub>
+                    </m:sSub>
+                  </m:oMath>
+                </a14:m>
+                <a:r>
+                  <a:rPr/>
+                  <a:t> be the forecast errors of two models and </a:t>
+                </a:r>
+                <a14:m>
+                  <m:oMath xmlns:m="http://schemas.openxmlformats.org/officeDocument/2006/math">
+                    <m:sSub>
+                      <m:e>
+                        <m:r>
+                          <m:t>d</m:t>
+                        </m:r>
+                      </m:e>
+                      <m:sub>
+                        <m:r>
+                          <m:t>t</m:t>
+                        </m:r>
+                      </m:sub>
+                    </m:sSub>
+                    <m:r>
+                      <m:rPr>
+                        <m:sty m:val="p"/>
+                      </m:rPr>
+                      <m:t>=</m:t>
+                    </m:r>
+                    <m:r>
+                      <m:t>L</m:t>
+                    </m:r>
+                    <m:d>
+                      <m:dPr>
+                        <m:begChr m:val="("/>
+                        <m:sepChr m:val=""/>
+                        <m:endChr m:val=")"/>
+                        <m:grow/>
+                      </m:dPr>
+                      <m:e>
+                        <m:sSub>
+                          <m:e>
+                            <m:r>
+                              <m:t>e</m:t>
+                            </m:r>
+                          </m:e>
+                          <m:sub>
+                            <m:r>
+                              <m:t>1</m:t>
+                            </m:r>
+                            <m:r>
+                              <m:t>t</m:t>
+                            </m:r>
+                          </m:sub>
+                        </m:sSub>
+                      </m:e>
+                    </m:d>
+                    <m:r>
+                      <m:rPr>
+                        <m:sty m:val="p"/>
+                      </m:rPr>
+                      <m:t>−</m:t>
+                    </m:r>
+                    <m:r>
+                      <m:t>L</m:t>
+                    </m:r>
+                    <m:d>
+                      <m:dPr>
+                        <m:begChr m:val="("/>
+                        <m:sepChr m:val=""/>
+                        <m:endChr m:val=")"/>
+                        <m:grow/>
+                      </m:dPr>
+                      <m:e>
+                        <m:sSub>
+                          <m:e>
+                            <m:r>
+                              <m:t>e</m:t>
+                            </m:r>
+                          </m:e>
+                          <m:sub>
+                            <m:r>
+                              <m:t>2</m:t>
+                            </m:r>
+                            <m:r>
+                              <m:t>t</m:t>
+                            </m:r>
+                          </m:sub>
+                        </m:sSub>
+                      </m:e>
+                    </m:d>
+                  </m:oMath>
+                </a14:m>
+                <a:r>
+                  <a:rPr/>
+                  <a:t> the loss differential. Under the null of equal predictive accuracy, </a:t>
+                </a:r>
+                <a14:m>
+                  <m:oMath xmlns:m="http://schemas.openxmlformats.org/officeDocument/2006/math">
+                    <m:r>
+                      <m:rPr>
+                        <m:sty m:val="p"/>
+                        <m:scr m:val="double-struck"/>
+                      </m:rPr>
+                      <m:t>E</m:t>
+                    </m:r>
+                    <m:d>
+                      <m:dPr>
+                        <m:begChr m:val="["/>
+                        <m:sepChr m:val=""/>
+                        <m:endChr m:val="]"/>
+                        <m:grow/>
+                      </m:dPr>
+                      <m:e>
+                        <m:sSub>
+                          <m:e>
+                            <m:r>
+                              <m:t>d</m:t>
+                            </m:r>
+                          </m:e>
+                          <m:sub>
+                            <m:r>
+                              <m:t>t</m:t>
+                            </m:r>
+                          </m:sub>
+                        </m:sSub>
+                      </m:e>
+                    </m:d>
+                    <m:r>
+                      <m:rPr>
+                        <m:sty m:val="p"/>
+                      </m:rPr>
+                      <m:t>=</m:t>
+                    </m:r>
+                    <m:r>
+                      <m:t>0</m:t>
+                    </m:r>
+                  </m:oMath>
+                </a14:m>
+                <a:r>
+                  <a:rPr/>
+                  <a:t>, and</a:t>
+                </a:r>
+              </a:p>
+              <a:p>
+                <a:pPr lvl="0" indent="0" marL="0">
+                  <a:buNone/>
+                </a:pPr>
+                <a14:m>
+                  <m:oMathPara xmlns:m="http://schemas.openxmlformats.org/officeDocument/2006/math">
+                    <m:oMathParaPr>
+                      <m:jc m:val="center"/>
+                    </m:oMathParaPr>
+                    <m:oMath>
+                      <m:r>
+                        <m:rPr>
+                          <m:sty m:val="p"/>
+                        </m:rPr>
+                        <m:t>D</m:t>
+                      </m:r>
+                      <m:r>
+                        <m:rPr>
+                          <m:sty m:val="p"/>
+                        </m:rPr>
+                        <m:t>M</m:t>
+                      </m:r>
+                      <m:r>
+                        <m:rPr>
+                          <m:sty m:val="p"/>
+                        </m:rPr>
+                        <m:t>=</m:t>
+                      </m:r>
+                      <m:f>
+                        <m:fPr>
+                          <m:type m:val="bar"/>
+                        </m:fPr>
+                        <m:num>
+                          <m:acc>
+                            <m:accPr>
+                              <m:chr m:val="‾"/>
+                            </m:accPr>
+                            <m:e>
+                              <m:r>
+                                <m:t>d</m:t>
+                              </m:r>
+                            </m:e>
+                          </m:acc>
+                        </m:num>
+                        <m:den>
+                          <m:rad>
+                            <m:radPr>
+                              <m:degHide m:val="on"/>
+                            </m:radPr>
+                            <m:deg/>
+                            <m:e>
+                              <m:acc>
+                                <m:accPr>
+                                  <m:chr m:val="̂"/>
+                                </m:accPr>
+                                <m:e>
+                                  <m:r>
+                                    <m:rPr>
+                                      <m:sty m:val="p"/>
+                                    </m:rPr>
+                                    <m:t>Var</m:t>
+                                  </m:r>
+                                </m:e>
+                              </m:acc>
+                              <m:d>
+                                <m:dPr>
+                                  <m:begChr m:val="("/>
+                                  <m:sepChr m:val=""/>
+                                  <m:endChr m:val=")"/>
+                                  <m:grow/>
+                                </m:dPr>
+                                <m:e>
+                                  <m:acc>
+                                    <m:accPr>
+                                      <m:chr m:val="‾"/>
+                                    </m:accPr>
+                                    <m:e>
+                                      <m:r>
+                                        <m:t>d</m:t>
+                                      </m:r>
+                                    </m:e>
+                                  </m:acc>
+                                </m:e>
+                              </m:d>
+                            </m:e>
+                          </m:rad>
+                        </m:den>
+                      </m:f>
+                      <m:r>
+                        <m:t> </m:t>
+                      </m:r>
+                      <m:limUpp>
+                        <m:e>
+                          <m:r>
+                            <m:rPr>
+                              <m:sty m:val="p"/>
+                            </m:rPr>
+                            <m:t>→</m:t>
+                          </m:r>
+                        </m:e>
+                        <m:lim>
+                          <m:r>
+                            <m:t>d</m:t>
+                          </m:r>
+                        </m:lim>
+                      </m:limUpp>
+                      <m:r>
+                        <m:t> </m:t>
+                      </m:r>
+                      <m:r>
+                        <m:t>N</m:t>
+                      </m:r>
+                      <m:d>
+                        <m:dPr>
+                          <m:begChr m:val="("/>
+                          <m:sepChr m:val=""/>
+                          <m:endChr m:val=")"/>
+                          <m:grow/>
+                        </m:dPr>
+                        <m:e>
+                          <m:r>
+                            <m:t>0</m:t>
+                          </m:r>
+                          <m:r>
+                            <m:rPr>
+                              <m:sty m:val="p"/>
+                            </m:rPr>
+                            <m:t>,</m:t>
+                          </m:r>
+                          <m:r>
+                            <m:t>1</m:t>
+                          </m:r>
+                        </m:e>
+                      </m:d>
+                    </m:oMath>
+                  </m:oMathPara>
+                </a14:m>
+              </a:p>
+            </p:txBody>
+          </p:sp>
+        </mc:Choice>
+      </mc:AlternateContent>
     </p:spTree>
   </p:cSld>
 </p:sld>
 </file>
 
-<file path=ppt/slides/slide13.xml><?xml version="1.0" encoding="UTF-8"?><p:sld xmlns:a="http://schemas.openxmlformats.org/drawingml/2006/main" xmlns:r="http://schemas.openxmlformats.org/officeDocument/2006/relationships" xmlns:p="http://schemas.openxmlformats.org/presentationml/2006/main"><p:cSld><p:spTree><p:nvGrpSpPr><p:cNvPr id="1" name="" /><p:cNvGrpSpPr /><p:nvPr /></p:nvGrpSpPr><p:grpSpPr><a:xfrm><a:off x="0" y="0" /><a:ext cx="0" cy="0" /><a:chOff x="0" y="0" /><a:chExt cx="0" cy="0" /></a:xfrm></p:grpSpPr><p:sp><p:nvSpPr><p:cNvPr id="2" name="Title 1" /><p:cNvSpPr><a:spLocks noGrp="1" /></p:cNvSpPr><p:nvPr><p:ph type="title" /></p:nvPr></p:nvSpPr><p:spPr /><p:txBody><a:bodyPr /><a:lstStyle /><a:p><a:pPr lvl="0" indent="0" marL="0"><a:buNone /></a:pPr><a:r><a:rPr /><a:t>Three things can change</a:t></a:r></a:p></p:txBody></p:sp><p:graphicFrame><p:nvGraphicFramePr><p:cNvPr id="6" name="Content Placeholder 5" /><p:cNvGraphicFramePr><a:graphicFrameLocks noGrp="1" /></p:cNvGraphicFramePr><p:nvPr><p:ph idx="1" /></p:nvPr></p:nvGraphicFramePr><p:xfrm><a:off x="457200" y="1193800" /><a:ext cx="8229600" cy="3390900" /></p:xfrm><a:graphic><a:graphicData uri="http://schemas.openxmlformats.org/drawingml/2006/table"><a:tbl><a:tblPr firstRow="1" bandRow="1"><a:tableStyleId>{5C22544A-7EE6-4342-B048-85BDC9FD1C3A}</a:tableStyleId></a:tblPr><a:tblGrid><a:gridCol w="2743200" /><a:gridCol w="2743200" /><a:gridCol w="2743200" /></a:tblGrid><a:tr h="0"><a:tc><a:txBody><a:bodyPr /><a:lstStyle /><a:p><a:pPr lvl="0" indent="0" marL="0"><a:buNone /></a:pPr><a:r><a:rPr /><a:t>Kind</a:t></a:r></a:p></a:txBody><a:tcPr /></a:tc><a:tc><a:txBody><a:bodyPr /><a:lstStyle /><a:p><a:pPr lvl="0" indent="0" marL="0"><a:buNone /></a:pPr><a:r><a:rPr /><a:t>What moves</a:t></a:r></a:p></a:txBody><a:tcPr /></a:tc><a:tc><a:txBody><a:bodyPr /><a:lstStyle /><a:p><a:pPr lvl="0" indent="0" marL="0"><a:buNone /></a:pPr><a:r><a:rPr /><a:t>Example</a:t></a:r></a:p></a:txBody><a:tcPr /></a:tc></a:tr><a:tr h="0"><a:tc><a:txBody><a:bodyPr /><a:lstStyle /><a:p><a:pPr lvl="0" indent="0" marL="0"><a:buNone /></a:pPr><a:r><a:rPr b="1" /><a:t>Covariate shift</a:t></a:r></a:p></a:txBody></a:tc><a:tc><a:txBody><a:bodyPr /><a:lstStyle /><a:p><a:pPr lvl="0" indent="0" marL="0"><a:buNone /></a:pPr><a14:m><m:oMath xmlns:m="http://schemas.openxmlformats.org/officeDocument/2006/math"><m:r><m:t>P</m:t></m:r><m:d><m:dPr><m:begChr m:val="(" /><m:sepChr m:val="" /><m:endChr m:val=")" /><m:grow /></m:dPr><m:e><m:r><m:t>X</m:t></m:r></m:e></m:d></m:oMath></a14:m></a:p></a:txBody></a:tc><a:tc><a:txBody><a:bodyPr /><a:lstStyle /><a:p><a:pPr lvl="0" indent="0" marL="0"><a:buNone /></a:pPr><a:r><a:rPr /><a:t>Energy prices leave their historical range</a:t></a:r></a:p></a:txBody></a:tc></a:tr><a:tr h="0"><a:tc><a:txBody><a:bodyPr /><a:lstStyle /><a:p><a:pPr lvl="0" indent="0" marL="0"><a:buNone /></a:pPr><a:r><a:rPr b="1" /><a:t>Label shift</a:t></a:r></a:p></a:txBody></a:tc><a:tc><a:txBody><a:bodyPr /><a:lstStyle /><a:p><a:pPr lvl="0" indent="0" marL="0"><a:buNone /></a:pPr><a14:m><m:oMath xmlns:m="http://schemas.openxmlformats.org/officeDocument/2006/math"><m:r><m:t>P</m:t></m:r><m:d><m:dPr><m:begChr m:val="(" /><m:sepChr m:val="" /><m:endChr m:val=")" /><m:grow /></m:dPr><m:e><m:r><m:t>Y</m:t></m:r></m:e></m:d></m:oMath></a14:m></a:p></a:txBody></a:tc><a:tc><a:txBody><a:bodyPr /><a:lstStyle /><a:p><a:pPr lvl="0" indent="0" marL="0"><a:buNone /></a:pPr><a:r><a:rPr /><a:t>Downturn: more countries fall behind</a:t></a:r></a:p></a:txBody></a:tc></a:tr><a:tr h="0"><a:tc><a:txBody><a:bodyPr /><a:lstStyle /><a:p><a:pPr lvl="0" indent="0" marL="0"><a:buNone /></a:pPr><a:r><a:rPr b="1" /><a:t>Concept drift</a:t></a:r></a:p></a:txBody></a:tc><a:tc><a:txBody><a:bodyPr /><a:lstStyle /><a:p><a:pPr lvl="0" indent="0" marL="0"><a:buNone /></a:pPr><a14:m><m:oMath xmlns:m="http://schemas.openxmlformats.org/officeDocument/2006/math"><m:r><m:t>P</m:t></m:r><m:d><m:dPr><m:begChr m:val="(" /><m:sepChr m:val="" /><m:endChr m:val=")" /><m:grow /></m:dPr><m:e><m:r><m:t>Y</m:t></m:r><m:r><m:rPr><m:sty m:val="p" /></m:rPr><m:t>∣</m:t></m:r><m:r><m:t>X</m:t></m:r></m:e></m:d></m:oMath></a14:m></a:p></a:txBody></a:tc><a:tc><a:txBody><a:bodyPr /><a:lstStyle /><a:p><a:pPr lvl="0" indent="0" marL="0"><a:buNone /></a:pPr><a:r><a:rPr /><a:t>The </a:t></a:r><a:r><a:rPr i="1" /><a:t>relationship</a:t></a:r><a:r><a:rPr /><a:t> changes</a:t></a:r></a:p></a:txBody></a:tc></a:tr></a:tbl></a:graphicData></a:graphic></p:graphicFrame></p:spTree></p:cSld></p:sld>
+<file path=ppt/slides/slide13.xml><?xml version="1.0" encoding="utf-8"?>
+<p:sld xmlns:a="http://schemas.openxmlformats.org/drawingml/2006/main" xmlns:r="http://schemas.openxmlformats.org/officeDocument/2006/relationships" xmlns:p="http://schemas.openxmlformats.org/presentationml/2006/main">
+  <p:cSld>
+    <p:spTree>
+      <p:nvGrpSpPr>
+        <p:cNvPr id="1" name=""/>
+        <p:cNvGrpSpPr/>
+        <p:nvPr/>
+      </p:nvGrpSpPr>
+      <p:grpSpPr>
+        <a:xfrm>
+          <a:off x="0" y="0"/>
+          <a:ext cx="0" cy="0"/>
+          <a:chOff x="0" y="0"/>
+          <a:chExt cx="0" cy="0"/>
+        </a:xfrm>
+      </p:grpSpPr>
+      <p:sp>
+        <p:nvSpPr>
+          <p:cNvPr id="2" name="Title 1"/>
+          <p:cNvSpPr>
+            <a:spLocks noGrp="1"/>
+          </p:cNvSpPr>
+          <p:nvPr>
+            <p:ph type="title"/>
+          </p:nvPr>
+        </p:nvSpPr>
+        <p:spPr/>
+        <p:txBody>
+          <a:bodyPr/>
+          <a:lstStyle/>
+          <a:p>
+            <a:pPr lvl="0" indent="0" marL="0">
+              <a:buNone/>
+            </a:pPr>
+            <a:r>
+              <a:rPr/>
+              <a:t>The variance must be HAC</a:t>
+            </a:r>
+          </a:p>
+        </p:txBody>
+      </p:sp>
+      <mc:AlternateContent xmlns:mc="http://schemas.openxmlformats.org/markup-compatibility/2006">
+        <mc:Choice xmlns:a14="http://schemas.microsoft.com/office/drawing/2010/main" Requires="a14">
+          <p:sp>
+            <p:nvSpPr>
+              <p:cNvPr id="3" name="Content Placeholder 2"/>
+              <p:cNvSpPr>
+                <a:spLocks noGrp="1"/>
+              </p:cNvSpPr>
+              <p:nvPr>
+                <p:ph idx="1"/>
+              </p:nvPr>
+            </p:nvSpPr>
+            <p:spPr/>
+            <p:txBody>
+              <a:bodyPr/>
+              <a:lstStyle/>
+              <a:p>
+                <a:pPr lvl="0" indent="0" marL="0">
+                  <a:buNone/>
+                </a:pPr>
+                <a:r>
+                  <a:rPr/>
+                  <a:t>Estimate </a:t>
+                </a:r>
+                <a14:m>
+                  <m:oMath xmlns:m="http://schemas.openxmlformats.org/officeDocument/2006/math">
+                    <m:acc>
+                      <m:accPr>
+                        <m:chr m:val="̂"/>
+                      </m:accPr>
+                      <m:e>
+                        <m:r>
+                          <m:rPr>
+                            <m:sty m:val="p"/>
+                          </m:rPr>
+                          <m:t>Var</m:t>
+                        </m:r>
+                      </m:e>
+                    </m:acc>
+                    <m:d>
+                      <m:dPr>
+                        <m:begChr m:val="("/>
+                        <m:sepChr m:val=""/>
+                        <m:endChr m:val=")"/>
+                        <m:grow/>
+                      </m:dPr>
+                      <m:e>
+                        <m:acc>
+                          <m:accPr>
+                            <m:chr m:val="‾"/>
+                          </m:accPr>
+                          <m:e>
+                            <m:r>
+                              <m:t>d</m:t>
+                            </m:r>
+                          </m:e>
+                        </m:acc>
+                      </m:e>
+                    </m:d>
+                  </m:oMath>
+                </a14:m>
+                <a:r>
+                  <a:rPr/>
+                  <a:t> with a </a:t>
+                </a:r>
+                <a:r>
+                  <a:rPr b="1"/>
+                  <a:t>Newey–West</a:t>
+                </a:r>
+                <a:r>
+                  <a:rPr/>
+                  <a:t> estimator, because </a:t>
+                </a:r>
+                <a14:m>
+                  <m:oMath xmlns:m="http://schemas.openxmlformats.org/officeDocument/2006/math">
+                    <m:sSub>
+                      <m:e>
+                        <m:r>
+                          <m:t>d</m:t>
+                        </m:r>
+                      </m:e>
+                      <m:sub>
+                        <m:r>
+                          <m:t>t</m:t>
+                        </m:r>
+                      </m:sub>
+                    </m:sSub>
+                  </m:oMath>
+                </a14:m>
+                <a:r>
+                  <a:rPr/>
+                  <a:t> is serially correlated at multi-step horizons.</a:t>
+                </a:r>
+              </a:p>
+              <a:p>
+                <a:pPr lvl="0" indent="0" marL="0">
+                  <a:buNone/>
+                </a:pPr>
+                <a:r>
+                  <a:rPr/>
+                  <a:t>Use a lag truncation of at least </a:t>
+                </a:r>
+                <a14:m>
+                  <m:oMath xmlns:m="http://schemas.openxmlformats.org/officeDocument/2006/math">
+                    <m:r>
+                      <m:t>h</m:t>
+                    </m:r>
+                    <m:r>
+                      <m:rPr>
+                        <m:sty m:val="p"/>
+                      </m:rPr>
+                      <m:t>−</m:t>
+                    </m:r>
+                    <m:r>
+                      <m:t>1</m:t>
+                    </m:r>
+                  </m:oMath>
+                </a14:m>
+                <a:r>
+                  <a:rPr/>
+                  <a:t>.</a:t>
+                </a:r>
+              </a:p>
+            </p:txBody>
+          </p:sp>
+        </mc:Choice>
+      </mc:AlternateContent>
+    </p:spTree>
+  </p:cSld>
+</p:sld>
 </file>
 
 <file path=ppt/slides/slide14.xml><?xml version="1.0" encoding="utf-8"?>
@@ -4062,6 +4018,31 @@
       </p:grpSpPr>
       <p:sp>
         <p:nvSpPr>
+          <p:cNvPr id="2" name="Title 1"/>
+          <p:cNvSpPr>
+            <a:spLocks noGrp="1"/>
+          </p:cNvSpPr>
+          <p:nvPr>
+            <p:ph type="title"/>
+          </p:nvPr>
+        </p:nvSpPr>
+        <p:spPr/>
+        <p:txBody>
+          <a:bodyPr/>
+          <a:lstStyle/>
+          <a:p>
+            <a:pPr lvl="0" indent="0" marL="0">
+              <a:buNone/>
+            </a:pPr>
+            <a:r>
+              <a:rPr/>
+              <a:t>Two cautions</a:t>
+            </a:r>
+          </a:p>
+        </p:txBody>
+      </p:sp>
+      <p:sp>
+        <p:nvSpPr>
           <p:cNvPr id="3" name="Content Placeholder 2"/>
           <p:cNvSpPr>
             <a:spLocks noGrp="1"/>
@@ -4075,20 +4056,41 @@
           <a:bodyPr/>
           <a:lstStyle/>
           <a:p>
-            <a:pPr lvl="0" indent="0" marL="0">
-              <a:buNone/>
-            </a:pPr>
-            <a:r>
-              <a:rPr/>
-              <a:t>The first two you can detect from data you already have. </a:t>
+            <a:pPr lvl="0"/>
+            <a:r>
+              <a:rPr/>
+              <a:t>The test is </a:t>
             </a:r>
             <a:r>
               <a:rPr b="1"/>
-              <a:t>Concept drift needs outcomes</a:t>
-            </a:r>
-            <a:r>
-              <a:rPr/>
-              <a:t>, which arrive late — often after the decisions were made.</a:t>
+              <a:t>not valid for nested models</a:t>
+            </a:r>
+            <a:r>
+              <a:rPr/>
+              <a:t> estimated on the same sample — use </a:t>
+            </a:r>
+            <a:r>
+              <a:rPr b="1"/>
+              <a:t>Clark–West</a:t>
+            </a:r>
+            <a:r>
+              <a:rPr/>
+              <a:t>.</a:t>
+            </a:r>
+          </a:p>
+          <a:p>
+            <a:pPr lvl="0"/>
+            <a:r>
+              <a:rPr/>
+              <a:t>With small samples, the </a:t>
+            </a:r>
+            <a:r>
+              <a:rPr b="1"/>
+              <a:t>Harvey–Leybourne–Newbold</a:t>
+            </a:r>
+            <a:r>
+              <a:rPr/>
+              <a:t> correction is advisable.</a:t>
             </a:r>
           </a:p>
         </p:txBody>
@@ -4125,7 +4127,12 @@
             <p:ph type="title"/>
           </p:nvPr>
         </p:nvSpPr>
-        <p:spPr/>
+        <p:spPr>
+          <a:xfrm>
+            <a:off x="722313" y="3305176"/>
+            <a:ext cx="7772400" cy="1021556"/>
+          </a:xfrm>
+        </p:spPr>
         <p:txBody>
           <a:bodyPr/>
           <a:lstStyle/>
@@ -4135,501 +4142,7 @@
             </a:pPr>
             <a:r>
               <a:rPr/>
-              <a:t>Detecting covariate shift</a:t>
-            </a:r>
-          </a:p>
-        </p:txBody>
-      </p:sp>
-      <p:sp>
-        <p:nvSpPr>
-          <p:cNvPr id="3" name="Content Placeholder 2"/>
-          <p:cNvSpPr>
-            <a:spLocks noGrp="1"/>
-          </p:cNvSpPr>
-          <p:nvPr>
-            <p:ph idx="1"/>
-          </p:nvPr>
-        </p:nvSpPr>
-        <p:spPr/>
-        <p:txBody>
-          <a:bodyPr/>
-          <a:lstStyle/>
-          <a:p>
-            <a:pPr lvl="0" indent="0">
-              <a:buNone/>
-            </a:pPr>
-            <a:r>
-              <a:rPr b="1">
-                <a:solidFill>
-                  <a:srgbClr val="008000"/>
-                </a:solidFill>
-                <a:latin typeface="Courier"/>
-              </a:rPr>
-              <a:t>from</a:t>
-            </a:r>
-            <a:r>
-              <a:rPr>
-                <a:latin typeface="Courier"/>
-              </a:rPr>
-              <a:t> sklearn.ensemble </a:t>
-            </a:r>
-            <a:r>
-              <a:rPr b="1">
-                <a:solidFill>
-                  <a:srgbClr val="008000"/>
-                </a:solidFill>
-                <a:latin typeface="Courier"/>
-              </a:rPr>
-              <a:t>import</a:t>
-            </a:r>
-            <a:r>
-              <a:rPr>
-                <a:latin typeface="Courier"/>
-              </a:rPr>
-              <a:t> RandomForestClassifier</a:t>
-            </a:r>
-            <a:br/>
-            <a:r>
-              <a:rPr b="1">
-                <a:solidFill>
-                  <a:srgbClr val="008000"/>
-                </a:solidFill>
-                <a:latin typeface="Courier"/>
-              </a:rPr>
-              <a:t>from</a:t>
-            </a:r>
-            <a:r>
-              <a:rPr>
-                <a:latin typeface="Courier"/>
-              </a:rPr>
-              <a:t> sklearn.model_selection </a:t>
-            </a:r>
-            <a:r>
-              <a:rPr b="1">
-                <a:solidFill>
-                  <a:srgbClr val="008000"/>
-                </a:solidFill>
-                <a:latin typeface="Courier"/>
-              </a:rPr>
-              <a:t>import</a:t>
-            </a:r>
-            <a:r>
-              <a:rPr>
-                <a:latin typeface="Courier"/>
-              </a:rPr>
-              <a:t> cross_val_score</a:t>
-            </a:r>
-            <a:br/>
-            <a:br/>
-            <a:r>
-              <a:rPr>
-                <a:latin typeface="Courier"/>
-              </a:rPr>
-              <a:t>pre  </a:t>
-            </a:r>
-            <a:r>
-              <a:rPr>
-                <a:solidFill>
-                  <a:srgbClr val="666666"/>
-                </a:solidFill>
-                <a:latin typeface="Courier"/>
-              </a:rPr>
-              <a:t>=</a:t>
-            </a:r>
-            <a:r>
-              <a:rPr>
-                <a:latin typeface="Courier"/>
-              </a:rPr>
-              <a:t> d[d.time </a:t>
-            </a:r>
-            <a:r>
-              <a:rPr>
-                <a:solidFill>
-                  <a:srgbClr val="666666"/>
-                </a:solidFill>
-                <a:latin typeface="Courier"/>
-              </a:rPr>
-              <a:t>&lt;=</a:t>
-            </a:r>
-            <a:r>
-              <a:rPr>
-                <a:latin typeface="Courier"/>
-              </a:rPr>
-              <a:t> </a:t>
-            </a:r>
-            <a:r>
-              <a:rPr>
-                <a:solidFill>
-                  <a:srgbClr val="40A070"/>
-                </a:solidFill>
-                <a:latin typeface="Courier"/>
-              </a:rPr>
-              <a:t>2020</a:t>
-            </a:r>
-            <a:r>
-              <a:rPr>
-                <a:latin typeface="Courier"/>
-              </a:rPr>
-              <a:t>][feat].fillna(</a:t>
-            </a:r>
-            <a:r>
-              <a:rPr>
-                <a:solidFill>
-                  <a:srgbClr val="40A070"/>
-                </a:solidFill>
-                <a:latin typeface="Courier"/>
-              </a:rPr>
-              <a:t>0</a:t>
-            </a:r>
-            <a:r>
-              <a:rPr>
-                <a:latin typeface="Courier"/>
-              </a:rPr>
-              <a:t>)</a:t>
-            </a:r>
-            <a:br/>
-            <a:r>
-              <a:rPr>
-                <a:latin typeface="Courier"/>
-              </a:rPr>
-              <a:t>post </a:t>
-            </a:r>
-            <a:r>
-              <a:rPr>
-                <a:solidFill>
-                  <a:srgbClr val="666666"/>
-                </a:solidFill>
-                <a:latin typeface="Courier"/>
-              </a:rPr>
-              <a:t>=</a:t>
-            </a:r>
-            <a:r>
-              <a:rPr>
-                <a:latin typeface="Courier"/>
-              </a:rPr>
-              <a:t> d[d.time </a:t>
-            </a:r>
-            <a:r>
-              <a:rPr>
-                <a:solidFill>
-                  <a:srgbClr val="666666"/>
-                </a:solidFill>
-                <a:latin typeface="Courier"/>
-              </a:rPr>
-              <a:t>&gt;=</a:t>
-            </a:r>
-            <a:r>
-              <a:rPr>
-                <a:latin typeface="Courier"/>
-              </a:rPr>
-              <a:t> </a:t>
-            </a:r>
-            <a:r>
-              <a:rPr>
-                <a:solidFill>
-                  <a:srgbClr val="40A070"/>
-                </a:solidFill>
-                <a:latin typeface="Courier"/>
-              </a:rPr>
-              <a:t>2021</a:t>
-            </a:r>
-            <a:r>
-              <a:rPr>
-                <a:latin typeface="Courier"/>
-              </a:rPr>
-              <a:t>][feat].fillna(</a:t>
-            </a:r>
-            <a:r>
-              <a:rPr>
-                <a:solidFill>
-                  <a:srgbClr val="40A070"/>
-                </a:solidFill>
-                <a:latin typeface="Courier"/>
-              </a:rPr>
-              <a:t>0</a:t>
-            </a:r>
-            <a:r>
-              <a:rPr>
-                <a:latin typeface="Courier"/>
-              </a:rPr>
-              <a:t>)</a:t>
-            </a:r>
-            <a:br/>
-            <a:br/>
-            <a:r>
-              <a:rPr>
-                <a:latin typeface="Courier"/>
-              </a:rPr>
-              <a:t>X </a:t>
-            </a:r>
-            <a:r>
-              <a:rPr>
-                <a:solidFill>
-                  <a:srgbClr val="666666"/>
-                </a:solidFill>
-                <a:latin typeface="Courier"/>
-              </a:rPr>
-              <a:t>=</a:t>
-            </a:r>
-            <a:r>
-              <a:rPr>
-                <a:latin typeface="Courier"/>
-              </a:rPr>
-              <a:t> pd.concat([pre, post])</a:t>
-            </a:r>
-            <a:r>
-              <a:rPr>
-                <a:solidFill>
-                  <a:srgbClr val="666666"/>
-                </a:solidFill>
-                <a:latin typeface="Courier"/>
-              </a:rPr>
-              <a:t>;</a:t>
-            </a:r>
-            <a:r>
-              <a:rPr>
-                <a:latin typeface="Courier"/>
-              </a:rPr>
-              <a:t> y </a:t>
-            </a:r>
-            <a:r>
-              <a:rPr>
-                <a:solidFill>
-                  <a:srgbClr val="666666"/>
-                </a:solidFill>
-                <a:latin typeface="Courier"/>
-              </a:rPr>
-              <a:t>=</a:t>
-            </a:r>
-            <a:r>
-              <a:rPr>
-                <a:latin typeface="Courier"/>
-              </a:rPr>
-              <a:t> np.r_[np.zeros(</a:t>
-            </a:r>
-            <a:r>
-              <a:rPr>
-                <a:solidFill>
-                  <a:srgbClr val="008000"/>
-                </a:solidFill>
-                <a:latin typeface="Courier"/>
-              </a:rPr>
-              <a:t>len</a:t>
-            </a:r>
-            <a:r>
-              <a:rPr>
-                <a:latin typeface="Courier"/>
-              </a:rPr>
-              <a:t>(pre)), np.ones(</a:t>
-            </a:r>
-            <a:r>
-              <a:rPr>
-                <a:solidFill>
-                  <a:srgbClr val="008000"/>
-                </a:solidFill>
-                <a:latin typeface="Courier"/>
-              </a:rPr>
-              <a:t>len</a:t>
-            </a:r>
-            <a:r>
-              <a:rPr>
-                <a:latin typeface="Courier"/>
-              </a:rPr>
-              <a:t>(post))]</a:t>
-            </a:r>
-            <a:br/>
-            <a:r>
-              <a:rPr>
-                <a:latin typeface="Courier"/>
-              </a:rPr>
-              <a:t>auc </a:t>
-            </a:r>
-            <a:r>
-              <a:rPr>
-                <a:solidFill>
-                  <a:srgbClr val="666666"/>
-                </a:solidFill>
-                <a:latin typeface="Courier"/>
-              </a:rPr>
-              <a:t>=</a:t>
-            </a:r>
-            <a:r>
-              <a:rPr>
-                <a:latin typeface="Courier"/>
-              </a:rPr>
-              <a:t> cross_val_score(RandomForestClassifier(</a:t>
-            </a:r>
-            <a:r>
-              <a:rPr>
-                <a:solidFill>
-                  <a:srgbClr val="40A070"/>
-                </a:solidFill>
-                <a:latin typeface="Courier"/>
-              </a:rPr>
-              <a:t>300</a:t>
-            </a:r>
-            <a:r>
-              <a:rPr>
-                <a:latin typeface="Courier"/>
-              </a:rPr>
-              <a:t>, random_state</a:t>
-            </a:r>
-            <a:r>
-              <a:rPr>
-                <a:solidFill>
-                  <a:srgbClr val="666666"/>
-                </a:solidFill>
-                <a:latin typeface="Courier"/>
-              </a:rPr>
-              <a:t>=</a:t>
-            </a:r>
-            <a:r>
-              <a:rPr>
-                <a:solidFill>
-                  <a:srgbClr val="40A070"/>
-                </a:solidFill>
-                <a:latin typeface="Courier"/>
-              </a:rPr>
-              <a:t>60033</a:t>
-            </a:r>
-            <a:r>
-              <a:rPr>
-                <a:latin typeface="Courier"/>
-              </a:rPr>
-              <a:t>),</a:t>
-            </a:r>
-            <a:br/>
-            <a:r>
-              <a:rPr>
-                <a:latin typeface="Courier"/>
-              </a:rPr>
-              <a:t>                      X, y, cv</a:t>
-            </a:r>
-            <a:r>
-              <a:rPr>
-                <a:solidFill>
-                  <a:srgbClr val="666666"/>
-                </a:solidFill>
-                <a:latin typeface="Courier"/>
-              </a:rPr>
-              <a:t>=</a:t>
-            </a:r>
-            <a:r>
-              <a:rPr>
-                <a:solidFill>
-                  <a:srgbClr val="40A070"/>
-                </a:solidFill>
-                <a:latin typeface="Courier"/>
-              </a:rPr>
-              <a:t>5</a:t>
-            </a:r>
-            <a:r>
-              <a:rPr>
-                <a:latin typeface="Courier"/>
-              </a:rPr>
-              <a:t>, scoring</a:t>
-            </a:r>
-            <a:r>
-              <a:rPr>
-                <a:solidFill>
-                  <a:srgbClr val="666666"/>
-                </a:solidFill>
-                <a:latin typeface="Courier"/>
-              </a:rPr>
-              <a:t>=</a:t>
-            </a:r>
-            <a:r>
-              <a:rPr>
-                <a:solidFill>
-                  <a:srgbClr val="4070A0"/>
-                </a:solidFill>
-                <a:latin typeface="Courier"/>
-              </a:rPr>
-              <a:t>"roc_auc"</a:t>
-            </a:r>
-            <a:r>
-              <a:rPr>
-                <a:latin typeface="Courier"/>
-              </a:rPr>
-              <a:t>).mean()</a:t>
-            </a:r>
-            <a:br/>
-            <a:r>
-              <a:rPr>
-                <a:solidFill>
-                  <a:srgbClr val="008000"/>
-                </a:solidFill>
-                <a:latin typeface="Courier"/>
-              </a:rPr>
-              <a:t>print</a:t>
-            </a:r>
-            <a:r>
-              <a:rPr>
-                <a:latin typeface="Courier"/>
-              </a:rPr>
-              <a:t>(</a:t>
-            </a:r>
-            <a:r>
-              <a:rPr>
-                <a:solidFill>
-                  <a:srgbClr val="4070A0"/>
-                </a:solidFill>
-                <a:latin typeface="Courier"/>
-              </a:rPr>
-              <a:t>"era-classifier AUC:"</a:t>
-            </a:r>
-            <a:r>
-              <a:rPr>
-                <a:latin typeface="Courier"/>
-              </a:rPr>
-              <a:t>, </a:t>
-            </a:r>
-            <a:r>
-              <a:rPr>
-                <a:solidFill>
-                  <a:srgbClr val="008000"/>
-                </a:solidFill>
-                <a:latin typeface="Courier"/>
-              </a:rPr>
-              <a:t>round</a:t>
-            </a:r>
-            <a:r>
-              <a:rPr>
-                <a:latin typeface="Courier"/>
-              </a:rPr>
-              <a:t>(auc, </a:t>
-            </a:r>
-            <a:r>
-              <a:rPr>
-                <a:solidFill>
-                  <a:srgbClr val="40A070"/>
-                </a:solidFill>
-                <a:latin typeface="Courier"/>
-              </a:rPr>
-              <a:t>3</a:t>
-            </a:r>
-            <a:r>
-              <a:rPr>
-                <a:latin typeface="Courier"/>
-              </a:rPr>
-              <a:t>))</a:t>
-            </a:r>
-          </a:p>
-          <a:p>
-            <a:pPr lvl="0" indent="0" marL="0">
-              <a:buNone/>
-            </a:pPr>
-            <a:r>
-              <a:rPr/>
-              <a:t>If a classifier can tell </a:t>
-            </a:r>
-            <a:r>
-              <a:rPr b="1"/>
-              <a:t>which era</a:t>
-            </a:r>
-            <a:r>
-              <a:rPr/>
-              <a:t> a row came from, the covariate distribution has moved. AUC near 0.5 means no detectable shift; near 1 means the two periods are different worlds.</a:t>
+              <a:t>11.3 Distribution shift</a:t>
             </a:r>
           </a:p>
         </p:txBody>
@@ -4639,120 +4152,7 @@
 </p:sld>
 </file>
 
-<file path=ppt/slides/slide16.xml><?xml version="1.0" encoding="utf-8"?>
-<p:sld xmlns:a="http://schemas.openxmlformats.org/drawingml/2006/main" xmlns:r="http://schemas.openxmlformats.org/officeDocument/2006/relationships" xmlns:p="http://schemas.openxmlformats.org/presentationml/2006/main">
-  <p:cSld>
-    <p:spTree>
-      <p:nvGrpSpPr>
-        <p:cNvPr id="1" name=""/>
-        <p:cNvGrpSpPr/>
-        <p:nvPr/>
-      </p:nvGrpSpPr>
-      <p:grpSpPr>
-        <a:xfrm>
-          <a:off x="0" y="0"/>
-          <a:ext cx="0" cy="0"/>
-          <a:chOff x="0" y="0"/>
-          <a:chExt cx="0" cy="0"/>
-        </a:xfrm>
-      </p:grpSpPr>
-      <p:sp>
-        <p:nvSpPr>
-          <p:cNvPr id="2" name="Title 1"/>
-          <p:cNvSpPr>
-            <a:spLocks noGrp="1"/>
-          </p:cNvSpPr>
-          <p:nvPr>
-            <p:ph type="title"/>
-          </p:nvPr>
-        </p:nvSpPr>
-        <p:spPr/>
-        <p:txBody>
-          <a:bodyPr/>
-          <a:lstStyle/>
-          <a:p>
-            <a:pPr lvl="0" indent="0" marL="0">
-              <a:buNone/>
-            </a:pPr>
-            <a:r>
-              <a:rPr/>
-              <a:t>What to do about it</a:t>
-            </a:r>
-          </a:p>
-        </p:txBody>
-      </p:sp>
-      <p:sp>
-        <p:nvSpPr>
-          <p:cNvPr id="3" name="Content Placeholder 2"/>
-          <p:cNvSpPr>
-            <a:spLocks noGrp="1"/>
-          </p:cNvSpPr>
-          <p:nvPr>
-            <p:ph idx="1"/>
-          </p:nvPr>
-        </p:nvSpPr>
-        <p:spPr/>
-        <p:txBody>
-          <a:bodyPr/>
-          <a:lstStyle/>
-          <a:p>
-            <a:pPr lvl="0"/>
-            <a:r>
-              <a:rPr b="1"/>
-              <a:t>Retrain</a:t>
-            </a:r>
-            <a:r>
-              <a:rPr/>
-              <a:t> on recent data — simple, and loses history</a:t>
-            </a:r>
-          </a:p>
-          <a:p>
-            <a:pPr lvl="0"/>
-            <a:r>
-              <a:rPr b="1"/>
-              <a:t>Reweight</a:t>
-            </a:r>
-            <a:r>
-              <a:rPr/>
-              <a:t> by the density ratio — principled, and unstable in the tails</a:t>
-            </a:r>
-          </a:p>
-          <a:p>
-            <a:pPr lvl="0"/>
-            <a:r>
-              <a:rPr b="1"/>
-              <a:t>Restrict</a:t>
-            </a:r>
-            <a:r>
-              <a:rPr/>
-              <a:t> the model to the region where it still has support</a:t>
-            </a:r>
-          </a:p>
-          <a:p>
-            <a:pPr lvl="0"/>
-            <a:r>
-              <a:rPr b="1"/>
-              <a:t>Stop</a:t>
-            </a:r>
-            <a:r>
-              <a:rPr/>
-              <a:t> — sometimes the honest answer</a:t>
-            </a:r>
-          </a:p>
-          <a:p>
-            <a:pPr lvl="0" indent="0" marL="0">
-              <a:buNone/>
-            </a:pPr>
-            <a:r>
-              <a:rPr/>
-              <a:t>Never extrapolate a tree-based model outside its training range. It cannot extrapolate at all; it returns the nearest leaf’s mean and gives no warning.</a:t>
-            </a:r>
-          </a:p>
-        </p:txBody>
-      </p:sp>
-    </p:spTree>
-  </p:cSld>
-</p:sld>
+<file path=ppt/slides/slide16.xml><?xml version="1.0" encoding="UTF-8"?><p:sld xmlns:a="http://schemas.openxmlformats.org/drawingml/2006/main" xmlns:r="http://schemas.openxmlformats.org/officeDocument/2006/relationships" xmlns:p="http://schemas.openxmlformats.org/presentationml/2006/main"><p:cSld><p:spTree><p:nvGrpSpPr><p:cNvPr id="1" name="" /><p:cNvGrpSpPr /><p:nvPr /></p:nvGrpSpPr><p:grpSpPr><a:xfrm><a:off x="0" y="0" /><a:ext cx="0" cy="0" /><a:chOff x="0" y="0" /><a:chExt cx="0" cy="0" /></a:xfrm></p:grpSpPr><p:sp><p:nvSpPr><p:cNvPr id="2" name="Title 1" /><p:cNvSpPr><a:spLocks noGrp="1" /></p:cNvSpPr><p:nvPr><p:ph type="title" /></p:nvPr></p:nvSpPr><p:spPr /><p:txBody><a:bodyPr /><a:lstStyle /><a:p><a:pPr lvl="0" indent="0" marL="0"><a:buNone /></a:pPr><a:r><a:rPr /><a:t>Four kinds</a:t></a:r></a:p></p:txBody></p:sp><p:graphicFrame><p:nvGraphicFramePr><p:cNvPr id="6" name="Content Placeholder 5" /><p:cNvGraphicFramePr><a:graphicFrameLocks noGrp="1" /></p:cNvGraphicFramePr><p:nvPr><p:ph idx="1" /></p:nvPr></p:nvGraphicFramePr><p:xfrm><a:off x="457200" y="1193800" /><a:ext cx="8229600" cy="3390900" /></p:xfrm><a:graphic><a:graphicData uri="http://schemas.openxmlformats.org/drawingml/2006/table"><a:tbl><a:tblPr firstRow="1" bandRow="1"><a:tableStyleId>{5C22544A-7EE6-4342-B048-85BDC9FD1C3A}</a:tableStyleId></a:tblPr><a:tblGrid><a:gridCol w="2743200" /><a:gridCol w="2743200" /><a:gridCol w="2743200" /></a:tblGrid><a:tr h="0"><a:tc><a:txBody><a:bodyPr /><a:lstStyle /><a:p><a:pPr lvl="0" indent="0" marL="0"><a:buNone /></a:pPr><a:r><a:rPr /><a:t>Type</a:t></a:r></a:p></a:txBody><a:tcPr /></a:tc><a:tc><a:txBody><a:bodyPr /><a:lstStyle /><a:p><a:pPr lvl="0" indent="0" marL="0"><a:buNone /></a:pPr><a:r><a:rPr /><a:t>What changes</a:t></a:r></a:p></a:txBody><a:tcPr /></a:tc><a:tc><a:txBody><a:bodyPr /><a:lstStyle /><a:p><a:pPr lvl="0" indent="0" marL="0"><a:buNone /></a:pPr><a:r><a:rPr /><a:t>Fix</a:t></a:r></a:p></a:txBody><a:tcPr /></a:tc></a:tr><a:tr h="0"><a:tc><a:txBody><a:bodyPr /><a:lstStyle /><a:p><a:pPr lvl="0" indent="0" marL="0"><a:buNone /></a:pPr><a:r><a:rPr b="1" /><a:t>Covariate shift</a:t></a:r></a:p></a:txBody></a:tc><a:tc><a:txBody><a:bodyPr /><a:lstStyle /><a:p><a:pPr lvl="0" indent="0" marL="0"><a:buNone /></a:pPr><a14:m><m:oMath xmlns:m="http://schemas.openxmlformats.org/officeDocument/2006/math"><m:r><m:t>P</m:t></m:r><m:d><m:dPr><m:begChr m:val="(" /><m:sepChr m:val="" /><m:endChr m:val=")" /><m:grow /></m:dPr><m:e><m:r><m:t>X</m:t></m:r></m:e></m:d></m:oMath></a14:m><a:r><a:rPr /><a:t>; </a:t></a:r><a14:m><m:oMath xmlns:m="http://schemas.openxmlformats.org/officeDocument/2006/math"><m:r><m:t>P</m:t></m:r><m:d><m:dPr><m:begChr m:val="(" /><m:sepChr m:val="" /><m:endChr m:val=")" /><m:grow /></m:dPr><m:e><m:r><m:t>Y</m:t></m:r><m:r><m:rPr><m:sty m:val="p" /></m:rPr><m:t>∣</m:t></m:r><m:r><m:t>X</m:t></m:r></m:e></m:d></m:oMath></a14:m><a:r><a:rPr /><a:t> stable</a:t></a:r></a:p></a:txBody></a:tc><a:tc><a:txBody><a:bodyPr /><a:lstStyle /><a:p><a:pPr lvl="0" indent="0" marL="0"><a:buNone /></a:pPr><a:r><a:rPr /><a:t>Importance weighting, or just retrain</a:t></a:r></a:p></a:txBody></a:tc></a:tr><a:tr h="0"><a:tc><a:txBody><a:bodyPr /><a:lstStyle /><a:p><a:pPr lvl="0" indent="0" marL="0"><a:buNone /></a:pPr><a:r><a:rPr b="1" /><a:t>Label shift</a:t></a:r></a:p></a:txBody></a:tc><a:tc><a:txBody><a:bodyPr /><a:lstStyle /><a:p><a:pPr lvl="0" indent="0" marL="0"><a:buNone /></a:pPr><a14:m><m:oMath xmlns:m="http://schemas.openxmlformats.org/officeDocument/2006/math"><m:r><m:t>P</m:t></m:r><m:d><m:dPr><m:begChr m:val="(" /><m:sepChr m:val="" /><m:endChr m:val=")" /><m:grow /></m:dPr><m:e><m:r><m:t>Y</m:t></m:r></m:e></m:d></m:oMath></a14:m><a:r><a:rPr /><a:t>; </a:t></a:r><a14:m><m:oMath xmlns:m="http://schemas.openxmlformats.org/officeDocument/2006/math"><m:r><m:t>P</m:t></m:r><m:d><m:dPr><m:begChr m:val="(" /><m:sepChr m:val="" /><m:endChr m:val=")" /><m:grow /></m:dPr><m:e><m:r><m:t>X</m:t></m:r><m:r><m:rPr><m:sty m:val="p" /></m:rPr><m:t>∣</m:t></m:r><m:r><m:t>Y</m:t></m:r></m:e></m:d></m:oMath></a14:m><a:r><a:rPr /><a:t> stable</a:t></a:r></a:p></a:txBody></a:tc><a:tc><a:txBody><a:bodyPr /><a:lstStyle /><a:p><a:pPr lvl="0" indent="0" marL="0"><a:buNone /></a:pPr><a:r><a:rPr /><a:t>Reweight, or correct the intercept (Session 06)</a:t></a:r></a:p></a:txBody></a:tc></a:tr><a:tr h="0"><a:tc><a:txBody><a:bodyPr /><a:lstStyle /><a:p><a:pPr lvl="0" indent="0" marL="0"><a:buNone /></a:pPr><a:r><a:rPr b="1" /><a:t>Concept drift</a:t></a:r></a:p></a:txBody></a:tc><a:tc><a:txBody><a:bodyPr /><a:lstStyle /><a:p><a:pPr lvl="0" indent="0" marL="0"><a:buNone /></a:pPr><a14:m><m:oMath xmlns:m="http://schemas.openxmlformats.org/officeDocument/2006/math"><m:r><m:t>P</m:t></m:r><m:d><m:dPr><m:begChr m:val="(" /><m:sepChr m:val="" /><m:endChr m:val=")" /><m:grow /></m:dPr><m:e><m:r><m:t>Y</m:t></m:r><m:r><m:rPr><m:sty m:val="p" /></m:rPr><m:t>∣</m:t></m:r><m:r><m:t>X</m:t></m:r></m:e></m:d></m:oMath></a14:m></a:p></a:txBody></a:tc><a:tc><a:txBody><a:bodyPr /><a:lstStyle /><a:p><a:pPr lvl="0" indent="0" marL="0"><a:buNone /></a:pPr><a:r><a:rPr /><a:t>Retraining necessary but not sufficient — the form may be wrong</a:t></a:r></a:p></a:txBody></a:tc></a:tr><a:tr h="0"><a:tc><a:txBody><a:bodyPr /><a:lstStyle /><a:p><a:pPr lvl="0" indent="0" marL="0"><a:buNone /></a:pPr><a:r><a:rPr b="1" /><a:t>Feedback</a:t></a:r></a:p></a:txBody></a:tc><a:tc><a:txBody><a:bodyPr /><a:lstStyle /><a:p><a:pPr lvl="0" indent="0" marL="0"><a:buNone /></a:pPr><a:r><a:rPr /><a:t>your model changes the world it predicts</a:t></a:r></a:p></a:txBody></a:tc><a:tc><a:txBody><a:bodyPr /><a:lstStyle /><a:p><a:pPr lvl="0" indent="0" marL="0"><a:buNone /></a:pPr><a:r><a:rPr /><a:t>Redesign</a:t></a:r></a:p></a:txBody></a:tc></a:tr></a:tbl></a:graphicData></a:graphic></p:graphicFrame></p:spTree></p:cSld></p:sld>
 </file>
 
 <file path=ppt/slides/slide17.xml><?xml version="1.0" encoding="utf-8"?>
@@ -4782,12 +4182,7 @@
             <p:ph type="title"/>
           </p:nvPr>
         </p:nvSpPr>
-        <p:spPr>
-          <a:xfrm>
-            <a:off x="722313" y="3305176"/>
-            <a:ext cx="7772400" cy="1021556"/>
-          </a:xfrm>
-        </p:spPr>
+        <p:spPr/>
         <p:txBody>
           <a:bodyPr/>
           <a:lstStyle/>
@@ -4797,662 +4192,7 @@
             </a:pPr>
             <a:r>
               <a:rPr/>
-              <a:t>Governance</a:t>
-            </a:r>
-          </a:p>
-        </p:txBody>
-      </p:sp>
-    </p:spTree>
-  </p:cSld>
-</p:sld>
-</file>
-
-<file path=ppt/slides/slide18.xml><?xml version="1.0" encoding="utf-8"?>
-<p:sld xmlns:a="http://schemas.openxmlformats.org/drawingml/2006/main" xmlns:r="http://schemas.openxmlformats.org/officeDocument/2006/relationships" xmlns:p="http://schemas.openxmlformats.org/presentationml/2006/main">
-  <p:cSld>
-    <p:spTree>
-      <p:nvGrpSpPr>
-        <p:cNvPr id="1" name=""/>
-        <p:cNvGrpSpPr/>
-        <p:nvPr/>
-      </p:nvGrpSpPr>
-      <p:grpSpPr>
-        <a:xfrm>
-          <a:off x="0" y="0"/>
-          <a:ext cx="0" cy="0"/>
-          <a:chOff x="0" y="0"/>
-          <a:chExt cx="0" cy="0"/>
-        </a:xfrm>
-      </p:grpSpPr>
-      <p:sp>
-        <p:nvSpPr>
-          <p:cNvPr id="2" name="Title 1"/>
-          <p:cNvSpPr>
-            <a:spLocks noGrp="1"/>
-          </p:cNvSpPr>
-          <p:nvPr>
-            <p:ph type="title"/>
-          </p:nvPr>
-        </p:nvSpPr>
-        <p:spPr/>
-        <p:txBody>
-          <a:bodyPr/>
-          <a:lstStyle/>
-          <a:p>
-            <a:pPr lvl="0" indent="0" marL="0">
-              <a:buNone/>
-            </a:pPr>
-            <a:r>
-              <a:rPr/>
-              <a:t>The question behind this section</a:t>
-            </a:r>
-          </a:p>
-        </p:txBody>
-      </p:sp>
-      <p:sp>
-        <p:nvSpPr>
-          <p:cNvPr id="3" name="Content Placeholder 2"/>
-          <p:cNvSpPr>
-            <a:spLocks noGrp="1"/>
-          </p:cNvSpPr>
-          <p:nvPr>
-            <p:ph idx="1"/>
-          </p:nvPr>
-        </p:nvSpPr>
-        <p:spPr/>
-        <p:txBody>
-          <a:bodyPr/>
-          <a:lstStyle/>
-          <a:p>
-            <a:pPr lvl="0" indent="0" marL="0">
-              <a:buNone/>
-            </a:pPr>
-            <a:r>
-              <a:rPr/>
-              <a:t>Someone will use your model after you have graduated, without asking you anything.</a:t>
-            </a:r>
-          </a:p>
-          <a:p>
-            <a:pPr lvl="0" indent="0" marL="0">
-              <a:buNone/>
-            </a:pPr>
-            <a:r>
-              <a:rPr/>
-              <a:t>Everything they need must be written down, next to the model, by you.</a:t>
-            </a:r>
-          </a:p>
-        </p:txBody>
-      </p:sp>
-    </p:spTree>
-  </p:cSld>
-</p:sld>
-</file>
-
-<file path=ppt/slides/slide19.xml><?xml version="1.0" encoding="utf-8"?>
-<p:sld xmlns:a="http://schemas.openxmlformats.org/drawingml/2006/main" xmlns:r="http://schemas.openxmlformats.org/officeDocument/2006/relationships" xmlns:p="http://schemas.openxmlformats.org/presentationml/2006/main">
-  <p:cSld>
-    <p:spTree>
-      <p:nvGrpSpPr>
-        <p:cNvPr id="1" name=""/>
-        <p:cNvGrpSpPr/>
-        <p:nvPr/>
-      </p:nvGrpSpPr>
-      <p:grpSpPr>
-        <a:xfrm>
-          <a:off x="0" y="0"/>
-          <a:ext cx="0" cy="0"/>
-          <a:chOff x="0" y="0"/>
-          <a:chExt cx="0" cy="0"/>
-        </a:xfrm>
-      </p:grpSpPr>
-      <p:sp>
-        <p:nvSpPr>
-          <p:cNvPr id="2" name="Title 1"/>
-          <p:cNvSpPr>
-            <a:spLocks noGrp="1"/>
-          </p:cNvSpPr>
-          <p:nvPr>
-            <p:ph type="title"/>
-          </p:nvPr>
-        </p:nvSpPr>
-        <p:spPr/>
-        <p:txBody>
-          <a:bodyPr/>
-          <a:lstStyle/>
-          <a:p>
-            <a:pPr lvl="0" indent="0" marL="0">
-              <a:buNone/>
-            </a:pPr>
-            <a:r>
-              <a:rPr/>
-              <a:t>The governance file</a:t>
-            </a:r>
-          </a:p>
-        </p:txBody>
-      </p:sp>
-      <p:sp>
-        <p:nvSpPr>
-          <p:cNvPr id="3" name="Content Placeholder 2"/>
-          <p:cNvSpPr>
-            <a:spLocks noGrp="1"/>
-          </p:cNvSpPr>
-          <p:nvPr>
-            <p:ph idx="1"/>
-          </p:nvPr>
-        </p:nvSpPr>
-        <p:spPr/>
-        <p:txBody>
-          <a:bodyPr/>
-          <a:lstStyle/>
-          <a:p>
-            <a:pPr lvl="0" indent="0" marL="0">
-              <a:buNone/>
-            </a:pPr>
-            <a:r>
-              <a:rPr/>
-              <a:t>Your group ships one. See </a:t>
-            </a:r>
-            <a:r>
-              <a:rPr>
-                <a:hlinkClick r:id="rId2"/>
-                <a:latin typeface="Courier"/>
-              </a:rPr>
-              <a:t>02-lab/governance-file-template.md</a:t>
-            </a:r>
-            <a:r>
-              <a:rPr/>
-              <a:t>.</a:t>
-            </a:r>
-          </a:p>
-          <a:p>
-            <a:pPr lvl="0"/>
-            <a:r>
-              <a:rPr b="1"/>
-              <a:t>Intended use</a:t>
-            </a:r>
-            <a:r>
-              <a:rPr/>
-              <a:t> — and the uses you are ruling out</a:t>
-            </a:r>
-          </a:p>
-          <a:p>
-            <a:pPr lvl="0"/>
-            <a:r>
-              <a:rPr b="1"/>
-              <a:t>Data</a:t>
-            </a:r>
-            <a:r>
-              <a:rPr/>
-              <a:t> — provenance, coverage, known gaps, licence</a:t>
-            </a:r>
-          </a:p>
-          <a:p>
-            <a:pPr lvl="0"/>
-            <a:r>
-              <a:rPr b="1"/>
-              <a:t>Estimand</a:t>
-            </a:r>
-            <a:r>
-              <a:rPr/>
-              <a:t> — prediction or effect, stated once and plainly</a:t>
-            </a:r>
-          </a:p>
-          <a:p>
-            <a:pPr lvl="0"/>
-            <a:r>
-              <a:rPr b="1"/>
-              <a:t>Validation</a:t>
-            </a:r>
-            <a:r>
-              <a:rPr/>
-              <a:t> — the split, the horizon, the error, honestly</a:t>
-            </a:r>
-          </a:p>
-          <a:p>
-            <a:pPr lvl="0"/>
-            <a:r>
-              <a:rPr b="1"/>
-              <a:t>Known failure modes</a:t>
-            </a:r>
-            <a:r>
-              <a:rPr/>
-              <a:t> — where it breaks, in what direction</a:t>
-            </a:r>
-          </a:p>
-          <a:p>
-            <a:pPr lvl="0"/>
-            <a:r>
-              <a:rPr b="1"/>
-              <a:t>Monitoring</a:t>
-            </a:r>
-            <a:r>
-              <a:rPr/>
-              <a:t> — what to watch, and the trigger to retire it</a:t>
-            </a:r>
-          </a:p>
-        </p:txBody>
-      </p:sp>
-    </p:spTree>
-  </p:cSld>
-</p:sld>
-</file>
-
-<file path=ppt/slides/slide2.xml><?xml version="1.0" encoding="utf-8"?>
-<p:sld xmlns:a="http://schemas.openxmlformats.org/drawingml/2006/main" xmlns:r="http://schemas.openxmlformats.org/officeDocument/2006/relationships" xmlns:p="http://schemas.openxmlformats.org/presentationml/2006/main">
-  <p:cSld>
-    <p:spTree>
-      <p:nvGrpSpPr>
-        <p:cNvPr id="1" name=""/>
-        <p:cNvGrpSpPr/>
-        <p:nvPr/>
-      </p:nvGrpSpPr>
-      <p:grpSpPr>
-        <a:xfrm>
-          <a:off x="0" y="0"/>
-          <a:ext cx="0" cy="0"/>
-          <a:chOff x="0" y="0"/>
-          <a:chExt cx="0" cy="0"/>
-        </a:xfrm>
-      </p:grpSpPr>
-      <p:sp>
-        <p:nvSpPr>
-          <p:cNvPr id="2" name="Title 1"/>
-          <p:cNvSpPr>
-            <a:spLocks noGrp="1"/>
-          </p:cNvSpPr>
-          <p:nvPr>
-            <p:ph type="title"/>
-          </p:nvPr>
-        </p:nvSpPr>
-        <p:spPr>
-          <a:xfrm>
-            <a:off x="722313" y="3305176"/>
-            <a:ext cx="7772400" cy="1021556"/>
-          </a:xfrm>
-        </p:spPr>
-        <p:txBody>
-          <a:bodyPr/>
-          <a:lstStyle/>
-          <a:p>
-            <a:pPr lvl="0" indent="0" marL="0">
-              <a:buNone/>
-            </a:pPr>
-            <a:r>
-              <a:rPr/>
-              <a:t>Where we are</a:t>
-            </a:r>
-          </a:p>
-        </p:txBody>
-      </p:sp>
-    </p:spTree>
-  </p:cSld>
-</p:sld>
-</file>
-
-<file path=ppt/slides/slide20.xml><?xml version="1.0" encoding="utf-8"?>
-<p:sld xmlns:a="http://schemas.openxmlformats.org/drawingml/2006/main" xmlns:r="http://schemas.openxmlformats.org/officeDocument/2006/relationships" xmlns:p="http://schemas.openxmlformats.org/presentationml/2006/main">
-  <p:cSld>
-    <p:spTree>
-      <p:nvGrpSpPr>
-        <p:cNvPr id="1" name=""/>
-        <p:cNvGrpSpPr/>
-        <p:nvPr/>
-      </p:nvGrpSpPr>
-      <p:grpSpPr>
-        <a:xfrm>
-          <a:off x="0" y="0"/>
-          <a:ext cx="0" cy="0"/>
-          <a:chOff x="0" y="0"/>
-          <a:chExt cx="0" cy="0"/>
-        </a:xfrm>
-      </p:grpSpPr>
-      <p:sp>
-        <p:nvSpPr>
-          <p:cNvPr id="2" name="Title 1"/>
-          <p:cNvSpPr>
-            <a:spLocks noGrp="1"/>
-          </p:cNvSpPr>
-          <p:nvPr>
-            <p:ph type="title"/>
-          </p:nvPr>
-        </p:nvSpPr>
-        <p:spPr/>
-        <p:txBody>
-          <a:bodyPr/>
-          <a:lstStyle/>
-          <a:p>
-            <a:pPr lvl="0" indent="0" marL="0">
-              <a:buNone/>
-            </a:pPr>
-            <a:r>
-              <a:rPr/>
-              <a:t>The retirement trigger</a:t>
-            </a:r>
-          </a:p>
-        </p:txBody>
-      </p:sp>
-      <p:sp>
-        <p:nvSpPr>
-          <p:cNvPr id="3" name="Content Placeholder 2"/>
-          <p:cNvSpPr>
-            <a:spLocks noGrp="1"/>
-          </p:cNvSpPr>
-          <p:nvPr>
-            <p:ph idx="1"/>
-          </p:nvPr>
-        </p:nvSpPr>
-        <p:spPr/>
-        <p:txBody>
-          <a:bodyPr/>
-          <a:lstStyle/>
-          <a:p>
-            <a:pPr lvl="0" indent="0" marL="0">
-              <a:buNone/>
-            </a:pPr>
-            <a:r>
-              <a:rPr/>
-              <a:t>A model with no stated retirement condition is never retired. It is used until something goes visibly wrong, and by then it has been wrong for a while.</a:t>
-            </a:r>
-          </a:p>
-          <a:p>
-            <a:pPr lvl="0" indent="0" marL="0">
-              <a:buNone/>
-            </a:pPr>
-            <a:r>
-              <a:rPr/>
-              <a:t>Write a specific one:</a:t>
-            </a:r>
-          </a:p>
-          <a:p>
-            <a:pPr lvl="0" indent="0" marL="1270000">
-              <a:buNone/>
-            </a:pPr>
-            <a:r>
-              <a:rPr sz="2000" i="1"/>
-              <a:t>“Retrain when the era-classifier AUC against the training period exceeds 0.75, or when rolling 2-year RMSE exceeds 1.4× the backtest median. Retire if retraining does not restore it.”</a:t>
-            </a:r>
-          </a:p>
-          <a:p>
-            <a:pPr lvl="0" indent="0" marL="0">
-              <a:buNone/>
-            </a:pPr>
-            <a:r>
-              <a:rPr/>
-              <a:t>Specific enough that someone who has never met you can execute it.</a:t>
-            </a:r>
-          </a:p>
-        </p:txBody>
-      </p:sp>
-    </p:spTree>
-  </p:cSld>
-</p:sld>
-</file>
-
-<file path=ppt/slides/slide21.xml><?xml version="1.0" encoding="utf-8"?>
-<p:sld xmlns:a="http://schemas.openxmlformats.org/drawingml/2006/main" xmlns:r="http://schemas.openxmlformats.org/officeDocument/2006/relationships" xmlns:p="http://schemas.openxmlformats.org/presentationml/2006/main">
-  <p:cSld>
-    <p:spTree>
-      <p:nvGrpSpPr>
-        <p:cNvPr id="1" name=""/>
-        <p:cNvGrpSpPr/>
-        <p:nvPr/>
-      </p:nvGrpSpPr>
-      <p:grpSpPr>
-        <a:xfrm>
-          <a:off x="0" y="0"/>
-          <a:ext cx="0" cy="0"/>
-          <a:chOff x="0" y="0"/>
-          <a:chExt cx="0" cy="0"/>
-        </a:xfrm>
-      </p:grpSpPr>
-      <p:sp>
-        <p:nvSpPr>
-          <p:cNvPr id="2" name="Title 1"/>
-          <p:cNvSpPr>
-            <a:spLocks noGrp="1"/>
-          </p:cNvSpPr>
-          <p:nvPr>
-            <p:ph type="title"/>
-          </p:nvPr>
-        </p:nvSpPr>
-        <p:spPr/>
-        <p:txBody>
-          <a:bodyPr/>
-          <a:lstStyle/>
-          <a:p>
-            <a:pPr lvl="0" indent="0" marL="0">
-              <a:buNone/>
-            </a:pPr>
-            <a:r>
-              <a:rPr/>
-              <a:t>What you owe the reader</a:t>
-            </a:r>
-          </a:p>
-        </p:txBody>
-      </p:sp>
-      <p:sp>
-        <p:nvSpPr>
-          <p:cNvPr id="3" name="Content Placeholder 2"/>
-          <p:cNvSpPr>
-            <a:spLocks noGrp="1"/>
-          </p:cNvSpPr>
-          <p:nvPr>
-            <p:ph idx="1"/>
-          </p:nvPr>
-        </p:nvSpPr>
-        <p:spPr/>
-        <p:txBody>
-          <a:bodyPr/>
-          <a:lstStyle/>
-          <a:p>
-            <a:pPr lvl="0"/>
-            <a:r>
-              <a:rPr/>
-              <a:t>The coverage gaps — for the spine, the pre-2021 absence of the adoption module</a:t>
-            </a:r>
-          </a:p>
-          <a:p>
-            <a:pPr lvl="0"/>
-            <a:r>
-              <a:rPr/>
-              <a:t>The flags you dropped, and which countries that biased against</a:t>
-            </a:r>
-          </a:p>
-          <a:p>
-            <a:pPr lvl="0"/>
-            <a:r>
-              <a:rPr/>
-              <a:t>Every construct labelled as a construct</a:t>
-            </a:r>
-          </a:p>
-          <a:p>
-            <a:pPr lvl="0"/>
-            <a:r>
-              <a:rPr/>
-              <a:t>The assumptions that would overturn your conclusion if wrong</a:t>
-            </a:r>
-          </a:p>
-          <a:p>
-            <a:pPr lvl="0" indent="0" marL="0">
-              <a:buNone/>
-            </a:pPr>
-            <a:r>
-              <a:rPr/>
-              <a:t>This is not modesty. A limitation you name is a limitation you have controlled for in the reader’s mind. One you omit is a hole someone else will find.</a:t>
-            </a:r>
-          </a:p>
-        </p:txBody>
-      </p:sp>
-    </p:spTree>
-  </p:cSld>
-</p:sld>
-</file>
-
-<file path=ppt/slides/slide22.xml><?xml version="1.0" encoding="utf-8"?>
-<p:sld xmlns:a="http://schemas.openxmlformats.org/drawingml/2006/main" xmlns:r="http://schemas.openxmlformats.org/officeDocument/2006/relationships" xmlns:p="http://schemas.openxmlformats.org/presentationml/2006/main">
-  <p:cSld>
-    <p:spTree>
-      <p:nvGrpSpPr>
-        <p:cNvPr id="1" name=""/>
-        <p:cNvGrpSpPr/>
-        <p:nvPr/>
-      </p:nvGrpSpPr>
-      <p:grpSpPr>
-        <a:xfrm>
-          <a:off x="0" y="0"/>
-          <a:ext cx="0" cy="0"/>
-          <a:chOff x="0" y="0"/>
-          <a:chExt cx="0" cy="0"/>
-        </a:xfrm>
-      </p:grpSpPr>
-      <p:sp>
-        <p:nvSpPr>
-          <p:cNvPr id="2" name="Title 1"/>
-          <p:cNvSpPr>
-            <a:spLocks noGrp="1"/>
-          </p:cNvSpPr>
-          <p:nvPr>
-            <p:ph type="title"/>
-          </p:nvPr>
-        </p:nvSpPr>
-        <p:spPr/>
-        <p:txBody>
-          <a:bodyPr/>
-          <a:lstStyle/>
-          <a:p>
-            <a:pPr lvl="0" indent="0" marL="0">
-              <a:buNone/>
-            </a:pPr>
-            <a:r>
-              <a:rPr/>
-              <a:t>What to report</a:t>
-            </a:r>
-          </a:p>
-        </p:txBody>
-      </p:sp>
-      <mc:AlternateContent xmlns:mc="http://schemas.openxmlformats.org/markup-compatibility/2006">
-        <mc:Choice xmlns:a14="http://schemas.microsoft.com/office/drawing/2010/main" Requires="a14">
-          <p:sp>
-            <p:nvSpPr>
-              <p:cNvPr id="3" name="Content Placeholder 2"/>
-              <p:cNvSpPr>
-                <a:spLocks noGrp="1"/>
-              </p:cNvSpPr>
-              <p:nvPr>
-                <p:ph idx="1"/>
-              </p:nvPr>
-            </p:nvSpPr>
-            <p:spPr/>
-            <p:txBody>
-              <a:bodyPr/>
-              <a:lstStyle/>
-              <a:p>
-                <a:pPr lvl="0"/>
-                <a:r>
-                  <a:rPr/>
-                  <a:t>Rolling-origin backtest, </a:t>
-                </a:r>
-                <a:r>
-                  <a:rPr b="1"/>
-                  <a:t>year by year</a:t>
-                </a:r>
-                <a:r>
-                  <a:rPr/>
-                  <a:t>, at the deployment horizon</a:t>
-                </a:r>
-              </a:p>
-              <a:p>
-                <a:pPr lvl="0"/>
-                <a:r>
-                  <a:rPr/>
-                  <a:t>Window choice, and the claim about the world it encodes</a:t>
-                </a:r>
-              </a:p>
-              <a:p>
-                <a:pPr lvl="0"/>
-                <a:r>
-                  <a:rPr/>
-                  <a:t>Drift evidence for </a:t>
-                </a:r>
-                <a14:m>
-                  <m:oMath xmlns:m="http://schemas.openxmlformats.org/officeDocument/2006/math">
-                    <m:r>
-                      <m:t>P</m:t>
-                    </m:r>
-                    <m:d>
-                      <m:dPr>
-                        <m:begChr m:val="("/>
-                        <m:sepChr m:val=""/>
-                        <m:endChr m:val=")"/>
-                        <m:grow/>
-                      </m:dPr>
-                      <m:e>
-                        <m:r>
-                          <m:t>X</m:t>
-                        </m:r>
-                      </m:e>
-                    </m:d>
-                  </m:oMath>
-                </a14:m>
-                <a:r>
-                  <a:rPr/>
-                  <a:t>, and what you concluded</a:t>
-                </a:r>
-              </a:p>
-              <a:p>
-                <a:pPr lvl="0"/>
-                <a:r>
-                  <a:rPr/>
-                  <a:t>The governance file, complete, with a numeric retirement trigger</a:t>
-                </a:r>
-              </a:p>
-            </p:txBody>
-          </p:sp>
-        </mc:Choice>
-      </mc:AlternateContent>
-    </p:spTree>
-  </p:cSld>
-</p:sld>
-</file>
-
-<file path=ppt/slides/slide23.xml><?xml version="1.0" encoding="utf-8"?>
-<p:sld xmlns:a="http://schemas.openxmlformats.org/drawingml/2006/main" xmlns:r="http://schemas.openxmlformats.org/officeDocument/2006/relationships" xmlns:p="http://schemas.openxmlformats.org/presentationml/2006/main">
-  <p:cSld>
-    <p:spTree>
-      <p:nvGrpSpPr>
-        <p:cNvPr id="1" name=""/>
-        <p:cNvGrpSpPr/>
-        <p:nvPr/>
-      </p:nvGrpSpPr>
-      <p:grpSpPr>
-        <a:xfrm>
-          <a:off x="0" y="0"/>
-          <a:ext cx="0" cy="0"/>
-          <a:chOff x="0" y="0"/>
-          <a:chExt cx="0" cy="0"/>
-        </a:xfrm>
-      </p:grpSpPr>
-      <p:sp>
-        <p:nvSpPr>
-          <p:cNvPr id="2" name="Title 1"/>
-          <p:cNvSpPr>
-            <a:spLocks noGrp="1"/>
-          </p:cNvSpPr>
-          <p:nvPr>
-            <p:ph type="title"/>
-          </p:nvPr>
-        </p:nvSpPr>
-        <p:spPr/>
-        <p:txBody>
-          <a:bodyPr/>
-          <a:lstStyle/>
-          <a:p>
-            <a:pPr lvl="0" indent="0" marL="0">
-              <a:buNone/>
-            </a:pPr>
-            <a:r>
-              <a:rPr/>
-              <a:t>Common mistakes</a:t>
+              <a:t>How to detect them</a:t>
             </a:r>
           </a:p>
         </p:txBody>
@@ -5492,7 +4232,7 @@
                       </a:pPr>
                       <a:r>
                         <a:rPr/>
-                        <a:t>Mistake</a:t>
+                        <a:t>Type</a:t>
                       </a:r>
                     </a:p>
                   </a:txBody>
@@ -5508,7 +4248,7 @@
                       </a:pPr>
                       <a:r>
                         <a:rPr/>
-                        <a:t>Consequence</a:t>
+                        <a:t>Detection</a:t>
                       </a:r>
                     </a:p>
                   </a:txBody>
@@ -5526,7 +4266,7 @@
                       </a:pPr>
                       <a:r>
                         <a:rPr/>
-                        <a:t>Random CV on a forecast</a:t>
+                        <a:t>Covariate shift</a:t>
                       </a:r>
                     </a:p>
                   </a:txBody>
@@ -5541,7 +4281,7 @@
                       </a:pPr>
                       <a:r>
                         <a:rPr/>
-                        <a:t>Uses the future to predict the past</a:t>
+                        <a:t>Train a classifier to distinguish train from deploy</a:t>
                       </a:r>
                     </a:p>
                   </a:txBody>
@@ -5558,7 +4298,7 @@
                       </a:pPr>
                       <a:r>
                         <a:rPr/>
-                        <a:t>One averaged backtest error</a:t>
+                        <a:t>Label shift</a:t>
                       </a:r>
                     </a:p>
                   </a:txBody>
@@ -5573,7 +4313,7 @@
                       </a:pPr>
                       <a:r>
                         <a:rPr/>
-                        <a:t>Hides the year everything changed</a:t>
+                        <a:t>Compare predicted marginal to observed</a:t>
                       </a:r>
                     </a:p>
                   </a:txBody>
@@ -5590,7 +4330,7 @@
                       </a:pPr>
                       <a:r>
                         <a:rPr/>
-                        <a:t>Evaluating at the wrong horizon</a:t>
+                        <a:t>Concept drift</a:t>
                       </a:r>
                     </a:p>
                   </a:txBody>
@@ -5604,8 +4344,12 @@
                         <a:buNone/>
                       </a:pPr>
                       <a:r>
+                        <a:rPr b="1"/>
+                        <a:t>Only</a:t>
+                      </a:r>
+                      <a:r>
                         <a:rPr/>
-                        <a:t>Untested at the task it performs</a:t>
+                        <a:t> detectable once outcomes arrive</a:t>
                       </a:r>
                     </a:p>
                   </a:txBody>
@@ -5622,7 +4366,7 @@
                       </a:pPr>
                       <a:r>
                         <a:rPr/>
-                        <a:t>Extrapolating a forest</a:t>
+                        <a:t>Feedback</a:t>
                       </a:r>
                     </a:p>
                   </a:txBody>
@@ -5637,39 +4381,7 @@
                       </a:pPr>
                       <a:r>
                         <a:rPr/>
-                        <a:t>Silent nearest-leaf nonsense</a:t>
-                      </a:r>
-                    </a:p>
-                  </a:txBody>
-                </a:tc>
-              </a:tr>
-              <a:tr h="0">
-                <a:tc>
-                  <a:txBody>
-                    <a:bodyPr/>
-                    <a:lstStyle/>
-                    <a:p>
-                      <a:pPr lvl="0" indent="0" marL="0">
-                        <a:buNone/>
-                      </a:pPr>
-                      <a:r>
-                        <a:rPr/>
-                        <a:t>No retirement trigger</a:t>
-                      </a:r>
-                    </a:p>
-                  </a:txBody>
-                </a:tc>
-                <a:tc>
-                  <a:txBody>
-                    <a:bodyPr/>
-                    <a:lstStyle/>
-                    <a:p>
-                      <a:pPr lvl="0" indent="0" marL="0">
-                        <a:buNone/>
-                      </a:pPr>
-                      <a:r>
-                        <a:rPr/>
-                        <a:t>The model outlives its validity</a:t>
+                        <a:t>Requires causal reasoning, not monitoring</a:t>
                       </a:r>
                     </a:p>
                   </a:txBody>
@@ -5679,6 +4391,661 @@
           </a:graphicData>
         </a:graphic>
       </p:graphicFrame>
+    </p:spTree>
+  </p:cSld>
+</p:sld>
+</file>
+
+<file path=ppt/slides/slide18.xml><?xml version="1.0" encoding="utf-8"?>
+<p:sld xmlns:a="http://schemas.openxmlformats.org/drawingml/2006/main" xmlns:r="http://schemas.openxmlformats.org/officeDocument/2006/relationships" xmlns:p="http://schemas.openxmlformats.org/presentationml/2006/main">
+  <p:cSld>
+    <p:spTree>
+      <p:nvGrpSpPr>
+        <p:cNvPr id="1" name=""/>
+        <p:cNvGrpSpPr/>
+        <p:nvPr/>
+      </p:nvGrpSpPr>
+      <p:grpSpPr>
+        <a:xfrm>
+          <a:off x="0" y="0"/>
+          <a:ext cx="0" cy="0"/>
+          <a:chOff x="0" y="0"/>
+          <a:chExt cx="0" cy="0"/>
+        </a:xfrm>
+      </p:grpSpPr>
+      <p:sp>
+        <p:nvSpPr>
+          <p:cNvPr id="2" name="Title 1"/>
+          <p:cNvSpPr>
+            <a:spLocks noGrp="1"/>
+          </p:cNvSpPr>
+          <p:nvPr>
+            <p:ph type="title"/>
+          </p:nvPr>
+        </p:nvSpPr>
+        <p:spPr/>
+        <p:txBody>
+          <a:bodyPr/>
+          <a:lstStyle/>
+          <a:p>
+            <a:pPr lvl="0" indent="0" marL="0">
+              <a:buNone/>
+            </a:pPr>
+            <a:r>
+              <a:rPr/>
+              <a:t>The classifier diagnostic</a:t>
+            </a:r>
+          </a:p>
+        </p:txBody>
+      </p:sp>
+      <p:sp>
+        <p:nvSpPr>
+          <p:cNvPr id="3" name="Content Placeholder 2"/>
+          <p:cNvSpPr>
+            <a:spLocks noGrp="1"/>
+          </p:cNvSpPr>
+          <p:nvPr>
+            <p:ph idx="1"/>
+          </p:nvPr>
+        </p:nvSpPr>
+        <p:spPr/>
+        <p:txBody>
+          <a:bodyPr/>
+          <a:lstStyle/>
+          <a:p>
+            <a:pPr lvl="0" indent="0" marL="0">
+              <a:buNone/>
+            </a:pPr>
+            <a:r>
+              <a:rPr/>
+              <a:t>Pool training and deployment features, label them by period, and try to predict the label.</a:t>
+            </a:r>
+          </a:p>
+          <a:p>
+            <a:pPr lvl="0" indent="0" marL="1270000">
+              <a:buNone/>
+            </a:pPr>
+            <a:r>
+              <a:rPr sz="2000" b="1"/>
+              <a:t>If a classifier can tell your two periods apart, so can your model’s errors.</a:t>
+            </a:r>
+          </a:p>
+          <a:p>
+            <a:pPr lvl="0" indent="0" marL="0">
+              <a:buNone/>
+            </a:pPr>
+            <a:r>
+              <a:rPr/>
+              <a:t>AUC near 0.5 is reassuring. Near 1.0 is an alarm.</a:t>
+            </a:r>
+          </a:p>
+        </p:txBody>
+      </p:sp>
+    </p:spTree>
+  </p:cSld>
+</p:sld>
+</file>
+
+<file path=ppt/slides/slide19.xml><?xml version="1.0" encoding="utf-8"?>
+<p:sld xmlns:a="http://schemas.openxmlformats.org/drawingml/2006/main" xmlns:r="http://schemas.openxmlformats.org/officeDocument/2006/relationships" xmlns:p="http://schemas.openxmlformats.org/presentationml/2006/main">
+  <p:cSld>
+    <p:spTree>
+      <p:nvGrpSpPr>
+        <p:cNvPr id="1" name=""/>
+        <p:cNvGrpSpPr/>
+        <p:nvPr/>
+      </p:nvGrpSpPr>
+      <p:grpSpPr>
+        <a:xfrm>
+          <a:off x="0" y="0"/>
+          <a:ext cx="0" cy="0"/>
+          <a:chOff x="0" y="0"/>
+          <a:chExt cx="0" cy="0"/>
+        </a:xfrm>
+      </p:grpSpPr>
+      <p:sp>
+        <p:nvSpPr>
+          <p:cNvPr id="2" name="Title 1"/>
+          <p:cNvSpPr>
+            <a:spLocks noGrp="1"/>
+          </p:cNvSpPr>
+          <p:nvPr>
+            <p:ph type="title"/>
+          </p:nvPr>
+        </p:nvSpPr>
+        <p:spPr/>
+        <p:txBody>
+          <a:bodyPr/>
+          <a:lstStyle/>
+          <a:p>
+            <a:pPr lvl="0" indent="0" marL="0">
+              <a:buNone/>
+            </a:pPr>
+            <a:r>
+              <a:rPr/>
+              <a:t>Goodhart’s law, stated precisely</a:t>
+            </a:r>
+          </a:p>
+        </p:txBody>
+      </p:sp>
+      <p:sp>
+        <p:nvSpPr>
+          <p:cNvPr id="3" name="Content Placeholder 2"/>
+          <p:cNvSpPr>
+            <a:spLocks noGrp="1"/>
+          </p:cNvSpPr>
+          <p:nvPr>
+            <p:ph idx="1"/>
+          </p:nvPr>
+        </p:nvSpPr>
+        <p:spPr/>
+        <p:txBody>
+          <a:bodyPr/>
+          <a:lstStyle/>
+          <a:p>
+            <a:pPr lvl="0" indent="0" marL="1270000">
+              <a:buNone/>
+            </a:pPr>
+            <a:r>
+              <a:rPr sz="2000"/>
+              <a:t>When a measure becomes a target, the relationship the model learned between measure and outcome is exactly the relationship agents have an incentive to break.</a:t>
+            </a:r>
+          </a:p>
+          <a:p>
+            <a:pPr lvl="0" indent="0" marL="0">
+              <a:buNone/>
+            </a:pPr>
+            <a:r>
+              <a:rPr/>
+              <a:t>A credit-scoring feature that predicts default only until applicants learn it is used is not a stable feature.</a:t>
+            </a:r>
+          </a:p>
+          <a:p>
+            <a:pPr lvl="0" indent="0" marL="0">
+              <a:buNone/>
+            </a:pPr>
+            <a:r>
+              <a:rPr/>
+              <a:t>This is a </a:t>
+            </a:r>
+            <a:r>
+              <a:rPr b="1"/>
+              <a:t>causal</a:t>
+            </a:r>
+            <a:r>
+              <a:rPr/>
+              <a:t> problem (Session 10), not a monitoring problem. </a:t>
+            </a:r>
+            <a:r>
+              <a:rPr b="1"/>
+              <a:t>No amount of retraining solves it.</a:t>
+            </a:r>
+          </a:p>
+        </p:txBody>
+      </p:sp>
+    </p:spTree>
+  </p:cSld>
+</p:sld>
+</file>
+
+<file path=ppt/slides/slide2.xml><?xml version="1.0" encoding="utf-8"?>
+<p:sld xmlns:a="http://schemas.openxmlformats.org/drawingml/2006/main" xmlns:r="http://schemas.openxmlformats.org/officeDocument/2006/relationships" xmlns:p="http://schemas.openxmlformats.org/presentationml/2006/main">
+  <p:cSld>
+    <p:spTree>
+      <p:nvGrpSpPr>
+        <p:cNvPr id="1" name=""/>
+        <p:cNvGrpSpPr/>
+        <p:nvPr/>
+      </p:nvGrpSpPr>
+      <p:grpSpPr>
+        <a:xfrm>
+          <a:off x="0" y="0"/>
+          <a:ext cx="0" cy="0"/>
+          <a:chOff x="0" y="0"/>
+          <a:chExt cx="0" cy="0"/>
+        </a:xfrm>
+      </p:grpSpPr>
+      <p:sp>
+        <p:nvSpPr>
+          <p:cNvPr id="3" name="Content Placeholder 2"/>
+          <p:cNvSpPr>
+            <a:spLocks noGrp="1"/>
+          </p:cNvSpPr>
+          <p:nvPr>
+            <p:ph idx="1"/>
+          </p:nvPr>
+        </p:nvSpPr>
+        <p:spPr/>
+        <p:txBody>
+          <a:bodyPr/>
+          <a:lstStyle/>
+          <a:p>
+            <a:pPr lvl="0" indent="0" marL="0">
+              <a:spcBef>
+                <a:spcPts val="3000"/>
+              </a:spcBef>
+              <a:buNone/>
+            </a:pPr>
+            <a:r>
+              <a:rPr b="1"/>
+              <a:t>What are you responsible for when someone acts on your model?</a:t>
+            </a:r>
+          </a:p>
+        </p:txBody>
+      </p:sp>
+    </p:spTree>
+  </p:cSld>
+</p:sld>
+</file>
+
+<file path=ppt/slides/slide20.xml><?xml version="1.0" encoding="utf-8"?>
+<p:sld xmlns:a="http://schemas.openxmlformats.org/drawingml/2006/main" xmlns:r="http://schemas.openxmlformats.org/officeDocument/2006/relationships" xmlns:p="http://schemas.openxmlformats.org/presentationml/2006/main">
+  <p:cSld>
+    <p:spTree>
+      <p:nvGrpSpPr>
+        <p:cNvPr id="1" name=""/>
+        <p:cNvGrpSpPr/>
+        <p:nvPr/>
+      </p:nvGrpSpPr>
+      <p:grpSpPr>
+        <a:xfrm>
+          <a:off x="0" y="0"/>
+          <a:ext cx="0" cy="0"/>
+          <a:chOff x="0" y="0"/>
+          <a:chExt cx="0" cy="0"/>
+        </a:xfrm>
+      </p:grpSpPr>
+      <p:sp>
+        <p:nvSpPr>
+          <p:cNvPr id="2" name="Title 1"/>
+          <p:cNvSpPr>
+            <a:spLocks noGrp="1"/>
+          </p:cNvSpPr>
+          <p:nvPr>
+            <p:ph type="title"/>
+          </p:nvPr>
+        </p:nvSpPr>
+        <p:spPr>
+          <a:xfrm>
+            <a:off x="722313" y="3305176"/>
+            <a:ext cx="7772400" cy="1021556"/>
+          </a:xfrm>
+        </p:spPr>
+        <p:txBody>
+          <a:bodyPr/>
+          <a:lstStyle/>
+          <a:p>
+            <a:pPr lvl="0" indent="0" marL="0">
+              <a:buNone/>
+            </a:pPr>
+            <a:r>
+              <a:rPr/>
+              <a:t>11.4 Model governance</a:t>
+            </a:r>
+          </a:p>
+        </p:txBody>
+      </p:sp>
+    </p:spTree>
+  </p:cSld>
+</p:sld>
+</file>
+
+<file path=ppt/slides/slide21.xml><?xml version="1.0" encoding="utf-8"?>
+<p:sld xmlns:a="http://schemas.openxmlformats.org/drawingml/2006/main" xmlns:r="http://schemas.openxmlformats.org/officeDocument/2006/relationships" xmlns:p="http://schemas.openxmlformats.org/presentationml/2006/main">
+  <p:cSld>
+    <p:spTree>
+      <p:nvGrpSpPr>
+        <p:cNvPr id="1" name=""/>
+        <p:cNvGrpSpPr/>
+        <p:nvPr/>
+      </p:nvGrpSpPr>
+      <p:grpSpPr>
+        <a:xfrm>
+          <a:off x="0" y="0"/>
+          <a:ext cx="0" cy="0"/>
+          <a:chOff x="0" y="0"/>
+          <a:chExt cx="0" cy="0"/>
+        </a:xfrm>
+      </p:grpSpPr>
+      <p:sp>
+        <p:nvSpPr>
+          <p:cNvPr id="2" name="Title 1"/>
+          <p:cNvSpPr>
+            <a:spLocks noGrp="1"/>
+          </p:cNvSpPr>
+          <p:nvPr>
+            <p:ph type="title"/>
+          </p:nvPr>
+        </p:nvSpPr>
+        <p:spPr/>
+        <p:txBody>
+          <a:bodyPr/>
+          <a:lstStyle/>
+          <a:p>
+            <a:pPr lvl="0" indent="0" marL="0">
+              <a:buNone/>
+            </a:pPr>
+            <a:r>
+              <a:rPr/>
+              <a:t>Seven headings</a:t>
+            </a:r>
+          </a:p>
+        </p:txBody>
+      </p:sp>
+      <p:sp>
+        <p:nvSpPr>
+          <p:cNvPr id="3" name="Content Placeholder 2"/>
+          <p:cNvSpPr>
+            <a:spLocks noGrp="1"/>
+          </p:cNvSpPr>
+          <p:nvPr>
+            <p:ph idx="1"/>
+          </p:nvPr>
+        </p:nvSpPr>
+        <p:spPr/>
+        <p:txBody>
+          <a:bodyPr/>
+          <a:lstStyle/>
+          <a:p>
+            <a:pPr lvl="0" indent="0" marL="0">
+              <a:buNone/>
+            </a:pPr>
+            <a:r>
+              <a:rPr/>
+              <a:t>A deployable model is accompanied by a document a competent successor could act on.</a:t>
+            </a:r>
+          </a:p>
+          <a:p>
+            <a:pPr lvl="0" indent="-342900" marL="342900">
+              <a:buAutoNum type="arabicPeriod"/>
+            </a:pPr>
+            <a:r>
+              <a:rPr b="1"/>
+              <a:t>Intended use</a:t>
+            </a:r>
+            <a:r>
+              <a:rPr/>
+              <a:t> — and out-of-scope uses</a:t>
+            </a:r>
+          </a:p>
+          <a:p>
+            <a:pPr lvl="0" indent="-342900" marL="342900">
+              <a:buAutoNum type="arabicPeriod"/>
+            </a:pPr>
+            <a:r>
+              <a:rPr b="1"/>
+              <a:t>Data lineage</a:t>
+            </a:r>
+            <a:r>
+              <a:rPr/>
+              <a:t> — sources, vintages, dates, licences, quality issues, checksums</a:t>
+            </a:r>
+          </a:p>
+          <a:p>
+            <a:pPr lvl="0" indent="-342900" marL="342900">
+              <a:buAutoNum type="arabicPeriod"/>
+            </a:pPr>
+            <a:r>
+              <a:rPr b="1"/>
+              <a:t>Preprocessing</a:t>
+            </a:r>
+            <a:r>
+              <a:rPr/>
+              <a:t> — every transformation, in order, with the code</a:t>
+            </a:r>
+          </a:p>
+          <a:p>
+            <a:pPr lvl="0" indent="-342900" marL="342900">
+              <a:buAutoNum type="arabicPeriod"/>
+            </a:pPr>
+            <a:r>
+              <a:rPr b="1"/>
+              <a:t>Validation</a:t>
+            </a:r>
+            <a:r>
+              <a:rPr/>
+              <a:t> — design, why the CV scheme matches deployment, metrics, benchmark, subgroups</a:t>
+            </a:r>
+          </a:p>
+          <a:p>
+            <a:pPr lvl="0" indent="-342900" marL="342900">
+              <a:buAutoNum type="arabicPeriod"/>
+            </a:pPr>
+            <a:r>
+              <a:rPr b="1"/>
+              <a:t>Limitations</a:t>
+            </a:r>
+            <a:r>
+              <a:rPr/>
+              <a:t> — where it performs worst, who is under-represented, what is load-bearing</a:t>
+            </a:r>
+          </a:p>
+          <a:p>
+            <a:pPr lvl="0" indent="-342900" marL="342900">
+              <a:buAutoNum type="arabicPeriod"/>
+            </a:pPr>
+            <a:r>
+              <a:rPr b="1"/>
+              <a:t>Monitoring plan</a:t>
+            </a:r>
+            <a:r>
+              <a:rPr/>
+              <a:t> — what is tracked, how often, what threshold triggers review</a:t>
+            </a:r>
+          </a:p>
+          <a:p>
+            <a:pPr lvl="0" indent="-342900" marL="342900">
+              <a:buAutoNum type="arabicPeriod"/>
+            </a:pPr>
+            <a:r>
+              <a:rPr b="1"/>
+              <a:t>Ownership</a:t>
+            </a:r>
+            <a:r>
+              <a:rPr/>
+              <a:t> — who is accountable, and the </a:t>
+            </a:r>
+            <a:r>
+              <a:rPr b="1"/>
+              <a:t>retirement criterion</a:t>
+            </a:r>
+          </a:p>
+        </p:txBody>
+      </p:sp>
+    </p:spTree>
+  </p:cSld>
+</p:sld>
+</file>
+
+<file path=ppt/slides/slide22.xml><?xml version="1.0" encoding="utf-8"?>
+<p:sld xmlns:a="http://schemas.openxmlformats.org/drawingml/2006/main" xmlns:r="http://schemas.openxmlformats.org/officeDocument/2006/relationships" xmlns:p="http://schemas.openxmlformats.org/presentationml/2006/main">
+  <p:cSld>
+    <p:spTree>
+      <p:nvGrpSpPr>
+        <p:cNvPr id="1" name=""/>
+        <p:cNvGrpSpPr/>
+        <p:nvPr/>
+      </p:nvGrpSpPr>
+      <p:grpSpPr>
+        <a:xfrm>
+          <a:off x="0" y="0"/>
+          <a:ext cx="0" cy="0"/>
+          <a:chOff x="0" y="0"/>
+          <a:chExt cx="0" cy="0"/>
+        </a:xfrm>
+      </p:grpSpPr>
+      <p:sp>
+        <p:nvSpPr>
+          <p:cNvPr id="2" name="Title 1"/>
+          <p:cNvSpPr>
+            <a:spLocks noGrp="1"/>
+          </p:cNvSpPr>
+          <p:nvPr>
+            <p:ph type="title"/>
+          </p:nvPr>
+        </p:nvSpPr>
+        <p:spPr/>
+        <p:txBody>
+          <a:bodyPr/>
+          <a:lstStyle/>
+          <a:p>
+            <a:pPr lvl="0" indent="0" marL="0">
+              <a:buNone/>
+            </a:pPr>
+            <a:r>
+              <a:rPr/>
+              <a:t>Not bureaucracy</a:t>
+            </a:r>
+          </a:p>
+        </p:txBody>
+      </p:sp>
+      <p:sp>
+        <p:nvSpPr>
+          <p:cNvPr id="3" name="Content Placeholder 2"/>
+          <p:cNvSpPr>
+            <a:spLocks noGrp="1"/>
+          </p:cNvSpPr>
+          <p:nvPr>
+            <p:ph idx="1"/>
+          </p:nvPr>
+        </p:nvSpPr>
+        <p:spPr/>
+        <p:txBody>
+          <a:bodyPr/>
+          <a:lstStyle/>
+          <a:p>
+            <a:pPr lvl="0" indent="0" marL="0">
+              <a:buNone/>
+            </a:pPr>
+            <a:r>
+              <a:rPr/>
+              <a:t>Sections </a:t>
+            </a:r>
+            <a:r>
+              <a:rPr b="1"/>
+              <a:t>5</a:t>
+            </a:r>
+            <a:r>
+              <a:rPr/>
+              <a:t> and </a:t>
+            </a:r>
+            <a:r>
+              <a:rPr b="1"/>
+              <a:t>6</a:t>
+            </a:r>
+            <a:r>
+              <a:rPr/>
+              <a:t> are where the intellectual content of the whole course finally has to be written down for someone else.</a:t>
+            </a:r>
+          </a:p>
+          <a:p>
+            <a:pPr lvl="0" indent="0" marL="0">
+              <a:buNone/>
+            </a:pPr>
+            <a:r>
+              <a:rPr/>
+              <a:t>Template: </a:t>
+            </a:r>
+            <a:r>
+              <a:rPr>
+                <a:hlinkClick r:id="rId2"/>
+                <a:latin typeface="Courier"/>
+              </a:rPr>
+              <a:t>02-lab/governance-file-template.md</a:t>
+            </a:r>
+          </a:p>
+        </p:txBody>
+      </p:sp>
+    </p:spTree>
+  </p:cSld>
+</p:sld>
+</file>
+
+<file path=ppt/slides/slide23.xml><?xml version="1.0" encoding="utf-8"?>
+<p:sld xmlns:a="http://schemas.openxmlformats.org/drawingml/2006/main" xmlns:r="http://schemas.openxmlformats.org/officeDocument/2006/relationships" xmlns:p="http://schemas.openxmlformats.org/presentationml/2006/main">
+  <p:cSld>
+    <p:spTree>
+      <p:nvGrpSpPr>
+        <p:cNvPr id="1" name=""/>
+        <p:cNvGrpSpPr/>
+        <p:nvPr/>
+      </p:nvGrpSpPr>
+      <p:grpSpPr>
+        <a:xfrm>
+          <a:off x="0" y="0"/>
+          <a:ext cx="0" cy="0"/>
+          <a:chOff x="0" y="0"/>
+          <a:chExt cx="0" cy="0"/>
+        </a:xfrm>
+      </p:grpSpPr>
+      <p:sp>
+        <p:nvSpPr>
+          <p:cNvPr id="2" name="Title 1"/>
+          <p:cNvSpPr>
+            <a:spLocks noGrp="1"/>
+          </p:cNvSpPr>
+          <p:nvPr>
+            <p:ph type="title"/>
+          </p:nvPr>
+        </p:nvSpPr>
+        <p:spPr/>
+        <p:txBody>
+          <a:bodyPr/>
+          <a:lstStyle/>
+          <a:p>
+            <a:pPr lvl="0" indent="0" marL="0">
+              <a:buNone/>
+            </a:pPr>
+            <a:r>
+              <a:rPr/>
+              <a:t>Write a specific retirement trigger</a:t>
+            </a:r>
+          </a:p>
+        </p:txBody>
+      </p:sp>
+      <p:sp>
+        <p:nvSpPr>
+          <p:cNvPr id="3" name="Content Placeholder 2"/>
+          <p:cNvSpPr>
+            <a:spLocks noGrp="1"/>
+          </p:cNvSpPr>
+          <p:nvPr>
+            <p:ph idx="1"/>
+          </p:nvPr>
+        </p:nvSpPr>
+        <p:spPr/>
+        <p:txBody>
+          <a:bodyPr/>
+          <a:lstStyle/>
+          <a:p>
+            <a:pPr lvl="0" indent="0" marL="0">
+              <a:buNone/>
+            </a:pPr>
+            <a:r>
+              <a:rPr/>
+              <a:t>A model with no stated retirement condition is never retired. It is used until something goes visibly wrong — and by then it has been wrong for a while.</a:t>
+            </a:r>
+          </a:p>
+          <a:p>
+            <a:pPr lvl="0" indent="0" marL="1270000">
+              <a:buNone/>
+            </a:pPr>
+            <a:r>
+              <a:rPr sz="2000" i="1"/>
+              <a:t>“Retrain when the era-classifier AUC against the training period exceeds 0.75, or when rolling 2-year RMSE exceeds 1.4× the backtest median. Retire if retraining does not restore it.”</a:t>
+            </a:r>
+          </a:p>
+          <a:p>
+            <a:pPr lvl="0" indent="0" marL="0">
+              <a:buNone/>
+            </a:pPr>
+            <a:r>
+              <a:rPr/>
+              <a:t>Specific enough that someone who has never met you can execute it.</a:t>
+            </a:r>
+          </a:p>
+        </p:txBody>
+      </p:sp>
     </p:spTree>
   </p:cSld>
 </p:sld>
@@ -5711,7 +5078,12 @@
             <p:ph type="title"/>
           </p:nvPr>
         </p:nvSpPr>
-        <p:spPr/>
+        <p:spPr>
+          <a:xfrm>
+            <a:off x="722313" y="3305176"/>
+            <a:ext cx="7772400" cy="1021556"/>
+          </a:xfrm>
+        </p:spPr>
         <p:txBody>
           <a:bodyPr/>
           <a:lstStyle/>
@@ -5721,7 +5093,60 @@
             </a:pPr>
             <a:r>
               <a:rPr/>
-              <a:t>In the lab</a:t>
+              <a:t>11.5 The arc</a:t>
+            </a:r>
+          </a:p>
+        </p:txBody>
+      </p:sp>
+    </p:spTree>
+  </p:cSld>
+</p:sld>
+</file>
+
+<file path=ppt/slides/slide25.xml><?xml version="1.0" encoding="UTF-8"?><p:sld xmlns:a="http://schemas.openxmlformats.org/drawingml/2006/main" xmlns:r="http://schemas.openxmlformats.org/officeDocument/2006/relationships" xmlns:p="http://schemas.openxmlformats.org/presentationml/2006/main"><p:cSld><p:spTree><p:nvGrpSpPr><p:cNvPr id="1" name="" /><p:cNvGrpSpPr /><p:nvPr /></p:nvGrpSpPr><p:grpSpPr><a:xfrm><a:off x="0" y="0" /><a:ext cx="0" cy="0" /><a:chOff x="0" y="0" /><a:chExt cx="0" cy="0" /></a:xfrm></p:grpSpPr><p:sp><p:nvSpPr><p:cNvPr id="2" name="Title 1" /><p:cNvSpPr><a:spLocks noGrp="1" /></p:cNvSpPr><p:nvPr><p:ph type="title" /></p:nvPr></p:nvSpPr><p:spPr /><p:txBody><a:bodyPr /><a:lstStyle /><a:p><a:pPr lvl="0" indent="0" marL="0"><a:buNone /></a:pPr><a:r><a:rPr /><a:t>The dial, and the self-deception it prevents</a:t></a:r></a:p></p:txBody></p:sp><p:graphicFrame><p:nvGraphicFramePr><p:cNvPr id="6" name="Content Placeholder 5" /><p:cNvGraphicFramePr><a:graphicFrameLocks noGrp="1" /></p:cNvGraphicFramePr><p:nvPr><p:ph idx="1" /></p:nvPr></p:nvGraphicFramePr><p:xfrm><a:off x="457200" y="1193800" /><a:ext cx="8229600" cy="3390900" /></p:xfrm><a:graphic><a:graphicData uri="http://schemas.openxmlformats.org/drawingml/2006/table"><a:tbl><a:tblPr firstRow="1" bandRow="1"><a:tableStyleId>{5C22544A-7EE6-4342-B048-85BDC9FD1C3A}</a:tableStyleId></a:tblPr><a:tblGrid><a:gridCol w="2743200" /><a:gridCol w="2743200" /><a:gridCol w="2743200" /></a:tblGrid><a:tr h="0"><a:tc><a:txBody><a:bodyPr /><a:lstStyle /><a:p><a:pPr lvl="0" indent="0" marL="0"><a:buNone /></a:pPr><a:r><a:rPr /><a:t>Session</a:t></a:r></a:p></a:txBody><a:tcPr /></a:tc><a:tc><a:txBody><a:bodyPr /><a:lstStyle /><a:p><a:pPr lvl="0" indent="0" marL="0"><a:buNone /></a:pPr><a:r><a:rPr /><a:t>The dial</a:t></a:r></a:p></a:txBody><a:tcPr /></a:tc><a:tc><a:txBody><a:bodyPr /><a:lstStyle /><a:p><a:pPr lvl="0" indent="0" marL="0"><a:buNone /></a:pPr><a:r><a:rPr /><a:t>The self-deception</a:t></a:r></a:p></a:txBody><a:tcPr /></a:tc></a:tr><a:tr h="0"><a:tc><a:txBody><a:bodyPr /><a:lstStyle /><a:p><a:pPr lvl="0" indent="0" marL="0"><a:buNone /></a:pPr><a:r><a:rPr /><a:t>2–3</a:t></a:r></a:p></a:txBody></a:tc><a:tc><a:txBody><a:bodyPr /><a:lstStyle /><a:p><a:pPr lvl="0" indent="0" marL="0"><a:buNone /></a:pPr><a:r><a:rPr /><a:t>Which variables enter, how errors are modelled</a:t></a:r></a:p></a:txBody></a:tc><a:tc><a:txBody><a:bodyPr /><a:lstStyle /><a:p><a:pPr lvl="0" indent="0" marL="0"><a:buNone /></a:pPr><a:r><a:rPr /><a:t>“My standard errors are correct because the software printed them”</a:t></a:r></a:p></a:txBody></a:tc></a:tr><a:tr h="0"><a:tc><a:txBody><a:bodyPr /><a:lstStyle /><a:p><a:pPr lvl="0" indent="0" marL="0"><a:buNone /></a:pPr><a:r><a:rPr /><a:t>4</a:t></a:r></a:p></a:txBody></a:tc><a:tc><a:txBody><a:bodyPr /><a:lstStyle /><a:p><a:pPr lvl="0" indent="0" marL="0"><a:buNone /></a:pPr><a:r><a:rPr /><a:t>Model complexity, via CV</a:t></a:r></a:p></a:txBody></a:tc><a:tc><a:txBody><a:bodyPr /><a:lstStyle /><a:p><a:pPr lvl="0" indent="0" marL="0"><a:buNone /></a:pPr><a:r><a:rPr /><a:t>“It fits the data well”</a:t></a:r></a:p></a:txBody></a:tc></a:tr><a:tr h="0"><a:tc><a:txBody><a:bodyPr /><a:lstStyle /><a:p><a:pPr lvl="0" indent="0" marL="0"><a:buNone /></a:pPr><a:r><a:rPr /><a:t>5–6</a:t></a:r></a:p></a:txBody></a:tc><a:tc><a:txBody><a:bodyPr /><a:lstStyle /><a:p><a:pPr lvl="0" indent="0" marL="0"><a:buNone /></a:pPr><a14:m><m:oMath xmlns:m="http://schemas.openxmlformats.org/officeDocument/2006/math"><m:r><m:t>λ</m:t></m:r></m:oMath></a14:m><a:r><a:rPr /><a:t> and </a:t></a:r><a14:m><m:oMath xmlns:m="http://schemas.openxmlformats.org/officeDocument/2006/math"><m:r><m:t>α</m:t></m:r></m:oMath></a14:m></a:p></a:txBody></a:tc><a:tc><a:txBody><a:bodyPr /><a:lstStyle /><a:p><a:pPr lvl="0" indent="0" marL="0"><a:buNone /></a:pPr><a:r><a:rPr /><a:t>“The model identified the true drivers”</a:t></a:r></a:p></a:txBody></a:tc></a:tr><a:tr h="0"><a:tc><a:txBody><a:bodyPr /><a:lstStyle /><a:p><a:pPr lvl="0" indent="0" marL="0"><a:buNone /></a:pPr><a:r><a:rPr /><a:t>6</a:t></a:r></a:p></a:txBody></a:tc><a:tc><a:txBody><a:bodyPr /><a:lstStyle /><a:p><a:pPr lvl="0" indent="0" marL="0"><a:buNone /></a:pPr><a:r><a:rPr /><a:t>The decision threshold</a:t></a:r></a:p></a:txBody></a:tc><a:tc><a:txBody><a:bodyPr /><a:lstStyle /><a:p><a:pPr lvl="0" indent="0" marL="0"><a:buNone /></a:pPr><a:r><a:rPr /><a:t>“It is 97% accurate”</a:t></a:r></a:p></a:txBody></a:tc></a:tr></a:tbl></a:graphicData></a:graphic></p:graphicFrame></p:spTree></p:cSld></p:sld>
+</file>
+
+<file path=ppt/slides/slide26.xml><?xml version="1.0" encoding="UTF-8"?><p:sld xmlns:a="http://schemas.openxmlformats.org/drawingml/2006/main" xmlns:r="http://schemas.openxmlformats.org/officeDocument/2006/relationships" xmlns:p="http://schemas.openxmlformats.org/presentationml/2006/main"><p:cSld><p:spTree><p:nvGrpSpPr><p:cNvPr id="1" name="" /><p:cNvGrpSpPr /><p:nvPr /></p:nvGrpSpPr><p:grpSpPr><a:xfrm><a:off x="0" y="0" /><a:ext cx="0" cy="0" /><a:chOff x="0" y="0" /><a:chExt cx="0" cy="0" /></a:xfrm></p:grpSpPr><p:sp><p:nvSpPr><p:cNvPr id="2" name="Title 1" /><p:cNvSpPr><a:spLocks noGrp="1" /></p:cNvSpPr><p:nvPr><p:ph type="title" /></p:nvPr></p:nvSpPr><p:spPr /><p:txBody><a:bodyPr /><a:lstStyle /><a:p><a:pPr lvl="0" indent="0" marL="0"><a:buNone /></a:pPr><a:r><a:rPr /><a:t>Continued</a:t></a:r></a:p></p:txBody></p:sp><p:graphicFrame><p:nvGraphicFramePr><p:cNvPr id="6" name="Content Placeholder 5" /><p:cNvGraphicFramePr><a:graphicFrameLocks noGrp="1" /></p:cNvGraphicFramePr><p:nvPr><p:ph idx="1" /></p:nvPr></p:nvGraphicFramePr><p:xfrm><a:off x="457200" y="1193800" /><a:ext cx="8229600" cy="3390900" /></p:xfrm><a:graphic><a:graphicData uri="http://schemas.openxmlformats.org/drawingml/2006/table"><a:tbl><a:tblPr firstRow="1" bandRow="1"><a:tableStyleId>{5C22544A-7EE6-4342-B048-85BDC9FD1C3A}</a:tableStyleId></a:tblPr><a:tblGrid><a:gridCol w="2743200" /><a:gridCol w="2743200" /><a:gridCol w="2743200" /></a:tblGrid><a:tr h="0"><a:tc><a:txBody><a:bodyPr /><a:lstStyle /><a:p><a:pPr lvl="0" indent="0" marL="0"><a:buNone /></a:pPr><a:r><a:rPr /><a:t>Session</a:t></a:r></a:p></a:txBody><a:tcPr /></a:tc><a:tc><a:txBody><a:bodyPr /><a:lstStyle /><a:p><a:pPr lvl="0" indent="0" marL="0"><a:buNone /></a:pPr><a:r><a:rPr /><a:t>The dial</a:t></a:r></a:p></a:txBody><a:tcPr /></a:tc><a:tc><a:txBody><a:bodyPr /><a:lstStyle /><a:p><a:pPr lvl="0" indent="0" marL="0"><a:buNone /></a:pPr><a:r><a:rPr /><a:t>The self-deception</a:t></a:r></a:p></a:txBody><a:tcPr /></a:tc></a:tr><a:tr h="0"><a:tc><a:txBody><a:bodyPr /><a:lstStyle /><a:p><a:pPr lvl="0" indent="0" marL="0"><a:buNone /></a:pPr><a:r><a:rPr /><a:t>7</a:t></a:r></a:p></a:txBody></a:tc><a:tc><a:txBody><a:bodyPr /><a:lstStyle /><a:p><a:pPr lvl="0" indent="0" marL="0"><a:buNone /></a:pPr><a:r><a:rPr /><a:t>Depth, learning rate, </a:t></a:r><a14:m><m:oMath xmlns:m="http://schemas.openxmlformats.org/officeDocument/2006/math"><m:r><m:t>m</m:t></m:r></m:oMath></a14:m></a:p></a:txBody></a:tc><a:tc><a:txBody><a:bodyPr /><a:lstStyle /><a:p><a:pPr lvl="0" indent="0" marL="0"><a:buNone /></a:pPr><a:r><a:rPr /><a:t>“The important feature is the cause”</a:t></a:r></a:p></a:txBody></a:tc></a:tr><a:tr h="0"><a:tc><a:txBody><a:bodyPr /><a:lstStyle /><a:p><a:pPr lvl="0" indent="0" marL="0"><a:buNone /></a:pPr><a:r><a:rPr /><a:t>8</a:t></a:r></a:p></a:txBody></a:tc><a:tc><a:txBody><a:bodyPr /><a:lstStyle /><a:p><a:pPr lvl="0" indent="0" marL="0"><a:buNone /></a:pPr><a:r><a:rPr /><a:t>The number of factors</a:t></a:r></a:p></a:txBody></a:tc><a:tc><a:txBody><a:bodyPr /><a:lstStyle /><a:p><a:pPr lvl="0" indent="0" marL="0"><a:buNone /></a:pPr><a:r><a:rPr /><a:t>“I extracted factors, then backtested”</a:t></a:r></a:p></a:txBody></a:tc></a:tr><a:tr h="0"><a:tc><a:txBody><a:bodyPr /><a:lstStyle /><a:p><a:pPr lvl="0" indent="0" marL="0"><a:buNone /></a:pPr><a:r><a:rPr /><a:t>9</a:t></a:r></a:p></a:txBody></a:tc><a:tc><a:txBody><a:bodyPr /><a:lstStyle /><a:p><a:pPr lvl="0" indent="0" marL="0"><a:buNone /></a:pPr><a14:m><m:oMath xmlns:m="http://schemas.openxmlformats.org/officeDocument/2006/math"><m:r><m:t>k</m:t></m:r></m:oMath></a14:m><a:r><a:rPr /><a:t>, and the representation of text</a:t></a:r></a:p></a:txBody></a:tc><a:tc><a:txBody><a:bodyPr /><a:lstStyle /><a:p><a:pPr lvl="0" indent="0" marL="0"><a:buNone /></a:pPr><a:r><a:rPr /><a:t>“The algorithm found clusters, so clusters exist”</a:t></a:r></a:p></a:txBody></a:tc></a:tr><a:tr h="0"><a:tc><a:txBody><a:bodyPr /><a:lstStyle /><a:p><a:pPr lvl="0" indent="0" marL="0"><a:buNone /></a:pPr><a:r><a:rPr b="1" /><a:t>10</a:t></a:r></a:p></a:txBody></a:tc><a:tc><a:txBody><a:bodyPr /><a:lstStyle /><a:p><a:pPr lvl="0" indent="0" marL="0"><a:buNone /></a:pPr><a:r><a:rPr b="1" /><a:t>Nothing — identification is not a dial</a:t></a:r></a:p></a:txBody></a:tc><a:tc><a:txBody><a:bodyPr /><a:lstStyle /><a:p><a:pPr lvl="0" indent="0" marL="0"><a:buNone /></a:pPr><a:r><a:rPr /><a:t>“A better predictor is a better policy guide”</a:t></a:r></a:p></a:txBody></a:tc></a:tr><a:tr h="0"><a:tc><a:txBody><a:bodyPr /><a:lstStyle /><a:p><a:pPr lvl="0" indent="0" marL="0"><a:buNone /></a:pPr><a:r><a:rPr /><a:t>11</a:t></a:r></a:p></a:txBody></a:tc><a:tc><a:txBody><a:bodyPr /><a:lstStyle /><a:p><a:pPr lvl="0" indent="0" marL="0"><a:buNone /></a:pPr><a:r><a:rPr /><a:t>The monitoring threshold</a:t></a:r></a:p></a:txBody></a:tc><a:tc><a:txBody><a:bodyPr /><a:lstStyle /><a:p><a:pPr lvl="0" indent="0" marL="0"><a:buNone /></a:pPr><a:r><a:rPr /><a:t>“It worked last year”</a:t></a:r></a:p></a:txBody></a:tc></a:tr></a:tbl></a:graphicData></a:graphic></p:graphicFrame></p:spTree></p:cSld></p:sld>
+</file>
+
+<file path=ppt/slides/slide27.xml><?xml version="1.0" encoding="utf-8"?>
+<p:sld xmlns:a="http://schemas.openxmlformats.org/drawingml/2006/main" xmlns:r="http://schemas.openxmlformats.org/officeDocument/2006/relationships" xmlns:p="http://schemas.openxmlformats.org/presentationml/2006/main">
+  <p:cSld>
+    <p:spTree>
+      <p:nvGrpSpPr>
+        <p:cNvPr id="1" name=""/>
+        <p:cNvGrpSpPr/>
+        <p:nvPr/>
+      </p:nvGrpSpPr>
+      <p:grpSpPr>
+        <a:xfrm>
+          <a:off x="0" y="0"/>
+          <a:ext cx="0" cy="0"/>
+          <a:chOff x="0" y="0"/>
+          <a:chExt cx="0" cy="0"/>
+        </a:xfrm>
+      </p:grpSpPr>
+      <p:sp>
+        <p:nvSpPr>
+          <p:cNvPr id="2" name="Title 1"/>
+          <p:cNvSpPr>
+            <a:spLocks noGrp="1"/>
+          </p:cNvSpPr>
+          <p:nvPr>
+            <p:ph type="title"/>
+          </p:nvPr>
+        </p:nvSpPr>
+        <p:spPr/>
+        <p:txBody>
+          <a:bodyPr/>
+          <a:lstStyle/>
+          <a:p>
+            <a:pPr lvl="0" indent="0" marL="0">
+              <a:buNone/>
+            </a:pPr>
+            <a:r>
+              <a:rPr/>
+              <a:t>The exception that defines the course</a:t>
             </a:r>
           </a:p>
         </p:txBody>
@@ -5741,65 +5166,195 @@
           <a:bodyPr/>
           <a:lstStyle/>
           <a:p>
-            <a:pPr lvl="0" indent="-342900" marL="342900">
-              <a:buAutoNum type="arabicPeriod"/>
+            <a:pPr lvl="0" indent="0" marL="1270000">
+              <a:buNone/>
             </a:pPr>
             <a:r>
-              <a:rPr/>
-              <a:t>Backtest </a:t>
+              <a:rPr sz="2000" b="1"/>
+              <a:t>No tuning parameter buys you identification.</a:t>
+            </a:r>
+          </a:p>
+          <a:p>
+            <a:pPr lvl="0" indent="0" marL="0">
+              <a:buNone/>
+            </a:pPr>
+            <a:r>
+              <a:rPr/>
+              <a:t>Session 10 is the one week with nothing to tune. That is not an omission — it is the point.</a:t>
+            </a:r>
+          </a:p>
+        </p:txBody>
+      </p:sp>
+    </p:spTree>
+  </p:cSld>
+</p:sld>
+</file>
+
+<file path=ppt/slides/slide28.xml><?xml version="1.0" encoding="utf-8"?>
+<p:sld xmlns:a="http://schemas.openxmlformats.org/drawingml/2006/main" xmlns:r="http://schemas.openxmlformats.org/officeDocument/2006/relationships" xmlns:p="http://schemas.openxmlformats.org/presentationml/2006/main">
+  <p:cSld>
+    <p:spTree>
+      <p:nvGrpSpPr>
+        <p:cNvPr id="1" name=""/>
+        <p:cNvGrpSpPr/>
+        <p:nvPr/>
+      </p:nvGrpSpPr>
+      <p:grpSpPr>
+        <a:xfrm>
+          <a:off x="0" y="0"/>
+          <a:ext cx="0" cy="0"/>
+          <a:chOff x="0" y="0"/>
+          <a:chExt cx="0" cy="0"/>
+        </a:xfrm>
+      </p:grpSpPr>
+      <p:sp>
+        <p:nvSpPr>
+          <p:cNvPr id="2" name="Title 1"/>
+          <p:cNvSpPr>
+            <a:spLocks noGrp="1"/>
+          </p:cNvSpPr>
+          <p:nvPr>
+            <p:ph type="title"/>
+          </p:nvPr>
+        </p:nvSpPr>
+        <p:spPr>
+          <a:xfrm>
+            <a:off x="722313" y="3305176"/>
+            <a:ext cx="7772400" cy="1021556"/>
+          </a:xfrm>
+        </p:spPr>
+        <p:txBody>
+          <a:bodyPr/>
+          <a:lstStyle/>
+          <a:p>
+            <a:pPr lvl="0" indent="0" marL="0">
+              <a:buNone/>
+            </a:pPr>
+            <a:r>
+              <a:rPr/>
+              <a:t>11.6 Returning to </a:t>
+            </a:r>
+            <a:r>
+              <a:rPr i="1"/>
+              <a:t>Europe 2031</a:t>
+            </a:r>
+          </a:p>
+        </p:txBody>
+      </p:sp>
+    </p:spTree>
+  </p:cSld>
+</p:sld>
+</file>
+
+<file path=ppt/slides/slide29.xml><?xml version="1.0" encoding="utf-8"?>
+<p:sld xmlns:a="http://schemas.openxmlformats.org/drawingml/2006/main" xmlns:r="http://schemas.openxmlformats.org/officeDocument/2006/relationships" xmlns:p="http://schemas.openxmlformats.org/presentationml/2006/main">
+  <p:cSld>
+    <p:spTree>
+      <p:nvGrpSpPr>
+        <p:cNvPr id="1" name=""/>
+        <p:cNvGrpSpPr/>
+        <p:nvPr/>
+      </p:nvGrpSpPr>
+      <p:grpSpPr>
+        <a:xfrm>
+          <a:off x="0" y="0"/>
+          <a:ext cx="0" cy="0"/>
+          <a:chOff x="0" y="0"/>
+          <a:chExt cx="0" cy="0"/>
+        </a:xfrm>
+      </p:grpSpPr>
+      <p:sp>
+        <p:nvSpPr>
+          <p:cNvPr id="2" name="Title 1"/>
+          <p:cNvSpPr>
+            <a:spLocks noGrp="1"/>
+          </p:cNvSpPr>
+          <p:nvPr>
+            <p:ph type="title"/>
+          </p:nvPr>
+        </p:nvSpPr>
+        <p:spPr/>
+        <p:txBody>
+          <a:bodyPr/>
+          <a:lstStyle/>
+          <a:p>
+            <a:pPr lvl="0" indent="0" marL="0">
+              <a:buNone/>
+            </a:pPr>
+            <a:r>
+              <a:rPr/>
+              <a:t>Sharper questions than in week one</a:t>
+            </a:r>
+          </a:p>
+        </p:txBody>
+      </p:sp>
+      <p:sp>
+        <p:nvSpPr>
+          <p:cNvPr id="3" name="Content Placeholder 2"/>
+          <p:cNvSpPr>
+            <a:spLocks noGrp="1"/>
+          </p:cNvSpPr>
+          <p:nvPr>
+            <p:ph idx="1"/>
+          </p:nvPr>
+        </p:nvSpPr>
+        <p:spPr/>
+        <p:txBody>
+          <a:bodyPr/>
+          <a:lstStyle/>
+          <a:p>
+            <a:pPr lvl="0" indent="0" marL="0">
+              <a:buNone/>
+            </a:pPr>
+            <a:r>
+              <a:rPr/>
+              <a:t>The scenario’s numbers were introduced in Session 01 as </a:t>
             </a:r>
             <a:r>
               <a:rPr b="1"/>
-              <a:t>your group’s own model</a:t>
-            </a:r>
-            <a:r>
-              <a:rPr/>
-              <a:t> with a rolling origin</a:t>
-            </a:r>
-          </a:p>
-          <a:p>
-            <a:pPr lvl="0" indent="-342900" marL="342900">
-              <a:buAutoNum type="arabicPeriod"/>
-            </a:pPr>
-            <a:r>
-              <a:rPr/>
-              <a:t>Plot error by year and find the break</a:t>
-            </a:r>
-          </a:p>
-          <a:p>
-            <a:pPr lvl="0" indent="-342900" marL="342900">
-              <a:buAutoNum type="arabicPeriod"/>
-            </a:pPr>
-            <a:r>
-              <a:rPr/>
-              <a:t>Run the era classifier; report the AUC and read it</a:t>
-            </a:r>
-          </a:p>
-          <a:p>
-            <a:pPr lvl="0" indent="-342900" marL="342900">
-              <a:buAutoNum type="arabicPeriod"/>
-            </a:pPr>
-            <a:r>
-              <a:rPr/>
-              <a:t>Complete the governance file, including a numeric trigger</a:t>
-            </a:r>
-          </a:p>
-          <a:p>
-            <a:pPr lvl="0" indent="-342900" marL="342900">
-              <a:buAutoNum type="arabicPeriod"/>
-            </a:pPr>
-            <a:r>
-              <a:rPr/>
-              <a:t>Three sentences on what your model is worth in 2027, and why</a:t>
-            </a:r>
-          </a:p>
-          <a:p>
-            <a:pPr lvl="0" indent="0" marL="0">
-              <a:buNone/>
-            </a:pPr>
-            <a:r>
-              <a:rPr/>
-              <a:t>Session 12 is your defence. The governance file is what you will be asked about.</a:t>
+              <a:t>parameters of a narrative</a:t>
+            </a:r>
+            <a:r>
+              <a:rPr/>
+              <a:t>. You can now interrogate them.</a:t>
+            </a:r>
+          </a:p>
+          <a:p>
+            <a:pPr lvl="0"/>
+            <a:r>
+              <a:rPr/>
+              <a:t>What would a </a:t>
+            </a:r>
+            <a:r>
+              <a:rPr b="1"/>
+              <a:t>factor model</a:t>
+            </a:r>
+            <a:r>
+              <a:rPr/>
+              <a:t> (S08) say about how many independent dimensions “technological capacity” actually has? Is compute one factor, or a proxy for several?</a:t>
+            </a:r>
+          </a:p>
+          <a:p>
+            <a:pPr lvl="0"/>
+            <a:r>
+              <a:rPr/>
+              <a:t>Is the labour-displacement mechanism a </a:t>
+            </a:r>
+            <a:r>
+              <a:rPr b="1"/>
+              <a:t>prediction</a:t>
+            </a:r>
+            <a:r>
+              <a:rPr/>
+              <a:t> or a </a:t>
+            </a:r>
+            <a:r>
+              <a:rPr b="1"/>
+              <a:t>causal</a:t>
+            </a:r>
+            <a:r>
+              <a:rPr/>
+              <a:t> claim (S10)? Which would you need to justify the narrative’s policy responses?</a:t>
             </a:r>
           </a:p>
         </p:txBody>
@@ -5846,7 +5401,7 @@
             </a:pPr>
             <a:r>
               <a:rPr/>
-              <a:t>The 90 minutes ahead</a:t>
+              <a:t>These slides follow the notes</a:t>
             </a:r>
           </a:p>
         </p:txBody>
@@ -5886,7 +5441,7 @@
                       </a:pPr>
                       <a:r>
                         <a:rPr b="1"/>
-                        <a:t>0–10</a:t>
+                        <a:t>11.1</a:t>
                       </a:r>
                     </a:p>
                   </a:txBody>
@@ -5901,7 +5456,7 @@
                       </a:pPr>
                       <a:r>
                         <a:rPr/>
-                        <a:t>Forecasting is not cross-validation</a:t>
+                        <a:t>Backtesting time-dependent models</a:t>
                       </a:r>
                     </a:p>
                   </a:txBody>
@@ -5918,7 +5473,7 @@
                       </a:pPr>
                       <a:r>
                         <a:rPr b="1"/>
-                        <a:t>10–30</a:t>
+                        <a:t>11.2</a:t>
                       </a:r>
                     </a:p>
                   </a:txBody>
@@ -5933,7 +5488,7 @@
                       </a:pPr>
                       <a:r>
                         <a:rPr/>
-                        <a:t>Backtesting with a rolling origin</a:t>
+                        <a:t>Comparing forecasts honestly</a:t>
                       </a:r>
                     </a:p>
                   </a:txBody>
@@ -5950,7 +5505,7 @@
                       </a:pPr>
                       <a:r>
                         <a:rPr b="1"/>
-                        <a:t>30–50</a:t>
+                        <a:t>11.3</a:t>
                       </a:r>
                     </a:p>
                   </a:txBody>
@@ -5965,7 +5520,7 @@
                       </a:pPr>
                       <a:r>
                         <a:rPr/>
-                        <a:t>Distribution shift, and its three kinds</a:t>
+                        <a:t>Distribution shift</a:t>
                       </a:r>
                     </a:p>
                   </a:txBody>
@@ -5982,7 +5537,7 @@
                       </a:pPr>
                       <a:r>
                         <a:rPr b="1"/>
-                        <a:t>50–70</a:t>
+                        <a:t>11.4</a:t>
                       </a:r>
                     </a:p>
                   </a:txBody>
@@ -5997,7 +5552,7 @@
                       </a:pPr>
                       <a:r>
                         <a:rPr/>
-                        <a:t>Detecting drift before it costs you</a:t>
+                        <a:t>Model governance</a:t>
                       </a:r>
                     </a:p>
                   </a:txBody>
@@ -6014,7 +5569,7 @@
                       </a:pPr>
                       <a:r>
                         <a:rPr b="1"/>
-                        <a:t>70–85</a:t>
+                        <a:t>11.5</a:t>
                       </a:r>
                     </a:p>
                   </a:txBody>
@@ -6029,7 +5584,7 @@
                       </a:pPr>
                       <a:r>
                         <a:rPr/>
-                        <a:t>Governance: what you owe the next person</a:t>
+                        <a:t>The arc, in one table</a:t>
                       </a:r>
                     </a:p>
                   </a:txBody>
@@ -6046,7 +5601,7 @@
                       </a:pPr>
                       <a:r>
                         <a:rPr b="1"/>
-                        <a:t>85–90</a:t>
+                        <a:t>11.6</a:t>
                       </a:r>
                     </a:p>
                   </a:txBody>
@@ -6061,7 +5616,11 @@
                       </a:pPr>
                       <a:r>
                         <a:rPr/>
-                        <a:t>Handoff to the lab</a:t>
+                        <a:t>Returning to </a:t>
+                      </a:r>
+                      <a:r>
+                        <a:rPr i="1"/>
+                        <a:t>Europe 2031</a:t>
                       </a:r>
                     </a:p>
                   </a:txBody>
@@ -6071,6 +5630,537 @@
           </a:graphicData>
         </a:graphic>
       </p:graphicFrame>
+    </p:spTree>
+  </p:cSld>
+</p:sld>
+</file>
+
+<file path=ppt/slides/slide30.xml><?xml version="1.0" encoding="utf-8"?>
+<p:sld xmlns:a="http://schemas.openxmlformats.org/drawingml/2006/main" xmlns:r="http://schemas.openxmlformats.org/officeDocument/2006/relationships" xmlns:p="http://schemas.openxmlformats.org/presentationml/2006/main">
+  <p:cSld>
+    <p:spTree>
+      <p:nvGrpSpPr>
+        <p:cNvPr id="1" name=""/>
+        <p:cNvGrpSpPr/>
+        <p:nvPr/>
+      </p:nvGrpSpPr>
+      <p:grpSpPr>
+        <a:xfrm>
+          <a:off x="0" y="0"/>
+          <a:ext cx="0" cy="0"/>
+          <a:chOff x="0" y="0"/>
+          <a:chExt cx="0" cy="0"/>
+        </a:xfrm>
+      </p:grpSpPr>
+      <p:sp>
+        <p:nvSpPr>
+          <p:cNvPr id="2" name="Title 1"/>
+          <p:cNvSpPr>
+            <a:spLocks noGrp="1"/>
+          </p:cNvSpPr>
+          <p:nvPr>
+            <p:ph type="title"/>
+          </p:nvPr>
+        </p:nvSpPr>
+        <p:spPr/>
+        <p:txBody>
+          <a:bodyPr/>
+          <a:lstStyle/>
+          <a:p>
+            <a:pPr lvl="0" indent="0" marL="0">
+              <a:buNone/>
+            </a:pPr>
+            <a:r>
+              <a:rPr/>
+              <a:t>And two more</a:t>
+            </a:r>
+          </a:p>
+        </p:txBody>
+      </p:sp>
+      <mc:AlternateContent xmlns:mc="http://schemas.openxmlformats.org/markup-compatibility/2006">
+        <mc:Choice xmlns:a14="http://schemas.microsoft.com/office/drawing/2010/main" Requires="a14">
+          <p:sp>
+            <p:nvSpPr>
+              <p:cNvPr id="3" name="Content Placeholder 2"/>
+              <p:cNvSpPr>
+                <a:spLocks noGrp="1"/>
+              </p:cNvSpPr>
+              <p:nvPr>
+                <p:ph idx="1"/>
+              </p:nvPr>
+            </p:nvSpPr>
+            <p:spPr/>
+            <p:txBody>
+              <a:bodyPr/>
+              <a:lstStyle/>
+              <a:p>
+                <a:pPr lvl="0"/>
+                <a:r>
+                  <a:rPr/>
+                  <a:t>Its policy menu implies </a:t>
+                </a:r>
+                <a:r>
+                  <a:rPr b="1"/>
+                  <a:t>decisions under cost asymmetry</a:t>
+                </a:r>
+                <a:r>
+                  <a:rPr/>
+                  <a:t>. What are </a:t>
+                </a:r>
+                <a14:m>
+                  <m:oMath xmlns:m="http://schemas.openxmlformats.org/officeDocument/2006/math">
+                    <m:sSub>
+                      <m:e>
+                        <m:r>
+                          <m:t>c</m:t>
+                        </m:r>
+                      </m:e>
+                      <m:sub>
+                        <m:r>
+                          <m:t>F</m:t>
+                        </m:r>
+                        <m:r>
+                          <m:t>P</m:t>
+                        </m:r>
+                      </m:sub>
+                    </m:sSub>
+                  </m:oMath>
+                </a14:m>
+                <a:r>
+                  <a:rPr/>
+                  <a:t> and </a:t>
+                </a:r>
+                <a14:m>
+                  <m:oMath xmlns:m="http://schemas.openxmlformats.org/officeDocument/2006/math">
+                    <m:sSub>
+                      <m:e>
+                        <m:r>
+                          <m:t>c</m:t>
+                        </m:r>
+                      </m:e>
+                      <m:sub>
+                        <m:r>
+                          <m:t>F</m:t>
+                        </m:r>
+                        <m:r>
+                          <m:t>N</m:t>
+                        </m:r>
+                      </m:sub>
+                    </m:sSub>
+                  </m:oMath>
+                </a14:m>
+                <a:r>
+                  <a:rPr/>
+                  <a:t> for acting on a false signal of European decline versus missing a true one (S06)?</a:t>
+                </a:r>
+              </a:p>
+              <a:p>
+                <a:pPr lvl="0"/>
+                <a:r>
+                  <a:rPr/>
+                  <a:t>Its indicators would be </a:t>
+                </a:r>
+                <a:r>
+                  <a:rPr b="1"/>
+                  <a:t>monitored over years</a:t>
+                </a:r>
+                <a:r>
+                  <a:rPr/>
+                  <a:t>. Which are vulnerable to </a:t>
+                </a:r>
+                <a:r>
+                  <a:rPr b="1"/>
+                  <a:t>Goodhart</a:t>
+                </a:r>
+                <a:r>
+                  <a:rPr/>
+                  <a:t>, and which to </a:t>
+                </a:r>
+                <a:r>
+                  <a:rPr b="1"/>
+                  <a:t>concept drift</a:t>
+                </a:r>
+                <a:r>
+                  <a:rPr/>
+                  <a:t> (S11)?</a:t>
+                </a:r>
+              </a:p>
+            </p:txBody>
+          </p:sp>
+        </mc:Choice>
+      </mc:AlternateContent>
+    </p:spTree>
+  </p:cSld>
+</p:sld>
+</file>
+
+<file path=ppt/slides/slide31.xml><?xml version="1.0" encoding="utf-8"?>
+<p:sld xmlns:a="http://schemas.openxmlformats.org/drawingml/2006/main" xmlns:r="http://schemas.openxmlformats.org/officeDocument/2006/relationships" xmlns:p="http://schemas.openxmlformats.org/presentationml/2006/main">
+  <p:cSld>
+    <p:spTree>
+      <p:nvGrpSpPr>
+        <p:cNvPr id="1" name=""/>
+        <p:cNvGrpSpPr/>
+        <p:nvPr/>
+      </p:nvGrpSpPr>
+      <p:grpSpPr>
+        <a:xfrm>
+          <a:off x="0" y="0"/>
+          <a:ext cx="0" cy="0"/>
+          <a:chOff x="0" y="0"/>
+          <a:chExt cx="0" cy="0"/>
+        </a:xfrm>
+      </p:grpSpPr>
+      <p:sp>
+        <p:nvSpPr>
+          <p:cNvPr id="2" name="Title 1"/>
+          <p:cNvSpPr>
+            <a:spLocks noGrp="1"/>
+          </p:cNvSpPr>
+          <p:nvPr>
+            <p:ph type="title"/>
+          </p:nvPr>
+        </p:nvSpPr>
+        <p:spPr/>
+        <p:txBody>
+          <a:bodyPr/>
+          <a:lstStyle/>
+          <a:p>
+            <a:pPr lvl="0" indent="0" marL="0">
+              <a:buNone/>
+            </a:pPr>
+            <a:r>
+              <a:rPr/>
+              <a:t>Why a stress test</a:t>
+            </a:r>
+          </a:p>
+        </p:txBody>
+      </p:sp>
+      <p:sp>
+        <p:nvSpPr>
+          <p:cNvPr id="3" name="Content Placeholder 2"/>
+          <p:cNvSpPr>
+            <a:spLocks noGrp="1"/>
+          </p:cNvSpPr>
+          <p:nvPr>
+            <p:ph idx="1"/>
+          </p:nvPr>
+        </p:nvSpPr>
+        <p:spPr/>
+        <p:txBody>
+          <a:bodyPr/>
+          <a:lstStyle/>
+          <a:p>
+            <a:pPr lvl="0" indent="0" marL="1270000">
+              <a:buNone/>
+            </a:pPr>
+            <a:r>
+              <a:rPr sz="2000"/>
+              <a:t>The purpose of a stress test is not to be right. It is to make you specify </a:t>
+            </a:r>
+            <a:r>
+              <a:rPr sz="2000" b="1"/>
+              <a:t>what you would need to know.</a:t>
+            </a:r>
+          </a:p>
+          <a:p>
+            <a:pPr lvl="0" indent="0" marL="0">
+              <a:buNone/>
+            </a:pPr>
+            <a:r>
+              <a:rPr/>
+              <a:t>That is also the purpose of a model — and it is what you will be examined on next week.</a:t>
+            </a:r>
+          </a:p>
+        </p:txBody>
+      </p:sp>
+    </p:spTree>
+  </p:cSld>
+</p:sld>
+</file>
+
+<file path=ppt/slides/slide32.xml><?xml version="1.0" encoding="utf-8"?>
+<p:sld xmlns:a="http://schemas.openxmlformats.org/drawingml/2006/main" xmlns:r="http://schemas.openxmlformats.org/officeDocument/2006/relationships" xmlns:p="http://schemas.openxmlformats.org/presentationml/2006/main">
+  <p:cSld>
+    <p:spTree>
+      <p:nvGrpSpPr>
+        <p:cNvPr id="1" name=""/>
+        <p:cNvGrpSpPr/>
+        <p:nvPr/>
+      </p:nvGrpSpPr>
+      <p:grpSpPr>
+        <a:xfrm>
+          <a:off x="0" y="0"/>
+          <a:ext cx="0" cy="0"/>
+          <a:chOff x="0" y="0"/>
+          <a:chExt cx="0" cy="0"/>
+        </a:xfrm>
+      </p:grpSpPr>
+      <p:sp>
+        <p:nvSpPr>
+          <p:cNvPr id="2" name="Title 1"/>
+          <p:cNvSpPr>
+            <a:spLocks noGrp="1"/>
+          </p:cNvSpPr>
+          <p:nvPr>
+            <p:ph type="title"/>
+          </p:nvPr>
+        </p:nvSpPr>
+        <p:spPr>
+          <a:xfrm>
+            <a:off x="722313" y="3305176"/>
+            <a:ext cx="7772400" cy="1021556"/>
+          </a:xfrm>
+        </p:spPr>
+        <p:txBody>
+          <a:bodyPr/>
+          <a:lstStyle/>
+          <a:p>
+            <a:pPr lvl="0" indent="0" marL="0">
+              <a:buNone/>
+            </a:pPr>
+            <a:r>
+              <a:rPr/>
+              <a:t>The lab</a:t>
+            </a:r>
+          </a:p>
+        </p:txBody>
+      </p:sp>
+    </p:spTree>
+  </p:cSld>
+</p:sld>
+</file>
+
+<file path=ppt/slides/slide33.xml><?xml version="1.0" encoding="utf-8"?>
+<p:sld xmlns:a="http://schemas.openxmlformats.org/drawingml/2006/main" xmlns:r="http://schemas.openxmlformats.org/officeDocument/2006/relationships" xmlns:p="http://schemas.openxmlformats.org/presentationml/2006/main">
+  <p:cSld>
+    <p:spTree>
+      <p:nvGrpSpPr>
+        <p:cNvPr id="1" name=""/>
+        <p:cNvGrpSpPr/>
+        <p:nvPr/>
+      </p:nvGrpSpPr>
+      <p:grpSpPr>
+        <a:xfrm>
+          <a:off x="0" y="0"/>
+          <a:ext cx="0" cy="0"/>
+          <a:chOff x="0" y="0"/>
+          <a:chExt cx="0" cy="0"/>
+        </a:xfrm>
+      </p:grpSpPr>
+      <p:sp>
+        <p:nvSpPr>
+          <p:cNvPr id="2" name="Title 1"/>
+          <p:cNvSpPr>
+            <a:spLocks noGrp="1"/>
+          </p:cNvSpPr>
+          <p:nvPr>
+            <p:ph type="title"/>
+          </p:nvPr>
+        </p:nvSpPr>
+        <p:spPr/>
+        <p:txBody>
+          <a:bodyPr/>
+          <a:lstStyle/>
+          <a:p>
+            <a:pPr lvl="0" indent="0" marL="0">
+              <a:buNone/>
+            </a:pPr>
+            <a:r>
+              <a:rPr/>
+              <a:t>What you do</a:t>
+            </a:r>
+          </a:p>
+        </p:txBody>
+      </p:sp>
+      <p:sp>
+        <p:nvSpPr>
+          <p:cNvPr id="3" name="Content Placeholder 2"/>
+          <p:cNvSpPr>
+            <a:spLocks noGrp="1"/>
+          </p:cNvSpPr>
+          <p:nvPr>
+            <p:ph idx="1"/>
+          </p:nvPr>
+        </p:nvSpPr>
+        <p:spPr/>
+        <p:txBody>
+          <a:bodyPr/>
+          <a:lstStyle/>
+          <a:p>
+            <a:pPr lvl="0" indent="-342900" marL="342900">
+              <a:buAutoNum type="arabicPeriod"/>
+            </a:pPr>
+            <a:r>
+              <a:rPr/>
+              <a:t>Backtest </a:t>
+            </a:r>
+            <a:r>
+              <a:rPr b="1"/>
+              <a:t>your project’s</a:t>
+            </a:r>
+            <a:r>
+              <a:rPr/>
+              <a:t> model with a rolling origin, at the deployment horizon</a:t>
+            </a:r>
+          </a:p>
+          <a:p>
+            <a:pPr lvl="0" indent="-342900" marL="342900">
+              <a:buAutoNum type="arabicPeriod"/>
+            </a:pPr>
+            <a:r>
+              <a:rPr/>
+              <a:t>Plot error by period and find the break</a:t>
+            </a:r>
+          </a:p>
+          <a:p>
+            <a:pPr lvl="0" indent="-342900" marL="342900">
+              <a:buAutoNum type="arabicPeriod"/>
+            </a:pPr>
+            <a:r>
+              <a:rPr/>
+              <a:t>Run the era classifier; report the AUC and read it</a:t>
+            </a:r>
+          </a:p>
+          <a:p>
+            <a:pPr lvl="0" indent="-342900" marL="342900">
+              <a:buAutoNum type="arabicPeriod"/>
+            </a:pPr>
+            <a:r>
+              <a:rPr/>
+              <a:t>Complete the governance file, including a </a:t>
+            </a:r>
+            <a:r>
+              <a:rPr b="1"/>
+              <a:t>numeric</a:t>
+            </a:r>
+            <a:r>
+              <a:rPr/>
+              <a:t> retirement trigger</a:t>
+            </a:r>
+          </a:p>
+          <a:p>
+            <a:pPr lvl="0" indent="0" marL="0">
+              <a:buNone/>
+            </a:pPr>
+            <a:r>
+              <a:rPr/>
+              <a:t>Every preprocessing step inside the loop — including factor extraction.</a:t>
+            </a:r>
+          </a:p>
+        </p:txBody>
+      </p:sp>
+    </p:spTree>
+  </p:cSld>
+</p:sld>
+</file>
+
+<file path=ppt/slides/slide34.xml><?xml version="1.0" encoding="utf-8"?>
+<p:sld xmlns:a="http://schemas.openxmlformats.org/drawingml/2006/main" xmlns:r="http://schemas.openxmlformats.org/officeDocument/2006/relationships" xmlns:p="http://schemas.openxmlformats.org/presentationml/2006/main">
+  <p:cSld>
+    <p:spTree>
+      <p:nvGrpSpPr>
+        <p:cNvPr id="1" name=""/>
+        <p:cNvGrpSpPr/>
+        <p:nvPr/>
+      </p:nvGrpSpPr>
+      <p:grpSpPr>
+        <a:xfrm>
+          <a:off x="0" y="0"/>
+          <a:ext cx="0" cy="0"/>
+          <a:chOff x="0" y="0"/>
+          <a:chExt cx="0" cy="0"/>
+        </a:xfrm>
+      </p:grpSpPr>
+      <p:sp>
+        <p:nvSpPr>
+          <p:cNvPr id="2" name="Title 1"/>
+          <p:cNvSpPr>
+            <a:spLocks noGrp="1"/>
+          </p:cNvSpPr>
+          <p:nvPr>
+            <p:ph type="title"/>
+          </p:nvPr>
+        </p:nvSpPr>
+        <p:spPr/>
+        <p:txBody>
+          <a:bodyPr/>
+          <a:lstStyle/>
+          <a:p>
+            <a:pPr lvl="0" indent="0" marL="0">
+              <a:buNone/>
+            </a:pPr>
+            <a:r>
+              <a:rPr/>
+              <a:t>The two-minute report</a:t>
+            </a:r>
+          </a:p>
+        </p:txBody>
+      </p:sp>
+      <p:sp>
+        <p:nvSpPr>
+          <p:cNvPr id="3" name="Content Placeholder 2"/>
+          <p:cNvSpPr>
+            <a:spLocks noGrp="1"/>
+          </p:cNvSpPr>
+          <p:nvPr>
+            <p:ph idx="1"/>
+          </p:nvPr>
+        </p:nvSpPr>
+        <p:spPr/>
+        <p:txBody>
+          <a:bodyPr/>
+          <a:lstStyle/>
+          <a:p>
+            <a:pPr lvl="0" indent="-342900" marL="342900">
+              <a:buAutoNum type="arabicPeriod"/>
+            </a:pPr>
+            <a:r>
+              <a:rPr b="1"/>
+              <a:t>What I did</a:t>
+            </a:r>
+            <a:r>
+              <a:rPr/>
+              <a:t> — the backtest design, the window, the horizon</a:t>
+            </a:r>
+          </a:p>
+          <a:p>
+            <a:pPr lvl="0" indent="-342900" marL="342900">
+              <a:buAutoNum type="arabicPeriod"/>
+            </a:pPr>
+            <a:r>
+              <a:rPr b="1"/>
+              <a:t>The number</a:t>
+            </a:r>
+            <a:r>
+              <a:rPr/>
+              <a:t> — error against a hard benchmark, with a DM statement</a:t>
+            </a:r>
+          </a:p>
+          <a:p>
+            <a:pPr lvl="0" indent="-342900" marL="342900">
+              <a:buAutoNum type="arabicPeriod"/>
+            </a:pPr>
+            <a:r>
+              <a:rPr b="1"/>
+              <a:t>The catch</a:t>
+            </a:r>
+            <a:r>
+              <a:rPr/>
+              <a:t> — what would make you retire this model</a:t>
+            </a:r>
+          </a:p>
+          <a:p>
+            <a:pPr lvl="0" indent="0" marL="0">
+              <a:buNone/>
+            </a:pPr>
+            <a:r>
+              <a:rPr/>
+              <a:t>Session 12 is your defence. The governance file is what you will be asked about.</a:t>
+            </a:r>
+          </a:p>
+        </p:txBody>
+      </p:sp>
     </p:spTree>
   </p:cSld>
 </p:sld>
@@ -6095,12 +6185,12 @@
       </p:grpSpPr>
       <p:sp>
         <p:nvSpPr>
-          <p:cNvPr id="2" name="Title 1"/>
-          <p:cNvSpPr>
-            <a:spLocks noGrp="1"/>
-          </p:cNvSpPr>
-          <p:nvPr>
-            <p:ph type="title"/>
+          <p:cNvPr id="3" name="Content Placeholder 2"/>
+          <p:cNvSpPr>
+            <a:spLocks noGrp="1"/>
+          </p:cNvSpPr>
+          <p:nvPr>
+            <p:ph idx="1"/>
           </p:nvPr>
         </p:nvSpPr>
         <p:spPr/>
@@ -6113,70 +6203,18 @@
             </a:pPr>
             <a:r>
               <a:rPr/>
-              <a:t>Before class you read</a:t>
-            </a:r>
-          </a:p>
-        </p:txBody>
-      </p:sp>
-      <p:sp>
-        <p:nvSpPr>
-          <p:cNvPr id="3" name="Content Placeholder 2"/>
-          <p:cNvSpPr>
-            <a:spLocks noGrp="1"/>
-          </p:cNvSpPr>
-          <p:nvPr>
-            <p:ph idx="1"/>
-          </p:nvPr>
-        </p:nvSpPr>
-        <p:spPr/>
-        <p:txBody>
-          <a:bodyPr/>
-          <a:lstStyle/>
-          <a:p>
-            <a:pPr lvl="0" indent="0" marL="0">
-              <a:buNone/>
-            </a:pPr>
-            <a:r>
-              <a:rPr b="1"/>
-              <a:t>Mullainathan &amp; Spiess</a:t>
-            </a:r>
-            <a:r>
-              <a:rPr/>
-              <a:t>, </a:t>
-            </a:r>
-            <a:r>
-              <a:rPr i="1"/>
-              <a:t>Machine Learning: An Applied Econometric Approach</a:t>
-            </a:r>
-            <a:r>
-              <a:rPr/>
-              <a:t>, JEP 2017 — </a:t>
-            </a:r>
-            <a:r>
-              <a:rPr b="1"/>
-              <a:t>again</a:t>
-            </a:r>
-            <a:r>
-              <a:rPr/>
-              <a:t>, and this time only the closing sections.</a:t>
-            </a:r>
-          </a:p>
-          <a:p>
-            <a:pPr lvl="0" indent="0" marL="0">
-              <a:buNone/>
-            </a:pPr>
-            <a:r>
-              <a:rPr/>
-              <a:t>DOI: 10.1257/jep.31.2.87</a:t>
-            </a:r>
-          </a:p>
-          <a:p>
-            <a:pPr lvl="0" indent="0" marL="0">
-              <a:buNone/>
-            </a:pPr>
-            <a:r>
-              <a:rPr/>
-              <a:t>You read it in Session 04 for what ML does well. Read it now for what it assumes: that tomorrow resembles yesterday. Today is about when that fails.</a:t>
+              <a:t>Same numbering as </a:t>
+            </a:r>
+            <a:r>
+              <a:rPr>
+                <a:hlinkClick r:id="rId2"/>
+                <a:latin typeface="Courier"/>
+              </a:rPr>
+              <a:t>01-lecture/README.md</a:t>
+            </a:r>
+            <a:r>
+              <a:rPr/>
+              <a:t>.</a:t>
             </a:r>
           </a:p>
         </p:txBody>
@@ -6213,7 +6251,12 @@
             <p:ph type="title"/>
           </p:nvPr>
         </p:nvSpPr>
-        <p:spPr/>
+        <p:spPr>
+          <a:xfrm>
+            <a:off x="722313" y="3305176"/>
+            <a:ext cx="7772400" cy="1021556"/>
+          </a:xfrm>
+        </p:spPr>
         <p:txBody>
           <a:bodyPr/>
           <a:lstStyle/>
@@ -6223,41 +6266,7 @@
             </a:pPr>
             <a:r>
               <a:rPr/>
-              <a:t>Today’s question</a:t>
-            </a:r>
-          </a:p>
-        </p:txBody>
-      </p:sp>
-      <p:sp>
-        <p:nvSpPr>
-          <p:cNvPr id="3" name="Content Placeholder 2"/>
-          <p:cNvSpPr>
-            <a:spLocks noGrp="1"/>
-          </p:cNvSpPr>
-          <p:nvPr>
-            <p:ph idx="1"/>
-          </p:nvPr>
-        </p:nvSpPr>
-        <p:spPr/>
-        <p:txBody>
-          <a:bodyPr/>
-          <a:lstStyle/>
-          <a:p>
-            <a:pPr lvl="0" indent="0" marL="1270000">
-              <a:buNone/>
-            </a:pPr>
-            <a:r>
-              <a:rPr sz="2000" i="1"/>
-              <a:t>Your group has a model. What is it worth in 2027?</a:t>
-            </a:r>
-          </a:p>
-          <a:p>
-            <a:pPr lvl="0" indent="0" marL="0">
-              <a:buNone/>
-            </a:pPr>
-            <a:r>
-              <a:rPr/>
-              <a:t>Every number you have produced this term describes a world that has already happened. Nothing you have done yet establishes that it will keep working.</a:t>
+              <a:t>11.1 Backtesting</a:t>
             </a:r>
           </a:p>
         </p:txBody>
@@ -6294,12 +6303,7 @@
             <p:ph type="title"/>
           </p:nvPr>
         </p:nvSpPr>
-        <p:spPr>
-          <a:xfrm>
-            <a:off x="722313" y="3305176"/>
-            <a:ext cx="7772400" cy="1021556"/>
-          </a:xfrm>
-        </p:spPr>
+        <p:spPr/>
         <p:txBody>
           <a:bodyPr/>
           <a:lstStyle/>
@@ -6309,54 +6313,7 @@
             </a:pPr>
             <a:r>
               <a:rPr/>
-              <a:t>Backtesting</a:t>
-            </a:r>
-          </a:p>
-        </p:txBody>
-      </p:sp>
-    </p:spTree>
-  </p:cSld>
-</p:sld>
-</file>
-
-<file path=ppt/slides/slide7.xml><?xml version="1.0" encoding="utf-8"?>
-<p:sld xmlns:a="http://schemas.openxmlformats.org/drawingml/2006/main" xmlns:r="http://schemas.openxmlformats.org/officeDocument/2006/relationships" xmlns:p="http://schemas.openxmlformats.org/presentationml/2006/main">
-  <p:cSld>
-    <p:spTree>
-      <p:nvGrpSpPr>
-        <p:cNvPr id="1" name=""/>
-        <p:cNvGrpSpPr/>
-        <p:nvPr/>
-      </p:nvGrpSpPr>
-      <p:grpSpPr>
-        <a:xfrm>
-          <a:off x="0" y="0"/>
-          <a:ext cx="0" cy="0"/>
-          <a:chOff x="0" y="0"/>
-          <a:chExt cx="0" cy="0"/>
-        </a:xfrm>
-      </p:grpSpPr>
-      <p:sp>
-        <p:nvSpPr>
-          <p:cNvPr id="2" name="Title 1"/>
-          <p:cNvSpPr>
-            <a:spLocks noGrp="1"/>
-          </p:cNvSpPr>
-          <p:nvPr>
-            <p:ph type="title"/>
-          </p:nvPr>
-        </p:nvSpPr>
-        <p:spPr/>
-        <p:txBody>
-          <a:bodyPr/>
-          <a:lstStyle/>
-          <a:p>
-            <a:pPr lvl="0" indent="0" marL="0">
-              <a:buNone/>
-            </a:pPr>
-            <a:r>
-              <a:rPr/>
-              <a:t>Rolling origin</a:t>
+              <a:t>Three valid designs</a:t>
             </a:r>
           </a:p>
         </p:txBody>
@@ -6383,10 +6340,36 @@
                 </a:pPr>
                 <a:r>
                   <a:rPr/>
-                  <a:t>Train to time </a:t>
+                  <a:t>Random K-fold CV is invalid whenever observations are ordered in time.</a:t>
+                </a:r>
+              </a:p>
+              <a:p>
+                <a:pPr lvl="0"/>
+                <a:r>
+                  <a:rPr b="1"/>
+                  <a:t>Rolling origin, expanding window</a:t>
+                </a:r>
+                <a:r>
+                  <a:rPr/>
+                  <a:t> — train on </a:t>
                 </a:r>
                 <a14:m>
                   <m:oMath xmlns:m="http://schemas.openxmlformats.org/officeDocument/2006/math">
+                    <m:r>
+                      <m:t>1</m:t>
+                    </m:r>
+                    <m:r>
+                      <m:rPr>
+                        <m:sty m:val="p"/>
+                      </m:rPr>
+                      <m:t>.</m:t>
+                    </m:r>
+                    <m:r>
+                      <m:rPr>
+                        <m:sty m:val="p"/>
+                      </m:rPr>
+                      <m:t>.</m:t>
+                    </m:r>
                     <m:r>
                       <m:t>t</m:t>
                     </m:r>
@@ -6414,44 +6397,189 @@
                 </a14:m>
                 <a:r>
                   <a:rPr/>
-                  <a:t>, roll forward, repeat.</a:t>
+                  <a:t>, increment </a:t>
+                </a:r>
+                <a14:m>
+                  <m:oMath xmlns:m="http://schemas.openxmlformats.org/officeDocument/2006/math">
+                    <m:r>
+                      <m:t>t</m:t>
+                    </m:r>
+                  </m:oMath>
+                </a14:m>
+                <a:r>
+                  <a:rPr/>
+                  <a:t>. Uses all history; training size grows, so early and late errors are not comparable.</a:t>
                 </a:r>
               </a:p>
               <a:p>
                 <a:pPr lvl="0"/>
                 <a:r>
                   <a:rPr b="1"/>
-                  <a:t>Expanding window</a:t>
+                  <a:t>Rolling origin, fixed window</a:t>
                 </a:r>
                 <a:r>
                   <a:rPr/>
-                  <a:t> — training set grows; assumes the past stays relevant</a:t>
+                  <a:t> — train on </a:t>
+                </a:r>
+                <a14:m>
+                  <m:oMath xmlns:m="http://schemas.openxmlformats.org/officeDocument/2006/math">
+                    <m:r>
+                      <m:t>t</m:t>
+                    </m:r>
+                    <m:r>
+                      <m:rPr>
+                        <m:sty m:val="p"/>
+                      </m:rPr>
+                      <m:t>−</m:t>
+                    </m:r>
+                    <m:r>
+                      <m:t>w</m:t>
+                    </m:r>
+                    <m:r>
+                      <m:rPr>
+                        <m:sty m:val="p"/>
+                      </m:rPr>
+                      <m:t>.</m:t>
+                    </m:r>
+                    <m:r>
+                      <m:rPr>
+                        <m:sty m:val="p"/>
+                      </m:rPr>
+                      <m:t>.</m:t>
+                    </m:r>
+                    <m:r>
+                      <m:t>t</m:t>
+                    </m:r>
+                  </m:oMath>
+                </a14:m>
+                <a:r>
+                  <a:rPr/>
+                  <a:t>. Constant training size; adapts to structural change; discards old information.</a:t>
                 </a:r>
               </a:p>
               <a:p>
                 <a:pPr lvl="0"/>
                 <a:r>
                   <a:rPr b="1"/>
-                  <a:t>Rolling window</a:t>
+                  <a:t>Blocked CV with a purge and an embargo</a:t>
                 </a:r>
                 <a:r>
                   <a:rPr/>
-                  <a:t> — fixed length; assumes the distant past is stale</a:t>
+                  <a:t> — leave a gap of at least </a:t>
                 </a:r>
-              </a:p>
-              <a:p>
-                <a:pPr lvl="0" indent="0" marL="0">
-                  <a:buNone/>
-                </a:pPr>
+                <a14:m>
+                  <m:oMath xmlns:m="http://schemas.openxmlformats.org/officeDocument/2006/math">
+                    <m:r>
+                      <m:t>h</m:t>
+                    </m:r>
+                  </m:oMath>
+                </a14:m>
                 <a:r>
                   <a:rPr/>
-                  <a:t>Which you choose is a claim about how fast the world changes. State it.</a:t>
+                  <a:t> observations between train and test.</a:t>
                 </a:r>
               </a:p>
             </p:txBody>
           </p:sp>
         </mc:Choice>
       </mc:AlternateContent>
+    </p:spTree>
+  </p:cSld>
+</p:sld>
+</file>
+
+<file path=ppt/slides/slide7.xml><?xml version="1.0" encoding="utf-8"?>
+<p:sld xmlns:a="http://schemas.openxmlformats.org/drawingml/2006/main" xmlns:r="http://schemas.openxmlformats.org/officeDocument/2006/relationships" xmlns:p="http://schemas.openxmlformats.org/presentationml/2006/main">
+  <p:cSld>
+    <p:spTree>
+      <p:nvGrpSpPr>
+        <p:cNvPr id="1" name=""/>
+        <p:cNvGrpSpPr/>
+        <p:nvPr/>
+      </p:nvGrpSpPr>
+      <p:grpSpPr>
+        <a:xfrm>
+          <a:off x="0" y="0"/>
+          <a:ext cx="0" cy="0"/>
+          <a:chOff x="0" y="0"/>
+          <a:chExt cx="0" cy="0"/>
+        </a:xfrm>
+      </p:grpSpPr>
+      <p:sp>
+        <p:nvSpPr>
+          <p:cNvPr id="2" name="Title 1"/>
+          <p:cNvSpPr>
+            <a:spLocks noGrp="1"/>
+          </p:cNvSpPr>
+          <p:nvPr>
+            <p:ph type="title"/>
+          </p:nvPr>
+        </p:nvSpPr>
+        <p:spPr/>
+        <p:txBody>
+          <a:bodyPr/>
+          <a:lstStyle/>
+          <a:p>
+            <a:pPr lvl="0" indent="0" marL="0">
+              <a:buNone/>
+            </a:pPr>
+            <a:r>
+              <a:rPr/>
+              <a:t>Why the purge matters</a:t>
+            </a:r>
+          </a:p>
+        </p:txBody>
+      </p:sp>
+      <p:sp>
+        <p:nvSpPr>
+          <p:cNvPr id="3" name="Content Placeholder 2"/>
+          <p:cNvSpPr>
+            <a:spLocks noGrp="1"/>
+          </p:cNvSpPr>
+          <p:nvPr>
+            <p:ph idx="1"/>
+          </p:nvPr>
+        </p:nvSpPr>
+        <p:spPr/>
+        <p:txBody>
+          <a:bodyPr/>
+          <a:lstStyle/>
+          <a:p>
+            <a:pPr lvl="0" indent="0" marL="0">
+              <a:buNone/>
+            </a:pPr>
+            <a:r>
+              <a:rPr/>
+              <a:t>A gap prevents leakage through </a:t>
+            </a:r>
+            <a:r>
+              <a:rPr b="1"/>
+              <a:t>overlapping horizons</a:t>
+            </a:r>
+            <a:r>
+              <a:rPr/>
+              <a:t> or through </a:t>
+            </a:r>
+            <a:r>
+              <a:rPr b="1"/>
+              <a:t>serially correlated features</a:t>
+            </a:r>
+            <a:r>
+              <a:rPr/>
+              <a:t>.</a:t>
+            </a:r>
+          </a:p>
+          <a:p>
+            <a:pPr lvl="0" indent="0" marL="0">
+              <a:buNone/>
+            </a:pPr>
+            <a:r>
+              <a:rPr/>
+              <a:t>Essential whenever features are constructed from rolling windows — which, in macro work, is almost always.</a:t>
+            </a:r>
+          </a:p>
+        </p:txBody>
+      </p:sp>
     </p:spTree>
   </p:cSld>
 </p:sld>
@@ -6494,89 +6622,65 @@
             </a:pPr>
             <a:r>
               <a:rPr/>
-              <a:t>Respect the horizon</a:t>
-            </a:r>
-          </a:p>
-        </p:txBody>
-      </p:sp>
-      <mc:AlternateContent xmlns:mc="http://schemas.openxmlformats.org/markup-compatibility/2006">
-        <mc:Choice xmlns:a14="http://schemas.microsoft.com/office/drawing/2010/main" Requires="a14">
-          <p:sp>
-            <p:nvSpPr>
-              <p:cNvPr id="3" name="Content Placeholder 2"/>
-              <p:cNvSpPr>
-                <a:spLocks noGrp="1"/>
-              </p:cNvSpPr>
-              <p:nvPr>
-                <p:ph idx="1"/>
-              </p:nvPr>
-            </p:nvSpPr>
-            <p:spPr/>
-            <p:txBody>
-              <a:bodyPr/>
-              <a:lstStyle/>
-              <a:p>
-                <a:pPr lvl="0" indent="0" marL="0">
-                  <a:buNone/>
-                </a:pPr>
-                <a:r>
-                  <a:rPr/>
-                  <a:t>If you will forecast one year ahead, evaluate at one year ahead.</a:t>
-                </a:r>
-              </a:p>
-              <a:p>
-                <a:pPr lvl="0" indent="0" marL="0">
-                  <a:buNone/>
-                </a:pPr>
-                <a:r>
-                  <a:rPr/>
-                  <a:t>A model evaluated at </a:t>
-                </a:r>
-                <a14:m>
-                  <m:oMath xmlns:m="http://schemas.openxmlformats.org/officeDocument/2006/math">
-                    <m:r>
-                      <m:t>h</m:t>
-                    </m:r>
-                    <m:r>
-                      <m:rPr>
-                        <m:sty m:val="p"/>
-                      </m:rPr>
-                      <m:t>=</m:t>
-                    </m:r>
-                    <m:r>
-                      <m:t>1</m:t>
-                    </m:r>
-                  </m:oMath>
-                </a14:m>
-                <a:r>
-                  <a:rPr/>
-                  <a:t> and deployed at </a:t>
-                </a:r>
-                <a14:m>
-                  <m:oMath xmlns:m="http://schemas.openxmlformats.org/officeDocument/2006/math">
-                    <m:r>
-                      <m:t>h</m:t>
-                    </m:r>
-                    <m:r>
-                      <m:rPr>
-                        <m:sty m:val="p"/>
-                      </m:rPr>
-                      <m:t>=</m:t>
-                    </m:r>
-                    <m:r>
-                      <m:t>3</m:t>
-                    </m:r>
-                  </m:oMath>
-                </a14:m>
-                <a:r>
-                  <a:rPr/>
-                  <a:t> has never been tested at the task it is doing. This is more common than it sounds, because the short horizon always looks better.</a:t>
-                </a:r>
-              </a:p>
-            </p:txBody>
-          </p:sp>
-        </mc:Choice>
-      </mc:AlternateContent>
+              <a:t>Two rules violated constantly</a:t>
+            </a:r>
+          </a:p>
+        </p:txBody>
+      </p:sp>
+      <p:sp>
+        <p:nvSpPr>
+          <p:cNvPr id="3" name="Content Placeholder 2"/>
+          <p:cNvSpPr>
+            <a:spLocks noGrp="1"/>
+          </p:cNvSpPr>
+          <p:nvPr>
+            <p:ph idx="1"/>
+          </p:nvPr>
+        </p:nvSpPr>
+        <p:spPr/>
+        <p:txBody>
+          <a:bodyPr/>
+          <a:lstStyle/>
+          <a:p>
+            <a:pPr lvl="0" indent="0" marL="0">
+              <a:buNone/>
+            </a:pPr>
+            <a:r>
+              <a:rPr b="1"/>
+              <a:t>1. Point-in-time data.</a:t>
+            </a:r>
+            <a:r>
+              <a:rPr/>
+              <a:t> Macroeconomic series are </a:t>
+            </a:r>
+            <a:r>
+              <a:rPr b="1"/>
+              <a:t>revised</a:t>
+            </a:r>
+            <a:r>
+              <a:rPr/>
+              <a:t>. A backtest using today’s vintage of GDP gives your model information no forecaster had at the time.</a:t>
+            </a:r>
+          </a:p>
+          <a:p>
+            <a:pPr lvl="0" indent="0" marL="0">
+              <a:buNone/>
+            </a:pPr>
+            <a:r>
+              <a:rPr/>
+              <a:t>Use real-time vintages — ALFRED, or the Philadelphia Fed’s real-time dataset — or </a:t>
+            </a:r>
+            <a:r>
+              <a:rPr b="1"/>
+              <a:t>state clearly that you have not</a:t>
+            </a:r>
+            <a:r>
+              <a:rPr/>
+              <a:t>.</a:t>
+            </a:r>
+          </a:p>
+        </p:txBody>
+      </p:sp>
     </p:spTree>
   </p:cSld>
 </p:sld>
@@ -6619,7 +6723,7 @@
             </a:pPr>
             <a:r>
               <a:rPr/>
-              <a:t>Set up</a:t>
+              <a:t>The second rule</a:t>
             </a:r>
           </a:p>
         </p:txBody>
@@ -6639,286 +6743,53 @@
           <a:bodyPr/>
           <a:lstStyle/>
           <a:p>
-            <a:pPr lvl="0" indent="0">
+            <a:pPr lvl="0" indent="0" marL="0">
               <a:buNone/>
             </a:pPr>
             <a:r>
-              <a:rPr b="1">
-                <a:solidFill>
-                  <a:srgbClr val="008000"/>
-                </a:solidFill>
-                <a:latin typeface="Courier"/>
-              </a:rPr>
-              <a:t>import</a:t>
-            </a:r>
-            <a:r>
-              <a:rPr>
-                <a:latin typeface="Courier"/>
-              </a:rPr>
-              <a:t> pandas </a:t>
-            </a:r>
-            <a:r>
-              <a:rPr b="1">
-                <a:solidFill>
-                  <a:srgbClr val="008000"/>
-                </a:solidFill>
-                <a:latin typeface="Courier"/>
-              </a:rPr>
-              <a:t>as</a:t>
-            </a:r>
-            <a:r>
-              <a:rPr>
-                <a:latin typeface="Courier"/>
-              </a:rPr>
-              <a:t> pd, numpy </a:t>
-            </a:r>
-            <a:r>
-              <a:rPr b="1">
-                <a:solidFill>
-                  <a:srgbClr val="008000"/>
-                </a:solidFill>
-                <a:latin typeface="Courier"/>
-              </a:rPr>
-              <a:t>as</a:t>
-            </a:r>
-            <a:r>
-              <a:rPr>
-                <a:latin typeface="Courier"/>
-              </a:rPr>
-              <a:t> np</a:t>
-            </a:r>
-            <a:br/>
-            <a:r>
-              <a:rPr b="1">
-                <a:solidFill>
-                  <a:srgbClr val="008000"/>
-                </a:solidFill>
-                <a:latin typeface="Courier"/>
-              </a:rPr>
-              <a:t>from</a:t>
-            </a:r>
-            <a:r>
-              <a:rPr>
-                <a:latin typeface="Courier"/>
-              </a:rPr>
-              <a:t> sklearn.ensemble </a:t>
-            </a:r>
-            <a:r>
-              <a:rPr b="1">
-                <a:solidFill>
-                  <a:srgbClr val="008000"/>
-                </a:solidFill>
-                <a:latin typeface="Courier"/>
-              </a:rPr>
-              <a:t>import</a:t>
-            </a:r>
-            <a:r>
-              <a:rPr>
-                <a:latin typeface="Courier"/>
-              </a:rPr>
-              <a:t> RandomForestRegressor</a:t>
-            </a:r>
-            <a:br/>
-            <a:br/>
-            <a:r>
-              <a:rPr>
-                <a:latin typeface="Courier"/>
-              </a:rPr>
-              <a:t>core </a:t>
-            </a:r>
-            <a:r>
-              <a:rPr>
-                <a:solidFill>
-                  <a:srgbClr val="666666"/>
-                </a:solidFill>
-                <a:latin typeface="Courier"/>
-              </a:rPr>
-              <a:t>=</a:t>
-            </a:r>
-            <a:r>
-              <a:rPr>
-                <a:latin typeface="Courier"/>
-              </a:rPr>
-              <a:t> pd.read_parquet(</a:t>
-            </a:r>
-            <a:r>
-              <a:rPr>
-                <a:solidFill>
-                  <a:srgbClr val="4070A0"/>
-                </a:solidFill>
-                <a:latin typeface="Courier"/>
-              </a:rPr>
-              <a:t>"data/spine/core.parquet"</a:t>
-            </a:r>
-            <a:r>
-              <a:rPr>
-                <a:latin typeface="Courier"/>
-              </a:rPr>
-              <a:t>)</a:t>
-            </a:r>
-            <a:br/>
-            <a:r>
-              <a:rPr>
-                <a:latin typeface="Courier"/>
-              </a:rPr>
-              <a:t>d </a:t>
-            </a:r>
-            <a:r>
-              <a:rPr>
-                <a:solidFill>
-                  <a:srgbClr val="666666"/>
-                </a:solidFill>
-                <a:latin typeface="Courier"/>
-              </a:rPr>
-              <a:t>=</a:t>
-            </a:r>
-            <a:r>
-              <a:rPr>
-                <a:latin typeface="Courier"/>
-              </a:rPr>
-              <a:t> core.dropna(subset</a:t>
-            </a:r>
-            <a:r>
-              <a:rPr>
-                <a:solidFill>
-                  <a:srgbClr val="666666"/>
-                </a:solidFill>
-                <a:latin typeface="Courier"/>
-              </a:rPr>
-              <a:t>=</a:t>
-            </a:r>
-            <a:r>
-              <a:rPr>
-                <a:latin typeface="Courier"/>
-              </a:rPr>
-              <a:t>[</a:t>
-            </a:r>
-            <a:r>
-              <a:rPr>
-                <a:solidFill>
-                  <a:srgbClr val="4070A0"/>
-                </a:solidFill>
-                <a:latin typeface="Courier"/>
-              </a:rPr>
-              <a:t>"prod_growth"</a:t>
-            </a:r>
-            <a:r>
-              <a:rPr>
-                <a:latin typeface="Courier"/>
-              </a:rPr>
-              <a:t>]).sort_values([</a:t>
-            </a:r>
-            <a:r>
-              <a:rPr>
-                <a:solidFill>
-                  <a:srgbClr val="4070A0"/>
-                </a:solidFill>
-                <a:latin typeface="Courier"/>
-              </a:rPr>
-              <a:t>"time"</a:t>
-            </a:r>
-            <a:r>
-              <a:rPr>
-                <a:latin typeface="Courier"/>
-              </a:rPr>
-              <a:t>, </a:t>
-            </a:r>
-            <a:r>
-              <a:rPr>
-                <a:solidFill>
-                  <a:srgbClr val="4070A0"/>
-                </a:solidFill>
-                <a:latin typeface="Courier"/>
-              </a:rPr>
-              <a:t>"geo"</a:t>
-            </a:r>
-            <a:r>
-              <a:rPr>
-                <a:latin typeface="Courier"/>
-              </a:rPr>
-              <a:t>])</a:t>
-            </a:r>
-            <a:br/>
-            <a:r>
-              <a:rPr>
-                <a:latin typeface="Courier"/>
-              </a:rPr>
-              <a:t>feat </a:t>
-            </a:r>
-            <a:r>
-              <a:rPr>
-                <a:solidFill>
-                  <a:srgbClr val="666666"/>
-                </a:solidFill>
-                <a:latin typeface="Courier"/>
-              </a:rPr>
-              <a:t>=</a:t>
-            </a:r>
-            <a:r>
-              <a:rPr>
-                <a:latin typeface="Courier"/>
-              </a:rPr>
-              <a:t> [</a:t>
-            </a:r>
-            <a:r>
-              <a:rPr>
-                <a:solidFill>
-                  <a:srgbClr val="4070A0"/>
-                </a:solidFill>
-                <a:latin typeface="Courier"/>
-              </a:rPr>
-              <a:t>"gdp_pc_eur"</a:t>
-            </a:r>
-            <a:r>
-              <a:rPr>
-                <a:latin typeface="Courier"/>
-              </a:rPr>
-              <a:t>, </a:t>
-            </a:r>
-            <a:r>
-              <a:rPr>
-                <a:solidFill>
-                  <a:srgbClr val="4070A0"/>
-                </a:solidFill>
-                <a:latin typeface="Courier"/>
-              </a:rPr>
-              <a:t>"population"</a:t>
-            </a:r>
-            <a:r>
-              <a:rPr>
-                <a:latin typeface="Courier"/>
-              </a:rPr>
-              <a:t>, </a:t>
-            </a:r>
-            <a:r>
-              <a:rPr>
-                <a:solidFill>
-                  <a:srgbClr val="4070A0"/>
-                </a:solidFill>
-                <a:latin typeface="Courier"/>
-              </a:rPr>
-              <a:t>"employment_ths"</a:t>
-            </a:r>
-            <a:r>
-              <a:rPr>
-                <a:latin typeface="Courier"/>
-              </a:rPr>
-              <a:t>, </a:t>
-            </a:r>
-            <a:r>
-              <a:rPr>
-                <a:solidFill>
-                  <a:srgbClr val="4070A0"/>
-                </a:solidFill>
-                <a:latin typeface="Courier"/>
-              </a:rPr>
-              <a:t>"gfcf_meur"</a:t>
-            </a:r>
-            <a:r>
-              <a:rPr>
-                <a:latin typeface="Courier"/>
-              </a:rPr>
-              <a:t>]</a:t>
+              <a:rPr b="1"/>
+              <a:t>2. Every preprocessing step must be inside the loop.</a:t>
+            </a:r>
+          </a:p>
+          <a:p>
+            <a:pPr lvl="0"/>
+            <a:r>
+              <a:rPr/>
+              <a:t>standardisation</a:t>
+            </a:r>
+          </a:p>
+          <a:p>
+            <a:pPr lvl="0"/>
+            <a:r>
+              <a:rPr b="1"/>
+              <a:t>factor extraction</a:t>
+            </a:r>
+            <a:r>
+              <a:rPr/>
+              <a:t> — Session 08</a:t>
+            </a:r>
+          </a:p>
+          <a:p>
+            <a:pPr lvl="0"/>
+            <a:r>
+              <a:rPr/>
+              <a:t>feature selection</a:t>
+            </a:r>
+          </a:p>
+          <a:p>
+            <a:pPr lvl="0"/>
+            <a:r>
+              <a:rPr/>
+              <a:t>hyperparameter choice</a:t>
+            </a:r>
+          </a:p>
+          <a:p>
+            <a:pPr lvl="0" indent="0" marL="0">
+              <a:buNone/>
+            </a:pPr>
+            <a:r>
+              <a:rPr/>
+              <a:t>Extracting factors from the full sample and then backtesting is look-ahead bias. It is the single most common flaw in student factor-model projects.</a:t>
             </a:r>
           </a:p>
         </p:txBody>

--- a/11-forecasting-drift-and-governance/slides.pptx
+++ b/11-forecasting-drift-and-governance/slides.pptx
@@ -4951,7 +4951,7 @@
                 <a:hlinkClick r:id="rId2"/>
                 <a:latin typeface="Courier"/>
               </a:rPr>
-              <a:t>02-lab/governance-file-template.md</a:t>
+              <a:t>02-practice/governance-file-template.md</a:t>
             </a:r>
           </a:p>
         </p:txBody>
@@ -5921,7 +5921,7 @@
             </a:pPr>
             <a:r>
               <a:rPr/>
-              <a:t>The lab</a:t>
+              <a:t>The practice</a:t>
             </a:r>
           </a:p>
         </p:txBody>

--- a/11-forecasting-drift-and-governance/slides.pptx
+++ b/11-forecasting-drift-and-governance/slides.pptx
@@ -3738,7 +3738,19 @@
                                     <m:rPr>
                                       <m:sty m:val="p"/>
                                     </m:rPr>
-                                    <m:t>Var</m:t>
+                                    <m:t>V</m:t>
+                                  </m:r>
+                                  <m:r>
+                                    <m:rPr>
+                                      <m:sty m:val="p"/>
+                                    </m:rPr>
+                                    <m:t>a</m:t>
+                                  </m:r>
+                                  <m:r>
+                                    <m:rPr>
+                                      <m:sty m:val="p"/>
+                                    </m:rPr>
+                                    <m:t>r</m:t>
                                   </m:r>
                                 </m:e>
                               </m:acc>
@@ -3902,7 +3914,19 @@
                           <m:rPr>
                             <m:sty m:val="p"/>
                           </m:rPr>
-                          <m:t>Var</m:t>
+                          <m:t>V</m:t>
+                        </m:r>
+                        <m:r>
+                          <m:rPr>
+                            <m:sty m:val="p"/>
+                          </m:rPr>
+                          <m:t>a</m:t>
+                        </m:r>
+                        <m:r>
+                          <m:rPr>
+                            <m:sty m:val="p"/>
+                          </m:rPr>
+                          <m:t>r</m:t>
                         </m:r>
                       </m:e>
                     </m:acc>

--- a/11-forecasting-drift-and-governance/slides.pptx
+++ b/11-forecasting-drift-and-governance/slides.pptx
@@ -939,15 +939,15 @@
         </p:nvSpPr>
         <p:spPr>
           <a:xfrm>
-            <a:off x="722313" y="3305176"/>
-            <a:ext cx="7772400" cy="1021556"/>
+            <a:off x="722313" y="1850000"/>
+            <a:ext cx="7772400" cy="1300000"/>
           </a:xfrm>
         </p:spPr>
         <p:txBody>
           <a:bodyPr anchor="t"/>
           <a:lstStyle>
             <a:lvl1pPr algn="l">
-              <a:defRPr sz="1850" b="1" cap="all"/>
+              <a:defRPr sz="2800" b="1" cap="none"/>
             </a:lvl1pPr>
           </a:lstStyle>
           <a:p>
@@ -970,8 +970,8 @@
         </p:nvSpPr>
         <p:spPr>
           <a:xfrm>
-            <a:off x="722313" y="2180035"/>
-            <a:ext cx="7772400" cy="1125140"/>
+            <a:off x="722313" y="3250000"/>
+            <a:ext cx="7772400" cy="700000"/>
           </a:xfrm>
         </p:spPr>
         <p:txBody>
@@ -3314,8 +3314,8 @@
         </p:nvSpPr>
         <p:spPr>
           <a:xfrm>
-            <a:off x="722313" y="3305176"/>
-            <a:ext cx="7772400" cy="1021556"/>
+            <a:off x="722313" y="1850000"/>
+            <a:ext cx="7772400" cy="1300000"/>
           </a:xfrm>
         </p:spPr>
         <p:txBody>
@@ -4153,8 +4153,8 @@
         </p:nvSpPr>
         <p:spPr>
           <a:xfrm>
-            <a:off x="722313" y="3305176"/>
-            <a:ext cx="7772400" cy="1021556"/>
+            <a:off x="722313" y="1850000"/>
+            <a:ext cx="7772400" cy="1300000"/>
           </a:xfrm>
         </p:spPr>
         <p:txBody>
@@ -4691,8 +4691,8 @@
         </p:nvSpPr>
         <p:spPr>
           <a:xfrm>
-            <a:off x="722313" y="3305176"/>
-            <a:ext cx="7772400" cy="1021556"/>
+            <a:off x="722313" y="1850000"/>
+            <a:ext cx="7772400" cy="1300000"/>
           </a:xfrm>
         </p:spPr>
         <p:txBody>
@@ -5104,8 +5104,8 @@
         </p:nvSpPr>
         <p:spPr>
           <a:xfrm>
-            <a:off x="722313" y="3305176"/>
-            <a:ext cx="7772400" cy="1021556"/>
+            <a:off x="722313" y="1850000"/>
+            <a:ext cx="7772400" cy="1300000"/>
           </a:xfrm>
         </p:spPr>
         <p:txBody>
@@ -5243,8 +5243,8 @@
         </p:nvSpPr>
         <p:spPr>
           <a:xfrm>
-            <a:off x="722313" y="3305176"/>
-            <a:ext cx="7772400" cy="1021556"/>
+            <a:off x="722313" y="1850000"/>
+            <a:ext cx="7772400" cy="1300000"/>
           </a:xfrm>
         </p:spPr>
         <p:txBody>
@@ -5932,8 +5932,8 @@
         </p:nvSpPr>
         <p:spPr>
           <a:xfrm>
-            <a:off x="722313" y="3305176"/>
-            <a:ext cx="7772400" cy="1021556"/>
+            <a:off x="722313" y="1850000"/>
+            <a:ext cx="7772400" cy="1300000"/>
           </a:xfrm>
         </p:spPr>
         <p:txBody>
@@ -6277,8 +6277,8 @@
         </p:nvSpPr>
         <p:spPr>
           <a:xfrm>
-            <a:off x="722313" y="3305176"/>
-            <a:ext cx="7772400" cy="1021556"/>
+            <a:off x="722313" y="1850000"/>
+            <a:ext cx="7772400" cy="1300000"/>
           </a:xfrm>
         </p:spPr>
         <p:txBody>

--- a/11-forecasting-drift-and-governance/slides.pptx
+++ b/11-forecasting-drift-and-governance/slides.pptx
@@ -39,6 +39,14 @@
     <p:sldId id="287" r:id="rId33"/>
     <p:sldId id="288" r:id="rId34"/>
     <p:sldId id="289" r:id="rId35"/>
+    <p:sldId id="290" r:id="rId36"/>
+    <p:sldId id="291" r:id="rId37"/>
+    <p:sldId id="292" r:id="rId38"/>
+    <p:sldId id="293" r:id="rId39"/>
+    <p:sldId id="294" r:id="rId40"/>
+    <p:sldId id="295" r:id="rId41"/>
+    <p:sldId id="296" r:id="rId42"/>
+    <p:sldId id="297" r:id="rId43"/>
   </p:sldIdLst>
   <p:sldSz cx="9144000" cy="5143500" type="screen16x9"/>
   <p:notesSz cx="6858000" cy="9144000"/>
@@ -3275,7 +3283,7 @@
             </a:pPr>
             <a:r>
               <a:rPr/>
-              <a:t>20 August 2026</a:t>
+              <a:t>22 August 2026</a:t>
             </a:r>
           </a:p>
         </p:txBody>
@@ -3312,12 +3320,7 @@
             <p:ph type="title"/>
           </p:nvPr>
         </p:nvSpPr>
-        <p:spPr>
-          <a:xfrm>
-            <a:off x="722313" y="1850000"/>
-            <a:ext cx="7772400" cy="1300000"/>
-          </a:xfrm>
-        </p:spPr>
+        <p:spPr/>
         <p:txBody>
           <a:bodyPr/>
           <a:lstStyle/>
@@ -3327,7 +3330,1199 @@
             </a:pPr>
             <a:r>
               <a:rPr/>
-              <a:t>11.2 Comparing honestly</a:t>
+              <a:t>Run it, three ways</a:t>
+            </a:r>
+          </a:p>
+        </p:txBody>
+      </p:sp>
+      <p:sp>
+        <p:nvSpPr>
+          <p:cNvPr id="3" name="Content Placeholder 2"/>
+          <p:cNvSpPr>
+            <a:spLocks noGrp="1"/>
+          </p:cNvSpPr>
+          <p:nvPr>
+            <p:ph idx="1"/>
+          </p:nvPr>
+        </p:nvSpPr>
+        <p:spPr/>
+        <p:txBody>
+          <a:bodyPr/>
+          <a:lstStyle/>
+          <a:p>
+            <a:pPr lvl="0" indent="0">
+              <a:buNone/>
+            </a:pPr>
+            <a:r>
+              <a:rPr b="1">
+                <a:solidFill>
+                  <a:srgbClr val="007020"/>
+                </a:solidFill>
+                <a:latin typeface="Courier"/>
+              </a:rPr>
+              <a:t>def</a:t>
+            </a:r>
+            <a:r>
+              <a:rPr>
+                <a:latin typeface="Courier"/>
+              </a:rPr>
+              <a:t> backtest(window</a:t>
+            </a:r>
+            <a:r>
+              <a:rPr>
+                <a:solidFill>
+                  <a:srgbClr val="666666"/>
+                </a:solidFill>
+                <a:latin typeface="Courier"/>
+              </a:rPr>
+              <a:t>=</a:t>
+            </a:r>
+            <a:r>
+              <a:rPr>
+                <a:solidFill>
+                  <a:srgbClr val="19177C"/>
+                </a:solidFill>
+                <a:latin typeface="Courier"/>
+              </a:rPr>
+              <a:t>None</a:t>
+            </a:r>
+            <a:r>
+              <a:rPr>
+                <a:latin typeface="Courier"/>
+              </a:rPr>
+              <a:t>, first</a:t>
+            </a:r>
+            <a:r>
+              <a:rPr>
+                <a:solidFill>
+                  <a:srgbClr val="666666"/>
+                </a:solidFill>
+                <a:latin typeface="Courier"/>
+              </a:rPr>
+              <a:t>=</a:t>
+            </a:r>
+            <a:r>
+              <a:rPr>
+                <a:solidFill>
+                  <a:srgbClr val="40A070"/>
+                </a:solidFill>
+                <a:latin typeface="Courier"/>
+              </a:rPr>
+              <a:t>6</a:t>
+            </a:r>
+            <a:r>
+              <a:rPr>
+                <a:latin typeface="Courier"/>
+              </a:rPr>
+              <a:t>):</a:t>
+            </a:r>
+            <a:br/>
+            <a:r>
+              <a:rPr>
+                <a:latin typeface="Courier"/>
+              </a:rPr>
+              <a:t>    </a:t>
+            </a:r>
+            <a:r>
+              <a:rPr i="1">
+                <a:solidFill>
+                  <a:srgbClr val="60A0B0"/>
+                </a:solidFill>
+                <a:latin typeface="Courier"/>
+              </a:rPr>
+              <a:t>"""One row per predicted country-year, with the model's error and the benchmark's."""</a:t>
+            </a:r>
+            <a:br/>
+            <a:r>
+              <a:rPr>
+                <a:latin typeface="Courier"/>
+              </a:rPr>
+              <a:t>    out </a:t>
+            </a:r>
+            <a:r>
+              <a:rPr>
+                <a:solidFill>
+                  <a:srgbClr val="666666"/>
+                </a:solidFill>
+                <a:latin typeface="Courier"/>
+              </a:rPr>
+              <a:t>=</a:t>
+            </a:r>
+            <a:r>
+              <a:rPr>
+                <a:latin typeface="Courier"/>
+              </a:rPr>
+              <a:t> []</a:t>
+            </a:r>
+            <a:br/>
+            <a:r>
+              <a:rPr>
+                <a:latin typeface="Courier"/>
+              </a:rPr>
+              <a:t>    </a:t>
+            </a:r>
+            <a:r>
+              <a:rPr b="1">
+                <a:solidFill>
+                  <a:srgbClr val="007020"/>
+                </a:solidFill>
+                <a:latin typeface="Courier"/>
+              </a:rPr>
+              <a:t>for</a:t>
+            </a:r>
+            <a:r>
+              <a:rPr>
+                <a:latin typeface="Courier"/>
+              </a:rPr>
+              <a:t> t </a:t>
+            </a:r>
+            <a:r>
+              <a:rPr b="1">
+                <a:solidFill>
+                  <a:srgbClr val="007020"/>
+                </a:solidFill>
+                <a:latin typeface="Courier"/>
+              </a:rPr>
+              <a:t>in</a:t>
+            </a:r>
+            <a:r>
+              <a:rPr>
+                <a:latin typeface="Courier"/>
+              </a:rPr>
+              <a:t> YEARS[first:]:</a:t>
+            </a:r>
+            <a:br/>
+            <a:r>
+              <a:rPr>
+                <a:latin typeface="Courier"/>
+              </a:rPr>
+              <a:t>        tr </a:t>
+            </a:r>
+            <a:r>
+              <a:rPr>
+                <a:solidFill>
+                  <a:srgbClr val="666666"/>
+                </a:solidFill>
+                <a:latin typeface="Courier"/>
+              </a:rPr>
+              <a:t>=</a:t>
+            </a:r>
+            <a:r>
+              <a:rPr>
+                <a:latin typeface="Courier"/>
+              </a:rPr>
+              <a:t> (d.time </a:t>
+            </a:r>
+            <a:r>
+              <a:rPr>
+                <a:solidFill>
+                  <a:srgbClr val="666666"/>
+                </a:solidFill>
+                <a:latin typeface="Courier"/>
+              </a:rPr>
+              <a:t>&lt;</a:t>
+            </a:r>
+            <a:r>
+              <a:rPr>
+                <a:latin typeface="Courier"/>
+              </a:rPr>
+              <a:t> t) </a:t>
+            </a:r>
+            <a:r>
+              <a:rPr b="1">
+                <a:solidFill>
+                  <a:srgbClr val="007020"/>
+                </a:solidFill>
+                <a:latin typeface="Courier"/>
+              </a:rPr>
+              <a:t>if</a:t>
+            </a:r>
+            <a:r>
+              <a:rPr>
+                <a:latin typeface="Courier"/>
+              </a:rPr>
+              <a:t> window </a:t>
+            </a:r>
+            <a:r>
+              <a:rPr b="1">
+                <a:solidFill>
+                  <a:srgbClr val="007020"/>
+                </a:solidFill>
+                <a:latin typeface="Courier"/>
+              </a:rPr>
+              <a:t>is</a:t>
+            </a:r>
+            <a:r>
+              <a:rPr>
+                <a:latin typeface="Courier"/>
+              </a:rPr>
+              <a:t> </a:t>
+            </a:r>
+            <a:r>
+              <a:rPr>
+                <a:solidFill>
+                  <a:srgbClr val="19177C"/>
+                </a:solidFill>
+                <a:latin typeface="Courier"/>
+              </a:rPr>
+              <a:t>None</a:t>
+            </a:r>
+            <a:r>
+              <a:rPr>
+                <a:latin typeface="Courier"/>
+              </a:rPr>
+              <a:t> </a:t>
+            </a:r>
+            <a:r>
+              <a:rPr b="1">
+                <a:solidFill>
+                  <a:srgbClr val="007020"/>
+                </a:solidFill>
+                <a:latin typeface="Courier"/>
+              </a:rPr>
+              <a:t>else</a:t>
+            </a:r>
+            <a:r>
+              <a:rPr>
+                <a:latin typeface="Courier"/>
+              </a:rPr>
+              <a:t> ((d.time </a:t>
+            </a:r>
+            <a:r>
+              <a:rPr>
+                <a:solidFill>
+                  <a:srgbClr val="666666"/>
+                </a:solidFill>
+                <a:latin typeface="Courier"/>
+              </a:rPr>
+              <a:t>&lt;</a:t>
+            </a:r>
+            <a:r>
+              <a:rPr>
+                <a:latin typeface="Courier"/>
+              </a:rPr>
+              <a:t> t) </a:t>
+            </a:r>
+            <a:r>
+              <a:rPr>
+                <a:solidFill>
+                  <a:srgbClr val="666666"/>
+                </a:solidFill>
+                <a:latin typeface="Courier"/>
+              </a:rPr>
+              <a:t>&amp;</a:t>
+            </a:r>
+            <a:r>
+              <a:rPr>
+                <a:latin typeface="Courier"/>
+              </a:rPr>
+              <a:t> (d.time </a:t>
+            </a:r>
+            <a:r>
+              <a:rPr>
+                <a:solidFill>
+                  <a:srgbClr val="666666"/>
+                </a:solidFill>
+                <a:latin typeface="Courier"/>
+              </a:rPr>
+              <a:t>&gt;=</a:t>
+            </a:r>
+            <a:r>
+              <a:rPr>
+                <a:latin typeface="Courier"/>
+              </a:rPr>
+              <a:t> t </a:t>
+            </a:r>
+            <a:r>
+              <a:rPr>
+                <a:solidFill>
+                  <a:srgbClr val="666666"/>
+                </a:solidFill>
+                <a:latin typeface="Courier"/>
+              </a:rPr>
+              <a:t>-</a:t>
+            </a:r>
+            <a:r>
+              <a:rPr>
+                <a:latin typeface="Courier"/>
+              </a:rPr>
+              <a:t> window))</a:t>
+            </a:r>
+            <a:br/>
+            <a:r>
+              <a:rPr>
+                <a:latin typeface="Courier"/>
+              </a:rPr>
+              <a:t>        te </a:t>
+            </a:r>
+            <a:r>
+              <a:rPr>
+                <a:solidFill>
+                  <a:srgbClr val="666666"/>
+                </a:solidFill>
+                <a:latin typeface="Courier"/>
+              </a:rPr>
+              <a:t>=</a:t>
+            </a:r>
+            <a:r>
+              <a:rPr>
+                <a:latin typeface="Courier"/>
+              </a:rPr>
+              <a:t> (d.time </a:t>
+            </a:r>
+            <a:r>
+              <a:rPr>
+                <a:solidFill>
+                  <a:srgbClr val="666666"/>
+                </a:solidFill>
+                <a:latin typeface="Courier"/>
+              </a:rPr>
+              <a:t>==</a:t>
+            </a:r>
+            <a:r>
+              <a:rPr>
+                <a:latin typeface="Courier"/>
+              </a:rPr>
+              <a:t> t)</a:t>
+            </a:r>
+            <a:br/>
+            <a:r>
+              <a:rPr>
+                <a:latin typeface="Courier"/>
+              </a:rPr>
+              <a:t>        </a:t>
+            </a:r>
+            <a:r>
+              <a:rPr b="1">
+                <a:solidFill>
+                  <a:srgbClr val="007020"/>
+                </a:solidFill>
+                <a:latin typeface="Courier"/>
+              </a:rPr>
+              <a:t>if</a:t>
+            </a:r>
+            <a:r>
+              <a:rPr>
+                <a:latin typeface="Courier"/>
+              </a:rPr>
+              <a:t> tr.</a:t>
+            </a:r>
+            <a:r>
+              <a:rPr>
+                <a:solidFill>
+                  <a:srgbClr val="008000"/>
+                </a:solidFill>
+                <a:latin typeface="Courier"/>
+              </a:rPr>
+              <a:t>sum</a:t>
+            </a:r>
+            <a:r>
+              <a:rPr>
+                <a:latin typeface="Courier"/>
+              </a:rPr>
+              <a:t>() </a:t>
+            </a:r>
+            <a:r>
+              <a:rPr>
+                <a:solidFill>
+                  <a:srgbClr val="666666"/>
+                </a:solidFill>
+                <a:latin typeface="Courier"/>
+              </a:rPr>
+              <a:t>&lt;</a:t>
+            </a:r>
+            <a:r>
+              <a:rPr>
+                <a:latin typeface="Courier"/>
+              </a:rPr>
+              <a:t> </a:t>
+            </a:r>
+            <a:r>
+              <a:rPr>
+                <a:solidFill>
+                  <a:srgbClr val="40A070"/>
+                </a:solidFill>
+                <a:latin typeface="Courier"/>
+              </a:rPr>
+              <a:t>30</a:t>
+            </a:r>
+            <a:r>
+              <a:rPr>
+                <a:latin typeface="Courier"/>
+              </a:rPr>
+              <a:t> </a:t>
+            </a:r>
+            <a:r>
+              <a:rPr b="1">
+                <a:solidFill>
+                  <a:srgbClr val="007020"/>
+                </a:solidFill>
+                <a:latin typeface="Courier"/>
+              </a:rPr>
+              <a:t>or</a:t>
+            </a:r>
+            <a:r>
+              <a:rPr>
+                <a:latin typeface="Courier"/>
+              </a:rPr>
+              <a:t> te.</a:t>
+            </a:r>
+            <a:r>
+              <a:rPr>
+                <a:solidFill>
+                  <a:srgbClr val="008000"/>
+                </a:solidFill>
+                <a:latin typeface="Courier"/>
+              </a:rPr>
+              <a:t>sum</a:t>
+            </a:r>
+            <a:r>
+              <a:rPr>
+                <a:latin typeface="Courier"/>
+              </a:rPr>
+              <a:t>() </a:t>
+            </a:r>
+            <a:r>
+              <a:rPr>
+                <a:solidFill>
+                  <a:srgbClr val="666666"/>
+                </a:solidFill>
+                <a:latin typeface="Courier"/>
+              </a:rPr>
+              <a:t>==</a:t>
+            </a:r>
+            <a:r>
+              <a:rPr>
+                <a:latin typeface="Courier"/>
+              </a:rPr>
+              <a:t> </a:t>
+            </a:r>
+            <a:r>
+              <a:rPr>
+                <a:solidFill>
+                  <a:srgbClr val="40A070"/>
+                </a:solidFill>
+                <a:latin typeface="Courier"/>
+              </a:rPr>
+              <a:t>0</a:t>
+            </a:r>
+            <a:r>
+              <a:rPr>
+                <a:latin typeface="Courier"/>
+              </a:rPr>
+              <a:t>:</a:t>
+            </a:r>
+            <a:br/>
+            <a:r>
+              <a:rPr>
+                <a:latin typeface="Courier"/>
+              </a:rPr>
+              <a:t>            </a:t>
+            </a:r>
+            <a:r>
+              <a:rPr b="1">
+                <a:solidFill>
+                  <a:srgbClr val="007020"/>
+                </a:solidFill>
+                <a:latin typeface="Courier"/>
+              </a:rPr>
+              <a:t>continue</a:t>
+            </a:r>
+            <a:br/>
+            <a:r>
+              <a:rPr>
+                <a:latin typeface="Courier"/>
+              </a:rPr>
+              <a:t>        f </a:t>
+            </a:r>
+            <a:r>
+              <a:rPr>
+                <a:solidFill>
+                  <a:srgbClr val="666666"/>
+                </a:solidFill>
+                <a:latin typeface="Courier"/>
+              </a:rPr>
+              <a:t>=</a:t>
+            </a:r>
+            <a:r>
+              <a:rPr>
+                <a:latin typeface="Courier"/>
+              </a:rPr>
+              <a:t> (RandomForestRegressor(</a:t>
+            </a:r>
+            <a:r>
+              <a:rPr>
+                <a:solidFill>
+                  <a:srgbClr val="40A070"/>
+                </a:solidFill>
+                <a:latin typeface="Courier"/>
+              </a:rPr>
+              <a:t>200</a:t>
+            </a:r>
+            <a:r>
+              <a:rPr>
+                <a:latin typeface="Courier"/>
+              </a:rPr>
+              <a:t>, min_samples_leaf</a:t>
+            </a:r>
+            <a:r>
+              <a:rPr>
+                <a:solidFill>
+                  <a:srgbClr val="666666"/>
+                </a:solidFill>
+                <a:latin typeface="Courier"/>
+              </a:rPr>
+              <a:t>=</a:t>
+            </a:r>
+            <a:r>
+              <a:rPr>
+                <a:solidFill>
+                  <a:srgbClr val="40A070"/>
+                </a:solidFill>
+                <a:latin typeface="Courier"/>
+              </a:rPr>
+              <a:t>3</a:t>
+            </a:r>
+            <a:r>
+              <a:rPr>
+                <a:latin typeface="Courier"/>
+              </a:rPr>
+              <a:t>, random_state</a:t>
+            </a:r>
+            <a:r>
+              <a:rPr>
+                <a:solidFill>
+                  <a:srgbClr val="666666"/>
+                </a:solidFill>
+                <a:latin typeface="Courier"/>
+              </a:rPr>
+              <a:t>=</a:t>
+            </a:r>
+            <a:r>
+              <a:rPr>
+                <a:solidFill>
+                  <a:srgbClr val="40A070"/>
+                </a:solidFill>
+                <a:latin typeface="Courier"/>
+              </a:rPr>
+              <a:t>0</a:t>
+            </a:r>
+            <a:r>
+              <a:rPr>
+                <a:latin typeface="Courier"/>
+              </a:rPr>
+              <a:t>, n_jobs</a:t>
+            </a:r>
+            <a:r>
+              <a:rPr>
+                <a:solidFill>
+                  <a:srgbClr val="666666"/>
+                </a:solidFill>
+                <a:latin typeface="Courier"/>
+              </a:rPr>
+              <a:t>=-</a:t>
+            </a:r>
+            <a:r>
+              <a:rPr>
+                <a:solidFill>
+                  <a:srgbClr val="40A070"/>
+                </a:solidFill>
+                <a:latin typeface="Courier"/>
+              </a:rPr>
+              <a:t>1</a:t>
+            </a:r>
+            <a:r>
+              <a:rPr>
+                <a:latin typeface="Courier"/>
+              </a:rPr>
+              <a:t>)</a:t>
+            </a:r>
+            <a:br/>
+            <a:r>
+              <a:rPr>
+                <a:latin typeface="Courier"/>
+              </a:rPr>
+              <a:t>             .fit(d.loc[tr, FEAT], d.loc[tr, </a:t>
+            </a:r>
+            <a:r>
+              <a:rPr>
+                <a:solidFill>
+                  <a:srgbClr val="4070A0"/>
+                </a:solidFill>
+                <a:latin typeface="Courier"/>
+              </a:rPr>
+              <a:t>"y_next"</a:t>
+            </a:r>
+            <a:r>
+              <a:rPr>
+                <a:latin typeface="Courier"/>
+              </a:rPr>
+              <a:t>]).predict(d.loc[te, FEAT]))</a:t>
+            </a:r>
+            <a:br/>
+            <a:r>
+              <a:rPr>
+                <a:latin typeface="Courier"/>
+              </a:rPr>
+              <a:t>        truth </a:t>
+            </a:r>
+            <a:r>
+              <a:rPr>
+                <a:solidFill>
+                  <a:srgbClr val="666666"/>
+                </a:solidFill>
+                <a:latin typeface="Courier"/>
+              </a:rPr>
+              <a:t>=</a:t>
+            </a:r>
+            <a:r>
+              <a:rPr>
+                <a:latin typeface="Courier"/>
+              </a:rPr>
+              <a:t> d.loc[te, </a:t>
+            </a:r>
+            <a:r>
+              <a:rPr>
+                <a:solidFill>
+                  <a:srgbClr val="4070A0"/>
+                </a:solidFill>
+                <a:latin typeface="Courier"/>
+              </a:rPr>
+              <a:t>"y_next"</a:t>
+            </a:r>
+            <a:r>
+              <a:rPr>
+                <a:latin typeface="Courier"/>
+              </a:rPr>
+              <a:t>].to_numpy()</a:t>
+            </a:r>
+            <a:br/>
+            <a:r>
+              <a:rPr>
+                <a:latin typeface="Courier"/>
+              </a:rPr>
+              <a:t>        out.append(pd.DataFrame({</a:t>
+            </a:r>
+            <a:r>
+              <a:rPr>
+                <a:solidFill>
+                  <a:srgbClr val="4070A0"/>
+                </a:solidFill>
+                <a:latin typeface="Courier"/>
+              </a:rPr>
+              <a:t>"time"</a:t>
+            </a:r>
+            <a:r>
+              <a:rPr>
+                <a:latin typeface="Courier"/>
+              </a:rPr>
+              <a:t>: t,</a:t>
+            </a:r>
+            <a:br/>
+            <a:r>
+              <a:rPr>
+                <a:latin typeface="Courier"/>
+              </a:rPr>
+              <a:t>                                 </a:t>
+            </a:r>
+            <a:r>
+              <a:rPr>
+                <a:solidFill>
+                  <a:srgbClr val="4070A0"/>
+                </a:solidFill>
+                <a:latin typeface="Courier"/>
+              </a:rPr>
+              <a:t>"e_model"</a:t>
+            </a:r>
+            <a:r>
+              <a:rPr>
+                <a:latin typeface="Courier"/>
+              </a:rPr>
+              <a:t>: truth </a:t>
+            </a:r>
+            <a:r>
+              <a:rPr>
+                <a:solidFill>
+                  <a:srgbClr val="666666"/>
+                </a:solidFill>
+                <a:latin typeface="Courier"/>
+              </a:rPr>
+              <a:t>-</a:t>
+            </a:r>
+            <a:r>
+              <a:rPr>
+                <a:latin typeface="Courier"/>
+              </a:rPr>
+              <a:t> f,</a:t>
+            </a:r>
+            <a:br/>
+            <a:r>
+              <a:rPr>
+                <a:latin typeface="Courier"/>
+              </a:rPr>
+              <a:t>                                 </a:t>
+            </a:r>
+            <a:r>
+              <a:rPr>
+                <a:solidFill>
+                  <a:srgbClr val="4070A0"/>
+                </a:solidFill>
+                <a:latin typeface="Courier"/>
+              </a:rPr>
+              <a:t>"e_rw"</a:t>
+            </a:r>
+            <a:r>
+              <a:rPr>
+                <a:latin typeface="Courier"/>
+              </a:rPr>
+              <a:t>: truth </a:t>
+            </a:r>
+            <a:r>
+              <a:rPr>
+                <a:solidFill>
+                  <a:srgbClr val="666666"/>
+                </a:solidFill>
+                <a:latin typeface="Courier"/>
+              </a:rPr>
+              <a:t>-</a:t>
+            </a:r>
+            <a:r>
+              <a:rPr>
+                <a:latin typeface="Courier"/>
+              </a:rPr>
+              <a:t> d.loc[te, TGT].to_numpy()}))  </a:t>
+            </a:r>
+            <a:r>
+              <a:rPr i="1">
+                <a:solidFill>
+                  <a:srgbClr val="60A0B0"/>
+                </a:solidFill>
+                <a:latin typeface="Courier"/>
+              </a:rPr>
+              <a:t># random walk</a:t>
+            </a:r>
+            <a:br/>
+            <a:r>
+              <a:rPr>
+                <a:latin typeface="Courier"/>
+              </a:rPr>
+              <a:t>    </a:t>
+            </a:r>
+            <a:r>
+              <a:rPr b="1">
+                <a:solidFill>
+                  <a:srgbClr val="007020"/>
+                </a:solidFill>
+                <a:latin typeface="Courier"/>
+              </a:rPr>
+              <a:t>return</a:t>
+            </a:r>
+            <a:r>
+              <a:rPr>
+                <a:latin typeface="Courier"/>
+              </a:rPr>
+              <a:t> pd.concat(out, ignore_index</a:t>
+            </a:r>
+            <a:r>
+              <a:rPr>
+                <a:solidFill>
+                  <a:srgbClr val="666666"/>
+                </a:solidFill>
+                <a:latin typeface="Courier"/>
+              </a:rPr>
+              <a:t>=</a:t>
+            </a:r>
+            <a:r>
+              <a:rPr>
+                <a:solidFill>
+                  <a:srgbClr val="19177C"/>
+                </a:solidFill>
+                <a:latin typeface="Courier"/>
+              </a:rPr>
+              <a:t>True</a:t>
+            </a:r>
+            <a:r>
+              <a:rPr>
+                <a:latin typeface="Courier"/>
+              </a:rPr>
+              <a:t>)</a:t>
+            </a:r>
+            <a:br/>
+            <a:br/>
+            <a:r>
+              <a:rPr>
+                <a:latin typeface="Courier"/>
+              </a:rPr>
+              <a:t>rmse </a:t>
+            </a:r>
+            <a:r>
+              <a:rPr>
+                <a:solidFill>
+                  <a:srgbClr val="666666"/>
+                </a:solidFill>
+                <a:latin typeface="Courier"/>
+              </a:rPr>
+              <a:t>=</a:t>
+            </a:r>
+            <a:r>
+              <a:rPr>
+                <a:latin typeface="Courier"/>
+              </a:rPr>
+              <a:t> </a:t>
+            </a:r>
+            <a:r>
+              <a:rPr b="1">
+                <a:solidFill>
+                  <a:srgbClr val="007020"/>
+                </a:solidFill>
+                <a:latin typeface="Courier"/>
+              </a:rPr>
+              <a:t>lambda</a:t>
+            </a:r>
+            <a:r>
+              <a:rPr>
+                <a:latin typeface="Courier"/>
+              </a:rPr>
+              <a:t> e: np.sqrt((e </a:t>
+            </a:r>
+            <a:r>
+              <a:rPr>
+                <a:solidFill>
+                  <a:srgbClr val="666666"/>
+                </a:solidFill>
+                <a:latin typeface="Courier"/>
+              </a:rPr>
+              <a:t>**</a:t>
+            </a:r>
+            <a:r>
+              <a:rPr>
+                <a:latin typeface="Courier"/>
+              </a:rPr>
+              <a:t> </a:t>
+            </a:r>
+            <a:r>
+              <a:rPr>
+                <a:solidFill>
+                  <a:srgbClr val="40A070"/>
+                </a:solidFill>
+                <a:latin typeface="Courier"/>
+              </a:rPr>
+              <a:t>2</a:t>
+            </a:r>
+            <a:r>
+              <a:rPr>
+                <a:latin typeface="Courier"/>
+              </a:rPr>
+              <a:t>).mean())</a:t>
+            </a:r>
+            <a:br/>
+            <a:r>
+              <a:rPr b="1">
+                <a:solidFill>
+                  <a:srgbClr val="007020"/>
+                </a:solidFill>
+                <a:latin typeface="Courier"/>
+              </a:rPr>
+              <a:t>for</a:t>
+            </a:r>
+            <a:r>
+              <a:rPr>
+                <a:latin typeface="Courier"/>
+              </a:rPr>
+              <a:t> name, w </a:t>
+            </a:r>
+            <a:r>
+              <a:rPr b="1">
+                <a:solidFill>
+                  <a:srgbClr val="007020"/>
+                </a:solidFill>
+                <a:latin typeface="Courier"/>
+              </a:rPr>
+              <a:t>in</a:t>
+            </a:r>
+            <a:r>
+              <a:rPr>
+                <a:latin typeface="Courier"/>
+              </a:rPr>
+              <a:t> [(</a:t>
+            </a:r>
+            <a:r>
+              <a:rPr>
+                <a:solidFill>
+                  <a:srgbClr val="4070A0"/>
+                </a:solidFill>
+                <a:latin typeface="Courier"/>
+              </a:rPr>
+              <a:t>"expanding"</a:t>
+            </a:r>
+            <a:r>
+              <a:rPr>
+                <a:latin typeface="Courier"/>
+              </a:rPr>
+              <a:t>, </a:t>
+            </a:r>
+            <a:r>
+              <a:rPr>
+                <a:solidFill>
+                  <a:srgbClr val="19177C"/>
+                </a:solidFill>
+                <a:latin typeface="Courier"/>
+              </a:rPr>
+              <a:t>None</a:t>
+            </a:r>
+            <a:r>
+              <a:rPr>
+                <a:latin typeface="Courier"/>
+              </a:rPr>
+              <a:t>), (</a:t>
+            </a:r>
+            <a:r>
+              <a:rPr>
+                <a:solidFill>
+                  <a:srgbClr val="4070A0"/>
+                </a:solidFill>
+                <a:latin typeface="Courier"/>
+              </a:rPr>
+              <a:t>"fixed 5y"</a:t>
+            </a:r>
+            <a:r>
+              <a:rPr>
+                <a:latin typeface="Courier"/>
+              </a:rPr>
+              <a:t>, </a:t>
+            </a:r>
+            <a:r>
+              <a:rPr>
+                <a:solidFill>
+                  <a:srgbClr val="40A070"/>
+                </a:solidFill>
+                <a:latin typeface="Courier"/>
+              </a:rPr>
+              <a:t>5</a:t>
+            </a:r>
+            <a:r>
+              <a:rPr>
+                <a:latin typeface="Courier"/>
+              </a:rPr>
+              <a:t>), (</a:t>
+            </a:r>
+            <a:r>
+              <a:rPr>
+                <a:solidFill>
+                  <a:srgbClr val="4070A0"/>
+                </a:solidFill>
+                <a:latin typeface="Courier"/>
+              </a:rPr>
+              <a:t>"fixed 8y"</a:t>
+            </a:r>
+            <a:r>
+              <a:rPr>
+                <a:latin typeface="Courier"/>
+              </a:rPr>
+              <a:t>, </a:t>
+            </a:r>
+            <a:r>
+              <a:rPr>
+                <a:solidFill>
+                  <a:srgbClr val="40A070"/>
+                </a:solidFill>
+                <a:latin typeface="Courier"/>
+              </a:rPr>
+              <a:t>8</a:t>
+            </a:r>
+            <a:r>
+              <a:rPr>
+                <a:latin typeface="Courier"/>
+              </a:rPr>
+              <a:t>)]:</a:t>
+            </a:r>
+            <a:br/>
+            <a:r>
+              <a:rPr>
+                <a:latin typeface="Courier"/>
+              </a:rPr>
+              <a:t>    r </a:t>
+            </a:r>
+            <a:r>
+              <a:rPr>
+                <a:solidFill>
+                  <a:srgbClr val="666666"/>
+                </a:solidFill>
+                <a:latin typeface="Courier"/>
+              </a:rPr>
+              <a:t>=</a:t>
+            </a:r>
+            <a:r>
+              <a:rPr>
+                <a:latin typeface="Courier"/>
+              </a:rPr>
+              <a:t> backtest(w)</a:t>
+            </a:r>
+            <a:br/>
+            <a:r>
+              <a:rPr>
+                <a:latin typeface="Courier"/>
+              </a:rPr>
+              <a:t>    </a:t>
+            </a:r>
+            <a:r>
+              <a:rPr>
+                <a:solidFill>
+                  <a:srgbClr val="008000"/>
+                </a:solidFill>
+                <a:latin typeface="Courier"/>
+              </a:rPr>
+              <a:t>print</a:t>
+            </a:r>
+            <a:r>
+              <a:rPr>
+                <a:latin typeface="Courier"/>
+              </a:rPr>
+              <a:t>(</a:t>
+            </a:r>
+            <a:r>
+              <a:rPr>
+                <a:solidFill>
+                  <a:srgbClr val="BB6688"/>
+                </a:solidFill>
+                <a:latin typeface="Courier"/>
+              </a:rPr>
+              <a:t>f"</a:t>
+            </a:r>
+            <a:r>
+              <a:rPr>
+                <a:solidFill>
+                  <a:srgbClr val="4070A0"/>
+                </a:solidFill>
+                <a:latin typeface="Courier"/>
+              </a:rPr>
+              <a:t>{</a:t>
+            </a:r>
+            <a:r>
+              <a:rPr>
+                <a:latin typeface="Courier"/>
+              </a:rPr>
+              <a:t>name</a:t>
+            </a:r>
+            <a:r>
+              <a:rPr>
+                <a:solidFill>
+                  <a:srgbClr val="4070A0"/>
+                </a:solidFill>
+                <a:latin typeface="Courier"/>
+              </a:rPr>
+              <a:t>:10s}</a:t>
+            </a:r>
+            <a:r>
+              <a:rPr>
+                <a:solidFill>
+                  <a:srgbClr val="BB6688"/>
+                </a:solidFill>
+                <a:latin typeface="Courier"/>
+              </a:rPr>
+              <a:t>  model RMSE </a:t>
+            </a:r>
+            <a:r>
+              <a:rPr>
+                <a:solidFill>
+                  <a:srgbClr val="4070A0"/>
+                </a:solidFill>
+                <a:latin typeface="Courier"/>
+              </a:rPr>
+              <a:t>{</a:t>
+            </a:r>
+            <a:r>
+              <a:rPr>
+                <a:latin typeface="Courier"/>
+              </a:rPr>
+              <a:t>rmse(r.e_model)</a:t>
+            </a:r>
+            <a:r>
+              <a:rPr>
+                <a:solidFill>
+                  <a:srgbClr val="4070A0"/>
+                </a:solidFill>
+                <a:latin typeface="Courier"/>
+              </a:rPr>
+              <a:t>:.4f}</a:t>
+            </a:r>
+            <a:r>
+              <a:rPr>
+                <a:solidFill>
+                  <a:srgbClr val="BB6688"/>
+                </a:solidFill>
+                <a:latin typeface="Courier"/>
+              </a:rPr>
+              <a:t>   random walk </a:t>
+            </a:r>
+            <a:r>
+              <a:rPr>
+                <a:solidFill>
+                  <a:srgbClr val="4070A0"/>
+                </a:solidFill>
+                <a:latin typeface="Courier"/>
+              </a:rPr>
+              <a:t>{</a:t>
+            </a:r>
+            <a:r>
+              <a:rPr>
+                <a:latin typeface="Courier"/>
+              </a:rPr>
+              <a:t>rmse(r.e_rw)</a:t>
+            </a:r>
+            <a:r>
+              <a:rPr>
+                <a:solidFill>
+                  <a:srgbClr val="4070A0"/>
+                </a:solidFill>
+                <a:latin typeface="Courier"/>
+              </a:rPr>
+              <a:t>:.4f}</a:t>
+            </a:r>
+            <a:r>
+              <a:rPr>
+                <a:solidFill>
+                  <a:srgbClr val="BB6688"/>
+                </a:solidFill>
+                <a:latin typeface="Courier"/>
+              </a:rPr>
+              <a:t>"</a:t>
+            </a:r>
+            <a:r>
+              <a:rPr>
+                <a:latin typeface="Courier"/>
+              </a:rPr>
+              <a:t>)</a:t>
+            </a:r>
+          </a:p>
+          <a:p>
+            <a:pPr lvl="0" indent="0">
+              <a:buNone/>
+            </a:pPr>
+            <a:r>
+              <a:rPr>
+                <a:latin typeface="Courier"/>
+              </a:rPr>
+              <a:t>expanding   model RMSE 0.0287   random walk 0.0283
+fixed 5y    model RMSE 0.0285   random walk 0.0283
+fixed 8y    model RMSE 0.0290   random walk 0.0283</a:t>
+            </a:r>
+          </a:p>
+          <a:p>
+            <a:pPr lvl="0" indent="0" marL="0">
+              <a:buNone/>
+            </a:pPr>
+            <a:r>
+              <a:rPr/>
+              <a:t>Read the second column. </a:t>
+            </a:r>
+            <a:r>
+              <a:rPr b="1"/>
+              <a:t>The random walk wins.</a:t>
+            </a:r>
+            <a:r>
+              <a:rPr/>
+              <a:t> Thirteen features, two hundred trees, and a rule that says “next year looks like this year” is better.</a:t>
             </a:r>
           </a:p>
         </p:txBody>
@@ -3364,7 +4559,12 @@
             <p:ph type="title"/>
           </p:nvPr>
         </p:nvSpPr>
-        <p:spPr/>
+        <p:spPr>
+          <a:xfrm>
+            <a:off x="722313" y="1850000"/>
+            <a:ext cx="7772400" cy="1300000"/>
+          </a:xfrm>
+        </p:spPr>
         <p:txBody>
           <a:bodyPr/>
           <a:lstStyle/>
@@ -3374,7 +4574,194 @@
             </a:pPr>
             <a:r>
               <a:rPr/>
-              <a:t>Against a benchmark that is hard to beat</a:t>
+              <a:t>2 · Comparing honestly</a:t>
+            </a:r>
+          </a:p>
+        </p:txBody>
+      </p:sp>
+    </p:spTree>
+  </p:cSld>
+</p:sld>
+</file>
+
+<file path=ppt/slides/slide12.xml><?xml version="1.0" encoding="utf-8"?>
+<p:sld xmlns:a="http://schemas.openxmlformats.org/drawingml/2006/main" xmlns:r="http://schemas.openxmlformats.org/officeDocument/2006/relationships" xmlns:p="http://schemas.openxmlformats.org/presentationml/2006/main">
+  <p:cSld>
+    <p:spTree>
+      <p:nvGrpSpPr>
+        <p:cNvPr id="1" name=""/>
+        <p:cNvGrpSpPr/>
+        <p:nvPr/>
+      </p:nvGrpSpPr>
+      <p:grpSpPr>
+        <a:xfrm>
+          <a:off x="0" y="0"/>
+          <a:ext cx="0" cy="0"/>
+          <a:chOff x="0" y="0"/>
+          <a:chExt cx="0" cy="0"/>
+        </a:xfrm>
+      </p:grpSpPr>
+      <p:sp>
+        <p:nvSpPr>
+          <p:cNvPr id="2" name="Title 1"/>
+          <p:cNvSpPr>
+            <a:spLocks noGrp="1"/>
+          </p:cNvSpPr>
+          <p:nvPr>
+            <p:ph type="title"/>
+          </p:nvPr>
+        </p:nvSpPr>
+        <p:spPr/>
+        <p:txBody>
+          <a:bodyPr/>
+          <a:lstStyle/>
+          <a:p>
+            <a:pPr lvl="0" indent="0" marL="0">
+              <a:buNone/>
+            </a:pPr>
+            <a:r>
+              <a:rPr/>
+              <a:t>Pick a benchmark that is hard to beat</a:t>
+            </a:r>
+          </a:p>
+        </p:txBody>
+      </p:sp>
+      <mc:AlternateContent xmlns:mc="http://schemas.openxmlformats.org/markup-compatibility/2006">
+        <mc:Choice xmlns:a14="http://schemas.microsoft.com/office/drawing/2010/main" Requires="a14">
+          <p:sp>
+            <p:nvSpPr>
+              <p:cNvPr id="3" name="Content Placeholder 2"/>
+              <p:cNvSpPr>
+                <a:spLocks noGrp="1"/>
+              </p:cNvSpPr>
+              <p:nvPr>
+                <p:ph idx="1"/>
+              </p:nvPr>
+            </p:nvSpPr>
+            <p:spPr/>
+            <p:txBody>
+              <a:bodyPr/>
+              <a:lstStyle/>
+              <a:p>
+                <a:pPr lvl="0"/>
+                <a:r>
+                  <a:rPr/>
+                  <a:t>A </a:t>
+                </a:r>
+                <a:r>
+                  <a:rPr b="1"/>
+                  <a:t>random walk</a:t>
+                </a:r>
+                <a:r>
+                  <a:rPr/>
+                  <a:t> — for anything close to a unit root, this is brutal</a:t>
+                </a:r>
+              </a:p>
+              <a:p>
+                <a:pPr lvl="0"/>
+                <a:r>
+                  <a:rPr/>
+                  <a:t>An </a:t>
+                </a:r>
+                <a:r>
+                  <a:rPr b="1"/>
+                  <a:t>AR(</a:t>
+                </a:r>
+                <a14:m>
+                  <m:oMath xmlns:m="http://schemas.openxmlformats.org/officeDocument/2006/math">
+                    <m:r>
+                      <m:t>p</m:t>
+                    </m:r>
+                  </m:oMath>
+                </a14:m>
+                <a:r>
+                  <a:rPr b="1"/>
+                  <a:t>)</a:t>
+                </a:r>
+                <a:r>
+                  <a:rPr/>
+                  <a:t> — cheap, and it uses the persistence you were going to claim credit for</a:t>
+                </a:r>
+              </a:p>
+              <a:p>
+                <a:pPr lvl="0"/>
+                <a:r>
+                  <a:rPr/>
+                  <a:t>The </a:t>
+                </a:r>
+                <a:r>
+                  <a:rPr b="1"/>
+                  <a:t>consensus forecast</a:t>
+                </a:r>
+                <a:r>
+                  <a:rPr/>
+                  <a:t> — if you cannot beat the professionals, say so</a:t>
+                </a:r>
+              </a:p>
+              <a:p>
+                <a:pPr lvl="0" indent="0" marL="0">
+                  <a:buNone/>
+                </a:pPr>
+                <a:r>
+                  <a:rPr/>
+                  <a:t>A lower RMSE </a:t>
+                </a:r>
+                <a:r>
+                  <a:rPr b="1"/>
+                  <a:t>without a significance statement</a:t>
+                </a:r>
+                <a:r>
+                  <a:rPr/>
+                  <a:t> is an anecdote. The difference between 0.0287 and 0.0283 is not a finding until you have tested it.</a:t>
+                </a:r>
+              </a:p>
+            </p:txBody>
+          </p:sp>
+        </mc:Choice>
+      </mc:AlternateContent>
+    </p:spTree>
+  </p:cSld>
+</p:sld>
+</file>
+
+<file path=ppt/slides/slide13.xml><?xml version="1.0" encoding="utf-8"?>
+<p:sld xmlns:a="http://schemas.openxmlformats.org/drawingml/2006/main" xmlns:r="http://schemas.openxmlformats.org/officeDocument/2006/relationships" xmlns:p="http://schemas.openxmlformats.org/presentationml/2006/main">
+  <p:cSld>
+    <p:spTree>
+      <p:nvGrpSpPr>
+        <p:cNvPr id="1" name=""/>
+        <p:cNvGrpSpPr/>
+        <p:nvPr/>
+      </p:nvGrpSpPr>
+      <p:grpSpPr>
+        <a:xfrm>
+          <a:off x="0" y="0"/>
+          <a:ext cx="0" cy="0"/>
+          <a:chOff x="0" y="0"/>
+          <a:chExt cx="0" cy="0"/>
+        </a:xfrm>
+      </p:grpSpPr>
+      <p:sp>
+        <p:nvSpPr>
+          <p:cNvPr id="2" name="Title 1"/>
+          <p:cNvSpPr>
+            <a:spLocks noGrp="1"/>
+          </p:cNvSpPr>
+          <p:nvPr>
+            <p:ph type="title"/>
+          </p:nvPr>
+        </p:nvSpPr>
+        <p:spPr/>
+        <p:txBody>
+          <a:bodyPr/>
+          <a:lstStyle/>
+          <a:p>
+            <a:pPr lvl="0" indent="0" marL="0">
+              <a:buNone/>
+            </a:pPr>
+            <a:r>
+              <a:rPr/>
+              <a:t>Diebold–Mariano</a:t>
             </a:r>
           </a:p>
         </p:txBody>
@@ -3401,103 +4788,7 @@
                 </a:pPr>
                 <a:r>
                   <a:rPr/>
-                  <a:t>A random walk, an AR(</a:t>
-                </a:r>
-                <a14:m>
-                  <m:oMath xmlns:m="http://schemas.openxmlformats.org/officeDocument/2006/math">
-                    <m:r>
-                      <m:t>p</m:t>
-                    </m:r>
-                  </m:oMath>
-                </a14:m>
-                <a:r>
-                  <a:rPr/>
-                  <a:t>), or the consensus forecast.</a:t>
-                </a:r>
-              </a:p>
-              <a:p>
-                <a:pPr lvl="0" indent="0" marL="0">
-                  <a:buNone/>
-                </a:pPr>
-                <a:r>
-                  <a:rPr b="1"/>
-                  <a:t>A lower RMSE without a significance statement is an anecdote.</a:t>
-                </a:r>
-              </a:p>
-            </p:txBody>
-          </p:sp>
-        </mc:Choice>
-      </mc:AlternateContent>
-    </p:spTree>
-  </p:cSld>
-</p:sld>
-</file>
-
-<file path=ppt/slides/slide12.xml><?xml version="1.0" encoding="utf-8"?>
-<p:sld xmlns:a="http://schemas.openxmlformats.org/drawingml/2006/main" xmlns:r="http://schemas.openxmlformats.org/officeDocument/2006/relationships" xmlns:p="http://schemas.openxmlformats.org/presentationml/2006/main">
-  <p:cSld>
-    <p:spTree>
-      <p:nvGrpSpPr>
-        <p:cNvPr id="1" name=""/>
-        <p:cNvGrpSpPr/>
-        <p:nvPr/>
-      </p:nvGrpSpPr>
-      <p:grpSpPr>
-        <a:xfrm>
-          <a:off x="0" y="0"/>
-          <a:ext cx="0" cy="0"/>
-          <a:chOff x="0" y="0"/>
-          <a:chExt cx="0" cy="0"/>
-        </a:xfrm>
-      </p:grpSpPr>
-      <p:sp>
-        <p:nvSpPr>
-          <p:cNvPr id="2" name="Title 1"/>
-          <p:cNvSpPr>
-            <a:spLocks noGrp="1"/>
-          </p:cNvSpPr>
-          <p:nvPr>
-            <p:ph type="title"/>
-          </p:nvPr>
-        </p:nvSpPr>
-        <p:spPr/>
-        <p:txBody>
-          <a:bodyPr/>
-          <a:lstStyle/>
-          <a:p>
-            <a:pPr lvl="0" indent="0" marL="0">
-              <a:buNone/>
-            </a:pPr>
-            <a:r>
-              <a:rPr/>
-              <a:t>Diebold–Mariano</a:t>
-            </a:r>
-          </a:p>
-        </p:txBody>
-      </p:sp>
-      <mc:AlternateContent xmlns:mc="http://schemas.openxmlformats.org/markup-compatibility/2006">
-        <mc:Choice xmlns:a14="http://schemas.microsoft.com/office/drawing/2010/main" Requires="a14">
-          <p:sp>
-            <p:nvSpPr>
-              <p:cNvPr id="3" name="Content Placeholder 2"/>
-              <p:cNvSpPr>
-                <a:spLocks noGrp="1"/>
-              </p:cNvSpPr>
-              <p:nvPr>
-                <p:ph idx="1"/>
-              </p:nvPr>
-            </p:nvSpPr>
-            <p:spPr/>
-            <p:txBody>
-              <a:bodyPr/>
-              <a:lstStyle/>
-              <a:p>
-                <a:pPr lvl="0" indent="0" marL="0">
-                  <a:buNone/>
-                </a:pPr>
-                <a:r>
-                  <a:rPr/>
-                  <a:t>Let </a:t>
+                  <a:t>With </a:t>
                 </a:r>
                 <a14:m>
                   <m:oMath xmlns:m="http://schemas.openxmlformats.org/officeDocument/2006/math">
@@ -3541,7 +4832,7 @@
                 </a14:m>
                 <a:r>
                   <a:rPr/>
-                  <a:t> be the forecast errors of two models and </a:t>
+                  <a:t> the two models’ errors and </a:t>
                 </a:r>
                 <a14:m>
                   <m:oMath xmlns:m="http://schemas.openxmlformats.org/officeDocument/2006/math">
@@ -3629,53 +4920,7 @@
                 </a14:m>
                 <a:r>
                   <a:rPr/>
-                  <a:t> the loss differential. Under the null of equal predictive accuracy, </a:t>
-                </a:r>
-                <a14:m>
-                  <m:oMath xmlns:m="http://schemas.openxmlformats.org/officeDocument/2006/math">
-                    <m:r>
-                      <m:rPr>
-                        <m:sty m:val="p"/>
-                        <m:scr m:val="double-struck"/>
-                      </m:rPr>
-                      <m:t>E</m:t>
-                    </m:r>
-                    <m:d>
-                      <m:dPr>
-                        <m:begChr m:val="["/>
-                        <m:sepChr m:val=""/>
-                        <m:endChr m:val="]"/>
-                        <m:grow/>
-                      </m:dPr>
-                      <m:e>
-                        <m:sSub>
-                          <m:e>
-                            <m:r>
-                              <m:t>d</m:t>
-                            </m:r>
-                          </m:e>
-                          <m:sub>
-                            <m:r>
-                              <m:t>t</m:t>
-                            </m:r>
-                          </m:sub>
-                        </m:sSub>
-                      </m:e>
-                    </m:d>
-                    <m:r>
-                      <m:rPr>
-                        <m:sty m:val="p"/>
-                      </m:rPr>
-                      <m:t>=</m:t>
-                    </m:r>
-                    <m:r>
-                      <m:t>0</m:t>
-                    </m:r>
-                  </m:oMath>
-                </a14:m>
-                <a:r>
-                  <a:rPr/>
-                  <a:t>, and</a:t>
+                  <a:t>:</a:t>
                 </a:r>
               </a:p>
               <a:p>
@@ -3828,137 +5073,17 @@
                   </m:oMathPara>
                 </a14:m>
               </a:p>
-            </p:txBody>
-          </p:sp>
-        </mc:Choice>
-      </mc:AlternateContent>
-    </p:spTree>
-  </p:cSld>
-</p:sld>
-</file>
-
-<file path=ppt/slides/slide13.xml><?xml version="1.0" encoding="utf-8"?>
-<p:sld xmlns:a="http://schemas.openxmlformats.org/drawingml/2006/main" xmlns:r="http://schemas.openxmlformats.org/officeDocument/2006/relationships" xmlns:p="http://schemas.openxmlformats.org/presentationml/2006/main">
-  <p:cSld>
-    <p:spTree>
-      <p:nvGrpSpPr>
-        <p:cNvPr id="1" name=""/>
-        <p:cNvGrpSpPr/>
-        <p:nvPr/>
-      </p:nvGrpSpPr>
-      <p:grpSpPr>
-        <a:xfrm>
-          <a:off x="0" y="0"/>
-          <a:ext cx="0" cy="0"/>
-          <a:chOff x="0" y="0"/>
-          <a:chExt cx="0" cy="0"/>
-        </a:xfrm>
-      </p:grpSpPr>
-      <p:sp>
-        <p:nvSpPr>
-          <p:cNvPr id="2" name="Title 1"/>
-          <p:cNvSpPr>
-            <a:spLocks noGrp="1"/>
-          </p:cNvSpPr>
-          <p:nvPr>
-            <p:ph type="title"/>
-          </p:nvPr>
-        </p:nvSpPr>
-        <p:spPr/>
-        <p:txBody>
-          <a:bodyPr/>
-          <a:lstStyle/>
-          <a:p>
-            <a:pPr lvl="0" indent="0" marL="0">
-              <a:buNone/>
-            </a:pPr>
-            <a:r>
-              <a:rPr/>
-              <a:t>The variance must be HAC</a:t>
-            </a:r>
-          </a:p>
-        </p:txBody>
-      </p:sp>
-      <mc:AlternateContent xmlns:mc="http://schemas.openxmlformats.org/markup-compatibility/2006">
-        <mc:Choice xmlns:a14="http://schemas.microsoft.com/office/drawing/2010/main" Requires="a14">
-          <p:sp>
-            <p:nvSpPr>
-              <p:cNvPr id="3" name="Content Placeholder 2"/>
-              <p:cNvSpPr>
-                <a:spLocks noGrp="1"/>
-              </p:cNvSpPr>
-              <p:nvPr>
-                <p:ph idx="1"/>
-              </p:nvPr>
-            </p:nvSpPr>
-            <p:spPr/>
-            <p:txBody>
-              <a:bodyPr/>
-              <a:lstStyle/>
               <a:p>
                 <a:pPr lvl="0" indent="0" marL="0">
                   <a:buNone/>
                 </a:pPr>
                 <a:r>
                   <a:rPr/>
-                  <a:t>Estimate </a:t>
-                </a:r>
-                <a14:m>
-                  <m:oMath xmlns:m="http://schemas.openxmlformats.org/officeDocument/2006/math">
-                    <m:acc>
-                      <m:accPr>
-                        <m:chr m:val="̂"/>
-                      </m:accPr>
-                      <m:e>
-                        <m:r>
-                          <m:rPr>
-                            <m:sty m:val="p"/>
-                          </m:rPr>
-                          <m:t>V</m:t>
-                        </m:r>
-                        <m:r>
-                          <m:rPr>
-                            <m:sty m:val="p"/>
-                          </m:rPr>
-                          <m:t>a</m:t>
-                        </m:r>
-                        <m:r>
-                          <m:rPr>
-                            <m:sty m:val="p"/>
-                          </m:rPr>
-                          <m:t>r</m:t>
-                        </m:r>
-                      </m:e>
-                    </m:acc>
-                    <m:d>
-                      <m:dPr>
-                        <m:begChr m:val="("/>
-                        <m:sepChr m:val=""/>
-                        <m:endChr m:val=")"/>
-                        <m:grow/>
-                      </m:dPr>
-                      <m:e>
-                        <m:acc>
-                          <m:accPr>
-                            <m:chr m:val="‾"/>
-                          </m:accPr>
-                          <m:e>
-                            <m:r>
-                              <m:t>d</m:t>
-                            </m:r>
-                          </m:e>
-                        </m:acc>
-                      </m:e>
-                    </m:d>
-                  </m:oMath>
-                </a14:m>
-                <a:r>
-                  <a:rPr/>
-                  <a:t> with a </a:t>
+                  <a:t>The variance must use a </a:t>
                 </a:r>
                 <a:r>
                   <a:rPr b="1"/>
-                  <a:t>Newey–West</a:t>
+                  <a:t>HAC (Newey–West)</a:t>
                 </a:r>
                 <a:r>
                   <a:rPr/>
@@ -3982,16 +5107,7 @@
                 </a14:m>
                 <a:r>
                   <a:rPr/>
-                  <a:t> is serially correlated at multi-step horizons.</a:t>
-                </a:r>
-              </a:p>
-              <a:p>
-                <a:pPr lvl="0" indent="0" marL="0">
-                  <a:buNone/>
-                </a:pPr>
-                <a:r>
-                  <a:rPr/>
-                  <a:t>Use a lag truncation of at least </a:t>
+                  <a:t> is serially correlated at multi-step horizons. Lag truncation of at least </a:t>
                 </a:r>
                 <a14:m>
                   <m:oMath xmlns:m="http://schemas.openxmlformats.org/officeDocument/2006/math">
@@ -4012,6 +5128,31 @@
                 <a:r>
                   <a:rPr/>
                   <a:t>.</a:t>
+                </a:r>
+              </a:p>
+              <a:p>
+                <a:pPr lvl="0" indent="0" marL="0">
+                  <a:buNone/>
+                </a:pPr>
+                <a:r>
+                  <a:rPr/>
+                  <a:t>Two cautions: not valid for </a:t>
+                </a:r>
+                <a:r>
+                  <a:rPr b="1"/>
+                  <a:t>nested</a:t>
+                </a:r>
+                <a:r>
+                  <a:rPr/>
+                  <a:t> models on the same sample (use Clark–West), and with small samples apply the </a:t>
+                </a:r>
+                <a:r>
+                  <a:rPr b="1"/>
+                  <a:t>Harvey–Leybourne–Newbold</a:t>
+                </a:r>
+                <a:r>
+                  <a:rPr/>
+                  <a:t> correction.</a:t>
                 </a:r>
               </a:p>
             </p:txBody>
@@ -4060,7 +5201,7 @@
             </a:pPr>
             <a:r>
               <a:rPr/>
-              <a:t>Two cautions</a:t>
+              <a:t>Compute it</a:t>
             </a:r>
           </a:p>
         </p:txBody>
@@ -4080,41 +5221,878 @@
           <a:bodyPr/>
           <a:lstStyle/>
           <a:p>
-            <a:pPr lvl="0"/>
+            <a:pPr lvl="0" indent="0">
+              <a:buNone/>
+            </a:pPr>
+            <a:r>
+              <a:rPr>
+                <a:latin typeface="Courier"/>
+              </a:rPr>
+              <a:t>r </a:t>
+            </a:r>
+            <a:r>
+              <a:rPr>
+                <a:solidFill>
+                  <a:srgbClr val="666666"/>
+                </a:solidFill>
+                <a:latin typeface="Courier"/>
+              </a:rPr>
+              <a:t>=</a:t>
+            </a:r>
+            <a:r>
+              <a:rPr>
+                <a:latin typeface="Courier"/>
+              </a:rPr>
+              <a:t> backtest(</a:t>
+            </a:r>
+            <a:r>
+              <a:rPr>
+                <a:solidFill>
+                  <a:srgbClr val="19177C"/>
+                </a:solidFill>
+                <a:latin typeface="Courier"/>
+              </a:rPr>
+              <a:t>None</a:t>
+            </a:r>
+            <a:r>
+              <a:rPr>
+                <a:latin typeface="Courier"/>
+              </a:rPr>
+              <a:t>)</a:t>
+            </a:r>
+            <a:br/>
+            <a:br/>
+            <a:r>
+              <a:rPr b="1">
+                <a:solidFill>
+                  <a:srgbClr val="007020"/>
+                </a:solidFill>
+                <a:latin typeface="Courier"/>
+              </a:rPr>
+              <a:t>def</a:t>
+            </a:r>
+            <a:r>
+              <a:rPr>
+                <a:latin typeface="Courier"/>
+              </a:rPr>
+              <a:t> dm_stat(dt, lag</a:t>
+            </a:r>
+            <a:r>
+              <a:rPr>
+                <a:solidFill>
+                  <a:srgbClr val="666666"/>
+                </a:solidFill>
+                <a:latin typeface="Courier"/>
+              </a:rPr>
+              <a:t>=</a:t>
+            </a:r>
+            <a:r>
+              <a:rPr>
+                <a:solidFill>
+                  <a:srgbClr val="40A070"/>
+                </a:solidFill>
+                <a:latin typeface="Courier"/>
+              </a:rPr>
+              <a:t>1</a:t>
+            </a:r>
+            <a:r>
+              <a:rPr>
+                <a:latin typeface="Courier"/>
+              </a:rPr>
+              <a:t>):</a:t>
+            </a:r>
+            <a:br/>
+            <a:r>
+              <a:rPr>
+                <a:latin typeface="Courier"/>
+              </a:rPr>
+              <a:t>    </a:t>
+            </a:r>
+            <a:r>
+              <a:rPr i="1">
+                <a:solidFill>
+                  <a:srgbClr val="60A0B0"/>
+                </a:solidFill>
+                <a:latin typeface="Courier"/>
+              </a:rPr>
+              <a:t>"""Diebold-Mariano with a Newey-West variance."""</a:t>
+            </a:r>
+            <a:br/>
+            <a:r>
+              <a:rPr>
+                <a:latin typeface="Courier"/>
+              </a:rPr>
+              <a:t>    n </a:t>
+            </a:r>
+            <a:r>
+              <a:rPr>
+                <a:solidFill>
+                  <a:srgbClr val="666666"/>
+                </a:solidFill>
+                <a:latin typeface="Courier"/>
+              </a:rPr>
+              <a:t>=</a:t>
+            </a:r>
+            <a:r>
+              <a:rPr>
+                <a:latin typeface="Courier"/>
+              </a:rPr>
+              <a:t> </a:t>
+            </a:r>
+            <a:r>
+              <a:rPr>
+                <a:solidFill>
+                  <a:srgbClr val="008000"/>
+                </a:solidFill>
+                <a:latin typeface="Courier"/>
+              </a:rPr>
+              <a:t>len</a:t>
+            </a:r>
+            <a:r>
+              <a:rPr>
+                <a:latin typeface="Courier"/>
+              </a:rPr>
+              <a:t>(dt)</a:t>
+            </a:r>
+            <a:r>
+              <a:rPr>
+                <a:solidFill>
+                  <a:srgbClr val="666666"/>
+                </a:solidFill>
+                <a:latin typeface="Courier"/>
+              </a:rPr>
+              <a:t>;</a:t>
+            </a:r>
+            <a:r>
+              <a:rPr>
+                <a:latin typeface="Courier"/>
+              </a:rPr>
+              <a:t> dbar </a:t>
+            </a:r>
+            <a:r>
+              <a:rPr>
+                <a:solidFill>
+                  <a:srgbClr val="666666"/>
+                </a:solidFill>
+                <a:latin typeface="Courier"/>
+              </a:rPr>
+              <a:t>=</a:t>
+            </a:r>
+            <a:r>
+              <a:rPr>
+                <a:latin typeface="Courier"/>
+              </a:rPr>
+              <a:t> dt.mean()</a:t>
+            </a:r>
+            <a:br/>
+            <a:r>
+              <a:rPr>
+                <a:latin typeface="Courier"/>
+              </a:rPr>
+              <a:t>    v </a:t>
+            </a:r>
+            <a:r>
+              <a:rPr>
+                <a:solidFill>
+                  <a:srgbClr val="666666"/>
+                </a:solidFill>
+                <a:latin typeface="Courier"/>
+              </a:rPr>
+              <a:t>=</a:t>
+            </a:r>
+            <a:r>
+              <a:rPr>
+                <a:latin typeface="Courier"/>
+              </a:rPr>
+              <a:t> ((dt </a:t>
+            </a:r>
+            <a:r>
+              <a:rPr>
+                <a:solidFill>
+                  <a:srgbClr val="666666"/>
+                </a:solidFill>
+                <a:latin typeface="Courier"/>
+              </a:rPr>
+              <a:t>-</a:t>
+            </a:r>
+            <a:r>
+              <a:rPr>
+                <a:latin typeface="Courier"/>
+              </a:rPr>
+              <a:t> dbar) </a:t>
+            </a:r>
+            <a:r>
+              <a:rPr>
+                <a:solidFill>
+                  <a:srgbClr val="666666"/>
+                </a:solidFill>
+                <a:latin typeface="Courier"/>
+              </a:rPr>
+              <a:t>**</a:t>
+            </a:r>
+            <a:r>
+              <a:rPr>
+                <a:latin typeface="Courier"/>
+              </a:rPr>
+              <a:t> </a:t>
+            </a:r>
+            <a:r>
+              <a:rPr>
+                <a:solidFill>
+                  <a:srgbClr val="40A070"/>
+                </a:solidFill>
+                <a:latin typeface="Courier"/>
+              </a:rPr>
+              <a:t>2</a:t>
+            </a:r>
+            <a:r>
+              <a:rPr>
+                <a:latin typeface="Courier"/>
+              </a:rPr>
+              <a:t>).mean()</a:t>
+            </a:r>
+            <a:br/>
+            <a:r>
+              <a:rPr>
+                <a:latin typeface="Courier"/>
+              </a:rPr>
+              <a:t>    </a:t>
+            </a:r>
+            <a:r>
+              <a:rPr b="1">
+                <a:solidFill>
+                  <a:srgbClr val="007020"/>
+                </a:solidFill>
+                <a:latin typeface="Courier"/>
+              </a:rPr>
+              <a:t>for</a:t>
+            </a:r>
+            <a:r>
+              <a:rPr>
+                <a:latin typeface="Courier"/>
+              </a:rPr>
+              <a:t> l </a:t>
+            </a:r>
+            <a:r>
+              <a:rPr b="1">
+                <a:solidFill>
+                  <a:srgbClr val="007020"/>
+                </a:solidFill>
+                <a:latin typeface="Courier"/>
+              </a:rPr>
+              <a:t>in</a:t>
+            </a:r>
+            <a:r>
+              <a:rPr>
+                <a:latin typeface="Courier"/>
+              </a:rPr>
+              <a:t> </a:t>
+            </a:r>
+            <a:r>
+              <a:rPr>
+                <a:solidFill>
+                  <a:srgbClr val="008000"/>
+                </a:solidFill>
+                <a:latin typeface="Courier"/>
+              </a:rPr>
+              <a:t>range</a:t>
+            </a:r>
+            <a:r>
+              <a:rPr>
+                <a:latin typeface="Courier"/>
+              </a:rPr>
+              <a:t>(</a:t>
+            </a:r>
+            <a:r>
+              <a:rPr>
+                <a:solidFill>
+                  <a:srgbClr val="40A070"/>
+                </a:solidFill>
+                <a:latin typeface="Courier"/>
+              </a:rPr>
+              <a:t>1</a:t>
+            </a:r>
+            <a:r>
+              <a:rPr>
+                <a:latin typeface="Courier"/>
+              </a:rPr>
+              <a:t>, lag </a:t>
+            </a:r>
+            <a:r>
+              <a:rPr>
+                <a:solidFill>
+                  <a:srgbClr val="666666"/>
+                </a:solidFill>
+                <a:latin typeface="Courier"/>
+              </a:rPr>
+              <a:t>+</a:t>
+            </a:r>
+            <a:r>
+              <a:rPr>
+                <a:latin typeface="Courier"/>
+              </a:rPr>
+              <a:t> </a:t>
+            </a:r>
+            <a:r>
+              <a:rPr>
+                <a:solidFill>
+                  <a:srgbClr val="40A070"/>
+                </a:solidFill>
+                <a:latin typeface="Courier"/>
+              </a:rPr>
+              <a:t>1</a:t>
+            </a:r>
+            <a:r>
+              <a:rPr>
+                <a:latin typeface="Courier"/>
+              </a:rPr>
+              <a:t>):</a:t>
+            </a:r>
+            <a:br/>
+            <a:r>
+              <a:rPr>
+                <a:latin typeface="Courier"/>
+              </a:rPr>
+              <a:t>        gl </a:t>
+            </a:r>
+            <a:r>
+              <a:rPr>
+                <a:solidFill>
+                  <a:srgbClr val="666666"/>
+                </a:solidFill>
+                <a:latin typeface="Courier"/>
+              </a:rPr>
+              <a:t>=</a:t>
+            </a:r>
+            <a:r>
+              <a:rPr>
+                <a:latin typeface="Courier"/>
+              </a:rPr>
+              <a:t> ((dt[l:] </a:t>
+            </a:r>
+            <a:r>
+              <a:rPr>
+                <a:solidFill>
+                  <a:srgbClr val="666666"/>
+                </a:solidFill>
+                <a:latin typeface="Courier"/>
+              </a:rPr>
+              <a:t>-</a:t>
+            </a:r>
+            <a:r>
+              <a:rPr>
+                <a:latin typeface="Courier"/>
+              </a:rPr>
+              <a:t> dbar) </a:t>
+            </a:r>
+            <a:r>
+              <a:rPr>
+                <a:solidFill>
+                  <a:srgbClr val="666666"/>
+                </a:solidFill>
+                <a:latin typeface="Courier"/>
+              </a:rPr>
+              <a:t>*</a:t>
+            </a:r>
+            <a:r>
+              <a:rPr>
+                <a:latin typeface="Courier"/>
+              </a:rPr>
+              <a:t> (dt[:</a:t>
+            </a:r>
+            <a:r>
+              <a:rPr>
+                <a:solidFill>
+                  <a:srgbClr val="666666"/>
+                </a:solidFill>
+                <a:latin typeface="Courier"/>
+              </a:rPr>
+              <a:t>-</a:t>
+            </a:r>
+            <a:r>
+              <a:rPr>
+                <a:latin typeface="Courier"/>
+              </a:rPr>
+              <a:t>l] </a:t>
+            </a:r>
+            <a:r>
+              <a:rPr>
+                <a:solidFill>
+                  <a:srgbClr val="666666"/>
+                </a:solidFill>
+                <a:latin typeface="Courier"/>
+              </a:rPr>
+              <a:t>-</a:t>
+            </a:r>
+            <a:r>
+              <a:rPr>
+                <a:latin typeface="Courier"/>
+              </a:rPr>
+              <a:t> dbar)).mean()</a:t>
+            </a:r>
+            <a:br/>
+            <a:r>
+              <a:rPr>
+                <a:latin typeface="Courier"/>
+              </a:rPr>
+              <a:t>        v </a:t>
+            </a:r>
+            <a:r>
+              <a:rPr>
+                <a:solidFill>
+                  <a:srgbClr val="666666"/>
+                </a:solidFill>
+                <a:latin typeface="Courier"/>
+              </a:rPr>
+              <a:t>+=</a:t>
+            </a:r>
+            <a:r>
+              <a:rPr>
+                <a:latin typeface="Courier"/>
+              </a:rPr>
+              <a:t> </a:t>
+            </a:r>
+            <a:r>
+              <a:rPr>
+                <a:solidFill>
+                  <a:srgbClr val="40A070"/>
+                </a:solidFill>
+                <a:latin typeface="Courier"/>
+              </a:rPr>
+              <a:t>2</a:t>
+            </a:r>
+            <a:r>
+              <a:rPr>
+                <a:latin typeface="Courier"/>
+              </a:rPr>
+              <a:t> </a:t>
+            </a:r>
+            <a:r>
+              <a:rPr>
+                <a:solidFill>
+                  <a:srgbClr val="666666"/>
+                </a:solidFill>
+                <a:latin typeface="Courier"/>
+              </a:rPr>
+              <a:t>*</a:t>
+            </a:r>
+            <a:r>
+              <a:rPr>
+                <a:latin typeface="Courier"/>
+              </a:rPr>
+              <a:t> (</a:t>
+            </a:r>
+            <a:r>
+              <a:rPr>
+                <a:solidFill>
+                  <a:srgbClr val="40A070"/>
+                </a:solidFill>
+                <a:latin typeface="Courier"/>
+              </a:rPr>
+              <a:t>1</a:t>
+            </a:r>
+            <a:r>
+              <a:rPr>
+                <a:latin typeface="Courier"/>
+              </a:rPr>
+              <a:t> </a:t>
+            </a:r>
+            <a:r>
+              <a:rPr>
+                <a:solidFill>
+                  <a:srgbClr val="666666"/>
+                </a:solidFill>
+                <a:latin typeface="Courier"/>
+              </a:rPr>
+              <a:t>-</a:t>
+            </a:r>
+            <a:r>
+              <a:rPr>
+                <a:latin typeface="Courier"/>
+              </a:rPr>
+              <a:t> l </a:t>
+            </a:r>
+            <a:r>
+              <a:rPr>
+                <a:solidFill>
+                  <a:srgbClr val="666666"/>
+                </a:solidFill>
+                <a:latin typeface="Courier"/>
+              </a:rPr>
+              <a:t>/</a:t>
+            </a:r>
+            <a:r>
+              <a:rPr>
+                <a:latin typeface="Courier"/>
+              </a:rPr>
+              <a:t> (lag </a:t>
+            </a:r>
+            <a:r>
+              <a:rPr>
+                <a:solidFill>
+                  <a:srgbClr val="666666"/>
+                </a:solidFill>
+                <a:latin typeface="Courier"/>
+              </a:rPr>
+              <a:t>+</a:t>
+            </a:r>
+            <a:r>
+              <a:rPr>
+                <a:latin typeface="Courier"/>
+              </a:rPr>
+              <a:t> </a:t>
+            </a:r>
+            <a:r>
+              <a:rPr>
+                <a:solidFill>
+                  <a:srgbClr val="40A070"/>
+                </a:solidFill>
+                <a:latin typeface="Courier"/>
+              </a:rPr>
+              <a:t>1</a:t>
+            </a:r>
+            <a:r>
+              <a:rPr>
+                <a:latin typeface="Courier"/>
+              </a:rPr>
+              <a:t>)) </a:t>
+            </a:r>
+            <a:r>
+              <a:rPr>
+                <a:solidFill>
+                  <a:srgbClr val="666666"/>
+                </a:solidFill>
+                <a:latin typeface="Courier"/>
+              </a:rPr>
+              <a:t>*</a:t>
+            </a:r>
+            <a:r>
+              <a:rPr>
+                <a:latin typeface="Courier"/>
+              </a:rPr>
+              <a:t> gl</a:t>
+            </a:r>
+            <a:br/>
+            <a:r>
+              <a:rPr>
+                <a:latin typeface="Courier"/>
+              </a:rPr>
+              <a:t>    </a:t>
+            </a:r>
+            <a:r>
+              <a:rPr b="1">
+                <a:solidFill>
+                  <a:srgbClr val="007020"/>
+                </a:solidFill>
+                <a:latin typeface="Courier"/>
+              </a:rPr>
+              <a:t>return</a:t>
+            </a:r>
+            <a:r>
+              <a:rPr>
+                <a:latin typeface="Courier"/>
+              </a:rPr>
+              <a:t> dbar </a:t>
+            </a:r>
+            <a:r>
+              <a:rPr>
+                <a:solidFill>
+                  <a:srgbClr val="666666"/>
+                </a:solidFill>
+                <a:latin typeface="Courier"/>
+              </a:rPr>
+              <a:t>/</a:t>
+            </a:r>
+            <a:r>
+              <a:rPr>
+                <a:latin typeface="Courier"/>
+              </a:rPr>
+              <a:t> np.sqrt(v </a:t>
+            </a:r>
+            <a:r>
+              <a:rPr>
+                <a:solidFill>
+                  <a:srgbClr val="666666"/>
+                </a:solidFill>
+                <a:latin typeface="Courier"/>
+              </a:rPr>
+              <a:t>/</a:t>
+            </a:r>
+            <a:r>
+              <a:rPr>
+                <a:latin typeface="Courier"/>
+              </a:rPr>
+              <a:t> n)</a:t>
+            </a:r>
+            <a:br/>
+            <a:br/>
+            <a:r>
+              <a:rPr>
+                <a:latin typeface="Courier"/>
+              </a:rPr>
+              <a:t>diff </a:t>
+            </a:r>
+            <a:r>
+              <a:rPr>
+                <a:solidFill>
+                  <a:srgbClr val="666666"/>
+                </a:solidFill>
+                <a:latin typeface="Courier"/>
+              </a:rPr>
+              <a:t>=</a:t>
+            </a:r>
+            <a:r>
+              <a:rPr>
+                <a:latin typeface="Courier"/>
+              </a:rPr>
+              <a:t> (r.e_model </a:t>
+            </a:r>
+            <a:r>
+              <a:rPr>
+                <a:solidFill>
+                  <a:srgbClr val="666666"/>
+                </a:solidFill>
+                <a:latin typeface="Courier"/>
+              </a:rPr>
+              <a:t>**</a:t>
+            </a:r>
+            <a:r>
+              <a:rPr>
+                <a:latin typeface="Courier"/>
+              </a:rPr>
+              <a:t> </a:t>
+            </a:r>
+            <a:r>
+              <a:rPr>
+                <a:solidFill>
+                  <a:srgbClr val="40A070"/>
+                </a:solidFill>
+                <a:latin typeface="Courier"/>
+              </a:rPr>
+              <a:t>2</a:t>
+            </a:r>
+            <a:r>
+              <a:rPr>
+                <a:latin typeface="Courier"/>
+              </a:rPr>
+              <a:t> </a:t>
+            </a:r>
+            <a:r>
+              <a:rPr>
+                <a:solidFill>
+                  <a:srgbClr val="666666"/>
+                </a:solidFill>
+                <a:latin typeface="Courier"/>
+              </a:rPr>
+              <a:t>-</a:t>
+            </a:r>
+            <a:r>
+              <a:rPr>
+                <a:latin typeface="Courier"/>
+              </a:rPr>
+              <a:t> r.e_rw </a:t>
+            </a:r>
+            <a:r>
+              <a:rPr>
+                <a:solidFill>
+                  <a:srgbClr val="666666"/>
+                </a:solidFill>
+                <a:latin typeface="Courier"/>
+              </a:rPr>
+              <a:t>**</a:t>
+            </a:r>
+            <a:r>
+              <a:rPr>
+                <a:latin typeface="Courier"/>
+              </a:rPr>
+              <a:t> </a:t>
+            </a:r>
+            <a:r>
+              <a:rPr>
+                <a:solidFill>
+                  <a:srgbClr val="40A070"/>
+                </a:solidFill>
+                <a:latin typeface="Courier"/>
+              </a:rPr>
+              <a:t>2</a:t>
+            </a:r>
+            <a:r>
+              <a:rPr>
+                <a:latin typeface="Courier"/>
+              </a:rPr>
+              <a:t>).to_numpy()</a:t>
+            </a:r>
+            <a:br/>
+            <a:r>
+              <a:rPr>
+                <a:solidFill>
+                  <a:srgbClr val="008000"/>
+                </a:solidFill>
+                <a:latin typeface="Courier"/>
+              </a:rPr>
+              <a:t>print</a:t>
+            </a:r>
+            <a:r>
+              <a:rPr>
+                <a:latin typeface="Courier"/>
+              </a:rPr>
+              <a:t>(</a:t>
+            </a:r>
+            <a:r>
+              <a:rPr>
+                <a:solidFill>
+                  <a:srgbClr val="BB6688"/>
+                </a:solidFill>
+                <a:latin typeface="Courier"/>
+              </a:rPr>
+              <a:t>f"mean loss differential : </a:t>
+            </a:r>
+            <a:r>
+              <a:rPr>
+                <a:solidFill>
+                  <a:srgbClr val="4070A0"/>
+                </a:solidFill>
+                <a:latin typeface="Courier"/>
+              </a:rPr>
+              <a:t>{</a:t>
+            </a:r>
+            <a:r>
+              <a:rPr>
+                <a:latin typeface="Courier"/>
+              </a:rPr>
+              <a:t>diff</a:t>
+            </a:r>
+            <a:r>
+              <a:rPr>
+                <a:solidFill>
+                  <a:srgbClr val="4070A0"/>
+                </a:solidFill>
+                <a:latin typeface="Courier"/>
+              </a:rPr>
+              <a:t>.</a:t>
+            </a:r>
+            <a:r>
+              <a:rPr>
+                <a:latin typeface="Courier"/>
+              </a:rPr>
+              <a:t>mean()</a:t>
+            </a:r>
+            <a:r>
+              <a:rPr>
+                <a:solidFill>
+                  <a:srgbClr val="4070A0"/>
+                </a:solidFill>
+                <a:latin typeface="Courier"/>
+              </a:rPr>
+              <a:t>:+.6f}</a:t>
+            </a:r>
+            <a:r>
+              <a:rPr>
+                <a:solidFill>
+                  <a:srgbClr val="BB6688"/>
+                </a:solidFill>
+                <a:latin typeface="Courier"/>
+              </a:rPr>
+              <a:t>   (positive = model is worse)"</a:t>
+            </a:r>
+            <a:r>
+              <a:rPr>
+                <a:latin typeface="Courier"/>
+              </a:rPr>
+              <a:t>)</a:t>
+            </a:r>
+            <a:br/>
+            <a:r>
+              <a:rPr>
+                <a:solidFill>
+                  <a:srgbClr val="008000"/>
+                </a:solidFill>
+                <a:latin typeface="Courier"/>
+              </a:rPr>
+              <a:t>print</a:t>
+            </a:r>
+            <a:r>
+              <a:rPr>
+                <a:latin typeface="Courier"/>
+              </a:rPr>
+              <a:t>(</a:t>
+            </a:r>
+            <a:r>
+              <a:rPr>
+                <a:solidFill>
+                  <a:srgbClr val="BB6688"/>
+                </a:solidFill>
+                <a:latin typeface="Courier"/>
+              </a:rPr>
+              <a:t>f"DM statistic           : </a:t>
+            </a:r>
+            <a:r>
+              <a:rPr>
+                <a:solidFill>
+                  <a:srgbClr val="4070A0"/>
+                </a:solidFill>
+                <a:latin typeface="Courier"/>
+              </a:rPr>
+              <a:t>{</a:t>
+            </a:r>
+            <a:r>
+              <a:rPr>
+                <a:latin typeface="Courier"/>
+              </a:rPr>
+              <a:t>dm_stat(diff)</a:t>
+            </a:r>
+            <a:r>
+              <a:rPr>
+                <a:solidFill>
+                  <a:srgbClr val="4070A0"/>
+                </a:solidFill>
+                <a:latin typeface="Courier"/>
+              </a:rPr>
+              <a:t>:+.3f}</a:t>
+            </a:r>
+            <a:r>
+              <a:rPr>
+                <a:solidFill>
+                  <a:srgbClr val="BB6688"/>
+                </a:solidFill>
+                <a:latin typeface="Courier"/>
+              </a:rPr>
+              <a:t>   |DM| &lt; 1.96, so no detectable difference"</a:t>
+            </a:r>
+            <a:r>
+              <a:rPr>
+                <a:latin typeface="Courier"/>
+              </a:rPr>
+              <a:t>)</a:t>
+            </a:r>
+          </a:p>
+          <a:p>
+            <a:pPr lvl="0" indent="0">
+              <a:buNone/>
+            </a:pPr>
+            <a:r>
+              <a:rPr>
+                <a:latin typeface="Courier"/>
+              </a:rPr>
+              <a:t>mean loss differential : +0.000021   (positive = model is worse)
+DM statistic           : +0.265   |DM| &lt; 1.96, so no detectable difference</a:t>
+            </a:r>
+          </a:p>
+          <a:p>
+            <a:pPr lvl="0" indent="0" marL="0">
+              <a:buNone/>
+            </a:pPr>
             <a:r>
               <a:rPr/>
-              <a:t>The test is </a:t>
-            </a:r>
-            <a:r>
-              <a:rPr b="1"/>
-              <a:t>not valid for nested models</a:t>
+              <a:t>The honest sentence is: </a:t>
+            </a:r>
+            <a:r>
+              <a:rPr i="1"/>
+              <a:t>“the forest neither beats nor is beaten by a random walk on this panel.”</a:t>
             </a:r>
             <a:r>
               <a:rPr/>
-              <a:t> estimated on the same sample — use </a:t>
-            </a:r>
-            <a:r>
-              <a:rPr b="1"/>
-              <a:t>Clark–West</a:t>
-            </a:r>
-            <a:r>
-              <a:rPr/>
-              <a:t>.</a:t>
-            </a:r>
-          </a:p>
-          <a:p>
-            <a:pPr lvl="0"/>
-            <a:r>
-              <a:rPr/>
-              <a:t>With small samples, the </a:t>
-            </a:r>
-            <a:r>
-              <a:rPr b="1"/>
-              <a:t>Harvey–Leybourne–Newbold</a:t>
-            </a:r>
-            <a:r>
-              <a:rPr/>
-              <a:t> correction is advisable.</a:t>
+              <a:t> That is a result. It is publishable. It is what most forecasting comparisons actually find.</a:t>
             </a:r>
           </a:p>
         </p:txBody>
@@ -4151,12 +6129,7 @@
             <p:ph type="title"/>
           </p:nvPr>
         </p:nvSpPr>
-        <p:spPr>
-          <a:xfrm>
-            <a:off x="722313" y="1850000"/>
-            <a:ext cx="7772400" cy="1300000"/>
-          </a:xfrm>
-        </p:spPr>
+        <p:spPr/>
         <p:txBody>
           <a:bodyPr/>
           <a:lstStyle/>
@@ -4166,17 +6139,99 @@
             </a:pPr>
             <a:r>
               <a:rPr/>
-              <a:t>11.3 Distribution shift</a:t>
-            </a:r>
-          </a:p>
-        </p:txBody>
-      </p:sp>
+              <a:t>Where the errors actually are</a:t>
+            </a:r>
+          </a:p>
+        </p:txBody>
+      </p:sp>
+      <p:pic>
+        <p:nvPicPr>
+          <p:cNvPr descr="slides_files/figure-pptx/cell-6-output-1.png" id="0" name="Picture 1"/>
+          <p:cNvPicPr>
+            <a:picLocks noGrp="1" noChangeAspect="1"/>
+          </p:cNvPicPr>
+          <p:nvPr/>
+        </p:nvPicPr>
+        <p:blipFill>
+          <a:blip r:embed="rId2"/>
+          <a:stretch>
+            <a:fillRect/>
+          </a:stretch>
+        </p:blipFill>
+        <p:spPr bwMode="auto">
+          <a:xfrm>
+            <a:off x="533400" y="1193800"/>
+            <a:ext cx="8077200" cy="3390900"/>
+          </a:xfrm>
+          <a:prstGeom prst="rect">
+            <a:avLst/>
+          </a:prstGeom>
+          <a:noFill/>
+          <a:ln w="9525">
+            <a:noFill/>
+            <a:headEnd/>
+            <a:tailEnd/>
+          </a:ln>
+        </p:spPr>
+      </p:pic>
     </p:spTree>
   </p:cSld>
 </p:sld>
 </file>
 
-<file path=ppt/slides/slide16.xml><?xml version="1.0" encoding="UTF-8"?><p:sld xmlns:a="http://schemas.openxmlformats.org/drawingml/2006/main" xmlns:r="http://schemas.openxmlformats.org/officeDocument/2006/relationships" xmlns:p="http://schemas.openxmlformats.org/presentationml/2006/main"><p:cSld><p:spTree><p:nvGrpSpPr><p:cNvPr id="1" name="" /><p:cNvGrpSpPr /><p:nvPr /></p:nvGrpSpPr><p:grpSpPr><a:xfrm><a:off x="0" y="0" /><a:ext cx="0" cy="0" /><a:chOff x="0" y="0" /><a:chExt cx="0" cy="0" /></a:xfrm></p:grpSpPr><p:sp><p:nvSpPr><p:cNvPr id="2" name="Title 1" /><p:cNvSpPr><a:spLocks noGrp="1" /></p:cNvSpPr><p:nvPr><p:ph type="title" /></p:nvPr></p:nvSpPr><p:spPr /><p:txBody><a:bodyPr /><a:lstStyle /><a:p><a:pPr lvl="0" indent="0" marL="0"><a:buNone /></a:pPr><a:r><a:rPr /><a:t>Four kinds</a:t></a:r></a:p></p:txBody></p:sp><p:graphicFrame><p:nvGraphicFramePr><p:cNvPr id="6" name="Content Placeholder 5" /><p:cNvGraphicFramePr><a:graphicFrameLocks noGrp="1" /></p:cNvGraphicFramePr><p:nvPr><p:ph idx="1" /></p:nvPr></p:nvGraphicFramePr><p:xfrm><a:off x="457200" y="1193800" /><a:ext cx="8229600" cy="3390900" /></p:xfrm><a:graphic><a:graphicData uri="http://schemas.openxmlformats.org/drawingml/2006/table"><a:tbl><a:tblPr firstRow="1" bandRow="1"><a:tableStyleId>{5C22544A-7EE6-4342-B048-85BDC9FD1C3A}</a:tableStyleId></a:tblPr><a:tblGrid><a:gridCol w="2743200" /><a:gridCol w="2743200" /><a:gridCol w="2743200" /></a:tblGrid><a:tr h="0"><a:tc><a:txBody><a:bodyPr /><a:lstStyle /><a:p><a:pPr lvl="0" indent="0" marL="0"><a:buNone /></a:pPr><a:r><a:rPr /><a:t>Type</a:t></a:r></a:p></a:txBody><a:tcPr /></a:tc><a:tc><a:txBody><a:bodyPr /><a:lstStyle /><a:p><a:pPr lvl="0" indent="0" marL="0"><a:buNone /></a:pPr><a:r><a:rPr /><a:t>What changes</a:t></a:r></a:p></a:txBody><a:tcPr /></a:tc><a:tc><a:txBody><a:bodyPr /><a:lstStyle /><a:p><a:pPr lvl="0" indent="0" marL="0"><a:buNone /></a:pPr><a:r><a:rPr /><a:t>Fix</a:t></a:r></a:p></a:txBody><a:tcPr /></a:tc></a:tr><a:tr h="0"><a:tc><a:txBody><a:bodyPr /><a:lstStyle /><a:p><a:pPr lvl="0" indent="0" marL="0"><a:buNone /></a:pPr><a:r><a:rPr b="1" /><a:t>Covariate shift</a:t></a:r></a:p></a:txBody></a:tc><a:tc><a:txBody><a:bodyPr /><a:lstStyle /><a:p><a:pPr lvl="0" indent="0" marL="0"><a:buNone /></a:pPr><a14:m><m:oMath xmlns:m="http://schemas.openxmlformats.org/officeDocument/2006/math"><m:r><m:t>P</m:t></m:r><m:d><m:dPr><m:begChr m:val="(" /><m:sepChr m:val="" /><m:endChr m:val=")" /><m:grow /></m:dPr><m:e><m:r><m:t>X</m:t></m:r></m:e></m:d></m:oMath></a14:m><a:r><a:rPr /><a:t>; </a:t></a:r><a14:m><m:oMath xmlns:m="http://schemas.openxmlformats.org/officeDocument/2006/math"><m:r><m:t>P</m:t></m:r><m:d><m:dPr><m:begChr m:val="(" /><m:sepChr m:val="" /><m:endChr m:val=")" /><m:grow /></m:dPr><m:e><m:r><m:t>Y</m:t></m:r><m:r><m:rPr><m:sty m:val="p" /></m:rPr><m:t>∣</m:t></m:r><m:r><m:t>X</m:t></m:r></m:e></m:d></m:oMath></a14:m><a:r><a:rPr /><a:t> stable</a:t></a:r></a:p></a:txBody></a:tc><a:tc><a:txBody><a:bodyPr /><a:lstStyle /><a:p><a:pPr lvl="0" indent="0" marL="0"><a:buNone /></a:pPr><a:r><a:rPr /><a:t>Importance weighting, or just retrain</a:t></a:r></a:p></a:txBody></a:tc></a:tr><a:tr h="0"><a:tc><a:txBody><a:bodyPr /><a:lstStyle /><a:p><a:pPr lvl="0" indent="0" marL="0"><a:buNone /></a:pPr><a:r><a:rPr b="1" /><a:t>Label shift</a:t></a:r></a:p></a:txBody></a:tc><a:tc><a:txBody><a:bodyPr /><a:lstStyle /><a:p><a:pPr lvl="0" indent="0" marL="0"><a:buNone /></a:pPr><a14:m><m:oMath xmlns:m="http://schemas.openxmlformats.org/officeDocument/2006/math"><m:r><m:t>P</m:t></m:r><m:d><m:dPr><m:begChr m:val="(" /><m:sepChr m:val="" /><m:endChr m:val=")" /><m:grow /></m:dPr><m:e><m:r><m:t>Y</m:t></m:r></m:e></m:d></m:oMath></a14:m><a:r><a:rPr /><a:t>; </a:t></a:r><a14:m><m:oMath xmlns:m="http://schemas.openxmlformats.org/officeDocument/2006/math"><m:r><m:t>P</m:t></m:r><m:d><m:dPr><m:begChr m:val="(" /><m:sepChr m:val="" /><m:endChr m:val=")" /><m:grow /></m:dPr><m:e><m:r><m:t>X</m:t></m:r><m:r><m:rPr><m:sty m:val="p" /></m:rPr><m:t>∣</m:t></m:r><m:r><m:t>Y</m:t></m:r></m:e></m:d></m:oMath></a14:m><a:r><a:rPr /><a:t> stable</a:t></a:r></a:p></a:txBody></a:tc><a:tc><a:txBody><a:bodyPr /><a:lstStyle /><a:p><a:pPr lvl="0" indent="0" marL="0"><a:buNone /></a:pPr><a:r><a:rPr /><a:t>Reweight, or correct the intercept (Session 06)</a:t></a:r></a:p></a:txBody></a:tc></a:tr><a:tr h="0"><a:tc><a:txBody><a:bodyPr /><a:lstStyle /><a:p><a:pPr lvl="0" indent="0" marL="0"><a:buNone /></a:pPr><a:r><a:rPr b="1" /><a:t>Concept drift</a:t></a:r></a:p></a:txBody></a:tc><a:tc><a:txBody><a:bodyPr /><a:lstStyle /><a:p><a:pPr lvl="0" indent="0" marL="0"><a:buNone /></a:pPr><a14:m><m:oMath xmlns:m="http://schemas.openxmlformats.org/officeDocument/2006/math"><m:r><m:t>P</m:t></m:r><m:d><m:dPr><m:begChr m:val="(" /><m:sepChr m:val="" /><m:endChr m:val=")" /><m:grow /></m:dPr><m:e><m:r><m:t>Y</m:t></m:r><m:r><m:rPr><m:sty m:val="p" /></m:rPr><m:t>∣</m:t></m:r><m:r><m:t>X</m:t></m:r></m:e></m:d></m:oMath></a14:m></a:p></a:txBody></a:tc><a:tc><a:txBody><a:bodyPr /><a:lstStyle /><a:p><a:pPr lvl="0" indent="0" marL="0"><a:buNone /></a:pPr><a:r><a:rPr /><a:t>Retraining necessary but not sufficient — the form may be wrong</a:t></a:r></a:p></a:txBody></a:tc></a:tr><a:tr h="0"><a:tc><a:txBody><a:bodyPr /><a:lstStyle /><a:p><a:pPr lvl="0" indent="0" marL="0"><a:buNone /></a:pPr><a:r><a:rPr b="1" /><a:t>Feedback</a:t></a:r></a:p></a:txBody></a:tc><a:tc><a:txBody><a:bodyPr /><a:lstStyle /><a:p><a:pPr lvl="0" indent="0" marL="0"><a:buNone /></a:pPr><a:r><a:rPr /><a:t>your model changes the world it predicts</a:t></a:r></a:p></a:txBody></a:tc><a:tc><a:txBody><a:bodyPr /><a:lstStyle /><a:p><a:pPr lvl="0" indent="0" marL="0"><a:buNone /></a:pPr><a:r><a:rPr /><a:t>Redesign</a:t></a:r></a:p></a:txBody></a:tc></a:tr></a:tbl></a:graphicData></a:graphic></p:graphicFrame></p:spTree></p:cSld></p:sld>
+<file path=ppt/slides/slide16.xml><?xml version="1.0" encoding="utf-8"?>
+<p:sld xmlns:a="http://schemas.openxmlformats.org/drawingml/2006/main" xmlns:r="http://schemas.openxmlformats.org/officeDocument/2006/relationships" xmlns:p="http://schemas.openxmlformats.org/presentationml/2006/main">
+  <p:cSld>
+    <p:spTree>
+      <p:nvGrpSpPr>
+        <p:cNvPr id="1" name=""/>
+        <p:cNvGrpSpPr/>
+        <p:nvPr/>
+      </p:nvGrpSpPr>
+      <p:grpSpPr>
+        <a:xfrm>
+          <a:off x="0" y="0"/>
+          <a:ext cx="0" cy="0"/>
+          <a:chOff x="0" y="0"/>
+          <a:chExt cx="0" cy="0"/>
+        </a:xfrm>
+      </p:grpSpPr>
+      <p:sp>
+        <p:nvSpPr>
+          <p:cNvPr id="3" name="Content Placeholder 2"/>
+          <p:cNvSpPr>
+            <a:spLocks noGrp="1"/>
+          </p:cNvSpPr>
+          <p:nvPr>
+            <p:ph idx="1"/>
+          </p:nvPr>
+        </p:nvSpPr>
+        <p:spPr/>
+        <p:txBody>
+          <a:bodyPr/>
+          <a:lstStyle/>
+          <a:p>
+            <a:pPr lvl="0" indent="0" marL="0">
+              <a:buNone/>
+            </a:pPr>
+            <a:r>
+              <a:rPr/>
+              <a:t>An average hides this. Both models get </a:t>
+            </a:r>
+            <a:r>
+              <a:rPr b="1"/>
+              <a:t>worse</a:t>
+            </a:r>
+            <a:r>
+              <a:rPr/>
+              <a:t> at the same moment — which is the signature of something changing in the world, not in the model.</a:t>
+            </a:r>
+          </a:p>
+        </p:txBody>
+      </p:sp>
+    </p:spTree>
+  </p:cSld>
+</p:sld>
 </file>
 
 <file path=ppt/slides/slide17.xml><?xml version="1.0" encoding="utf-8"?>
@@ -4206,7 +6261,12 @@
             <p:ph type="title"/>
           </p:nvPr>
         </p:nvSpPr>
-        <p:spPr/>
+        <p:spPr>
+          <a:xfrm>
+            <a:off x="722313" y="1850000"/>
+            <a:ext cx="7772400" cy="1300000"/>
+          </a:xfrm>
+        </p:spPr>
         <p:txBody>
           <a:bodyPr/>
           <a:lstStyle/>
@@ -4216,298 +6276,17 @@
             </a:pPr>
             <a:r>
               <a:rPr/>
-              <a:t>How to detect them</a:t>
-            </a:r>
-          </a:p>
-        </p:txBody>
-      </p:sp>
-      <p:graphicFrame>
-        <p:nvGraphicFramePr>
-          <p:cNvPr id="6" name="Content Placeholder 5"/>
-          <p:cNvGraphicFramePr>
-            <a:graphicFrameLocks noGrp="1"/>
-          </p:cNvGraphicFramePr>
-          <p:nvPr>
-            <p:ph idx="1"/>
-          </p:nvPr>
-        </p:nvGraphicFramePr>
-        <p:xfrm>
-          <a:off x="457200" y="1193800"/>
-          <a:ext cx="8229600" cy="3390900"/>
-        </p:xfrm>
-        <a:graphic>
-          <a:graphicData uri="http://schemas.openxmlformats.org/drawingml/2006/table">
-            <a:tbl>
-              <a:tblPr firstRow="1" bandRow="1">
-                <a:tableStyleId>{5C22544A-7EE6-4342-B048-85BDC9FD1C3A}</a:tableStyleId>
-              </a:tblPr>
-              <a:tblGrid>
-                <a:gridCol w="4114800"/>
-                <a:gridCol w="4114800"/>
-              </a:tblGrid>
-              <a:tr h="0">
-                <a:tc>
-                  <a:txBody>
-                    <a:bodyPr/>
-                    <a:lstStyle/>
-                    <a:p>
-                      <a:pPr lvl="0" indent="0" marL="0">
-                        <a:buNone/>
-                      </a:pPr>
-                      <a:r>
-                        <a:rPr/>
-                        <a:t>Type</a:t>
-                      </a:r>
-                    </a:p>
-                  </a:txBody>
-                  <a:tcPr/>
-                </a:tc>
-                <a:tc>
-                  <a:txBody>
-                    <a:bodyPr/>
-                    <a:lstStyle/>
-                    <a:p>
-                      <a:pPr lvl="0" indent="0" marL="0">
-                        <a:buNone/>
-                      </a:pPr>
-                      <a:r>
-                        <a:rPr/>
-                        <a:t>Detection</a:t>
-                      </a:r>
-                    </a:p>
-                  </a:txBody>
-                  <a:tcPr/>
-                </a:tc>
-              </a:tr>
-              <a:tr h="0">
-                <a:tc>
-                  <a:txBody>
-                    <a:bodyPr/>
-                    <a:lstStyle/>
-                    <a:p>
-                      <a:pPr lvl="0" indent="0" marL="0">
-                        <a:buNone/>
-                      </a:pPr>
-                      <a:r>
-                        <a:rPr/>
-                        <a:t>Covariate shift</a:t>
-                      </a:r>
-                    </a:p>
-                  </a:txBody>
-                </a:tc>
-                <a:tc>
-                  <a:txBody>
-                    <a:bodyPr/>
-                    <a:lstStyle/>
-                    <a:p>
-                      <a:pPr lvl="0" indent="0" marL="0">
-                        <a:buNone/>
-                      </a:pPr>
-                      <a:r>
-                        <a:rPr/>
-                        <a:t>Train a classifier to distinguish train from deploy</a:t>
-                      </a:r>
-                    </a:p>
-                  </a:txBody>
-                </a:tc>
-              </a:tr>
-              <a:tr h="0">
-                <a:tc>
-                  <a:txBody>
-                    <a:bodyPr/>
-                    <a:lstStyle/>
-                    <a:p>
-                      <a:pPr lvl="0" indent="0" marL="0">
-                        <a:buNone/>
-                      </a:pPr>
-                      <a:r>
-                        <a:rPr/>
-                        <a:t>Label shift</a:t>
-                      </a:r>
-                    </a:p>
-                  </a:txBody>
-                </a:tc>
-                <a:tc>
-                  <a:txBody>
-                    <a:bodyPr/>
-                    <a:lstStyle/>
-                    <a:p>
-                      <a:pPr lvl="0" indent="0" marL="0">
-                        <a:buNone/>
-                      </a:pPr>
-                      <a:r>
-                        <a:rPr/>
-                        <a:t>Compare predicted marginal to observed</a:t>
-                      </a:r>
-                    </a:p>
-                  </a:txBody>
-                </a:tc>
-              </a:tr>
-              <a:tr h="0">
-                <a:tc>
-                  <a:txBody>
-                    <a:bodyPr/>
-                    <a:lstStyle/>
-                    <a:p>
-                      <a:pPr lvl="0" indent="0" marL="0">
-                        <a:buNone/>
-                      </a:pPr>
-                      <a:r>
-                        <a:rPr/>
-                        <a:t>Concept drift</a:t>
-                      </a:r>
-                    </a:p>
-                  </a:txBody>
-                </a:tc>
-                <a:tc>
-                  <a:txBody>
-                    <a:bodyPr/>
-                    <a:lstStyle/>
-                    <a:p>
-                      <a:pPr lvl="0" indent="0" marL="0">
-                        <a:buNone/>
-                      </a:pPr>
-                      <a:r>
-                        <a:rPr b="1"/>
-                        <a:t>Only</a:t>
-                      </a:r>
-                      <a:r>
-                        <a:rPr/>
-                        <a:t> detectable once outcomes arrive</a:t>
-                      </a:r>
-                    </a:p>
-                  </a:txBody>
-                </a:tc>
-              </a:tr>
-              <a:tr h="0">
-                <a:tc>
-                  <a:txBody>
-                    <a:bodyPr/>
-                    <a:lstStyle/>
-                    <a:p>
-                      <a:pPr lvl="0" indent="0" marL="0">
-                        <a:buNone/>
-                      </a:pPr>
-                      <a:r>
-                        <a:rPr/>
-                        <a:t>Feedback</a:t>
-                      </a:r>
-                    </a:p>
-                  </a:txBody>
-                </a:tc>
-                <a:tc>
-                  <a:txBody>
-                    <a:bodyPr/>
-                    <a:lstStyle/>
-                    <a:p>
-                      <a:pPr lvl="0" indent="0" marL="0">
-                        <a:buNone/>
-                      </a:pPr>
-                      <a:r>
-                        <a:rPr/>
-                        <a:t>Requires causal reasoning, not monitoring</a:t>
-                      </a:r>
-                    </a:p>
-                  </a:txBody>
-                </a:tc>
-              </a:tr>
-            </a:tbl>
-          </a:graphicData>
-        </a:graphic>
-      </p:graphicFrame>
+              <a:t>3 · Distribution shift</a:t>
+            </a:r>
+          </a:p>
+        </p:txBody>
+      </p:sp>
     </p:spTree>
   </p:cSld>
 </p:sld>
 </file>
 
-<file path=ppt/slides/slide18.xml><?xml version="1.0" encoding="utf-8"?>
-<p:sld xmlns:a="http://schemas.openxmlformats.org/drawingml/2006/main" xmlns:r="http://schemas.openxmlformats.org/officeDocument/2006/relationships" xmlns:p="http://schemas.openxmlformats.org/presentationml/2006/main">
-  <p:cSld>
-    <p:spTree>
-      <p:nvGrpSpPr>
-        <p:cNvPr id="1" name=""/>
-        <p:cNvGrpSpPr/>
-        <p:nvPr/>
-      </p:nvGrpSpPr>
-      <p:grpSpPr>
-        <a:xfrm>
-          <a:off x="0" y="0"/>
-          <a:ext cx="0" cy="0"/>
-          <a:chOff x="0" y="0"/>
-          <a:chExt cx="0" cy="0"/>
-        </a:xfrm>
-      </p:grpSpPr>
-      <p:sp>
-        <p:nvSpPr>
-          <p:cNvPr id="2" name="Title 1"/>
-          <p:cNvSpPr>
-            <a:spLocks noGrp="1"/>
-          </p:cNvSpPr>
-          <p:nvPr>
-            <p:ph type="title"/>
-          </p:nvPr>
-        </p:nvSpPr>
-        <p:spPr/>
-        <p:txBody>
-          <a:bodyPr/>
-          <a:lstStyle/>
-          <a:p>
-            <a:pPr lvl="0" indent="0" marL="0">
-              <a:buNone/>
-            </a:pPr>
-            <a:r>
-              <a:rPr/>
-              <a:t>The classifier diagnostic</a:t>
-            </a:r>
-          </a:p>
-        </p:txBody>
-      </p:sp>
-      <p:sp>
-        <p:nvSpPr>
-          <p:cNvPr id="3" name="Content Placeholder 2"/>
-          <p:cNvSpPr>
-            <a:spLocks noGrp="1"/>
-          </p:cNvSpPr>
-          <p:nvPr>
-            <p:ph idx="1"/>
-          </p:nvPr>
-        </p:nvSpPr>
-        <p:spPr/>
-        <p:txBody>
-          <a:bodyPr/>
-          <a:lstStyle/>
-          <a:p>
-            <a:pPr lvl="0" indent="0" marL="0">
-              <a:buNone/>
-            </a:pPr>
-            <a:r>
-              <a:rPr/>
-              <a:t>Pool training and deployment features, label them by period, and try to predict the label.</a:t>
-            </a:r>
-          </a:p>
-          <a:p>
-            <a:pPr lvl="0" indent="0" marL="1270000">
-              <a:buNone/>
-            </a:pPr>
-            <a:r>
-              <a:rPr sz="2000" b="1"/>
-              <a:t>If a classifier can tell your two periods apart, so can your model’s errors.</a:t>
-            </a:r>
-          </a:p>
-          <a:p>
-            <a:pPr lvl="0" indent="0" marL="0">
-              <a:buNone/>
-            </a:pPr>
-            <a:r>
-              <a:rPr/>
-              <a:t>AUC near 0.5 is reassuring. Near 1.0 is an alarm.</a:t>
-            </a:r>
-          </a:p>
-        </p:txBody>
-      </p:sp>
-    </p:spTree>
-  </p:cSld>
-</p:sld>
+<file path=ppt/slides/slide18.xml><?xml version="1.0" encoding="UTF-8"?><p:sld xmlns:a="http://schemas.openxmlformats.org/drawingml/2006/main" xmlns:r="http://schemas.openxmlformats.org/officeDocument/2006/relationships" xmlns:p="http://schemas.openxmlformats.org/presentationml/2006/main"><p:cSld><p:spTree><p:nvGrpSpPr><p:cNvPr id="1" name="" /><p:cNvGrpSpPr /><p:nvPr /></p:nvGrpSpPr><p:grpSpPr><a:xfrm><a:off x="0" y="0" /><a:ext cx="0" cy="0" /><a:chOff x="0" y="0" /><a:chExt cx="0" cy="0" /></a:xfrm></p:grpSpPr><p:sp><p:nvSpPr><p:cNvPr id="2" name="Title 1" /><p:cNvSpPr><a:spLocks noGrp="1" /></p:cNvSpPr><p:nvPr><p:ph type="title" /></p:nvPr></p:nvSpPr><p:spPr /><p:txBody><a:bodyPr /><a:lstStyle /><a:p><a:pPr lvl="0" indent="0" marL="0"><a:buNone /></a:pPr><a:r><a:rPr /><a:t>Four kinds, and they need different answers</a:t></a:r></a:p></p:txBody></p:sp><p:graphicFrame><p:nvGraphicFramePr><p:cNvPr id="6" name="Content Placeholder 5" /><p:cNvGraphicFramePr><a:graphicFrameLocks noGrp="1" /></p:cNvGraphicFramePr><p:nvPr><p:ph idx="1" /></p:nvPr></p:nvGraphicFramePr><p:xfrm><a:off x="457200" y="1193800" /><a:ext cx="8229600" cy="3390900" /></p:xfrm><a:graphic><a:graphicData uri="http://schemas.openxmlformats.org/drawingml/2006/table"><a:tbl><a:tblPr firstRow="1" bandRow="1"><a:tableStyleId>{5C22544A-7EE6-4342-B048-85BDC9FD1C3A}</a:tableStyleId></a:tblPr><a:tblGrid><a:gridCol w="2057400" /><a:gridCol w="2057400" /><a:gridCol w="2057400" /><a:gridCol w="2057400" /></a:tblGrid><a:tr h="0"><a:tc><a:txBody><a:bodyPr /><a:lstStyle /><a:p><a:pPr lvl="0" indent="0" marL="0"><a:buNone /></a:pPr><a:r><a:rPr /><a:t>Type</a:t></a:r></a:p></a:txBody><a:tcPr /></a:tc><a:tc><a:txBody><a:bodyPr /><a:lstStyle /><a:p><a:pPr lvl="0" indent="0" marL="0"><a:buNone /></a:pPr><a:r><a:rPr /><a:t>What changes</a:t></a:r></a:p></a:txBody><a:tcPr /></a:tc><a:tc><a:txBody><a:bodyPr /><a:lstStyle /><a:p><a:pPr lvl="0" indent="0" marL="0"><a:buNone /></a:pPr><a:r><a:rPr /><a:t>Detection</a:t></a:r></a:p></a:txBody><a:tcPr /></a:tc><a:tc><a:txBody><a:bodyPr /><a:lstStyle /><a:p><a:pPr lvl="0" indent="0" marL="0"><a:buNone /></a:pPr><a:r><a:rPr /><a:t>Fix</a:t></a:r></a:p></a:txBody><a:tcPr /></a:tc></a:tr><a:tr h="0"><a:tc><a:txBody><a:bodyPr /><a:lstStyle /><a:p><a:pPr lvl="0" indent="0" marL="0"><a:buNone /></a:pPr><a:r><a:rPr b="1" /><a:t>Covariate shift</a:t></a:r></a:p></a:txBody></a:tc><a:tc><a:txBody><a:bodyPr /><a:lstStyle /><a:p><a:pPr lvl="0" indent="0" marL="0"><a:buNone /></a:pPr><a14:m><m:oMath xmlns:m="http://schemas.openxmlformats.org/officeDocument/2006/math"><m:r><m:t>P</m:t></m:r><m:d><m:dPr><m:begChr m:val="(" /><m:sepChr m:val="" /><m:endChr m:val=")" /><m:grow /></m:dPr><m:e><m:r><m:t>X</m:t></m:r></m:e></m:d></m:oMath></a14:m><a:r><a:rPr /><a:t>; </a:t></a:r><a14:m><m:oMath xmlns:m="http://schemas.openxmlformats.org/officeDocument/2006/math"><m:r><m:t>P</m:t></m:r><m:d><m:dPr><m:begChr m:val="(" /><m:sepChr m:val="" /><m:endChr m:val=")" /><m:grow /></m:dPr><m:e><m:r><m:t>Y</m:t></m:r><m:r><m:rPr><m:sty m:val="p" /></m:rPr><m:t>∣</m:t></m:r><m:r><m:t>X</m:t></m:r></m:e></m:d></m:oMath></a14:m><a:r><a:rPr /><a:t> stable</a:t></a:r></a:p></a:txBody></a:tc><a:tc><a:txBody><a:bodyPr /><a:lstStyle /><a:p><a:pPr lvl="0" indent="0" marL="0"><a:buNone /></a:pPr><a:r><a:rPr /><a:t>classifier: train vs deploy</a:t></a:r></a:p></a:txBody></a:tc><a:tc><a:txBody><a:bodyPr /><a:lstStyle /><a:p><a:pPr lvl="0" indent="0" marL="0"><a:buNone /></a:pPr><a:r><a:rPr /><a:t>reweight, or retrain</a:t></a:r></a:p></a:txBody></a:tc></a:tr><a:tr h="0"><a:tc><a:txBody><a:bodyPr /><a:lstStyle /><a:p><a:pPr lvl="0" indent="0" marL="0"><a:buNone /></a:pPr><a:r><a:rPr b="1" /><a:t>Label shift</a:t></a:r></a:p></a:txBody></a:tc><a:tc><a:txBody><a:bodyPr /><a:lstStyle /><a:p><a:pPr lvl="0" indent="0" marL="0"><a:buNone /></a:pPr><a14:m><m:oMath xmlns:m="http://schemas.openxmlformats.org/officeDocument/2006/math"><m:r><m:t>P</m:t></m:r><m:d><m:dPr><m:begChr m:val="(" /><m:sepChr m:val="" /><m:endChr m:val=")" /><m:grow /></m:dPr><m:e><m:r><m:t>Y</m:t></m:r></m:e></m:d></m:oMath></a14:m><a:r><a:rPr /><a:t>; </a:t></a:r><a14:m><m:oMath xmlns:m="http://schemas.openxmlformats.org/officeDocument/2006/math"><m:r><m:t>P</m:t></m:r><m:d><m:dPr><m:begChr m:val="(" /><m:sepChr m:val="" /><m:endChr m:val=")" /><m:grow /></m:dPr><m:e><m:r><m:t>X</m:t></m:r><m:r><m:rPr><m:sty m:val="p" /></m:rPr><m:t>∣</m:t></m:r><m:r><m:t>Y</m:t></m:r></m:e></m:d></m:oMath></a14:m><a:r><a:rPr /><a:t> stable</a:t></a:r></a:p></a:txBody></a:tc><a:tc><a:txBody><a:bodyPr /><a:lstStyle /><a:p><a:pPr lvl="0" indent="0" marL="0"><a:buNone /></a:pPr><a:r><a:rPr /><a:t>predicted vs observed marginal</a:t></a:r></a:p></a:txBody></a:tc><a:tc><a:txBody><a:bodyPr /><a:lstStyle /><a:p><a:pPr lvl="0" indent="0" marL="0"><a:buNone /></a:pPr><a:r><a:rPr /><a:t>reweight; correct the intercept (S06)</a:t></a:r></a:p></a:txBody></a:tc></a:tr><a:tr h="0"><a:tc><a:txBody><a:bodyPr /><a:lstStyle /><a:p><a:pPr lvl="0" indent="0" marL="0"><a:buNone /></a:pPr><a:r><a:rPr b="1" /><a:t>Concept drift</a:t></a:r></a:p></a:txBody></a:tc><a:tc><a:txBody><a:bodyPr /><a:lstStyle /><a:p><a:pPr lvl="0" indent="0" marL="0"><a:buNone /></a:pPr><a14:m><m:oMath xmlns:m="http://schemas.openxmlformats.org/officeDocument/2006/math"><m:r><m:t>P</m:t></m:r><m:d><m:dPr><m:begChr m:val="(" /><m:sepChr m:val="" /><m:endChr m:val=")" /><m:grow /></m:dPr><m:e><m:r><m:t>Y</m:t></m:r><m:r><m:rPr><m:sty m:val="p" /></m:rPr><m:t>∣</m:t></m:r><m:r><m:t>X</m:t></m:r></m:e></m:d></m:oMath></a14:m></a:p></a:txBody></a:tc><a:tc><a:txBody><a:bodyPr /><a:lstStyle /><a:p><a:pPr lvl="0" indent="0" marL="0"><a:buNone /></a:pPr><a:r><a:rPr /><a:t>only once outcomes arrive</a:t></a:r></a:p></a:txBody></a:tc><a:tc><a:txBody><a:bodyPr /><a:lstStyle /><a:p><a:pPr lvl="0" indent="0" marL="0"><a:buNone /></a:pPr><a:r><a:rPr /><a:t>retrain — necessary, not sufficient</a:t></a:r></a:p></a:txBody></a:tc></a:tr><a:tr h="0"><a:tc><a:txBody><a:bodyPr /><a:lstStyle /><a:p><a:pPr lvl="0" indent="0" marL="0"><a:buNone /></a:pPr><a:r><a:rPr b="1" /><a:t>Feedback</a:t></a:r></a:p></a:txBody></a:tc><a:tc><a:txBody><a:bodyPr /><a:lstStyle /><a:p><a:pPr lvl="0" indent="0" marL="0"><a:buNone /></a:pPr><a:r><a:rPr /><a:t>your model changes the world</a:t></a:r></a:p></a:txBody></a:tc><a:tc><a:txBody><a:bodyPr /><a:lstStyle /><a:p><a:pPr lvl="0" indent="0" marL="0"><a:buNone /></a:pPr><a:r><a:rPr /><a:t>causal reasoning, not monitoring</a:t></a:r></a:p></a:txBody></a:tc><a:tc><a:txBody><a:bodyPr /><a:lstStyle /><a:p><a:pPr lvl="0" indent="0" marL="0"><a:buNone /></a:pPr><a:r><a:rPr /><a:t>redesign</a:t></a:r></a:p></a:txBody></a:tc></a:tr></a:tbl></a:graphicData></a:graphic></p:graphicFrame></p:spTree></p:cSld></p:sld>
 </file>
 
 <file path=ppt/slides/slide19.xml><?xml version="1.0" encoding="utf-8"?>
@@ -4529,12 +6308,12 @@
       </p:grpSpPr>
       <p:sp>
         <p:nvSpPr>
-          <p:cNvPr id="2" name="Title 1"/>
-          <p:cNvSpPr>
-            <a:spLocks noGrp="1"/>
-          </p:cNvSpPr>
-          <p:nvPr>
-            <p:ph type="title"/>
+          <p:cNvPr id="3" name="Content Placeholder 2"/>
+          <p:cNvSpPr>
+            <a:spLocks noGrp="1"/>
+          </p:cNvSpPr>
+          <p:nvPr>
+            <p:ph idx="1"/>
           </p:nvPr>
         </p:nvSpPr>
         <p:spPr/>
@@ -4547,62 +6326,15 @@
             </a:pPr>
             <a:r>
               <a:rPr/>
-              <a:t>Goodhart’s law, stated precisely</a:t>
-            </a:r>
-          </a:p>
-        </p:txBody>
-      </p:sp>
-      <p:sp>
-        <p:nvSpPr>
-          <p:cNvPr id="3" name="Content Placeholder 2"/>
-          <p:cNvSpPr>
-            <a:spLocks noGrp="1"/>
-          </p:cNvSpPr>
-          <p:nvPr>
-            <p:ph idx="1"/>
-          </p:nvPr>
-        </p:nvSpPr>
-        <p:spPr/>
-        <p:txBody>
-          <a:bodyPr/>
-          <a:lstStyle/>
-          <a:p>
-            <a:pPr lvl="0" indent="0" marL="1270000">
-              <a:buNone/>
-            </a:pPr>
-            <a:r>
-              <a:rPr sz="2000"/>
-              <a:t>When a measure becomes a target, the relationship the model learned between measure and outcome is exactly the relationship agents have an incentive to break.</a:t>
-            </a:r>
-          </a:p>
-          <a:p>
-            <a:pPr lvl="0" indent="0" marL="0">
-              <a:buNone/>
-            </a:pPr>
+              <a:t>Only the first is detectable </a:t>
+            </a:r>
+            <a:r>
+              <a:rPr b="1"/>
+              <a:t>before</a:t>
+            </a:r>
             <a:r>
               <a:rPr/>
-              <a:t>A credit-scoring feature that predicts default only until applicants learn it is used is not a stable feature.</a:t>
-            </a:r>
-          </a:p>
-          <a:p>
-            <a:pPr lvl="0" indent="0" marL="0">
-              <a:buNone/>
-            </a:pPr>
-            <a:r>
-              <a:rPr/>
-              <a:t>This is a </a:t>
-            </a:r>
-            <a:r>
-              <a:rPr b="1"/>
-              <a:t>causal</a:t>
-            </a:r>
-            <a:r>
-              <a:rPr/>
-              <a:t> problem (Session 10), not a monitoring problem. </a:t>
-            </a:r>
-            <a:r>
-              <a:rPr b="1"/>
-              <a:t>No amount of retraining solves it.</a:t>
+              <a:t> the damage. The last is not a monitoring problem at all.</a:t>
             </a:r>
           </a:p>
         </p:txBody>
@@ -4689,12 +6421,7 @@
             <p:ph type="title"/>
           </p:nvPr>
         </p:nvSpPr>
-        <p:spPr>
-          <a:xfrm>
-            <a:off x="722313" y="1850000"/>
-            <a:ext cx="7772400" cy="1300000"/>
-          </a:xfrm>
-        </p:spPr>
+        <p:spPr/>
         <p:txBody>
           <a:bodyPr/>
           <a:lstStyle/>
@@ -4704,7 +6431,62 @@
             </a:pPr>
             <a:r>
               <a:rPr/>
-              <a:t>11.4 Model governance</a:t>
+              <a:t>The classifier diagnostic</a:t>
+            </a:r>
+          </a:p>
+        </p:txBody>
+      </p:sp>
+      <p:sp>
+        <p:nvSpPr>
+          <p:cNvPr id="3" name="Content Placeholder 2"/>
+          <p:cNvSpPr>
+            <a:spLocks noGrp="1"/>
+          </p:cNvSpPr>
+          <p:nvPr>
+            <p:ph idx="1"/>
+          </p:nvPr>
+        </p:nvSpPr>
+        <p:spPr/>
+        <p:txBody>
+          <a:bodyPr/>
+          <a:lstStyle/>
+          <a:p>
+            <a:pPr lvl="0" indent="0" marL="0">
+              <a:buNone/>
+            </a:pPr>
+            <a:r>
+              <a:rPr/>
+              <a:t>Pool the training and deployment features, label each row by period, and try to </a:t>
+            </a:r>
+            <a:r>
+              <a:rPr b="1"/>
+              <a:t>predict the label</a:t>
+            </a:r>
+            <a:r>
+              <a:rPr/>
+              <a:t>.</a:t>
+            </a:r>
+          </a:p>
+          <a:p>
+            <a:pPr lvl="0" indent="0" marL="0">
+              <a:buNone/>
+            </a:pPr>
+            <a:r>
+              <a:rPr b="1"/>
+              <a:t>If a classifier can tell your two periods apart, so can your model’s errors.</a:t>
+            </a:r>
+            <a:r>
+              <a:rPr/>
+              <a:t> AUC near 0.5 is reassuring. Near 1.0 is an alarm.</a:t>
+            </a:r>
+          </a:p>
+          <a:p>
+            <a:pPr lvl="0" indent="0" marL="0">
+              <a:buNone/>
+            </a:pPr>
+            <a:r>
+              <a:rPr/>
+              <a:t>It costs four lines and it is the single highest-value monitoring check you can run.</a:t>
             </a:r>
           </a:p>
         </p:txBody>
@@ -4751,7 +6533,7 @@
             </a:pPr>
             <a:r>
               <a:rPr/>
-              <a:t>Seven headings</a:t>
+              <a:t>Run it — and run a placebo</a:t>
             </a:r>
           </a:p>
         </p:txBody>
@@ -4771,107 +6553,1134 @@
           <a:bodyPr/>
           <a:lstStyle/>
           <a:p>
-            <a:pPr lvl="0" indent="0" marL="0">
+            <a:pPr lvl="0" indent="0">
               <a:buNone/>
             </a:pPr>
             <a:r>
-              <a:rPr/>
-              <a:t>A deployable model is accompanied by a document a competent successor could act on.</a:t>
-            </a:r>
-          </a:p>
-          <a:p>
-            <a:pPr lvl="0" indent="-342900" marL="342900">
-              <a:buAutoNum type="arabicPeriod"/>
+              <a:rPr>
+                <a:latin typeface="Courier"/>
+              </a:rPr>
+              <a:t>X_lev </a:t>
+            </a:r>
+            <a:r>
+              <a:rPr>
+                <a:solidFill>
+                  <a:srgbClr val="666666"/>
+                </a:solidFill>
+                <a:latin typeface="Courier"/>
+              </a:rPr>
+              <a:t>=</a:t>
+            </a:r>
+            <a:r>
+              <a:rPr>
+                <a:latin typeface="Courier"/>
+              </a:rPr>
+              <a:t> m[FEAT].to_numpy(</a:t>
+            </a:r>
+            <a:r>
+              <a:rPr>
+                <a:solidFill>
+                  <a:srgbClr val="008000"/>
+                </a:solidFill>
+                <a:latin typeface="Courier"/>
+              </a:rPr>
+              <a:t>float</a:t>
+            </a:r>
+            <a:r>
+              <a:rPr>
+                <a:latin typeface="Courier"/>
+              </a:rPr>
+              <a:t>)</a:t>
+            </a:r>
+            <a:br/>
+            <a:r>
+              <a:rPr>
+                <a:latin typeface="Courier"/>
+              </a:rPr>
+              <a:t>chg </a:t>
+            </a:r>
+            <a:r>
+              <a:rPr>
+                <a:solidFill>
+                  <a:srgbClr val="666666"/>
+                </a:solidFill>
+                <a:latin typeface="Courier"/>
+              </a:rPr>
+              <a:t>=</a:t>
+            </a:r>
+            <a:r>
+              <a:rPr>
+                <a:latin typeface="Courier"/>
+              </a:rPr>
+              <a:t> m.groupby(</a:t>
+            </a:r>
+            <a:r>
+              <a:rPr>
+                <a:solidFill>
+                  <a:srgbClr val="4070A0"/>
+                </a:solidFill>
+                <a:latin typeface="Courier"/>
+              </a:rPr>
+              <a:t>"geo"</a:t>
+            </a:r>
+            <a:r>
+              <a:rPr>
+                <a:latin typeface="Courier"/>
+              </a:rPr>
+              <a:t>)[FEAT].pct_change().replace([np.inf, </a:t>
+            </a:r>
+            <a:r>
+              <a:rPr>
+                <a:solidFill>
+                  <a:srgbClr val="666666"/>
+                </a:solidFill>
+                <a:latin typeface="Courier"/>
+              </a:rPr>
+              <a:t>-</a:t>
+            </a:r>
+            <a:r>
+              <a:rPr>
+                <a:latin typeface="Courier"/>
+              </a:rPr>
+              <a:t>np.inf], np.nan)</a:t>
+            </a:r>
+            <a:br/>
+            <a:r>
+              <a:rPr>
+                <a:latin typeface="Courier"/>
+              </a:rPr>
+              <a:t>ok </a:t>
+            </a:r>
+            <a:r>
+              <a:rPr>
+                <a:solidFill>
+                  <a:srgbClr val="666666"/>
+                </a:solidFill>
+                <a:latin typeface="Courier"/>
+              </a:rPr>
+              <a:t>=</a:t>
+            </a:r>
+            <a:r>
+              <a:rPr>
+                <a:latin typeface="Courier"/>
+              </a:rPr>
+              <a:t> chg.notna().</a:t>
+            </a:r>
+            <a:r>
+              <a:rPr>
+                <a:solidFill>
+                  <a:srgbClr val="008000"/>
+                </a:solidFill>
+                <a:latin typeface="Courier"/>
+              </a:rPr>
+              <a:t>all</a:t>
+            </a:r>
+            <a:r>
+              <a:rPr>
+                <a:latin typeface="Courier"/>
+              </a:rPr>
+              <a:t>(axis</a:t>
+            </a:r>
+            <a:r>
+              <a:rPr>
+                <a:solidFill>
+                  <a:srgbClr val="666666"/>
+                </a:solidFill>
+                <a:latin typeface="Courier"/>
+              </a:rPr>
+              <a:t>=</a:t>
+            </a:r>
+            <a:r>
+              <a:rPr>
+                <a:solidFill>
+                  <a:srgbClr val="40A070"/>
+                </a:solidFill>
+                <a:latin typeface="Courier"/>
+              </a:rPr>
+              <a:t>1</a:t>
+            </a:r>
+            <a:r>
+              <a:rPr>
+                <a:latin typeface="Courier"/>
+              </a:rPr>
+              <a:t>)</a:t>
+            </a:r>
+            <a:br/>
+            <a:r>
+              <a:rPr>
+                <a:latin typeface="Courier"/>
+              </a:rPr>
+              <a:t>X_chg, t_chg </a:t>
+            </a:r>
+            <a:r>
+              <a:rPr>
+                <a:solidFill>
+                  <a:srgbClr val="666666"/>
+                </a:solidFill>
+                <a:latin typeface="Courier"/>
+              </a:rPr>
+              <a:t>=</a:t>
+            </a:r>
+            <a:r>
+              <a:rPr>
+                <a:latin typeface="Courier"/>
+              </a:rPr>
+              <a:t> chg[ok].to_numpy(</a:t>
+            </a:r>
+            <a:r>
+              <a:rPr>
+                <a:solidFill>
+                  <a:srgbClr val="008000"/>
+                </a:solidFill>
+                <a:latin typeface="Courier"/>
+              </a:rPr>
+              <a:t>float</a:t>
+            </a:r>
+            <a:r>
+              <a:rPr>
+                <a:latin typeface="Courier"/>
+              </a:rPr>
+              <a:t>), m.loc[ok, </a:t>
+            </a:r>
+            <a:r>
+              <a:rPr>
+                <a:solidFill>
+                  <a:srgbClr val="4070A0"/>
+                </a:solidFill>
+                <a:latin typeface="Courier"/>
+              </a:rPr>
+              <a:t>"time"</a:t>
+            </a:r>
+            <a:r>
+              <a:rPr>
+                <a:latin typeface="Courier"/>
+              </a:rPr>
+              <a:t>].to_numpy()</a:t>
+            </a:r>
+            <a:br/>
+            <a:br/>
+            <a:r>
+              <a:rPr b="1">
+                <a:solidFill>
+                  <a:srgbClr val="007020"/>
+                </a:solidFill>
+                <a:latin typeface="Courier"/>
+              </a:rPr>
+              <a:t>def</a:t>
+            </a:r>
+            <a:r>
+              <a:rPr>
+                <a:latin typeface="Courier"/>
+              </a:rPr>
+              <a:t> drift_auc(X, times, cut):</a:t>
+            </a:r>
+            <a:br/>
+            <a:r>
+              <a:rPr>
+                <a:latin typeface="Courier"/>
+              </a:rPr>
+              <a:t>    lab </a:t>
+            </a:r>
+            <a:r>
+              <a:rPr>
+                <a:solidFill>
+                  <a:srgbClr val="666666"/>
+                </a:solidFill>
+                <a:latin typeface="Courier"/>
+              </a:rPr>
+              <a:t>=</a:t>
+            </a:r>
+            <a:r>
+              <a:rPr>
+                <a:latin typeface="Courier"/>
+              </a:rPr>
+              <a:t> (times </a:t>
+            </a:r>
+            <a:r>
+              <a:rPr>
+                <a:solidFill>
+                  <a:srgbClr val="666666"/>
+                </a:solidFill>
+                <a:latin typeface="Courier"/>
+              </a:rPr>
+              <a:t>&gt;=</a:t>
+            </a:r>
+            <a:r>
+              <a:rPr>
+                <a:latin typeface="Courier"/>
+              </a:rPr>
+              <a:t> cut).astype(</a:t>
+            </a:r>
+            <a:r>
+              <a:rPr>
+                <a:solidFill>
+                  <a:srgbClr val="008000"/>
+                </a:solidFill>
+                <a:latin typeface="Courier"/>
+              </a:rPr>
+              <a:t>int</a:t>
+            </a:r>
+            <a:r>
+              <a:rPr>
+                <a:latin typeface="Courier"/>
+              </a:rPr>
+              <a:t>)</a:t>
+            </a:r>
+            <a:br/>
+            <a:r>
+              <a:rPr>
+                <a:latin typeface="Courier"/>
+              </a:rPr>
+              <a:t>    p </a:t>
+            </a:r>
+            <a:r>
+              <a:rPr>
+                <a:solidFill>
+                  <a:srgbClr val="666666"/>
+                </a:solidFill>
+                <a:latin typeface="Courier"/>
+              </a:rPr>
+              <a:t>=</a:t>
+            </a:r>
+            <a:r>
+              <a:rPr>
+                <a:latin typeface="Courier"/>
+              </a:rPr>
+              <a:t> cross_val_predict(</a:t>
+            </a:r>
+            <a:br/>
+            <a:r>
+              <a:rPr>
+                <a:latin typeface="Courier"/>
+              </a:rPr>
+              <a:t>        RandomForestClassifier(</a:t>
+            </a:r>
+            <a:r>
+              <a:rPr>
+                <a:solidFill>
+                  <a:srgbClr val="40A070"/>
+                </a:solidFill>
+                <a:latin typeface="Courier"/>
+              </a:rPr>
+              <a:t>400</a:t>
+            </a:r>
+            <a:r>
+              <a:rPr>
+                <a:latin typeface="Courier"/>
+              </a:rPr>
+              <a:t>, min_samples_leaf</a:t>
+            </a:r>
+            <a:r>
+              <a:rPr>
+                <a:solidFill>
+                  <a:srgbClr val="666666"/>
+                </a:solidFill>
+                <a:latin typeface="Courier"/>
+              </a:rPr>
+              <a:t>=</a:t>
+            </a:r>
+            <a:r>
+              <a:rPr>
+                <a:solidFill>
+                  <a:srgbClr val="40A070"/>
+                </a:solidFill>
+                <a:latin typeface="Courier"/>
+              </a:rPr>
+              <a:t>3</a:t>
+            </a:r>
+            <a:r>
+              <a:rPr>
+                <a:latin typeface="Courier"/>
+              </a:rPr>
+              <a:t>, random_state</a:t>
+            </a:r>
+            <a:r>
+              <a:rPr>
+                <a:solidFill>
+                  <a:srgbClr val="666666"/>
+                </a:solidFill>
+                <a:latin typeface="Courier"/>
+              </a:rPr>
+              <a:t>=</a:t>
+            </a:r>
+            <a:r>
+              <a:rPr>
+                <a:solidFill>
+                  <a:srgbClr val="40A070"/>
+                </a:solidFill>
+                <a:latin typeface="Courier"/>
+              </a:rPr>
+              <a:t>0</a:t>
+            </a:r>
+            <a:r>
+              <a:rPr>
+                <a:latin typeface="Courier"/>
+              </a:rPr>
+              <a:t>, n_jobs</a:t>
+            </a:r>
+            <a:r>
+              <a:rPr>
+                <a:solidFill>
+                  <a:srgbClr val="666666"/>
+                </a:solidFill>
+                <a:latin typeface="Courier"/>
+              </a:rPr>
+              <a:t>=-</a:t>
+            </a:r>
+            <a:r>
+              <a:rPr>
+                <a:solidFill>
+                  <a:srgbClr val="40A070"/>
+                </a:solidFill>
+                <a:latin typeface="Courier"/>
+              </a:rPr>
+              <a:t>1</a:t>
+            </a:r>
+            <a:r>
+              <a:rPr>
+                <a:latin typeface="Courier"/>
+              </a:rPr>
+              <a:t>),</a:t>
+            </a:r>
+            <a:br/>
+            <a:r>
+              <a:rPr>
+                <a:latin typeface="Courier"/>
+              </a:rPr>
+              <a:t>        X, lab, cv</a:t>
+            </a:r>
+            <a:r>
+              <a:rPr>
+                <a:solidFill>
+                  <a:srgbClr val="666666"/>
+                </a:solidFill>
+                <a:latin typeface="Courier"/>
+              </a:rPr>
+              <a:t>=</a:t>
+            </a:r>
+            <a:r>
+              <a:rPr>
+                <a:latin typeface="Courier"/>
+              </a:rPr>
+              <a:t>StratifiedKFold(</a:t>
+            </a:r>
+            <a:r>
+              <a:rPr>
+                <a:solidFill>
+                  <a:srgbClr val="40A070"/>
+                </a:solidFill>
+                <a:latin typeface="Courier"/>
+              </a:rPr>
+              <a:t>5</a:t>
+            </a:r>
+            <a:r>
+              <a:rPr>
+                <a:latin typeface="Courier"/>
+              </a:rPr>
+              <a:t>, shuffle</a:t>
+            </a:r>
+            <a:r>
+              <a:rPr>
+                <a:solidFill>
+                  <a:srgbClr val="666666"/>
+                </a:solidFill>
+                <a:latin typeface="Courier"/>
+              </a:rPr>
+              <a:t>=</a:t>
+            </a:r>
+            <a:r>
+              <a:rPr>
+                <a:solidFill>
+                  <a:srgbClr val="19177C"/>
+                </a:solidFill>
+                <a:latin typeface="Courier"/>
+              </a:rPr>
+              <a:t>True</a:t>
+            </a:r>
+            <a:r>
+              <a:rPr>
+                <a:latin typeface="Courier"/>
+              </a:rPr>
+              <a:t>, random_state</a:t>
+            </a:r>
+            <a:r>
+              <a:rPr>
+                <a:solidFill>
+                  <a:srgbClr val="666666"/>
+                </a:solidFill>
+                <a:latin typeface="Courier"/>
+              </a:rPr>
+              <a:t>=</a:t>
+            </a:r>
+            <a:r>
+              <a:rPr>
+                <a:solidFill>
+                  <a:srgbClr val="40A070"/>
+                </a:solidFill>
+                <a:latin typeface="Courier"/>
+              </a:rPr>
+              <a:t>0</a:t>
+            </a:r>
+            <a:r>
+              <a:rPr>
+                <a:latin typeface="Courier"/>
+              </a:rPr>
+              <a:t>),</a:t>
+            </a:r>
+            <a:br/>
+            <a:r>
+              <a:rPr>
+                <a:latin typeface="Courier"/>
+              </a:rPr>
+              <a:t>        method</a:t>
+            </a:r>
+            <a:r>
+              <a:rPr>
+                <a:solidFill>
+                  <a:srgbClr val="666666"/>
+                </a:solidFill>
+                <a:latin typeface="Courier"/>
+              </a:rPr>
+              <a:t>=</a:t>
+            </a:r>
+            <a:r>
+              <a:rPr>
+                <a:solidFill>
+                  <a:srgbClr val="4070A0"/>
+                </a:solidFill>
+                <a:latin typeface="Courier"/>
+              </a:rPr>
+              <a:t>"predict_proba"</a:t>
+            </a:r>
+            <a:r>
+              <a:rPr>
+                <a:latin typeface="Courier"/>
+              </a:rPr>
+              <a:t>)[:, </a:t>
+            </a:r>
+            <a:r>
+              <a:rPr>
+                <a:solidFill>
+                  <a:srgbClr val="40A070"/>
+                </a:solidFill>
+                <a:latin typeface="Courier"/>
+              </a:rPr>
+              <a:t>1</a:t>
+            </a:r>
+            <a:r>
+              <a:rPr>
+                <a:latin typeface="Courier"/>
+              </a:rPr>
+              <a:t>]</a:t>
+            </a:r>
+            <a:br/>
+            <a:r>
+              <a:rPr>
+                <a:latin typeface="Courier"/>
+              </a:rPr>
+              <a:t>    </a:t>
+            </a:r>
+            <a:r>
+              <a:rPr b="1">
+                <a:solidFill>
+                  <a:srgbClr val="007020"/>
+                </a:solidFill>
+                <a:latin typeface="Courier"/>
+              </a:rPr>
+              <a:t>return</a:t>
+            </a:r>
+            <a:r>
+              <a:rPr>
+                <a:latin typeface="Courier"/>
+              </a:rPr>
+              <a:t> roc_auc_score(lab, p)</a:t>
+            </a:r>
+            <a:br/>
+            <a:br/>
+            <a:r>
+              <a:rPr>
+                <a:latin typeface="Courier"/>
+              </a:rPr>
+              <a:t>CUTS </a:t>
+            </a:r>
+            <a:r>
+              <a:rPr>
+                <a:solidFill>
+                  <a:srgbClr val="666666"/>
+                </a:solidFill>
+                <a:latin typeface="Courier"/>
+              </a:rPr>
+              <a:t>=</a:t>
+            </a:r>
+            <a:r>
+              <a:rPr>
+                <a:latin typeface="Courier"/>
+              </a:rPr>
+              <a:t> [</a:t>
+            </a:r>
+            <a:r>
+              <a:rPr>
+                <a:solidFill>
+                  <a:srgbClr val="40A070"/>
+                </a:solidFill>
+                <a:latin typeface="Courier"/>
+              </a:rPr>
+              <a:t>2015</a:t>
+            </a:r>
+            <a:r>
+              <a:rPr>
+                <a:latin typeface="Courier"/>
+              </a:rPr>
+              <a:t>, </a:t>
+            </a:r>
+            <a:r>
+              <a:rPr>
+                <a:solidFill>
+                  <a:srgbClr val="40A070"/>
+                </a:solidFill>
+                <a:latin typeface="Courier"/>
+              </a:rPr>
+              <a:t>2017</a:t>
+            </a:r>
+            <a:r>
+              <a:rPr>
+                <a:latin typeface="Courier"/>
+              </a:rPr>
+              <a:t>, </a:t>
+            </a:r>
+            <a:r>
+              <a:rPr>
+                <a:solidFill>
+                  <a:srgbClr val="40A070"/>
+                </a:solidFill>
+                <a:latin typeface="Courier"/>
+              </a:rPr>
+              <a:t>2019</a:t>
+            </a:r>
+            <a:r>
+              <a:rPr>
+                <a:latin typeface="Courier"/>
+              </a:rPr>
+              <a:t>, </a:t>
+            </a:r>
+            <a:r>
+              <a:rPr>
+                <a:solidFill>
+                  <a:srgbClr val="40A070"/>
+                </a:solidFill>
+                <a:latin typeface="Courier"/>
+              </a:rPr>
+              <a:t>2021</a:t>
+            </a:r>
+            <a:r>
+              <a:rPr>
+                <a:latin typeface="Courier"/>
+              </a:rPr>
+              <a:t>]</a:t>
+            </a:r>
+            <a:br/>
+            <a:r>
+              <a:rPr>
+                <a:latin typeface="Courier"/>
+              </a:rPr>
+              <a:t>lev </a:t>
+            </a:r>
+            <a:r>
+              <a:rPr>
+                <a:solidFill>
+                  <a:srgbClr val="666666"/>
+                </a:solidFill>
+                <a:latin typeface="Courier"/>
+              </a:rPr>
+              <a:t>=</a:t>
+            </a:r>
+            <a:r>
+              <a:rPr>
+                <a:latin typeface="Courier"/>
+              </a:rPr>
+              <a:t> [drift_auc(X_lev, m[</a:t>
+            </a:r>
+            <a:r>
+              <a:rPr>
+                <a:solidFill>
+                  <a:srgbClr val="4070A0"/>
+                </a:solidFill>
+                <a:latin typeface="Courier"/>
+              </a:rPr>
+              <a:t>"time"</a:t>
+            </a:r>
+            <a:r>
+              <a:rPr>
+                <a:latin typeface="Courier"/>
+              </a:rPr>
+              <a:t>].to_numpy(), c) </a:t>
+            </a:r>
+            <a:r>
+              <a:rPr b="1">
+                <a:solidFill>
+                  <a:srgbClr val="007020"/>
+                </a:solidFill>
+                <a:latin typeface="Courier"/>
+              </a:rPr>
+              <a:t>for</a:t>
+            </a:r>
+            <a:r>
+              <a:rPr>
+                <a:latin typeface="Courier"/>
+              </a:rPr>
+              <a:t> c </a:t>
+            </a:r>
+            <a:r>
+              <a:rPr b="1">
+                <a:solidFill>
+                  <a:srgbClr val="007020"/>
+                </a:solidFill>
+                <a:latin typeface="Courier"/>
+              </a:rPr>
+              <a:t>in</a:t>
+            </a:r>
+            <a:r>
+              <a:rPr>
+                <a:latin typeface="Courier"/>
+              </a:rPr>
+              <a:t> CUTS]</a:t>
+            </a:r>
+            <a:br/>
+            <a:r>
+              <a:rPr>
+                <a:latin typeface="Courier"/>
+              </a:rPr>
+              <a:t>chgs </a:t>
+            </a:r>
+            <a:r>
+              <a:rPr>
+                <a:solidFill>
+                  <a:srgbClr val="666666"/>
+                </a:solidFill>
+                <a:latin typeface="Courier"/>
+              </a:rPr>
+              <a:t>=</a:t>
+            </a:r>
+            <a:r>
+              <a:rPr>
+                <a:latin typeface="Courier"/>
+              </a:rPr>
+              <a:t> [drift_auc(X_chg, t_chg, c) </a:t>
+            </a:r>
+            <a:r>
+              <a:rPr b="1">
+                <a:solidFill>
+                  <a:srgbClr val="007020"/>
+                </a:solidFill>
+                <a:latin typeface="Courier"/>
+              </a:rPr>
+              <a:t>for</a:t>
+            </a:r>
+            <a:r>
+              <a:rPr>
+                <a:latin typeface="Courier"/>
+              </a:rPr>
+              <a:t> c </a:t>
+            </a:r>
+            <a:r>
+              <a:rPr b="1">
+                <a:solidFill>
+                  <a:srgbClr val="007020"/>
+                </a:solidFill>
+                <a:latin typeface="Courier"/>
+              </a:rPr>
+              <a:t>in</a:t>
+            </a:r>
+            <a:r>
+              <a:rPr>
+                <a:latin typeface="Courier"/>
+              </a:rPr>
+              <a:t> CUTS]</a:t>
+            </a:r>
+            <a:br/>
+            <a:r>
+              <a:rPr>
+                <a:solidFill>
+                  <a:srgbClr val="008000"/>
+                </a:solidFill>
+                <a:latin typeface="Courier"/>
+              </a:rPr>
+              <a:t>print</a:t>
+            </a:r>
+            <a:r>
+              <a:rPr>
+                <a:latin typeface="Courier"/>
+              </a:rPr>
+              <a:t>(</a:t>
+            </a:r>
+            <a:r>
+              <a:rPr>
+                <a:solidFill>
+                  <a:srgbClr val="4070A0"/>
+                </a:solidFill>
+                <a:latin typeface="Courier"/>
+              </a:rPr>
+              <a:t>"cut year :"</a:t>
+            </a:r>
+            <a:r>
+              <a:rPr>
+                <a:latin typeface="Courier"/>
+              </a:rPr>
+              <a:t>, </a:t>
+            </a:r>
+            <a:r>
+              <a:rPr>
+                <a:solidFill>
+                  <a:srgbClr val="4070A0"/>
+                </a:solidFill>
+                <a:latin typeface="Courier"/>
+              </a:rPr>
+              <a:t>"  "</a:t>
+            </a:r>
+            <a:r>
+              <a:rPr>
+                <a:latin typeface="Courier"/>
+              </a:rPr>
+              <a:t>.join(</a:t>
+            </a:r>
+            <a:r>
+              <a:rPr>
+                <a:solidFill>
+                  <a:srgbClr val="BB6688"/>
+                </a:solidFill>
+                <a:latin typeface="Courier"/>
+              </a:rPr>
+              <a:t>f"</a:t>
+            </a:r>
+            <a:r>
+              <a:rPr>
+                <a:solidFill>
+                  <a:srgbClr val="4070A0"/>
+                </a:solidFill>
+                <a:latin typeface="Courier"/>
+              </a:rPr>
+              <a:t>{</a:t>
+            </a:r>
+            <a:r>
+              <a:rPr>
+                <a:latin typeface="Courier"/>
+              </a:rPr>
+              <a:t>c</a:t>
+            </a:r>
+            <a:r>
+              <a:rPr>
+                <a:solidFill>
+                  <a:srgbClr val="4070A0"/>
+                </a:solidFill>
+                <a:latin typeface="Courier"/>
+              </a:rPr>
+              <a:t>}</a:t>
+            </a:r>
+            <a:r>
+              <a:rPr>
+                <a:solidFill>
+                  <a:srgbClr val="BB6688"/>
+                </a:solidFill>
+                <a:latin typeface="Courier"/>
+              </a:rPr>
+              <a:t>"</a:t>
+            </a:r>
+            <a:r>
+              <a:rPr>
+                <a:latin typeface="Courier"/>
+              </a:rPr>
+              <a:t> </a:t>
+            </a:r>
+            <a:r>
+              <a:rPr b="1">
+                <a:solidFill>
+                  <a:srgbClr val="007020"/>
+                </a:solidFill>
+                <a:latin typeface="Courier"/>
+              </a:rPr>
+              <a:t>for</a:t>
+            </a:r>
+            <a:r>
+              <a:rPr>
+                <a:latin typeface="Courier"/>
+              </a:rPr>
+              <a:t> c </a:t>
+            </a:r>
+            <a:r>
+              <a:rPr b="1">
+                <a:solidFill>
+                  <a:srgbClr val="007020"/>
+                </a:solidFill>
+                <a:latin typeface="Courier"/>
+              </a:rPr>
+              <a:t>in</a:t>
+            </a:r>
+            <a:r>
+              <a:rPr>
+                <a:latin typeface="Courier"/>
+              </a:rPr>
+              <a:t> CUTS))</a:t>
+            </a:r>
+            <a:br/>
+            <a:r>
+              <a:rPr>
+                <a:solidFill>
+                  <a:srgbClr val="008000"/>
+                </a:solidFill>
+                <a:latin typeface="Courier"/>
+              </a:rPr>
+              <a:t>print</a:t>
+            </a:r>
+            <a:r>
+              <a:rPr>
+                <a:latin typeface="Courier"/>
+              </a:rPr>
+              <a:t>(</a:t>
+            </a:r>
+            <a:r>
+              <a:rPr>
+                <a:solidFill>
+                  <a:srgbClr val="4070A0"/>
+                </a:solidFill>
+                <a:latin typeface="Courier"/>
+              </a:rPr>
+              <a:t>"levels   :"</a:t>
+            </a:r>
+            <a:r>
+              <a:rPr>
+                <a:latin typeface="Courier"/>
+              </a:rPr>
+              <a:t>, </a:t>
+            </a:r>
+            <a:r>
+              <a:rPr>
+                <a:solidFill>
+                  <a:srgbClr val="4070A0"/>
+                </a:solidFill>
+                <a:latin typeface="Courier"/>
+              </a:rPr>
+              <a:t>"  "</a:t>
+            </a:r>
+            <a:r>
+              <a:rPr>
+                <a:latin typeface="Courier"/>
+              </a:rPr>
+              <a:t>.join(</a:t>
+            </a:r>
+            <a:r>
+              <a:rPr>
+                <a:solidFill>
+                  <a:srgbClr val="BB6688"/>
+                </a:solidFill>
+                <a:latin typeface="Courier"/>
+              </a:rPr>
+              <a:t>f"</a:t>
+            </a:r>
+            <a:r>
+              <a:rPr>
+                <a:solidFill>
+                  <a:srgbClr val="4070A0"/>
+                </a:solidFill>
+                <a:latin typeface="Courier"/>
+              </a:rPr>
+              <a:t>{</a:t>
+            </a:r>
+            <a:r>
+              <a:rPr>
+                <a:latin typeface="Courier"/>
+              </a:rPr>
+              <a:t>v</a:t>
+            </a:r>
+            <a:r>
+              <a:rPr>
+                <a:solidFill>
+                  <a:srgbClr val="4070A0"/>
+                </a:solidFill>
+                <a:latin typeface="Courier"/>
+              </a:rPr>
+              <a:t>:.2f}</a:t>
+            </a:r>
+            <a:r>
+              <a:rPr>
+                <a:solidFill>
+                  <a:srgbClr val="BB6688"/>
+                </a:solidFill>
+                <a:latin typeface="Courier"/>
+              </a:rPr>
+              <a:t>"</a:t>
+            </a:r>
+            <a:r>
+              <a:rPr>
+                <a:latin typeface="Courier"/>
+              </a:rPr>
+              <a:t> </a:t>
+            </a:r>
+            <a:r>
+              <a:rPr b="1">
+                <a:solidFill>
+                  <a:srgbClr val="007020"/>
+                </a:solidFill>
+                <a:latin typeface="Courier"/>
+              </a:rPr>
+              <a:t>for</a:t>
+            </a:r>
+            <a:r>
+              <a:rPr>
+                <a:latin typeface="Courier"/>
+              </a:rPr>
+              <a:t> v </a:t>
+            </a:r>
+            <a:r>
+              <a:rPr b="1">
+                <a:solidFill>
+                  <a:srgbClr val="007020"/>
+                </a:solidFill>
+                <a:latin typeface="Courier"/>
+              </a:rPr>
+              <a:t>in</a:t>
+            </a:r>
+            <a:r>
+              <a:rPr>
+                <a:latin typeface="Courier"/>
+              </a:rPr>
+              <a:t> lev))</a:t>
+            </a:r>
+            <a:br/>
+            <a:r>
+              <a:rPr>
+                <a:solidFill>
+                  <a:srgbClr val="008000"/>
+                </a:solidFill>
+                <a:latin typeface="Courier"/>
+              </a:rPr>
+              <a:t>print</a:t>
+            </a:r>
+            <a:r>
+              <a:rPr>
+                <a:latin typeface="Courier"/>
+              </a:rPr>
+              <a:t>(</a:t>
+            </a:r>
+            <a:r>
+              <a:rPr>
+                <a:solidFill>
+                  <a:srgbClr val="4070A0"/>
+                </a:solidFill>
+                <a:latin typeface="Courier"/>
+              </a:rPr>
+              <a:t>"changes  :"</a:t>
+            </a:r>
+            <a:r>
+              <a:rPr>
+                <a:latin typeface="Courier"/>
+              </a:rPr>
+              <a:t>, </a:t>
+            </a:r>
+            <a:r>
+              <a:rPr>
+                <a:solidFill>
+                  <a:srgbClr val="4070A0"/>
+                </a:solidFill>
+                <a:latin typeface="Courier"/>
+              </a:rPr>
+              <a:t>"  "</a:t>
+            </a:r>
+            <a:r>
+              <a:rPr>
+                <a:latin typeface="Courier"/>
+              </a:rPr>
+              <a:t>.join(</a:t>
+            </a:r>
+            <a:r>
+              <a:rPr>
+                <a:solidFill>
+                  <a:srgbClr val="BB6688"/>
+                </a:solidFill>
+                <a:latin typeface="Courier"/>
+              </a:rPr>
+              <a:t>f"</a:t>
+            </a:r>
+            <a:r>
+              <a:rPr>
+                <a:solidFill>
+                  <a:srgbClr val="4070A0"/>
+                </a:solidFill>
+                <a:latin typeface="Courier"/>
+              </a:rPr>
+              <a:t>{</a:t>
+            </a:r>
+            <a:r>
+              <a:rPr>
+                <a:latin typeface="Courier"/>
+              </a:rPr>
+              <a:t>v</a:t>
+            </a:r>
+            <a:r>
+              <a:rPr>
+                <a:solidFill>
+                  <a:srgbClr val="4070A0"/>
+                </a:solidFill>
+                <a:latin typeface="Courier"/>
+              </a:rPr>
+              <a:t>:.2f}</a:t>
+            </a:r>
+            <a:r>
+              <a:rPr>
+                <a:solidFill>
+                  <a:srgbClr val="BB6688"/>
+                </a:solidFill>
+                <a:latin typeface="Courier"/>
+              </a:rPr>
+              <a:t>"</a:t>
+            </a:r>
+            <a:r>
+              <a:rPr>
+                <a:latin typeface="Courier"/>
+              </a:rPr>
+              <a:t> </a:t>
+            </a:r>
+            <a:r>
+              <a:rPr b="1">
+                <a:solidFill>
+                  <a:srgbClr val="007020"/>
+                </a:solidFill>
+                <a:latin typeface="Courier"/>
+              </a:rPr>
+              <a:t>for</a:t>
+            </a:r>
+            <a:r>
+              <a:rPr>
+                <a:latin typeface="Courier"/>
+              </a:rPr>
+              <a:t> v </a:t>
+            </a:r>
+            <a:r>
+              <a:rPr b="1">
+                <a:solidFill>
+                  <a:srgbClr val="007020"/>
+                </a:solidFill>
+                <a:latin typeface="Courier"/>
+              </a:rPr>
+              <a:t>in</a:t>
+            </a:r>
+            <a:r>
+              <a:rPr>
+                <a:latin typeface="Courier"/>
+              </a:rPr>
+              <a:t> chgs))</a:t>
+            </a:r>
+          </a:p>
+          <a:p>
+            <a:pPr lvl="0" indent="0">
+              <a:buNone/>
             </a:pPr>
             <a:r>
-              <a:rPr b="1"/>
-              <a:t>Intended use</a:t>
-            </a:r>
-            <a:r>
-              <a:rPr/>
-              <a:t> — and out-of-scope uses</a:t>
-            </a:r>
-          </a:p>
-          <a:p>
-            <a:pPr lvl="0" indent="-342900" marL="342900">
-              <a:buAutoNum type="arabicPeriod"/>
-            </a:pPr>
-            <a:r>
-              <a:rPr b="1"/>
-              <a:t>Data lineage</a:t>
-            </a:r>
-            <a:r>
-              <a:rPr/>
-              <a:t> — sources, vintages, dates, licences, quality issues, checksums</a:t>
-            </a:r>
-          </a:p>
-          <a:p>
-            <a:pPr lvl="0" indent="-342900" marL="342900">
-              <a:buAutoNum type="arabicPeriod"/>
-            </a:pPr>
-            <a:r>
-              <a:rPr b="1"/>
-              <a:t>Preprocessing</a:t>
-            </a:r>
-            <a:r>
-              <a:rPr/>
-              <a:t> — every transformation, in order, with the code</a:t>
-            </a:r>
-          </a:p>
-          <a:p>
-            <a:pPr lvl="0" indent="-342900" marL="342900">
-              <a:buAutoNum type="arabicPeriod"/>
-            </a:pPr>
-            <a:r>
-              <a:rPr b="1"/>
-              <a:t>Validation</a:t>
-            </a:r>
-            <a:r>
-              <a:rPr/>
-              <a:t> — design, why the CV scheme matches deployment, metrics, benchmark, subgroups</a:t>
-            </a:r>
-          </a:p>
-          <a:p>
-            <a:pPr lvl="0" indent="-342900" marL="342900">
-              <a:buAutoNum type="arabicPeriod"/>
-            </a:pPr>
-            <a:r>
-              <a:rPr b="1"/>
-              <a:t>Limitations</a:t>
-            </a:r>
-            <a:r>
-              <a:rPr/>
-              <a:t> — where it performs worst, who is under-represented, what is load-bearing</a:t>
-            </a:r>
-          </a:p>
-          <a:p>
-            <a:pPr lvl="0" indent="-342900" marL="342900">
-              <a:buAutoNum type="arabicPeriod"/>
-            </a:pPr>
-            <a:r>
-              <a:rPr b="1"/>
-              <a:t>Monitoring plan</a:t>
-            </a:r>
-            <a:r>
-              <a:rPr/>
-              <a:t> — what is tracked, how often, what threshold triggers review</a:t>
-            </a:r>
-          </a:p>
-          <a:p>
-            <a:pPr lvl="0" indent="-342900" marL="342900">
-              <a:buAutoNum type="arabicPeriod"/>
-            </a:pPr>
-            <a:r>
-              <a:rPr b="1"/>
-              <a:t>Ownership</a:t>
-            </a:r>
-            <a:r>
-              <a:rPr/>
-              <a:t> — who is accountable, and the </a:t>
-            </a:r>
-            <a:r>
-              <a:rPr b="1"/>
-              <a:t>retirement criterion</a:t>
+              <a:rPr>
+                <a:latin typeface="Courier"/>
+              </a:rPr>
+              <a:t>cut year : 2015  2017  2019  2021
+levels   : 0.82  0.85  0.84  0.87
+changes  : 0.65  0.63  0.65  0.68</a:t>
             </a:r>
           </a:p>
         </p:txBody>
@@ -4918,68 +7727,41 @@
             </a:pPr>
             <a:r>
               <a:rPr/>
-              <a:t>Not bureaucracy</a:t>
-            </a:r>
-          </a:p>
-        </p:txBody>
-      </p:sp>
-      <p:sp>
-        <p:nvSpPr>
-          <p:cNvPr id="3" name="Content Placeholder 2"/>
-          <p:cNvSpPr>
-            <a:spLocks noGrp="1"/>
-          </p:cNvSpPr>
-          <p:nvPr>
-            <p:ph idx="1"/>
-          </p:nvPr>
-        </p:nvSpPr>
-        <p:spPr/>
-        <p:txBody>
-          <a:bodyPr/>
-          <a:lstStyle/>
-          <a:p>
-            <a:pPr lvl="0" indent="0" marL="0">
-              <a:buNone/>
-            </a:pPr>
-            <a:r>
-              <a:rPr/>
-              <a:t>Sections </a:t>
-            </a:r>
-            <a:r>
-              <a:rPr b="1"/>
-              <a:t>5</a:t>
-            </a:r>
-            <a:r>
-              <a:rPr/>
-              <a:t> and </a:t>
-            </a:r>
-            <a:r>
-              <a:rPr b="1"/>
-              <a:t>6</a:t>
-            </a:r>
-            <a:r>
-              <a:rPr/>
-              <a:t> are where the intellectual content of the whole course finally has to be written down for someone else.</a:t>
-            </a:r>
-          </a:p>
-          <a:p>
-            <a:pPr lvl="0" indent="0" marL="0">
-              <a:buNone/>
-            </a:pPr>
-            <a:r>
-              <a:rPr/>
-              <a:t>Template: </a:t>
-            </a:r>
-            <a:r>
-              <a:rPr>
-                <a:hlinkClick r:id="rId2"/>
-                <a:latin typeface="Courier"/>
-              </a:rPr>
-              <a:t>02-practice/governance-file-template.md</a:t>
-            </a:r>
-          </a:p>
-        </p:txBody>
-      </p:sp>
+              <a:t>Read that carefully</a:t>
+            </a:r>
+          </a:p>
+        </p:txBody>
+      </p:sp>
+      <p:pic>
+        <p:nvPicPr>
+          <p:cNvPr descr="slides_files/figure-pptx/cell-8-output-1.png" id="0" name="Picture 1"/>
+          <p:cNvPicPr>
+            <a:picLocks noGrp="1" noChangeAspect="1"/>
+          </p:cNvPicPr>
+          <p:nvPr/>
+        </p:nvPicPr>
+        <p:blipFill>
+          <a:blip r:embed="rId2"/>
+          <a:stretch>
+            <a:fillRect/>
+          </a:stretch>
+        </p:blipFill>
+        <p:spPr bwMode="auto">
+          <a:xfrm>
+            <a:off x="647700" y="1193800"/>
+            <a:ext cx="7835900" cy="3390900"/>
+          </a:xfrm>
+          <a:prstGeom prst="rect">
+            <a:avLst/>
+          </a:prstGeom>
+          <a:noFill/>
+          <a:ln w="9525">
+            <a:noFill/>
+            <a:headEnd/>
+            <a:tailEnd/>
+          </a:ln>
+        </p:spPr>
+      </p:pic>
     </p:spTree>
   </p:cSld>
 </p:sld>
@@ -5004,12 +7786,12 @@
       </p:grpSpPr>
       <p:sp>
         <p:nvSpPr>
-          <p:cNvPr id="2" name="Title 1"/>
-          <p:cNvSpPr>
-            <a:spLocks noGrp="1"/>
-          </p:cNvSpPr>
-          <p:nvPr>
-            <p:ph type="title"/>
+          <p:cNvPr id="3" name="Content Placeholder 2"/>
+          <p:cNvSpPr>
+            <a:spLocks noGrp="1"/>
+          </p:cNvSpPr>
+          <p:nvPr>
+            <p:ph idx="1"/>
           </p:nvPr>
         </p:nvSpPr>
         <p:spPr/>
@@ -5022,50 +7804,23 @@
             </a:pPr>
             <a:r>
               <a:rPr/>
-              <a:t>Write a specific retirement trigger</a:t>
-            </a:r>
-          </a:p>
-        </p:txBody>
-      </p:sp>
-      <p:sp>
-        <p:nvSpPr>
-          <p:cNvPr id="3" name="Content Placeholder 2"/>
-          <p:cNvSpPr>
-            <a:spLocks noGrp="1"/>
-          </p:cNvSpPr>
-          <p:nvPr>
-            <p:ph idx="1"/>
-          </p:nvPr>
-        </p:nvSpPr>
-        <p:spPr/>
-        <p:txBody>
-          <a:bodyPr/>
-          <a:lstStyle/>
-          <a:p>
-            <a:pPr lvl="0" indent="0" marL="0">
-              <a:buNone/>
-            </a:pPr>
+              <a:t>In levels, the classifier separates </a:t>
+            </a:r>
+            <a:r>
+              <a:rPr b="1"/>
+              <a:t>every</a:t>
+            </a:r>
             <a:r>
               <a:rPr/>
-              <a:t>A model with no stated retirement condition is never retired. It is used until something goes visibly wrong — and by then it has been wrong for a while.</a:t>
-            </a:r>
-          </a:p>
-          <a:p>
-            <a:pPr lvl="0" indent="0" marL="1270000">
-              <a:buNone/>
-            </a:pPr>
-            <a:r>
-              <a:rPr sz="2000" i="1"/>
-              <a:t>“Retrain when the era-classifier AUC against the training period exceeds 0.75, or when rolling 2-year RMSE exceeds 1.4× the backtest median. Retire if retraining does not restore it.”</a:t>
-            </a:r>
-          </a:p>
-          <a:p>
-            <a:pPr lvl="0" indent="0" marL="0">
-              <a:buNone/>
-            </a:pPr>
+              <a:t> split at AUC 0.82–0.87 — including years with no documented break. It is detecting the </a:t>
+            </a:r>
+            <a:r>
+              <a:rPr b="1"/>
+              <a:t>trend</a:t>
+            </a:r>
             <a:r>
               <a:rPr/>
-              <a:t>Specific enough that someone who has never met you can execute it.</a:t>
+              <a:t>, not the regime change.</a:t>
             </a:r>
           </a:p>
         </p:txBody>
@@ -5102,6 +7857,127 @@
             <p:ph type="title"/>
           </p:nvPr>
         </p:nvSpPr>
+        <p:spPr/>
+        <p:txBody>
+          <a:bodyPr/>
+          <a:lstStyle/>
+          <a:p>
+            <a:pPr lvl="0" indent="0" marL="0">
+              <a:buNone/>
+            </a:pPr>
+            <a:r>
+              <a:rPr/>
+              <a:t>The lesson about diagnostics</a:t>
+            </a:r>
+          </a:p>
+        </p:txBody>
+      </p:sp>
+      <mc:AlternateContent xmlns:mc="http://schemas.openxmlformats.org/markup-compatibility/2006">
+        <mc:Choice xmlns:a14="http://schemas.microsoft.com/office/drawing/2010/main" Requires="a14">
+          <p:sp>
+            <p:nvSpPr>
+              <p:cNvPr id="3" name="Content Placeholder 2"/>
+              <p:cNvSpPr>
+                <a:spLocks noGrp="1"/>
+              </p:cNvSpPr>
+              <p:nvPr>
+                <p:ph idx="1"/>
+              </p:nvPr>
+            </p:nvSpPr>
+            <p:spPr/>
+            <p:txBody>
+              <a:bodyPr/>
+              <a:lstStyle/>
+              <a:p>
+                <a:pPr lvl="0" indent="0" marL="0">
+                  <a:buNone/>
+                </a:pPr>
+                <a:r>
+                  <a:rPr/>
+                  <a:t>A drift AUC of 0.87 means nothing on its own. It means something compared with the AUC at a date where you believe nothing happened.</a:t>
+                </a:r>
+              </a:p>
+              <a:p>
+                <a:pPr lvl="0"/>
+                <a:r>
+                  <a:rPr/>
+                  <a:t>Always run </a:t>
+                </a:r>
+                <a:r>
+                  <a:rPr b="1"/>
+                  <a:t>placebo cuts</a:t>
+                </a:r>
+              </a:p>
+              <a:p>
+                <a:pPr lvl="0"/>
+                <a:r>
+                  <a:rPr/>
+                  <a:t>Detrend or difference before asking about a regime change</a:t>
+                </a:r>
+              </a:p>
+              <a:p>
+                <a:pPr lvl="0"/>
+                <a:r>
+                  <a:rPr/>
+                  <a:t>Report the whole profile, not the one number that supported your story</a:t>
+                </a:r>
+              </a:p>
+              <a:p>
+                <a:pPr lvl="0" indent="0" marL="0">
+                  <a:buNone/>
+                </a:pPr>
+                <a:r>
+                  <a:rPr/>
+                  <a:t>This is the same discipline as Session 03’s diagnostics and Session 09’s second criterion for </a:t>
+                </a:r>
+                <a14:m>
+                  <m:oMath xmlns:m="http://schemas.openxmlformats.org/officeDocument/2006/math">
+                    <m:r>
+                      <m:t>k</m:t>
+                    </m:r>
+                  </m:oMath>
+                </a14:m>
+                <a:r>
+                  <a:rPr/>
+                  <a:t>. By now it should feel like a habit.</a:t>
+                </a:r>
+              </a:p>
+            </p:txBody>
+          </p:sp>
+        </mc:Choice>
+      </mc:AlternateContent>
+    </p:spTree>
+  </p:cSld>
+</p:sld>
+</file>
+
+<file path=ppt/slides/slide25.xml><?xml version="1.0" encoding="utf-8"?>
+<p:sld xmlns:a="http://schemas.openxmlformats.org/drawingml/2006/main" xmlns:r="http://schemas.openxmlformats.org/officeDocument/2006/relationships" xmlns:p="http://schemas.openxmlformats.org/presentationml/2006/main">
+  <p:cSld>
+    <p:spTree>
+      <p:nvGrpSpPr>
+        <p:cNvPr id="1" name=""/>
+        <p:cNvGrpSpPr/>
+        <p:nvPr/>
+      </p:nvGrpSpPr>
+      <p:grpSpPr>
+        <a:xfrm>
+          <a:off x="0" y="0"/>
+          <a:ext cx="0" cy="0"/>
+          <a:chOff x="0" y="0"/>
+          <a:chExt cx="0" cy="0"/>
+        </a:xfrm>
+      </p:grpSpPr>
+      <p:sp>
+        <p:nvSpPr>
+          <p:cNvPr id="2" name="Title 1"/>
+          <p:cNvSpPr>
+            <a:spLocks noGrp="1"/>
+          </p:cNvSpPr>
+          <p:nvPr>
+            <p:ph type="title"/>
+          </p:nvPr>
+        </p:nvSpPr>
         <p:spPr>
           <a:xfrm>
             <a:off x="722313" y="1850000"/>
@@ -5117,7 +7993,7 @@
             </a:pPr>
             <a:r>
               <a:rPr/>
-              <a:t>11.5 The arc</a:t>
+              <a:t>4 · Goodhart</a:t>
             </a:r>
           </a:p>
         </p:txBody>
@@ -5127,10 +8003,118 @@
 </p:sld>
 </file>
 
-<file path=ppt/slides/slide25.xml><?xml version="1.0" encoding="UTF-8"?><p:sld xmlns:a="http://schemas.openxmlformats.org/drawingml/2006/main" xmlns:r="http://schemas.openxmlformats.org/officeDocument/2006/relationships" xmlns:p="http://schemas.openxmlformats.org/presentationml/2006/main"><p:cSld><p:spTree><p:nvGrpSpPr><p:cNvPr id="1" name="" /><p:cNvGrpSpPr /><p:nvPr /></p:nvGrpSpPr><p:grpSpPr><a:xfrm><a:off x="0" y="0" /><a:ext cx="0" cy="0" /><a:chOff x="0" y="0" /><a:chExt cx="0" cy="0" /></a:xfrm></p:grpSpPr><p:sp><p:nvSpPr><p:cNvPr id="2" name="Title 1" /><p:cNvSpPr><a:spLocks noGrp="1" /></p:cNvSpPr><p:nvPr><p:ph type="title" /></p:nvPr></p:nvSpPr><p:spPr /><p:txBody><a:bodyPr /><a:lstStyle /><a:p><a:pPr lvl="0" indent="0" marL="0"><a:buNone /></a:pPr><a:r><a:rPr /><a:t>The dial, and the self-deception it prevents</a:t></a:r></a:p></p:txBody></p:sp><p:graphicFrame><p:nvGraphicFramePr><p:cNvPr id="6" name="Content Placeholder 5" /><p:cNvGraphicFramePr><a:graphicFrameLocks noGrp="1" /></p:cNvGraphicFramePr><p:nvPr><p:ph idx="1" /></p:nvPr></p:nvGraphicFramePr><p:xfrm><a:off x="457200" y="1193800" /><a:ext cx="8229600" cy="3390900" /></p:xfrm><a:graphic><a:graphicData uri="http://schemas.openxmlformats.org/drawingml/2006/table"><a:tbl><a:tblPr firstRow="1" bandRow="1"><a:tableStyleId>{5C22544A-7EE6-4342-B048-85BDC9FD1C3A}</a:tableStyleId></a:tblPr><a:tblGrid><a:gridCol w="2743200" /><a:gridCol w="2743200" /><a:gridCol w="2743200" /></a:tblGrid><a:tr h="0"><a:tc><a:txBody><a:bodyPr /><a:lstStyle /><a:p><a:pPr lvl="0" indent="0" marL="0"><a:buNone /></a:pPr><a:r><a:rPr /><a:t>Session</a:t></a:r></a:p></a:txBody><a:tcPr /></a:tc><a:tc><a:txBody><a:bodyPr /><a:lstStyle /><a:p><a:pPr lvl="0" indent="0" marL="0"><a:buNone /></a:pPr><a:r><a:rPr /><a:t>The dial</a:t></a:r></a:p></a:txBody><a:tcPr /></a:tc><a:tc><a:txBody><a:bodyPr /><a:lstStyle /><a:p><a:pPr lvl="0" indent="0" marL="0"><a:buNone /></a:pPr><a:r><a:rPr /><a:t>The self-deception</a:t></a:r></a:p></a:txBody><a:tcPr /></a:tc></a:tr><a:tr h="0"><a:tc><a:txBody><a:bodyPr /><a:lstStyle /><a:p><a:pPr lvl="0" indent="0" marL="0"><a:buNone /></a:pPr><a:r><a:rPr /><a:t>2–3</a:t></a:r></a:p></a:txBody></a:tc><a:tc><a:txBody><a:bodyPr /><a:lstStyle /><a:p><a:pPr lvl="0" indent="0" marL="0"><a:buNone /></a:pPr><a:r><a:rPr /><a:t>Which variables enter, how errors are modelled</a:t></a:r></a:p></a:txBody></a:tc><a:tc><a:txBody><a:bodyPr /><a:lstStyle /><a:p><a:pPr lvl="0" indent="0" marL="0"><a:buNone /></a:pPr><a:r><a:rPr /><a:t>“My standard errors are correct because the software printed them”</a:t></a:r></a:p></a:txBody></a:tc></a:tr><a:tr h="0"><a:tc><a:txBody><a:bodyPr /><a:lstStyle /><a:p><a:pPr lvl="0" indent="0" marL="0"><a:buNone /></a:pPr><a:r><a:rPr /><a:t>4</a:t></a:r></a:p></a:txBody></a:tc><a:tc><a:txBody><a:bodyPr /><a:lstStyle /><a:p><a:pPr lvl="0" indent="0" marL="0"><a:buNone /></a:pPr><a:r><a:rPr /><a:t>Model complexity, via CV</a:t></a:r></a:p></a:txBody></a:tc><a:tc><a:txBody><a:bodyPr /><a:lstStyle /><a:p><a:pPr lvl="0" indent="0" marL="0"><a:buNone /></a:pPr><a:r><a:rPr /><a:t>“It fits the data well”</a:t></a:r></a:p></a:txBody></a:tc></a:tr><a:tr h="0"><a:tc><a:txBody><a:bodyPr /><a:lstStyle /><a:p><a:pPr lvl="0" indent="0" marL="0"><a:buNone /></a:pPr><a:r><a:rPr /><a:t>5–6</a:t></a:r></a:p></a:txBody></a:tc><a:tc><a:txBody><a:bodyPr /><a:lstStyle /><a:p><a:pPr lvl="0" indent="0" marL="0"><a:buNone /></a:pPr><a14:m><m:oMath xmlns:m="http://schemas.openxmlformats.org/officeDocument/2006/math"><m:r><m:t>λ</m:t></m:r></m:oMath></a14:m><a:r><a:rPr /><a:t> and </a:t></a:r><a14:m><m:oMath xmlns:m="http://schemas.openxmlformats.org/officeDocument/2006/math"><m:r><m:t>α</m:t></m:r></m:oMath></a14:m></a:p></a:txBody></a:tc><a:tc><a:txBody><a:bodyPr /><a:lstStyle /><a:p><a:pPr lvl="0" indent="0" marL="0"><a:buNone /></a:pPr><a:r><a:rPr /><a:t>“The model identified the true drivers”</a:t></a:r></a:p></a:txBody></a:tc></a:tr><a:tr h="0"><a:tc><a:txBody><a:bodyPr /><a:lstStyle /><a:p><a:pPr lvl="0" indent="0" marL="0"><a:buNone /></a:pPr><a:r><a:rPr /><a:t>6</a:t></a:r></a:p></a:txBody></a:tc><a:tc><a:txBody><a:bodyPr /><a:lstStyle /><a:p><a:pPr lvl="0" indent="0" marL="0"><a:buNone /></a:pPr><a:r><a:rPr /><a:t>The decision threshold</a:t></a:r></a:p></a:txBody></a:tc><a:tc><a:txBody><a:bodyPr /><a:lstStyle /><a:p><a:pPr lvl="0" indent="0" marL="0"><a:buNone /></a:pPr><a:r><a:rPr /><a:t>“It is 97% accurate”</a:t></a:r></a:p></a:txBody></a:tc></a:tr></a:tbl></a:graphicData></a:graphic></p:graphicFrame></p:spTree></p:cSld></p:sld>
-</file>
-
-<file path=ppt/slides/slide26.xml><?xml version="1.0" encoding="UTF-8"?><p:sld xmlns:a="http://schemas.openxmlformats.org/drawingml/2006/main" xmlns:r="http://schemas.openxmlformats.org/officeDocument/2006/relationships" xmlns:p="http://schemas.openxmlformats.org/presentationml/2006/main"><p:cSld><p:spTree><p:nvGrpSpPr><p:cNvPr id="1" name="" /><p:cNvGrpSpPr /><p:nvPr /></p:nvGrpSpPr><p:grpSpPr><a:xfrm><a:off x="0" y="0" /><a:ext cx="0" cy="0" /><a:chOff x="0" y="0" /><a:chExt cx="0" cy="0" /></a:xfrm></p:grpSpPr><p:sp><p:nvSpPr><p:cNvPr id="2" name="Title 1" /><p:cNvSpPr><a:spLocks noGrp="1" /></p:cNvSpPr><p:nvPr><p:ph type="title" /></p:nvPr></p:nvSpPr><p:spPr /><p:txBody><a:bodyPr /><a:lstStyle /><a:p><a:pPr lvl="0" indent="0" marL="0"><a:buNone /></a:pPr><a:r><a:rPr /><a:t>Continued</a:t></a:r></a:p></p:txBody></p:sp><p:graphicFrame><p:nvGraphicFramePr><p:cNvPr id="6" name="Content Placeholder 5" /><p:cNvGraphicFramePr><a:graphicFrameLocks noGrp="1" /></p:cNvGraphicFramePr><p:nvPr><p:ph idx="1" /></p:nvPr></p:nvGraphicFramePr><p:xfrm><a:off x="457200" y="1193800" /><a:ext cx="8229600" cy="3390900" /></p:xfrm><a:graphic><a:graphicData uri="http://schemas.openxmlformats.org/drawingml/2006/table"><a:tbl><a:tblPr firstRow="1" bandRow="1"><a:tableStyleId>{5C22544A-7EE6-4342-B048-85BDC9FD1C3A}</a:tableStyleId></a:tblPr><a:tblGrid><a:gridCol w="2743200" /><a:gridCol w="2743200" /><a:gridCol w="2743200" /></a:tblGrid><a:tr h="0"><a:tc><a:txBody><a:bodyPr /><a:lstStyle /><a:p><a:pPr lvl="0" indent="0" marL="0"><a:buNone /></a:pPr><a:r><a:rPr /><a:t>Session</a:t></a:r></a:p></a:txBody><a:tcPr /></a:tc><a:tc><a:txBody><a:bodyPr /><a:lstStyle /><a:p><a:pPr lvl="0" indent="0" marL="0"><a:buNone /></a:pPr><a:r><a:rPr /><a:t>The dial</a:t></a:r></a:p></a:txBody><a:tcPr /></a:tc><a:tc><a:txBody><a:bodyPr /><a:lstStyle /><a:p><a:pPr lvl="0" indent="0" marL="0"><a:buNone /></a:pPr><a:r><a:rPr /><a:t>The self-deception</a:t></a:r></a:p></a:txBody><a:tcPr /></a:tc></a:tr><a:tr h="0"><a:tc><a:txBody><a:bodyPr /><a:lstStyle /><a:p><a:pPr lvl="0" indent="0" marL="0"><a:buNone /></a:pPr><a:r><a:rPr /><a:t>7</a:t></a:r></a:p></a:txBody></a:tc><a:tc><a:txBody><a:bodyPr /><a:lstStyle /><a:p><a:pPr lvl="0" indent="0" marL="0"><a:buNone /></a:pPr><a:r><a:rPr /><a:t>Depth, learning rate, </a:t></a:r><a14:m><m:oMath xmlns:m="http://schemas.openxmlformats.org/officeDocument/2006/math"><m:r><m:t>m</m:t></m:r></m:oMath></a14:m></a:p></a:txBody></a:tc><a:tc><a:txBody><a:bodyPr /><a:lstStyle /><a:p><a:pPr lvl="0" indent="0" marL="0"><a:buNone /></a:pPr><a:r><a:rPr /><a:t>“The important feature is the cause”</a:t></a:r></a:p></a:txBody></a:tc></a:tr><a:tr h="0"><a:tc><a:txBody><a:bodyPr /><a:lstStyle /><a:p><a:pPr lvl="0" indent="0" marL="0"><a:buNone /></a:pPr><a:r><a:rPr /><a:t>8</a:t></a:r></a:p></a:txBody></a:tc><a:tc><a:txBody><a:bodyPr /><a:lstStyle /><a:p><a:pPr lvl="0" indent="0" marL="0"><a:buNone /></a:pPr><a:r><a:rPr /><a:t>The number of factors</a:t></a:r></a:p></a:txBody></a:tc><a:tc><a:txBody><a:bodyPr /><a:lstStyle /><a:p><a:pPr lvl="0" indent="0" marL="0"><a:buNone /></a:pPr><a:r><a:rPr /><a:t>“I extracted factors, then backtested”</a:t></a:r></a:p></a:txBody></a:tc></a:tr><a:tr h="0"><a:tc><a:txBody><a:bodyPr /><a:lstStyle /><a:p><a:pPr lvl="0" indent="0" marL="0"><a:buNone /></a:pPr><a:r><a:rPr /><a:t>9</a:t></a:r></a:p></a:txBody></a:tc><a:tc><a:txBody><a:bodyPr /><a:lstStyle /><a:p><a:pPr lvl="0" indent="0" marL="0"><a:buNone /></a:pPr><a14:m><m:oMath xmlns:m="http://schemas.openxmlformats.org/officeDocument/2006/math"><m:r><m:t>k</m:t></m:r></m:oMath></a14:m><a:r><a:rPr /><a:t>, and the representation of text</a:t></a:r></a:p></a:txBody></a:tc><a:tc><a:txBody><a:bodyPr /><a:lstStyle /><a:p><a:pPr lvl="0" indent="0" marL="0"><a:buNone /></a:pPr><a:r><a:rPr /><a:t>“The algorithm found clusters, so clusters exist”</a:t></a:r></a:p></a:txBody></a:tc></a:tr><a:tr h="0"><a:tc><a:txBody><a:bodyPr /><a:lstStyle /><a:p><a:pPr lvl="0" indent="0" marL="0"><a:buNone /></a:pPr><a:r><a:rPr b="1" /><a:t>10</a:t></a:r></a:p></a:txBody></a:tc><a:tc><a:txBody><a:bodyPr /><a:lstStyle /><a:p><a:pPr lvl="0" indent="0" marL="0"><a:buNone /></a:pPr><a:r><a:rPr b="1" /><a:t>Nothing — identification is not a dial</a:t></a:r></a:p></a:txBody></a:tc><a:tc><a:txBody><a:bodyPr /><a:lstStyle /><a:p><a:pPr lvl="0" indent="0" marL="0"><a:buNone /></a:pPr><a:r><a:rPr /><a:t>“A better predictor is a better policy guide”</a:t></a:r></a:p></a:txBody></a:tc></a:tr><a:tr h="0"><a:tc><a:txBody><a:bodyPr /><a:lstStyle /><a:p><a:pPr lvl="0" indent="0" marL="0"><a:buNone /></a:pPr><a:r><a:rPr /><a:t>11</a:t></a:r></a:p></a:txBody></a:tc><a:tc><a:txBody><a:bodyPr /><a:lstStyle /><a:p><a:pPr lvl="0" indent="0" marL="0"><a:buNone /></a:pPr><a:r><a:rPr /><a:t>The monitoring threshold</a:t></a:r></a:p></a:txBody></a:tc><a:tc><a:txBody><a:bodyPr /><a:lstStyle /><a:p><a:pPr lvl="0" indent="0" marL="0"><a:buNone /></a:pPr><a:r><a:rPr /><a:t>“It worked last year”</a:t></a:r></a:p></a:txBody></a:tc></a:tr></a:tbl></a:graphicData></a:graphic></p:graphicFrame></p:spTree></p:cSld></p:sld>
+<file path=ppt/slides/slide26.xml><?xml version="1.0" encoding="utf-8"?>
+<p:sld xmlns:a="http://schemas.openxmlformats.org/drawingml/2006/main" xmlns:r="http://schemas.openxmlformats.org/officeDocument/2006/relationships" xmlns:p="http://schemas.openxmlformats.org/presentationml/2006/main">
+  <p:cSld>
+    <p:spTree>
+      <p:nvGrpSpPr>
+        <p:cNvPr id="1" name=""/>
+        <p:cNvGrpSpPr/>
+        <p:nvPr/>
+      </p:nvGrpSpPr>
+      <p:grpSpPr>
+        <a:xfrm>
+          <a:off x="0" y="0"/>
+          <a:ext cx="0" cy="0"/>
+          <a:chOff x="0" y="0"/>
+          <a:chExt cx="0" cy="0"/>
+        </a:xfrm>
+      </p:grpSpPr>
+      <p:sp>
+        <p:nvSpPr>
+          <p:cNvPr id="2" name="Title 1"/>
+          <p:cNvSpPr>
+            <a:spLocks noGrp="1"/>
+          </p:cNvSpPr>
+          <p:nvPr>
+            <p:ph type="title"/>
+          </p:nvPr>
+        </p:nvSpPr>
+        <p:spPr/>
+        <p:txBody>
+          <a:bodyPr/>
+          <a:lstStyle/>
+          <a:p>
+            <a:pPr lvl="0" indent="0" marL="0">
+              <a:buNone/>
+            </a:pPr>
+            <a:r>
+              <a:rPr/>
+              <a:t>Stated precisely for this course</a:t>
+            </a:r>
+          </a:p>
+        </p:txBody>
+      </p:sp>
+      <p:sp>
+        <p:nvSpPr>
+          <p:cNvPr id="3" name="Content Placeholder 2"/>
+          <p:cNvSpPr>
+            <a:spLocks noGrp="1"/>
+          </p:cNvSpPr>
+          <p:nvPr>
+            <p:ph idx="1"/>
+          </p:nvPr>
+        </p:nvSpPr>
+        <p:spPr/>
+        <p:txBody>
+          <a:bodyPr/>
+          <a:lstStyle/>
+          <a:p>
+            <a:pPr lvl="0" indent="0" marL="1270000">
+              <a:buNone/>
+            </a:pPr>
+            <a:r>
+              <a:rPr sz="2000"/>
+              <a:t>When a measure becomes a target, the relationship the model learned between measure and outcome is </a:t>
+            </a:r>
+            <a:r>
+              <a:rPr sz="2000" b="1"/>
+              <a:t>exactly the relationship agents have an incentive to break</a:t>
+            </a:r>
+            <a:r>
+              <a:rPr sz="2000"/>
+              <a:t>.</a:t>
+            </a:r>
+          </a:p>
+          <a:p>
+            <a:pPr lvl="0" indent="0" marL="0">
+              <a:buNone/>
+            </a:pPr>
+            <a:r>
+              <a:rPr/>
+              <a:t>A credit-scoring feature that predicts default only until applicants learn it is used is not a stable feature. It was never a feature of the world; it was a feature of the world </a:t>
+            </a:r>
+            <a:r>
+              <a:rPr i="1"/>
+              <a:t>before your model existed in it</a:t>
+            </a:r>
+            <a:r>
+              <a:rPr/>
+              <a:t>.</a:t>
+            </a:r>
+          </a:p>
+          <a:p>
+            <a:pPr lvl="0" indent="0" marL="0">
+              <a:buNone/>
+            </a:pPr>
+            <a:r>
+              <a:rPr/>
+              <a:t>This is a </a:t>
+            </a:r>
+            <a:r>
+              <a:rPr b="1"/>
+              <a:t>causal</a:t>
+            </a:r>
+            <a:r>
+              <a:rPr/>
+              <a:t> problem (Session 10), not a monitoring problem. No amount of retraining solves it, because every retrain teaches the agents faster.</a:t>
+            </a:r>
+          </a:p>
+        </p:txBody>
+      </p:sp>
+    </p:spTree>
+  </p:cSld>
+</p:sld>
 </file>
 
 <file path=ppt/slides/slide27.xml><?xml version="1.0" encoding="utf-8"?>
@@ -5160,7 +8144,12 @@
             <p:ph type="title"/>
           </p:nvPr>
         </p:nvSpPr>
-        <p:spPr/>
+        <p:spPr>
+          <a:xfrm>
+            <a:off x="722313" y="1850000"/>
+            <a:ext cx="7772400" cy="1300000"/>
+          </a:xfrm>
+        </p:spPr>
         <p:txBody>
           <a:bodyPr/>
           <a:lstStyle/>
@@ -5170,41 +8159,7 @@
             </a:pPr>
             <a:r>
               <a:rPr/>
-              <a:t>The exception that defines the course</a:t>
-            </a:r>
-          </a:p>
-        </p:txBody>
-      </p:sp>
-      <p:sp>
-        <p:nvSpPr>
-          <p:cNvPr id="3" name="Content Placeholder 2"/>
-          <p:cNvSpPr>
-            <a:spLocks noGrp="1"/>
-          </p:cNvSpPr>
-          <p:nvPr>
-            <p:ph idx="1"/>
-          </p:nvPr>
-        </p:nvSpPr>
-        <p:spPr/>
-        <p:txBody>
-          <a:bodyPr/>
-          <a:lstStyle/>
-          <a:p>
-            <a:pPr lvl="0" indent="0" marL="1270000">
-              <a:buNone/>
-            </a:pPr>
-            <a:r>
-              <a:rPr sz="2000" b="1"/>
-              <a:t>No tuning parameter buys you identification.</a:t>
-            </a:r>
-          </a:p>
-          <a:p>
-            <a:pPr lvl="0" indent="0" marL="0">
-              <a:buNone/>
-            </a:pPr>
-            <a:r>
-              <a:rPr/>
-              <a:t>Session 10 is the one week with nothing to tune. That is not an omission — it is the point.</a:t>
+              <a:t>5 · Governance</a:t>
             </a:r>
           </a:p>
         </p:txBody>
@@ -5241,12 +8196,7 @@
             <p:ph type="title"/>
           </p:nvPr>
         </p:nvSpPr>
-        <p:spPr>
-          <a:xfrm>
-            <a:off x="722313" y="1850000"/>
-            <a:ext cx="7772400" cy="1300000"/>
-          </a:xfrm>
-        </p:spPr>
+        <p:spPr/>
         <p:txBody>
           <a:bodyPr/>
           <a:lstStyle/>
@@ -5256,11 +8206,130 @@
             </a:pPr>
             <a:r>
               <a:rPr/>
-              <a:t>11.6 Returning to </a:t>
+              <a:t>What a deployable model comes with</a:t>
+            </a:r>
+          </a:p>
+        </p:txBody>
+      </p:sp>
+      <p:sp>
+        <p:nvSpPr>
+          <p:cNvPr id="3" name="Content Placeholder 2"/>
+          <p:cNvSpPr>
+            <a:spLocks noGrp="1"/>
+          </p:cNvSpPr>
+          <p:nvPr>
+            <p:ph idx="1"/>
+          </p:nvPr>
+        </p:nvSpPr>
+        <p:spPr/>
+        <p:txBody>
+          <a:bodyPr/>
+          <a:lstStyle/>
+          <a:p>
+            <a:pPr lvl="0" indent="-342900" marL="342900">
+              <a:buAutoNum type="arabicPeriod"/>
+            </a:pPr>
+            <a:r>
+              <a:rPr b="1"/>
+              <a:t>Intended use, and out-of-scope uses</a:t>
+            </a:r>
+            <a:r>
+              <a:rPr/>
+              <a:t> — what decision, and what it must </a:t>
             </a:r>
             <a:r>
               <a:rPr i="1"/>
-              <a:t>Europe 2031</a:t>
+              <a:t>not</a:t>
+            </a:r>
+            <a:r>
+              <a:rPr/>
+              <a:t> be used for</a:t>
+            </a:r>
+          </a:p>
+          <a:p>
+            <a:pPr lvl="0" indent="-342900" marL="342900">
+              <a:buAutoNum type="arabicPeriod"/>
+            </a:pPr>
+            <a:r>
+              <a:rPr b="1"/>
+              <a:t>Data lineage</a:t>
+            </a:r>
+            <a:r>
+              <a:rPr/>
+              <a:t> — sources, vintages, collection dates, licences, quality issues, checksums</a:t>
+            </a:r>
+          </a:p>
+          <a:p>
+            <a:pPr lvl="0" indent="-342900" marL="342900">
+              <a:buAutoNum type="arabicPeriod"/>
+            </a:pPr>
+            <a:r>
+              <a:rPr b="1"/>
+              <a:t>Preprocessing</a:t>
+            </a:r>
+            <a:r>
+              <a:rPr/>
+              <a:t> — every transformation, in order, with the code</a:t>
+            </a:r>
+          </a:p>
+          <a:p>
+            <a:pPr lvl="0" indent="-342900" marL="342900">
+              <a:buAutoNum type="arabicPeriod"/>
+            </a:pPr>
+            <a:r>
+              <a:rPr b="1"/>
+              <a:t>Validation</a:t>
+            </a:r>
+            <a:r>
+              <a:rPr/>
+              <a:t> — the design, </a:t>
+            </a:r>
+            <a:r>
+              <a:rPr i="1"/>
+              <a:t>why it matches deployment</a:t>
+            </a:r>
+            <a:r>
+              <a:rPr/>
+              <a:t>, metrics, benchmark, subgroup performance</a:t>
+            </a:r>
+          </a:p>
+          <a:p>
+            <a:pPr lvl="0" indent="-342900" marL="342900">
+              <a:buAutoNum type="arabicPeriod"/>
+            </a:pPr>
+            <a:r>
+              <a:rPr b="1"/>
+              <a:t>Limitations</a:t>
+            </a:r>
+            <a:r>
+              <a:rPr/>
+              <a:t> — where it performs worst, who is under-represented, what is load-bearing</a:t>
+            </a:r>
+          </a:p>
+          <a:p>
+            <a:pPr lvl="0" indent="-342900" marL="342900">
+              <a:buAutoNum type="arabicPeriod"/>
+            </a:pPr>
+            <a:r>
+              <a:rPr b="1"/>
+              <a:t>Monitoring plan</a:t>
+            </a:r>
+            <a:r>
+              <a:rPr/>
+              <a:t> — which quantities, at what frequency, and what triggers review</a:t>
+            </a:r>
+          </a:p>
+          <a:p>
+            <a:pPr lvl="0" indent="-342900" marL="342900">
+              <a:buAutoNum type="arabicPeriod"/>
+            </a:pPr>
+            <a:r>
+              <a:rPr b="1"/>
+              <a:t>Ownership</a:t>
+            </a:r>
+            <a:r>
+              <a:rPr/>
+              <a:t> — who is accountable, and the retirement criterion</a:t>
             </a:r>
           </a:p>
         </p:txBody>
@@ -5307,7 +8376,7 @@
             </a:pPr>
             <a:r>
               <a:rPr/>
-              <a:t>Sharper questions than in week one</a:t>
+              <a:t>This is not bureaucracy</a:t>
             </a:r>
           </a:p>
         </p:txBody>
@@ -5332,53 +8401,56 @@
             </a:pPr>
             <a:r>
               <a:rPr/>
-              <a:t>The scenario’s numbers were introduced in Session 01 as </a:t>
+              <a:t>Sections </a:t>
             </a:r>
             <a:r>
               <a:rPr b="1"/>
-              <a:t>parameters of a narrative</a:t>
+              <a:t>5</a:t>
             </a:r>
             <a:r>
               <a:rPr/>
-              <a:t>. You can now interrogate them.</a:t>
+              <a:t> and </a:t>
+            </a:r>
+            <a:r>
+              <a:rPr b="1"/>
+              <a:t>6</a:t>
+            </a:r>
+            <a:r>
+              <a:rPr/>
+              <a:t> are where the intellectual content of this entire course finally has to be written down for somebody else.</a:t>
             </a:r>
           </a:p>
           <a:p>
             <a:pPr lvl="0"/>
             <a:r>
               <a:rPr/>
-              <a:t>What would a </a:t>
-            </a:r>
-            <a:r>
-              <a:rPr b="1"/>
-              <a:t>factor model</a:t>
-            </a:r>
+              <a:t>Section 5 is Sessions 03, 06 and 10: what is load-bearing, and where does it fail</a:t>
+            </a:r>
+          </a:p>
+          <a:p>
+            <a:pPr lvl="0"/>
             <a:r>
               <a:rPr/>
-              <a:t> (S08) say about how many independent dimensions “technological capacity” actually has? Is compute one factor, or a proxy for several?</a:t>
-            </a:r>
-          </a:p>
-          <a:p>
-            <a:pPr lvl="0"/>
+              <a:t>Section 6 is Sessions 04, 08 and 11: what would tell you it has stopped working</a:t>
+            </a:r>
+          </a:p>
+          <a:p>
+            <a:pPr lvl="0" indent="0" marL="0">
+              <a:buNone/>
+            </a:pPr>
             <a:r>
               <a:rPr/>
-              <a:t>Is the labour-displacement mechanism a </a:t>
-            </a:r>
-            <a:r>
-              <a:rPr b="1"/>
-              <a:t>prediction</a:t>
+              <a:t>If you cannot fill in sections 5 and 6, you do not understand your own model well enough to deploy it. Template: </a:t>
+            </a:r>
+            <a:r>
+              <a:rPr>
+                <a:latin typeface="Courier"/>
+              </a:rPr>
+              <a:t>02-practice/governance-file-template.md</a:t>
             </a:r>
             <a:r>
               <a:rPr/>
-              <a:t> or a </a:t>
-            </a:r>
-            <a:r>
-              <a:rPr b="1"/>
-              <a:t>causal</a:t>
-            </a:r>
-            <a:r>
-              <a:rPr/>
-              <a:t> claim (S10)? Which would you need to justify the narrative’s policy responses?</a:t>
+              <a:t>.</a:t>
             </a:r>
           </a:p>
         </p:txBody>
@@ -5425,7 +8497,7 @@
             </a:pPr>
             <a:r>
               <a:rPr/>
-              <a:t>These slides follow the notes</a:t>
+              <a:t>Outline</a:t>
             </a:r>
           </a:p>
         </p:txBody>
@@ -5465,7 +8537,7 @@
                       </a:pPr>
                       <a:r>
                         <a:rPr b="1"/>
-                        <a:t>11.1</a:t>
+                        <a:t>1</a:t>
                       </a:r>
                     </a:p>
                   </a:txBody>
@@ -5480,7 +8552,7 @@
                       </a:pPr>
                       <a:r>
                         <a:rPr/>
-                        <a:t>Backtesting time-dependent models</a:t>
+                        <a:t>Backtesting when time matters</a:t>
                       </a:r>
                     </a:p>
                   </a:txBody>
@@ -5497,7 +8569,7 @@
                       </a:pPr>
                       <a:r>
                         <a:rPr b="1"/>
-                        <a:t>11.2</a:t>
+                        <a:t>2</a:t>
                       </a:r>
                     </a:p>
                   </a:txBody>
@@ -5529,7 +8601,7 @@
                       </a:pPr>
                       <a:r>
                         <a:rPr b="1"/>
-                        <a:t>11.3</a:t>
+                        <a:t>3</a:t>
                       </a:r>
                     </a:p>
                   </a:txBody>
@@ -5561,7 +8633,39 @@
                       </a:pPr>
                       <a:r>
                         <a:rPr b="1"/>
-                        <a:t>11.4</a:t>
+                        <a:t>4</a:t>
+                      </a:r>
+                    </a:p>
+                  </a:txBody>
+                </a:tc>
+                <a:tc>
+                  <a:txBody>
+                    <a:bodyPr/>
+                    <a:lstStyle/>
+                    <a:p>
+                      <a:pPr lvl="0" indent="0" marL="0">
+                        <a:buNone/>
+                      </a:pPr>
+                      <a:r>
+                        <a:rPr/>
+                        <a:t>Goodhart’s law, stated precisely</a:t>
+                      </a:r>
+                    </a:p>
+                  </a:txBody>
+                </a:tc>
+              </a:tr>
+              <a:tr h="0">
+                <a:tc>
+                  <a:txBody>
+                    <a:bodyPr/>
+                    <a:lstStyle/>
+                    <a:p>
+                      <a:pPr lvl="0" indent="0" marL="0">
+                        <a:buNone/>
+                      </a:pPr>
+                      <a:r>
+                        <a:rPr b="1"/>
+                        <a:t>5</a:t>
                       </a:r>
                     </a:p>
                   </a:txBody>
@@ -5593,7 +8697,7 @@
                       </a:pPr>
                       <a:r>
                         <a:rPr b="1"/>
-                        <a:t>11.5</a:t>
+                        <a:t>6</a:t>
                       </a:r>
                     </a:p>
                   </a:txBody>
@@ -5608,7 +8712,7 @@
                       </a:pPr>
                       <a:r>
                         <a:rPr/>
-                        <a:t>The arc, in one table</a:t>
+                        <a:t>The arc of the course</a:t>
                       </a:r>
                     </a:p>
                   </a:txBody>
@@ -5625,7 +8729,7 @@
                       </a:pPr>
                       <a:r>
                         <a:rPr b="1"/>
-                        <a:t>11.6</a:t>
+                        <a:t>7</a:t>
                       </a:r>
                     </a:p>
                   </a:txBody>
@@ -5640,7 +8744,7 @@
                       </a:pPr>
                       <a:r>
                         <a:rPr/>
-                        <a:t>Returning to </a:t>
+                        <a:t>Back to </a:t>
                       </a:r>
                       <a:r>
                         <a:rPr i="1"/>
@@ -5696,7 +8800,304 @@
             </a:pPr>
             <a:r>
               <a:rPr/>
-              <a:t>And two more</a:t>
+              <a:t>A monitoring plan is a threshold, not a hope</a:t>
+            </a:r>
+          </a:p>
+        </p:txBody>
+      </p:sp>
+      <p:pic>
+        <p:nvPicPr>
+          <p:cNvPr descr="slides_files/figure-pptx/cell-9-output-1.png" id="0" name="Picture 1"/>
+          <p:cNvPicPr>
+            <a:picLocks noGrp="1" noChangeAspect="1"/>
+          </p:cNvPicPr>
+          <p:nvPr/>
+        </p:nvPicPr>
+        <p:blipFill>
+          <a:blip r:embed="rId2"/>
+          <a:stretch>
+            <a:fillRect/>
+          </a:stretch>
+        </p:blipFill>
+        <p:spPr bwMode="auto">
+          <a:xfrm>
+            <a:off x="533400" y="1193800"/>
+            <a:ext cx="8077200" cy="3390900"/>
+          </a:xfrm>
+          <a:prstGeom prst="rect">
+            <a:avLst/>
+          </a:prstGeom>
+          <a:noFill/>
+          <a:ln w="9525">
+            <a:noFill/>
+            <a:headEnd/>
+            <a:tailEnd/>
+          </a:ln>
+        </p:spPr>
+      </p:pic>
+    </p:spTree>
+  </p:cSld>
+</p:sld>
+</file>
+
+<file path=ppt/slides/slide31.xml><?xml version="1.0" encoding="utf-8"?>
+<p:sld xmlns:a="http://schemas.openxmlformats.org/drawingml/2006/main" xmlns:r="http://schemas.openxmlformats.org/officeDocument/2006/relationships" xmlns:p="http://schemas.openxmlformats.org/presentationml/2006/main">
+  <p:cSld>
+    <p:spTree>
+      <p:nvGrpSpPr>
+        <p:cNvPr id="1" name=""/>
+        <p:cNvGrpSpPr/>
+        <p:nvPr/>
+      </p:nvGrpSpPr>
+      <p:grpSpPr>
+        <a:xfrm>
+          <a:off x="0" y="0"/>
+          <a:ext cx="0" cy="0"/>
+          <a:chOff x="0" y="0"/>
+          <a:chExt cx="0" cy="0"/>
+        </a:xfrm>
+      </p:grpSpPr>
+      <p:sp>
+        <p:nvSpPr>
+          <p:cNvPr id="3" name="Content Placeholder 2"/>
+          <p:cNvSpPr>
+            <a:spLocks noGrp="1"/>
+          </p:cNvSpPr>
+          <p:nvPr>
+            <p:ph idx="1"/>
+          </p:nvPr>
+        </p:nvSpPr>
+        <p:spPr/>
+        <p:txBody>
+          <a:bodyPr/>
+          <a:lstStyle/>
+          <a:p>
+            <a:pPr lvl="0" indent="0" marL="0">
+              <a:buNone/>
+            </a:pPr>
+            <a:r>
+              <a:rPr/>
+              <a:t>Write the threshold </a:t>
+            </a:r>
+            <a:r>
+              <a:rPr b="1"/>
+              <a:t>before</a:t>
+            </a:r>
+            <a:r>
+              <a:rPr/>
+              <a:t> deployment, while you still have no stake in the answer. A threshold chosen after the model degrades is not a threshold; it is a negotiation.</a:t>
+            </a:r>
+          </a:p>
+        </p:txBody>
+      </p:sp>
+    </p:spTree>
+  </p:cSld>
+</p:sld>
+</file>
+
+<file path=ppt/slides/slide32.xml><?xml version="1.0" encoding="utf-8"?>
+<p:sld xmlns:a="http://schemas.openxmlformats.org/drawingml/2006/main" xmlns:r="http://schemas.openxmlformats.org/officeDocument/2006/relationships" xmlns:p="http://schemas.openxmlformats.org/presentationml/2006/main">
+  <p:cSld>
+    <p:spTree>
+      <p:nvGrpSpPr>
+        <p:cNvPr id="1" name=""/>
+        <p:cNvGrpSpPr/>
+        <p:nvPr/>
+      </p:nvGrpSpPr>
+      <p:grpSpPr>
+        <a:xfrm>
+          <a:off x="0" y="0"/>
+          <a:ext cx="0" cy="0"/>
+          <a:chOff x="0" y="0"/>
+          <a:chExt cx="0" cy="0"/>
+        </a:xfrm>
+      </p:grpSpPr>
+      <p:sp>
+        <p:nvSpPr>
+          <p:cNvPr id="2" name="Title 1"/>
+          <p:cNvSpPr>
+            <a:spLocks noGrp="1"/>
+          </p:cNvSpPr>
+          <p:nvPr>
+            <p:ph type="title"/>
+          </p:nvPr>
+        </p:nvSpPr>
+        <p:spPr>
+          <a:xfrm>
+            <a:off x="722313" y="1850000"/>
+            <a:ext cx="7772400" cy="1300000"/>
+          </a:xfrm>
+        </p:spPr>
+        <p:txBody>
+          <a:bodyPr/>
+          <a:lstStyle/>
+          <a:p>
+            <a:pPr lvl="0" indent="0" marL="0">
+              <a:buNone/>
+            </a:pPr>
+            <a:r>
+              <a:rPr/>
+              <a:t>6 · The arc</a:t>
+            </a:r>
+          </a:p>
+        </p:txBody>
+      </p:sp>
+    </p:spTree>
+  </p:cSld>
+</p:sld>
+</file>
+
+<file path=ppt/slides/slide33.xml><?xml version="1.0" encoding="UTF-8"?><p:sld xmlns:a="http://schemas.openxmlformats.org/drawingml/2006/main" xmlns:r="http://schemas.openxmlformats.org/officeDocument/2006/relationships" xmlns:p="http://schemas.openxmlformats.org/presentationml/2006/main"><p:cSld><p:spTree><p:nvGrpSpPr><p:cNvPr id="1" name="" /><p:cNvGrpSpPr /><p:nvPr /></p:nvGrpSpPr><p:grpSpPr><a:xfrm><a:off x="0" y="0" /><a:ext cx="0" cy="0" /><a:chOff x="0" y="0" /><a:chExt cx="0" cy="0" /></a:xfrm></p:grpSpPr><p:sp><p:nvSpPr><p:cNvPr id="2" name="Title 1" /><p:cNvSpPr><a:spLocks noGrp="1" /></p:cNvSpPr><p:nvPr><p:ph type="title" /></p:nvPr></p:nvSpPr><p:spPr /><p:txBody><a:bodyPr /><a:lstStyle /><a:p><a:pPr lvl="0" indent="0" marL="0"><a:buNone /></a:pPr><a:r><a:rPr /><a:t>Every session, one dial and one self-deception</a:t></a:r></a:p></p:txBody></p:sp><p:graphicFrame><p:nvGraphicFramePr><p:cNvPr id="6" name="Content Placeholder 5" /><p:cNvGraphicFramePr><a:graphicFrameLocks noGrp="1" /></p:cNvGraphicFramePr><p:nvPr><p:ph idx="1" /></p:nvPr></p:nvGraphicFramePr><p:xfrm><a:off x="457200" y="1193800" /><a:ext cx="8229600" cy="3390900" /></p:xfrm><a:graphic><a:graphicData uri="http://schemas.openxmlformats.org/drawingml/2006/table"><a:tbl><a:tblPr firstRow="1" bandRow="1"><a:tableStyleId>{5C22544A-7EE6-4342-B048-85BDC9FD1C3A}</a:tableStyleId></a:tblPr><a:tblGrid><a:gridCol w="2743200" /><a:gridCol w="2743200" /><a:gridCol w="2743200" /></a:tblGrid><a:tr h="0"><a:tc><a:txBody><a:bodyPr /><a:lstStyle /><a:p><a:pPr lvl="0" indent="0" marL="0"><a:buNone /></a:pPr><a:r><a:rPr /><a:t>Session</a:t></a:r></a:p></a:txBody><a:tcPr /></a:tc><a:tc><a:txBody><a:bodyPr /><a:lstStyle /><a:p><a:pPr lvl="0" indent="0" marL="0"><a:buNone /></a:pPr><a:r><a:rPr /><a:t>The dial</a:t></a:r></a:p></a:txBody><a:tcPr /></a:tc><a:tc><a:txBody><a:bodyPr /><a:lstStyle /><a:p><a:pPr lvl="0" indent="0" marL="0"><a:buNone /></a:pPr><a:r><a:rPr /><a:t>The self-deception it prevents</a:t></a:r></a:p></a:txBody><a:tcPr /></a:tc></a:tr><a:tr h="0"><a:tc><a:txBody><a:bodyPr /><a:lstStyle /><a:p><a:pPr lvl="0" indent="0" marL="0"><a:buNone /></a:pPr><a:r><a:rPr b="1" /><a:t>02–03</a:t></a:r></a:p></a:txBody></a:tc><a:tc><a:txBody><a:bodyPr /><a:lstStyle /><a:p><a:pPr lvl="0" indent="0" marL="0"><a:buNone /></a:pPr><a:r><a:rPr /><a:t>which variables enter, how errors are modelled</a:t></a:r></a:p></a:txBody></a:tc><a:tc><a:txBody><a:bodyPr /><a:lstStyle /><a:p><a:pPr lvl="0" indent="0" marL="0"><a:buNone /></a:pPr><a:r><a:rPr /><a:t>“my standard errors are right because the software printed them”</a:t></a:r></a:p></a:txBody></a:tc></a:tr><a:tr h="0"><a:tc><a:txBody><a:bodyPr /><a:lstStyle /><a:p><a:pPr lvl="0" indent="0" marL="0"><a:buNone /></a:pPr><a:r><a:rPr b="1" /><a:t>04</a:t></a:r></a:p></a:txBody></a:tc><a:tc><a:txBody><a:bodyPr /><a:lstStyle /><a:p><a:pPr lvl="0" indent="0" marL="0"><a:buNone /></a:pPr><a:r><a:rPr /><a:t>complexity, via CV</a:t></a:r></a:p></a:txBody></a:tc><a:tc><a:txBody><a:bodyPr /><a:lstStyle /><a:p><a:pPr lvl="0" indent="0" marL="0"><a:buNone /></a:pPr><a:r><a:rPr /><a:t>“it fits the data well”</a:t></a:r></a:p></a:txBody></a:tc></a:tr><a:tr h="0"><a:tc><a:txBody><a:bodyPr /><a:lstStyle /><a:p><a:pPr lvl="0" indent="0" marL="0"><a:buNone /></a:pPr><a:r><a:rPr b="1" /><a:t>05</a:t></a:r></a:p></a:txBody></a:tc><a:tc><a:txBody><a:bodyPr /><a:lstStyle /><a:p><a:pPr lvl="0" indent="0" marL="0"><a:buNone /></a:pPr><a14:m><m:oMath xmlns:m="http://schemas.openxmlformats.org/officeDocument/2006/math"><m:r><m:t>λ</m:t></m:r></m:oMath></a14:m><a:r><a:rPr /><a:t> and </a:t></a:r><a14:m><m:oMath xmlns:m="http://schemas.openxmlformats.org/officeDocument/2006/math"><m:r><m:t>α</m:t></m:r></m:oMath></a14:m></a:p></a:txBody></a:tc><a:tc><a:txBody><a:bodyPr /><a:lstStyle /><a:p><a:pPr lvl="0" indent="0" marL="0"><a:buNone /></a:pPr><a:r><a:rPr /><a:t>“the model identified the true drivers”</a:t></a:r></a:p></a:txBody></a:tc></a:tr><a:tr h="0"><a:tc><a:txBody><a:bodyPr /><a:lstStyle /><a:p><a:pPr lvl="0" indent="0" marL="0"><a:buNone /></a:pPr><a:r><a:rPr b="1" /><a:t>06</a:t></a:r></a:p></a:txBody></a:tc><a:tc><a:txBody><a:bodyPr /><a:lstStyle /><a:p><a:pPr lvl="0" indent="0" marL="0"><a:buNone /></a:pPr><a:r><a:rPr /><a:t>the decision threshold</a:t></a:r></a:p></a:txBody></a:tc><a:tc><a:txBody><a:bodyPr /><a:lstStyle /><a:p><a:pPr lvl="0" indent="0" marL="0"><a:buNone /></a:pPr><a:r><a:rPr /><a:t>“it is 97% accurate”</a:t></a:r></a:p></a:txBody></a:tc></a:tr><a:tr h="0"><a:tc><a:txBody><a:bodyPr /><a:lstStyle /><a:p><a:pPr lvl="0" indent="0" marL="0"><a:buNone /></a:pPr><a:r><a:rPr b="1" /><a:t>07</a:t></a:r></a:p></a:txBody></a:tc><a:tc><a:txBody><a:bodyPr /><a:lstStyle /><a:p><a:pPr lvl="0" indent="0" marL="0"><a:buNone /></a:pPr><a:r><a:rPr /><a:t>depth, learning rate, </a:t></a:r><a14:m><m:oMath xmlns:m="http://schemas.openxmlformats.org/officeDocument/2006/math"><m:r><m:t>m</m:t></m:r></m:oMath></a14:m></a:p></a:txBody></a:tc><a:tc><a:txBody><a:bodyPr /><a:lstStyle /><a:p><a:pPr lvl="0" indent="0" marL="0"><a:buNone /></a:pPr><a:r><a:rPr /><a:t>“the important feature is the cause”</a:t></a:r></a:p></a:txBody></a:tc></a:tr></a:tbl></a:graphicData></a:graphic></p:graphicFrame></p:spTree></p:cSld></p:sld>
+</file>
+
+<file path=ppt/slides/slide34.xml><?xml version="1.0" encoding="UTF-8"?><p:sld xmlns:a="http://schemas.openxmlformats.org/drawingml/2006/main" xmlns:r="http://schemas.openxmlformats.org/officeDocument/2006/relationships" xmlns:p="http://schemas.openxmlformats.org/presentationml/2006/main"><p:cSld><p:spTree><p:nvGrpSpPr><p:cNvPr id="1" name="" /><p:cNvGrpSpPr /><p:nvPr /></p:nvGrpSpPr><p:grpSpPr><a:xfrm><a:off x="0" y="0" /><a:ext cx="0" cy="0" /><a:chOff x="0" y="0" /><a:chExt cx="0" cy="0" /></a:xfrm></p:grpSpPr><p:sp><p:nvSpPr><p:cNvPr id="2" name="Title 1" /><p:cNvSpPr><a:spLocks noGrp="1" /></p:cNvSpPr><p:nvPr><p:ph type="title" /></p:nvPr></p:nvSpPr><p:spPr /><p:txBody><a:bodyPr /><a:lstStyle /><a:p><a:pPr lvl="0" indent="0" marL="0"><a:buNone /></a:pPr><a:r><a:rPr /><a:t>…continued</a:t></a:r></a:p></p:txBody></p:sp><p:graphicFrame><p:nvGraphicFramePr><p:cNvPr id="6" name="Content Placeholder 5" /><p:cNvGraphicFramePr><a:graphicFrameLocks noGrp="1" /></p:cNvGraphicFramePr><p:nvPr><p:ph idx="1" /></p:nvPr></p:nvGraphicFramePr><p:xfrm><a:off x="457200" y="1193800" /><a:ext cx="8229600" cy="3390900" /></p:xfrm><a:graphic><a:graphicData uri="http://schemas.openxmlformats.org/drawingml/2006/table"><a:tbl><a:tblPr firstRow="1" bandRow="1"><a:tableStyleId>{5C22544A-7EE6-4342-B048-85BDC9FD1C3A}</a:tableStyleId></a:tblPr><a:tblGrid><a:gridCol w="2743200" /><a:gridCol w="2743200" /><a:gridCol w="2743200" /></a:tblGrid><a:tr h="0"><a:tc><a:txBody><a:bodyPr /><a:lstStyle /><a:p><a:pPr lvl="0" indent="0" marL="0"><a:buNone /></a:pPr><a:r><a:rPr /><a:t>Session</a:t></a:r></a:p></a:txBody><a:tcPr /></a:tc><a:tc><a:txBody><a:bodyPr /><a:lstStyle /><a:p><a:pPr lvl="0" indent="0" marL="0"><a:buNone /></a:pPr><a:r><a:rPr /><a:t>The dial</a:t></a:r></a:p></a:txBody><a:tcPr /></a:tc><a:tc><a:txBody><a:bodyPr /><a:lstStyle /><a:p><a:pPr lvl="0" indent="0" marL="0"><a:buNone /></a:pPr><a:r><a:rPr /><a:t>The self-deception it prevents</a:t></a:r></a:p></a:txBody><a:tcPr /></a:tc></a:tr><a:tr h="0"><a:tc><a:txBody><a:bodyPr /><a:lstStyle /><a:p><a:pPr lvl="0" indent="0" marL="0"><a:buNone /></a:pPr><a:r><a:rPr b="1" /><a:t>08</a:t></a:r></a:p></a:txBody></a:tc><a:tc><a:txBody><a:bodyPr /><a:lstStyle /><a:p><a:pPr lvl="0" indent="0" marL="0"><a:buNone /></a:pPr><a:r><a:rPr /><a:t>the number of factors</a:t></a:r></a:p></a:txBody></a:tc><a:tc><a:txBody><a:bodyPr /><a:lstStyle /><a:p><a:pPr lvl="0" indent="0" marL="0"><a:buNone /></a:pPr><a:r><a:rPr /><a:t>“I extracted factors, then backtested”</a:t></a:r></a:p></a:txBody></a:tc></a:tr><a:tr h="0"><a:tc><a:txBody><a:bodyPr /><a:lstStyle /><a:p><a:pPr lvl="0" indent="0" marL="0"><a:buNone /></a:pPr><a:r><a:rPr b="1" /><a:t>09</a:t></a:r></a:p></a:txBody></a:tc><a:tc><a:txBody><a:bodyPr /><a:lstStyle /><a:p><a:pPr lvl="0" indent="0" marL="0"><a:buNone /></a:pPr><a14:m><m:oMath xmlns:m="http://schemas.openxmlformats.org/officeDocument/2006/math"><m:r><m:t>k</m:t></m:r></m:oMath></a14:m><a:r><a:rPr /><a:t>, and the text representation</a:t></a:r></a:p></a:txBody></a:tc><a:tc><a:txBody><a:bodyPr /><a:lstStyle /><a:p><a:pPr lvl="0" indent="0" marL="0"><a:buNone /></a:pPr><a:r><a:rPr /><a:t>“the algorithm found clusters, so clusters exist”</a:t></a:r></a:p></a:txBody></a:tc></a:tr><a:tr h="0"><a:tc><a:txBody><a:bodyPr /><a:lstStyle /><a:p><a:pPr lvl="0" indent="0" marL="0"><a:buNone /></a:pPr><a:r><a:rPr b="1" /><a:t>10</a:t></a:r></a:p></a:txBody></a:tc><a:tc><a:txBody><a:bodyPr /><a:lstStyle /><a:p><a:pPr lvl="0" indent="0" marL="0"><a:buNone /></a:pPr><a:r><a:rPr b="1" /><a:t>nothing</a:t></a:r><a:r><a:rPr /><a:t> — identification is not a dial</a:t></a:r></a:p></a:txBody></a:tc><a:tc><a:txBody><a:bodyPr /><a:lstStyle /><a:p><a:pPr lvl="0" indent="0" marL="0"><a:buNone /></a:pPr><a:r><a:rPr /><a:t>“a better predictor is a better policy guide”</a:t></a:r></a:p></a:txBody></a:tc></a:tr><a:tr h="0"><a:tc><a:txBody><a:bodyPr /><a:lstStyle /><a:p><a:pPr lvl="0" indent="0" marL="0"><a:buNone /></a:pPr><a:r><a:rPr b="1" /><a:t>11</a:t></a:r></a:p></a:txBody></a:tc><a:tc><a:txBody><a:bodyPr /><a:lstStyle /><a:p><a:pPr lvl="0" indent="0" marL="0"><a:buNone /></a:pPr><a:r><a:rPr /><a:t>the monitoring threshold</a:t></a:r></a:p></a:txBody></a:tc><a:tc><a:txBody><a:bodyPr /><a:lstStyle /><a:p><a:pPr lvl="0" indent="0" marL="0"><a:buNone /></a:pPr><a:r><a:rPr /><a:t>“it worked last year”</a:t></a:r></a:p></a:txBody></a:tc></a:tr></a:tbl></a:graphicData></a:graphic></p:graphicFrame></p:spTree></p:cSld></p:sld>
+</file>
+
+<file path=ppt/slides/slide35.xml><?xml version="1.0" encoding="utf-8"?>
+<p:sld xmlns:a="http://schemas.openxmlformats.org/drawingml/2006/main" xmlns:r="http://schemas.openxmlformats.org/officeDocument/2006/relationships" xmlns:p="http://schemas.openxmlformats.org/presentationml/2006/main">
+  <p:cSld>
+    <p:spTree>
+      <p:nvGrpSpPr>
+        <p:cNvPr id="1" name=""/>
+        <p:cNvGrpSpPr/>
+        <p:nvPr/>
+      </p:nvGrpSpPr>
+      <p:grpSpPr>
+        <a:xfrm>
+          <a:off x="0" y="0"/>
+          <a:ext cx="0" cy="0"/>
+          <a:chOff x="0" y="0"/>
+          <a:chExt cx="0" cy="0"/>
+        </a:xfrm>
+      </p:grpSpPr>
+      <p:sp>
+        <p:nvSpPr>
+          <p:cNvPr id="3" name="Content Placeholder 2"/>
+          <p:cNvSpPr>
+            <a:spLocks noGrp="1"/>
+          </p:cNvSpPr>
+          <p:nvPr>
+            <p:ph idx="1"/>
+          </p:nvPr>
+        </p:nvSpPr>
+        <p:spPr/>
+        <p:txBody>
+          <a:bodyPr/>
+          <a:lstStyle/>
+          <a:p>
+            <a:pPr lvl="0" indent="0" marL="0">
+              <a:buNone/>
+            </a:pPr>
+            <a:r>
+              <a:rPr/>
+              <a:t>Session 10 is the exception that defines the course: </a:t>
+            </a:r>
+            <a:r>
+              <a:rPr b="1"/>
+              <a:t>no tuning parameter buys you identification.</a:t>
+            </a:r>
+          </a:p>
+        </p:txBody>
+      </p:sp>
+    </p:spTree>
+  </p:cSld>
+</p:sld>
+</file>
+
+<file path=ppt/slides/slide36.xml><?xml version="1.0" encoding="utf-8"?>
+<p:sld xmlns:a="http://schemas.openxmlformats.org/drawingml/2006/main" xmlns:r="http://schemas.openxmlformats.org/officeDocument/2006/relationships" xmlns:p="http://schemas.openxmlformats.org/presentationml/2006/main">
+  <p:cSld>
+    <p:spTree>
+      <p:nvGrpSpPr>
+        <p:cNvPr id="1" name=""/>
+        <p:cNvGrpSpPr/>
+        <p:nvPr/>
+      </p:nvGrpSpPr>
+      <p:grpSpPr>
+        <a:xfrm>
+          <a:off x="0" y="0"/>
+          <a:ext cx="0" cy="0"/>
+          <a:chOff x="0" y="0"/>
+          <a:chExt cx="0" cy="0"/>
+        </a:xfrm>
+      </p:grpSpPr>
+      <p:sp>
+        <p:nvSpPr>
+          <p:cNvPr id="2" name="Title 1"/>
+          <p:cNvSpPr>
+            <a:spLocks noGrp="1"/>
+          </p:cNvSpPr>
+          <p:nvPr>
+            <p:ph type="title"/>
+          </p:nvPr>
+        </p:nvSpPr>
+        <p:spPr>
+          <a:xfrm>
+            <a:off x="722313" y="1850000"/>
+            <a:ext cx="7772400" cy="1300000"/>
+          </a:xfrm>
+        </p:spPr>
+        <p:txBody>
+          <a:bodyPr/>
+          <a:lstStyle/>
+          <a:p>
+            <a:pPr lvl="0" indent="0" marL="0">
+              <a:buNone/>
+            </a:pPr>
+            <a:r>
+              <a:rPr/>
+              <a:t>7 · Back to </a:t>
+            </a:r>
+            <a:r>
+              <a:rPr i="1"/>
+              <a:t>Europe 2031</a:t>
+            </a:r>
+          </a:p>
+        </p:txBody>
+      </p:sp>
+    </p:spTree>
+  </p:cSld>
+</p:sld>
+</file>
+
+<file path=ppt/slides/slide37.xml><?xml version="1.0" encoding="utf-8"?>
+<p:sld xmlns:a="http://schemas.openxmlformats.org/drawingml/2006/main" xmlns:r="http://schemas.openxmlformats.org/officeDocument/2006/relationships" xmlns:p="http://schemas.openxmlformats.org/presentationml/2006/main">
+  <p:cSld>
+    <p:spTree>
+      <p:nvGrpSpPr>
+        <p:cNvPr id="1" name=""/>
+        <p:cNvGrpSpPr/>
+        <p:nvPr/>
+      </p:nvGrpSpPr>
+      <p:grpSpPr>
+        <a:xfrm>
+          <a:off x="0" y="0"/>
+          <a:ext cx="0" cy="0"/>
+          <a:chOff x="0" y="0"/>
+          <a:chExt cx="0" cy="0"/>
+        </a:xfrm>
+      </p:grpSpPr>
+      <p:sp>
+        <p:nvSpPr>
+          <p:cNvPr id="2" name="Title 1"/>
+          <p:cNvSpPr>
+            <a:spLocks noGrp="1"/>
+          </p:cNvSpPr>
+          <p:nvPr>
+            <p:ph type="title"/>
+          </p:nvPr>
+        </p:nvSpPr>
+        <p:spPr/>
+        <p:txBody>
+          <a:bodyPr/>
+          <a:lstStyle/>
+          <a:p>
+            <a:pPr lvl="0" indent="0" marL="0">
+              <a:buNone/>
+            </a:pPr>
+            <a:r>
+              <a:rPr/>
+              <a:t>The same numbers, sharper questions</a:t>
             </a:r>
           </a:p>
         </p:txBody>
@@ -5718,14 +9119,69 @@
               <a:bodyPr/>
               <a:lstStyle/>
               <a:p>
+                <a:pPr lvl="0" indent="0" marL="0">
+                  <a:buNone/>
+                </a:pPr>
+                <a:r>
+                  <a:rPr/>
+                  <a:t>In Session 01 the scenario’s figures — a US:EU compute ratio near 12.2 in 2031, a buildout ratio near 15.7 — were </a:t>
+                </a:r>
+                <a:r>
+                  <a:rPr b="1"/>
+                  <a:t>parameters of a narrative</a:t>
+                </a:r>
+                <a:r>
+                  <a:rPr/>
+                  <a:t>. Now ask:</a:t>
+                </a:r>
+              </a:p>
+              <a:p>
                 <a:pPr lvl="0"/>
                 <a:r>
                   <a:rPr/>
-                  <a:t>Its policy menu implies </a:t>
+                  <a:t>What would a </a:t>
                 </a:r>
                 <a:r>
                   <a:rPr b="1"/>
-                  <a:t>decisions under cost asymmetry</a:t>
+                  <a:t>factor model</a:t>
+                </a:r>
+                <a:r>
+                  <a:rPr/>
+                  <a:t> (S08) say about how many independent dimensions “technological capacity” has? Is compute one factor, or a proxy for several?</a:t>
+                </a:r>
+              </a:p>
+              <a:p>
+                <a:pPr lvl="0"/>
+                <a:r>
+                  <a:rPr/>
+                  <a:t>Is the labour-displacement mechanism a </a:t>
+                </a:r>
+                <a:r>
+                  <a:rPr b="1"/>
+                  <a:t>prediction</a:t>
+                </a:r>
+                <a:r>
+                  <a:rPr/>
+                  <a:t> or a </a:t>
+                </a:r>
+                <a:r>
+                  <a:rPr b="1"/>
+                  <a:t>causal claim</a:t>
+                </a:r>
+                <a:r>
+                  <a:rPr/>
+                  <a:t> (S10)? Which one does the policy menu require?</a:t>
+                </a:r>
+              </a:p>
+              <a:p>
+                <a:pPr lvl="0"/>
+                <a:r>
+                  <a:rPr/>
+                  <a:t>The policy menu implies decisions under </a:t>
+                </a:r>
+                <a:r>
+                  <a:rPr b="1"/>
+                  <a:t>cost asymmetry</a:t>
                 </a:r>
                 <a:r>
                   <a:rPr/>
@@ -5775,38 +9231,41 @@
                 </a14:m>
                 <a:r>
                   <a:rPr/>
-                  <a:t> for acting on a false signal of European decline versus missing a true one (S06)?</a:t>
+                  <a:t>, and where does that put </a:t>
+                </a:r>
+                <a14:m>
+                  <m:oMath xmlns:m="http://schemas.openxmlformats.org/officeDocument/2006/math">
+                    <m:sSup>
+                      <m:e>
+                        <m:r>
+                          <m:t>τ</m:t>
+                        </m:r>
+                      </m:e>
+                      <m:sup>
+                        <m:r>
+                          <m:rPr>
+                            <m:sty m:val="p"/>
+                          </m:rPr>
+                          <m:t>⋆</m:t>
+                        </m:r>
+                      </m:sup>
+                    </m:sSup>
+                  </m:oMath>
+                </a14:m>
+                <a:r>
+                  <a:rPr/>
+                  <a:t> (S06)?</a:t>
                 </a:r>
               </a:p>
               <a:p>
-                <a:pPr lvl="0"/>
+                <a:pPr lvl="0" indent="0" marL="0">
+                  <a:buNone/>
+                </a:pPr>
                 <a:r>
-                  <a:rPr/>
-                  <a:t>Its indicators would be </a:t>
-                </a:r>
-                <a:r>
-                  <a:rPr b="1"/>
-                  <a:t>monitored over years</a:t>
-                </a:r>
-                <a:r>
-                  <a:rPr/>
-                  <a:t>. Which are vulnerable to </a:t>
-                </a:r>
-                <a:r>
-                  <a:rPr b="1"/>
-                  <a:t>Goodhart</a:t>
-                </a:r>
-                <a:r>
-                  <a:rPr/>
-                  <a:t>, and which to </a:t>
-                </a:r>
-                <a:r>
-                  <a:rPr b="1"/>
-                  <a:t>concept drift</a:t>
-                </a:r>
-                <a:r>
-                  <a:rPr/>
-                  <a:t> (S11)?</a:t>
+                  <a:rPr>
+                    <a:hlinkClick r:id="rId2"/>
+                  </a:rPr>
+                  <a:t>europe2031.ai</a:t>
                 </a:r>
               </a:p>
             </p:txBody>
@@ -5818,7 +9277,7 @@
 </p:sld>
 </file>
 
-<file path=ppt/slides/slide31.xml><?xml version="1.0" encoding="utf-8"?>
+<file path=ppt/slides/slide38.xml><?xml version="1.0" encoding="utf-8"?>
 <p:sld xmlns:a="http://schemas.openxmlformats.org/drawingml/2006/main" xmlns:r="http://schemas.openxmlformats.org/officeDocument/2006/relationships" xmlns:p="http://schemas.openxmlformats.org/presentationml/2006/main">
   <p:cSld>
     <p:spTree>
@@ -5855,7 +9314,7 @@
             </a:pPr>
             <a:r>
               <a:rPr/>
-              <a:t>Why a stress test</a:t>
+              <a:t>What has changed since Session 01</a:t>
             </a:r>
           </a:p>
         </p:txBody>
@@ -5875,16 +9334,12 @@
           <a:bodyPr/>
           <a:lstStyle/>
           <a:p>
-            <a:pPr lvl="0" indent="0" marL="1270000">
+            <a:pPr lvl="0" indent="0" marL="0">
               <a:buNone/>
             </a:pPr>
             <a:r>
-              <a:rPr sz="2000"/>
-              <a:t>The purpose of a stress test is not to be right. It is to make you specify </a:t>
-            </a:r>
-            <a:r>
-              <a:rPr sz="2000" b="1"/>
-              <a:t>what you would need to know.</a:t>
+              <a:rPr/>
+              <a:t>Nothing about the scenario. Everything about what you are able to ask of it.</a:t>
             </a:r>
           </a:p>
           <a:p>
@@ -5893,7 +9348,15 @@
             </a:pPr>
             <a:r>
               <a:rPr/>
-              <a:t>That is also the purpose of a model — and it is what you will be examined on next week.</a:t>
+              <a:t>That is the deliverable of this course: not a list of methods, but the reflex of asking </a:t>
+            </a:r>
+            <a:r>
+              <a:rPr i="1"/>
+              <a:t>what would have to be true</a:t>
+            </a:r>
+            <a:r>
+              <a:rPr/>
+              <a:t> — and knowing which of Sessions 02 to 11 answers it.</a:t>
             </a:r>
           </a:p>
         </p:txBody>
@@ -5903,7 +9366,7 @@
 </p:sld>
 </file>
 
-<file path=ppt/slides/slide32.xml><?xml version="1.0" encoding="utf-8"?>
+<file path=ppt/slides/slide39.xml><?xml version="1.0" encoding="utf-8"?>
 <p:sld xmlns:a="http://schemas.openxmlformats.org/drawingml/2006/main" xmlns:r="http://schemas.openxmlformats.org/officeDocument/2006/relationships" xmlns:p="http://schemas.openxmlformats.org/presentationml/2006/main">
   <p:cSld>
     <p:spTree>
@@ -5945,242 +9408,7 @@
             </a:pPr>
             <a:r>
               <a:rPr/>
-              <a:t>The practice</a:t>
-            </a:r>
-          </a:p>
-        </p:txBody>
-      </p:sp>
-    </p:spTree>
-  </p:cSld>
-</p:sld>
-</file>
-
-<file path=ppt/slides/slide33.xml><?xml version="1.0" encoding="utf-8"?>
-<p:sld xmlns:a="http://schemas.openxmlformats.org/drawingml/2006/main" xmlns:r="http://schemas.openxmlformats.org/officeDocument/2006/relationships" xmlns:p="http://schemas.openxmlformats.org/presentationml/2006/main">
-  <p:cSld>
-    <p:spTree>
-      <p:nvGrpSpPr>
-        <p:cNvPr id="1" name=""/>
-        <p:cNvGrpSpPr/>
-        <p:nvPr/>
-      </p:nvGrpSpPr>
-      <p:grpSpPr>
-        <a:xfrm>
-          <a:off x="0" y="0"/>
-          <a:ext cx="0" cy="0"/>
-          <a:chOff x="0" y="0"/>
-          <a:chExt cx="0" cy="0"/>
-        </a:xfrm>
-      </p:grpSpPr>
-      <p:sp>
-        <p:nvSpPr>
-          <p:cNvPr id="2" name="Title 1"/>
-          <p:cNvSpPr>
-            <a:spLocks noGrp="1"/>
-          </p:cNvSpPr>
-          <p:nvPr>
-            <p:ph type="title"/>
-          </p:nvPr>
-        </p:nvSpPr>
-        <p:spPr/>
-        <p:txBody>
-          <a:bodyPr/>
-          <a:lstStyle/>
-          <a:p>
-            <a:pPr lvl="0" indent="0" marL="0">
-              <a:buNone/>
-            </a:pPr>
-            <a:r>
-              <a:rPr/>
-              <a:t>What you do</a:t>
-            </a:r>
-          </a:p>
-        </p:txBody>
-      </p:sp>
-      <p:sp>
-        <p:nvSpPr>
-          <p:cNvPr id="3" name="Content Placeholder 2"/>
-          <p:cNvSpPr>
-            <a:spLocks noGrp="1"/>
-          </p:cNvSpPr>
-          <p:nvPr>
-            <p:ph idx="1"/>
-          </p:nvPr>
-        </p:nvSpPr>
-        <p:spPr/>
-        <p:txBody>
-          <a:bodyPr/>
-          <a:lstStyle/>
-          <a:p>
-            <a:pPr lvl="0" indent="-342900" marL="342900">
-              <a:buAutoNum type="arabicPeriod"/>
-            </a:pPr>
-            <a:r>
-              <a:rPr/>
-              <a:t>Backtest </a:t>
-            </a:r>
-            <a:r>
-              <a:rPr b="1"/>
-              <a:t>your project’s</a:t>
-            </a:r>
-            <a:r>
-              <a:rPr/>
-              <a:t> model with a rolling origin, at the deployment horizon</a:t>
-            </a:r>
-          </a:p>
-          <a:p>
-            <a:pPr lvl="0" indent="-342900" marL="342900">
-              <a:buAutoNum type="arabicPeriod"/>
-            </a:pPr>
-            <a:r>
-              <a:rPr/>
-              <a:t>Plot error by period and find the break</a:t>
-            </a:r>
-          </a:p>
-          <a:p>
-            <a:pPr lvl="0" indent="-342900" marL="342900">
-              <a:buAutoNum type="arabicPeriod"/>
-            </a:pPr>
-            <a:r>
-              <a:rPr/>
-              <a:t>Run the era classifier; report the AUC and read it</a:t>
-            </a:r>
-          </a:p>
-          <a:p>
-            <a:pPr lvl="0" indent="-342900" marL="342900">
-              <a:buAutoNum type="arabicPeriod"/>
-            </a:pPr>
-            <a:r>
-              <a:rPr/>
-              <a:t>Complete the governance file, including a </a:t>
-            </a:r>
-            <a:r>
-              <a:rPr b="1"/>
-              <a:t>numeric</a:t>
-            </a:r>
-            <a:r>
-              <a:rPr/>
-              <a:t> retirement trigger</a:t>
-            </a:r>
-          </a:p>
-          <a:p>
-            <a:pPr lvl="0" indent="0" marL="0">
-              <a:buNone/>
-            </a:pPr>
-            <a:r>
-              <a:rPr/>
-              <a:t>Every preprocessing step inside the loop — including factor extraction.</a:t>
-            </a:r>
-          </a:p>
-        </p:txBody>
-      </p:sp>
-    </p:spTree>
-  </p:cSld>
-</p:sld>
-</file>
-
-<file path=ppt/slides/slide34.xml><?xml version="1.0" encoding="utf-8"?>
-<p:sld xmlns:a="http://schemas.openxmlformats.org/drawingml/2006/main" xmlns:r="http://schemas.openxmlformats.org/officeDocument/2006/relationships" xmlns:p="http://schemas.openxmlformats.org/presentationml/2006/main">
-  <p:cSld>
-    <p:spTree>
-      <p:nvGrpSpPr>
-        <p:cNvPr id="1" name=""/>
-        <p:cNvGrpSpPr/>
-        <p:nvPr/>
-      </p:nvGrpSpPr>
-      <p:grpSpPr>
-        <a:xfrm>
-          <a:off x="0" y="0"/>
-          <a:ext cx="0" cy="0"/>
-          <a:chOff x="0" y="0"/>
-          <a:chExt cx="0" cy="0"/>
-        </a:xfrm>
-      </p:grpSpPr>
-      <p:sp>
-        <p:nvSpPr>
-          <p:cNvPr id="2" name="Title 1"/>
-          <p:cNvSpPr>
-            <a:spLocks noGrp="1"/>
-          </p:cNvSpPr>
-          <p:nvPr>
-            <p:ph type="title"/>
-          </p:nvPr>
-        </p:nvSpPr>
-        <p:spPr/>
-        <p:txBody>
-          <a:bodyPr/>
-          <a:lstStyle/>
-          <a:p>
-            <a:pPr lvl="0" indent="0" marL="0">
-              <a:buNone/>
-            </a:pPr>
-            <a:r>
-              <a:rPr/>
-              <a:t>The two-minute report</a:t>
-            </a:r>
-          </a:p>
-        </p:txBody>
-      </p:sp>
-      <p:sp>
-        <p:nvSpPr>
-          <p:cNvPr id="3" name="Content Placeholder 2"/>
-          <p:cNvSpPr>
-            <a:spLocks noGrp="1"/>
-          </p:cNvSpPr>
-          <p:nvPr>
-            <p:ph idx="1"/>
-          </p:nvPr>
-        </p:nvSpPr>
-        <p:spPr/>
-        <p:txBody>
-          <a:bodyPr/>
-          <a:lstStyle/>
-          <a:p>
-            <a:pPr lvl="0" indent="-342900" marL="342900">
-              <a:buAutoNum type="arabicPeriod"/>
-            </a:pPr>
-            <a:r>
-              <a:rPr b="1"/>
-              <a:t>What I did</a:t>
-            </a:r>
-            <a:r>
-              <a:rPr/>
-              <a:t> — the backtest design, the window, the horizon</a:t>
-            </a:r>
-          </a:p>
-          <a:p>
-            <a:pPr lvl="0" indent="-342900" marL="342900">
-              <a:buAutoNum type="arabicPeriod"/>
-            </a:pPr>
-            <a:r>
-              <a:rPr b="1"/>
-              <a:t>The number</a:t>
-            </a:r>
-            <a:r>
-              <a:rPr/>
-              <a:t> — error against a hard benchmark, with a DM statement</a:t>
-            </a:r>
-          </a:p>
-          <a:p>
-            <a:pPr lvl="0" indent="-342900" marL="342900">
-              <a:buAutoNum type="arabicPeriod"/>
-            </a:pPr>
-            <a:r>
-              <a:rPr b="1"/>
-              <a:t>The catch</a:t>
-            </a:r>
-            <a:r>
-              <a:rPr/>
-              <a:t> — what would make you retire this model</a:t>
-            </a:r>
-          </a:p>
-          <a:p>
-            <a:pPr lvl="0" indent="0" marL="0">
-              <a:buNone/>
-            </a:pPr>
-            <a:r>
-              <a:rPr/>
-              <a:t>Session 12 is your defence. The governance file is what you will be asked about.</a:t>
+              <a:t>Takeaways</a:t>
             </a:r>
           </a:p>
         </p:txBody>
@@ -6209,12 +9437,12 @@
       </p:grpSpPr>
       <p:sp>
         <p:nvSpPr>
-          <p:cNvPr id="3" name="Content Placeholder 2"/>
-          <p:cNvSpPr>
-            <a:spLocks noGrp="1"/>
-          </p:cNvSpPr>
-          <p:nvPr>
-            <p:ph idx="1"/>
+          <p:cNvPr id="2" name="Title 1"/>
+          <p:cNvSpPr>
+            <a:spLocks noGrp="1"/>
+          </p:cNvSpPr>
+          <p:nvPr>
+            <p:ph type="title"/>
           </p:nvPr>
         </p:nvSpPr>
         <p:spPr/>
@@ -6227,7 +9455,399 @@
             </a:pPr>
             <a:r>
               <a:rPr/>
-              <a:t>Same numbering as </a:t>
+              <a:t>Learning objectives</a:t>
+            </a:r>
+          </a:p>
+        </p:txBody>
+      </p:sp>
+      <p:sp>
+        <p:nvSpPr>
+          <p:cNvPr id="3" name="Content Placeholder 2"/>
+          <p:cNvSpPr>
+            <a:spLocks noGrp="1"/>
+          </p:cNvSpPr>
+          <p:nvPr>
+            <p:ph idx="1"/>
+          </p:nvPr>
+        </p:nvSpPr>
+        <p:spPr/>
+        <p:txBody>
+          <a:bodyPr/>
+          <a:lstStyle/>
+          <a:p>
+            <a:pPr lvl="0"/>
+            <a:r>
+              <a:rPr/>
+              <a:t>Choose among expanding, fixed-window and </a:t>
+            </a:r>
+            <a:r>
+              <a:rPr b="1"/>
+              <a:t>purged blocked</a:t>
+            </a:r>
+            <a:r>
+              <a:rPr/>
+              <a:t> designs, and say why</a:t>
+            </a:r>
+          </a:p>
+          <a:p>
+            <a:pPr lvl="0"/>
+            <a:r>
+              <a:rPr/>
+              <a:t>Compare against a benchmark with a </a:t>
+            </a:r>
+            <a:r>
+              <a:rPr b="1"/>
+              <a:t>Diebold–Mariano</a:t>
+            </a:r>
+            <a:r>
+              <a:rPr/>
+              <a:t> statistic, not an eyeball</a:t>
+            </a:r>
+          </a:p>
+          <a:p>
+            <a:pPr lvl="0"/>
+            <a:r>
+              <a:rPr/>
+              <a:t>Detect covariate shift with a classifier — and interpret the number against a </a:t>
+            </a:r>
+            <a:r>
+              <a:rPr b="1"/>
+              <a:t>placebo</a:t>
+            </a:r>
+          </a:p>
+          <a:p>
+            <a:pPr lvl="0"/>
+            <a:r>
+              <a:rPr/>
+              <a:t>Distinguish covariate shift, label shift, concept drift and </a:t>
+            </a:r>
+            <a:r>
+              <a:rPr b="1"/>
+              <a:t>feedback</a:t>
+            </a:r>
+          </a:p>
+          <a:p>
+            <a:pPr lvl="0"/>
+            <a:r>
+              <a:rPr/>
+              <a:t>Write a governance file a competent successor could act on</a:t>
+            </a:r>
+          </a:p>
+        </p:txBody>
+      </p:sp>
+    </p:spTree>
+  </p:cSld>
+</p:sld>
+</file>
+
+<file path=ppt/slides/slide40.xml><?xml version="1.0" encoding="utf-8"?>
+<p:sld xmlns:a="http://schemas.openxmlformats.org/drawingml/2006/main" xmlns:r="http://schemas.openxmlformats.org/officeDocument/2006/relationships" xmlns:p="http://schemas.openxmlformats.org/presentationml/2006/main">
+  <p:cSld>
+    <p:spTree>
+      <p:nvGrpSpPr>
+        <p:cNvPr id="1" name=""/>
+        <p:cNvGrpSpPr/>
+        <p:nvPr/>
+      </p:nvGrpSpPr>
+      <p:grpSpPr>
+        <a:xfrm>
+          <a:off x="0" y="0"/>
+          <a:ext cx="0" cy="0"/>
+          <a:chOff x="0" y="0"/>
+          <a:chExt cx="0" cy="0"/>
+        </a:xfrm>
+      </p:grpSpPr>
+      <p:sp>
+        <p:nvSpPr>
+          <p:cNvPr id="2" name="Title 1"/>
+          <p:cNvSpPr>
+            <a:spLocks noGrp="1"/>
+          </p:cNvSpPr>
+          <p:nvPr>
+            <p:ph type="title"/>
+          </p:nvPr>
+        </p:nvSpPr>
+        <p:spPr/>
+        <p:txBody>
+          <a:bodyPr/>
+          <a:lstStyle/>
+          <a:p>
+            <a:pPr lvl="0" indent="0" marL="0">
+              <a:buNone/>
+            </a:pPr>
+            <a:r>
+              <a:rPr/>
+              <a:t>Key takeaways</a:t>
+            </a:r>
+          </a:p>
+        </p:txBody>
+      </p:sp>
+      <p:sp>
+        <p:nvSpPr>
+          <p:cNvPr id="3" name="Content Placeholder 2"/>
+          <p:cNvSpPr>
+            <a:spLocks noGrp="1"/>
+          </p:cNvSpPr>
+          <p:nvPr>
+            <p:ph idx="1"/>
+          </p:nvPr>
+        </p:nvSpPr>
+        <p:spPr/>
+        <p:txBody>
+          <a:bodyPr/>
+          <a:lstStyle/>
+          <a:p>
+            <a:pPr lvl="0" indent="-342900" marL="342900">
+              <a:buAutoNum type="arabicPeriod"/>
+            </a:pPr>
+            <a:r>
+              <a:rPr/>
+              <a:t>Match the backtest design to the deployment: expanding, fixed, or blocked with a purge</a:t>
+            </a:r>
+          </a:p>
+          <a:p>
+            <a:pPr lvl="0" indent="-342900" marL="342900">
+              <a:buAutoNum type="arabicPeriod"/>
+            </a:pPr>
+            <a:r>
+              <a:rPr/>
+              <a:t>Everything inside the loop. Including the unsupervised steps</a:t>
+            </a:r>
+          </a:p>
+          <a:p>
+            <a:pPr lvl="0" indent="-342900" marL="342900">
+              <a:buAutoNum type="arabicPeriod"/>
+            </a:pPr>
+            <a:r>
+              <a:rPr/>
+              <a:t>Benchmark against something hard, and test the difference with </a:t>
+            </a:r>
+            <a:r>
+              <a:rPr b="1"/>
+              <a:t>Diebold–Mariano</a:t>
+            </a:r>
+          </a:p>
+          <a:p>
+            <a:pPr lvl="0" indent="-342900" marL="342900">
+              <a:buAutoNum type="arabicPeriod"/>
+            </a:pPr>
+            <a:r>
+              <a:rPr/>
+              <a:t>Four kinds of shift, four different responses. Only one is detectable in advance</a:t>
+            </a:r>
+          </a:p>
+          <a:p>
+            <a:pPr lvl="0" indent="-342900" marL="342900">
+              <a:buAutoNum type="arabicPeriod"/>
+            </a:pPr>
+            <a:r>
+              <a:rPr/>
+              <a:t>A drift diagnostic needs a </a:t>
+            </a:r>
+            <a:r>
+              <a:rPr b="1"/>
+              <a:t>placebo</a:t>
+            </a:r>
+            <a:r>
+              <a:rPr/>
+              <a:t> to be interpretable</a:t>
+            </a:r>
+          </a:p>
+          <a:p>
+            <a:pPr lvl="0" indent="-342900" marL="342900">
+              <a:buAutoNum type="arabicPeriod"/>
+            </a:pPr>
+            <a:r>
+              <a:rPr/>
+              <a:t>Goodhart is causal, not statistical. Retraining makes it worse</a:t>
+            </a:r>
+          </a:p>
+          <a:p>
+            <a:pPr lvl="0" indent="-342900" marL="342900">
+              <a:buAutoNum type="arabicPeriod"/>
+            </a:pPr>
+            <a:r>
+              <a:rPr/>
+              <a:t>If you cannot write the limitations and the monitoring plan, do not deploy</a:t>
+            </a:r>
+          </a:p>
+        </p:txBody>
+      </p:sp>
+    </p:spTree>
+  </p:cSld>
+</p:sld>
+</file>
+
+<file path=ppt/slides/slide41.xml><?xml version="1.0" encoding="utf-8"?>
+<p:sld xmlns:a="http://schemas.openxmlformats.org/drawingml/2006/main" xmlns:r="http://schemas.openxmlformats.org/officeDocument/2006/relationships" xmlns:p="http://schemas.openxmlformats.org/presentationml/2006/main">
+  <p:cSld>
+    <p:spTree>
+      <p:nvGrpSpPr>
+        <p:cNvPr id="1" name=""/>
+        <p:cNvGrpSpPr/>
+        <p:nvPr/>
+      </p:nvGrpSpPr>
+      <p:grpSpPr>
+        <a:xfrm>
+          <a:off x="0" y="0"/>
+          <a:ext cx="0" cy="0"/>
+          <a:chOff x="0" y="0"/>
+          <a:chExt cx="0" cy="0"/>
+        </a:xfrm>
+      </p:grpSpPr>
+      <p:sp>
+        <p:nvSpPr>
+          <p:cNvPr id="2" name="Title 1"/>
+          <p:cNvSpPr>
+            <a:spLocks noGrp="1"/>
+          </p:cNvSpPr>
+          <p:nvPr>
+            <p:ph type="title"/>
+          </p:nvPr>
+        </p:nvSpPr>
+        <p:spPr/>
+        <p:txBody>
+          <a:bodyPr/>
+          <a:lstStyle/>
+          <a:p>
+            <a:pPr lvl="0" indent="0" marL="0">
+              <a:buNone/>
+            </a:pPr>
+            <a:r>
+              <a:rPr/>
+              <a:t>What loses marks</a:t>
+            </a:r>
+          </a:p>
+        </p:txBody>
+      </p:sp>
+      <p:sp>
+        <p:nvSpPr>
+          <p:cNvPr id="3" name="Content Placeholder 2"/>
+          <p:cNvSpPr>
+            <a:spLocks noGrp="1"/>
+          </p:cNvSpPr>
+          <p:nvPr>
+            <p:ph idx="1"/>
+          </p:nvPr>
+        </p:nvSpPr>
+        <p:spPr/>
+        <p:txBody>
+          <a:bodyPr/>
+          <a:lstStyle/>
+          <a:p>
+            <a:pPr lvl="0"/>
+            <a:r>
+              <a:rPr/>
+              <a:t>Random K-fold on time-ordered data — after eleven weeks, there is no excuse</a:t>
+            </a:r>
+          </a:p>
+          <a:p>
+            <a:pPr lvl="0"/>
+            <a:r>
+              <a:rPr/>
+              <a:t>Standardising or extracting factors outside the backtest loop</a:t>
+            </a:r>
+          </a:p>
+          <a:p>
+            <a:pPr lvl="0"/>
+            <a:r>
+              <a:rPr/>
+              <a:t>“Our model beats the benchmark” with no DM statistic</a:t>
+            </a:r>
+          </a:p>
+          <a:p>
+            <a:pPr lvl="0"/>
+            <a:r>
+              <a:rPr/>
+              <a:t>A drift AUC with no placebo cut</a:t>
+            </a:r>
+          </a:p>
+          <a:p>
+            <a:pPr lvl="0"/>
+            <a:r>
+              <a:rPr/>
+              <a:t>A governance file whose limitations section says “none identified”</a:t>
+            </a:r>
+          </a:p>
+        </p:txBody>
+      </p:sp>
+    </p:spTree>
+  </p:cSld>
+</p:sld>
+</file>
+
+<file path=ppt/slides/slide42.xml><?xml version="1.0" encoding="utf-8"?>
+<p:sld xmlns:a="http://schemas.openxmlformats.org/drawingml/2006/main" xmlns:r="http://schemas.openxmlformats.org/officeDocument/2006/relationships" xmlns:p="http://schemas.openxmlformats.org/presentationml/2006/main">
+  <p:cSld>
+    <p:spTree>
+      <p:nvGrpSpPr>
+        <p:cNvPr id="1" name=""/>
+        <p:cNvGrpSpPr/>
+        <p:nvPr/>
+      </p:nvGrpSpPr>
+      <p:grpSpPr>
+        <a:xfrm>
+          <a:off x="0" y="0"/>
+          <a:ext cx="0" cy="0"/>
+          <a:chOff x="0" y="0"/>
+          <a:chExt cx="0" cy="0"/>
+        </a:xfrm>
+      </p:grpSpPr>
+      <p:sp>
+        <p:nvSpPr>
+          <p:cNvPr id="2" name="Title 1"/>
+          <p:cNvSpPr>
+            <a:spLocks noGrp="1"/>
+          </p:cNvSpPr>
+          <p:nvPr>
+            <p:ph type="title"/>
+          </p:nvPr>
+        </p:nvSpPr>
+        <p:spPr/>
+        <p:txBody>
+          <a:bodyPr/>
+          <a:lstStyle/>
+          <a:p>
+            <a:pPr lvl="0" indent="0" marL="0">
+              <a:buNone/>
+            </a:pPr>
+            <a:r>
+              <a:rPr/>
+              <a:t>Now, the practice</a:t>
+            </a:r>
+          </a:p>
+        </p:txBody>
+      </p:sp>
+      <p:sp>
+        <p:nvSpPr>
+          <p:cNvPr id="3" name="Content Placeholder 2"/>
+          <p:cNvSpPr>
+            <a:spLocks noGrp="1"/>
+          </p:cNvSpPr>
+          <p:nvPr>
+            <p:ph idx="1"/>
+          </p:nvPr>
+        </p:nvSpPr>
+        <p:spPr/>
+        <p:txBody>
+          <a:bodyPr/>
+          <a:lstStyle/>
+          <a:p>
+            <a:pPr lvl="0" indent="0" marL="0">
+              <a:buNone/>
+            </a:pPr>
+            <a:r>
+              <a:rPr/>
+              <a:t>Ninety minutes, in your groups. You will backtest one forecast properly, test it against a hard benchmark, run a drift diagnostic with a placebo — and write the governance file. The governance file is the deliverable.</a:t>
+            </a:r>
+          </a:p>
+          <a:p>
+            <a:pPr lvl="0" indent="0" marL="0">
+              <a:buNone/>
+            </a:pPr>
+            <a:r>
+              <a:rPr/>
+              <a:t>Notes: </a:t>
             </a:r>
             <a:r>
               <a:rPr>
@@ -6238,7 +9858,14 @@
             </a:r>
             <a:r>
               <a:rPr/>
-              <a:t>.</a:t>
+              <a:t> · practice brief: </a:t>
+            </a:r>
+            <a:r>
+              <a:rPr>
+                <a:hlinkClick r:id="rId3"/>
+                <a:latin typeface="Courier"/>
+              </a:rPr>
+              <a:t>02-practice/README.md</a:t>
             </a:r>
           </a:p>
         </p:txBody>
@@ -6290,7 +9917,7 @@
             </a:pPr>
             <a:r>
               <a:rPr/>
-              <a:t>11.1 Backtesting</a:t>
+              <a:t>1 · Backtesting</a:t>
             </a:r>
           </a:p>
         </p:txBody>
@@ -6337,7 +9964,7 @@
             </a:pPr>
             <a:r>
               <a:rPr/>
-              <a:t>Three valid designs</a:t>
+              <a:t>Random K-fold is invalid here, and you know why</a:t>
             </a:r>
           </a:p>
         </p:txBody>
@@ -6364,14 +9991,23 @@
                 </a:pPr>
                 <a:r>
                   <a:rPr/>
-                  <a:t>Random K-fold CV is invalid whenever observations are ordered in time.</a:t>
+                  <a:t>Session 04 established it: when observations are ordered in time, a random fold puts the future in the training set. The error you measure is not the error you will get.</a:t>
+                </a:r>
+              </a:p>
+              <a:p>
+                <a:pPr lvl="0" indent="0" marL="0">
+                  <a:buNone/>
+                </a:pPr>
+                <a:r>
+                  <a:rPr/>
+                  <a:t>Three valid designs, each answering a different question:</a:t>
                 </a:r>
               </a:p>
               <a:p>
                 <a:pPr lvl="0"/>
                 <a:r>
                   <a:rPr b="1"/>
-                  <a:t>Rolling origin, expanding window</a:t>
+                  <a:t>Expanding window</a:t>
                 </a:r>
                 <a:r>
                   <a:rPr/>
@@ -6421,25 +10057,14 @@
                 </a14:m>
                 <a:r>
                   <a:rPr/>
-                  <a:t>, increment </a:t>
-                </a:r>
-                <a14:m>
-                  <m:oMath xmlns:m="http://schemas.openxmlformats.org/officeDocument/2006/math">
-                    <m:r>
-                      <m:t>t</m:t>
-                    </m:r>
-                  </m:oMath>
-                </a14:m>
-                <a:r>
-                  <a:rPr/>
-                  <a:t>. Uses all history; training size grows, so early and late errors are not comparable.</a:t>
+                  <a:t>. Uses all history; training size grows, so early and late errors are not comparable</a:t>
                 </a:r>
               </a:p>
               <a:p>
                 <a:pPr lvl="0"/>
                 <a:r>
                   <a:rPr b="1"/>
-                  <a:t>Rolling origin, fixed window</a:t>
+                  <a:t>Fixed window</a:t>
                 </a:r>
                 <a:r>
                   <a:rPr/>
@@ -6478,14 +10103,22 @@
                 </a14:m>
                 <a:r>
                   <a:rPr/>
-                  <a:t>. Constant training size; adapts to structural change; discards old information.</a:t>
+                  <a:t>. Constant size; </a:t>
+                </a:r>
+                <a:r>
+                  <a:rPr b="1"/>
+                  <a:t>adapts to structural change</a:t>
+                </a:r>
+                <a:r>
+                  <a:rPr/>
+                  <a:t>; discards old information</a:t>
                 </a:r>
               </a:p>
               <a:p>
                 <a:pPr lvl="0"/>
                 <a:r>
                   <a:rPr b="1"/>
-                  <a:t>Blocked CV with a purge and an embargo</a:t>
+                  <a:t>Blocked, with purge and embargo</a:t>
                 </a:r>
                 <a:r>
                   <a:rPr/>
@@ -6500,7 +10133,7 @@
                 </a14:m>
                 <a:r>
                   <a:rPr/>
-                  <a:t> observations between train and test.</a:t>
+                  <a:t> between train and test</a:t>
                 </a:r>
               </a:p>
             </p:txBody>
@@ -6549,61 +10182,41 @@
             </a:pPr>
             <a:r>
               <a:rPr/>
-              <a:t>Why the purge matters</a:t>
-            </a:r>
-          </a:p>
-        </p:txBody>
-      </p:sp>
-      <p:sp>
-        <p:nvSpPr>
-          <p:cNvPr id="3" name="Content Placeholder 2"/>
-          <p:cNvSpPr>
-            <a:spLocks noGrp="1"/>
-          </p:cNvSpPr>
-          <p:nvPr>
-            <p:ph idx="1"/>
-          </p:nvPr>
-        </p:nvSpPr>
-        <p:spPr/>
-        <p:txBody>
-          <a:bodyPr/>
-          <a:lstStyle/>
-          <a:p>
-            <a:pPr lvl="0" indent="0" marL="0">
-              <a:buNone/>
-            </a:pPr>
-            <a:r>
-              <a:rPr/>
-              <a:t>A gap prevents leakage through </a:t>
-            </a:r>
-            <a:r>
-              <a:rPr b="1"/>
-              <a:t>overlapping horizons</a:t>
-            </a:r>
-            <a:r>
-              <a:rPr/>
-              <a:t> or through </a:t>
-            </a:r>
-            <a:r>
-              <a:rPr b="1"/>
-              <a:t>serially correlated features</a:t>
-            </a:r>
-            <a:r>
-              <a:rPr/>
-              <a:t>.</a:t>
-            </a:r>
-          </a:p>
-          <a:p>
-            <a:pPr lvl="0" indent="0" marL="0">
-              <a:buNone/>
-            </a:pPr>
-            <a:r>
-              <a:rPr/>
-              <a:t>Essential whenever features are constructed from rolling windows — which, in macro work, is almost always.</a:t>
-            </a:r>
-          </a:p>
-        </p:txBody>
-      </p:sp>
+              <a:t>The three designs, drawn</a:t>
+            </a:r>
+          </a:p>
+        </p:txBody>
+      </p:sp>
+      <p:pic>
+        <p:nvPicPr>
+          <p:cNvPr descr="slides_files/figure-pptx/cell-3-output-1.png" id="0" name="Picture 1"/>
+          <p:cNvPicPr>
+            <a:picLocks noGrp="1" noChangeAspect="1"/>
+          </p:cNvPicPr>
+          <p:nvPr/>
+        </p:nvPicPr>
+        <p:blipFill>
+          <a:blip r:embed="rId2"/>
+          <a:stretch>
+            <a:fillRect/>
+          </a:stretch>
+        </p:blipFill>
+        <p:spPr bwMode="auto">
+          <a:xfrm>
+            <a:off x="812800" y="1193800"/>
+            <a:ext cx="7505700" cy="3390900"/>
+          </a:xfrm>
+          <a:prstGeom prst="rect">
+            <a:avLst/>
+          </a:prstGeom>
+          <a:noFill/>
+          <a:ln w="9525">
+            <a:noFill/>
+            <a:headEnd/>
+            <a:tailEnd/>
+          </a:ln>
+        </p:spPr>
+      </p:pic>
     </p:spTree>
   </p:cSld>
 </p:sld>
@@ -6628,12 +10241,12 @@
       </p:grpSpPr>
       <p:sp>
         <p:nvSpPr>
-          <p:cNvPr id="2" name="Title 1"/>
-          <p:cNvSpPr>
-            <a:spLocks noGrp="1"/>
-          </p:cNvSpPr>
-          <p:nvPr>
-            <p:ph type="title"/>
+          <p:cNvPr id="3" name="Content Placeholder 2"/>
+          <p:cNvSpPr>
+            <a:spLocks noGrp="1"/>
+          </p:cNvSpPr>
+          <p:nvPr>
+            <p:ph idx="1"/>
           </p:nvPr>
         </p:nvSpPr>
         <p:spPr/>
@@ -6646,61 +10259,7 @@
             </a:pPr>
             <a:r>
               <a:rPr/>
-              <a:t>Two rules violated constantly</a:t>
-            </a:r>
-          </a:p>
-        </p:txBody>
-      </p:sp>
-      <p:sp>
-        <p:nvSpPr>
-          <p:cNvPr id="3" name="Content Placeholder 2"/>
-          <p:cNvSpPr>
-            <a:spLocks noGrp="1"/>
-          </p:cNvSpPr>
-          <p:nvPr>
-            <p:ph idx="1"/>
-          </p:nvPr>
-        </p:nvSpPr>
-        <p:spPr/>
-        <p:txBody>
-          <a:bodyPr/>
-          <a:lstStyle/>
-          <a:p>
-            <a:pPr lvl="0" indent="0" marL="0">
-              <a:buNone/>
-            </a:pPr>
-            <a:r>
-              <a:rPr b="1"/>
-              <a:t>1. Point-in-time data.</a:t>
-            </a:r>
-            <a:r>
-              <a:rPr/>
-              <a:t> Macroeconomic series are </a:t>
-            </a:r>
-            <a:r>
-              <a:rPr b="1"/>
-              <a:t>revised</a:t>
-            </a:r>
-            <a:r>
-              <a:rPr/>
-              <a:t>. A backtest using today’s vintage of GDP gives your model information no forecaster had at the time.</a:t>
-            </a:r>
-          </a:p>
-          <a:p>
-            <a:pPr lvl="0" indent="0" marL="0">
-              <a:buNone/>
-            </a:pPr>
-            <a:r>
-              <a:rPr/>
-              <a:t>Use real-time vintages — ALFRED, or the Philadelphia Fed’s real-time dataset — or </a:t>
-            </a:r>
-            <a:r>
-              <a:rPr b="1"/>
-              <a:t>state clearly that you have not</a:t>
-            </a:r>
-            <a:r>
-              <a:rPr/>
-              <a:t>.</a:t>
+              <a:t>Blue: training. Red: the origin being predicted. Grey: the purge gap — essential whenever features are built from rolling windows, because those windows straddle the boundary.</a:t>
             </a:r>
           </a:p>
         </p:txBody>
@@ -6747,7 +10306,7 @@
             </a:pPr>
             <a:r>
               <a:rPr/>
-              <a:t>The second rule</a:t>
+              <a:t>Two rules that are violated constantly</a:t>
             </a:r>
           </a:p>
         </p:txBody>
@@ -6772,48 +10331,49 @@
             </a:pPr>
             <a:r>
               <a:rPr b="1"/>
-              <a:t>2. Every preprocessing step must be inside the loop.</a:t>
-            </a:r>
-          </a:p>
-          <a:p>
-            <a:pPr lvl="0"/>
+              <a:t>1 · Point-in-time data.</a:t>
+            </a:r>
             <a:r>
               <a:rPr/>
-              <a:t>standardisation</a:t>
-            </a:r>
-          </a:p>
-          <a:p>
-            <a:pPr lvl="0"/>
+              <a:t> Macroeconomic series are </a:t>
+            </a:r>
             <a:r>
               <a:rPr b="1"/>
-              <a:t>factor extraction</a:t>
+              <a:t>revised</a:t>
             </a:r>
             <a:r>
               <a:rPr/>
-              <a:t> — Session 08</a:t>
-            </a:r>
-          </a:p>
-          <a:p>
-            <a:pPr lvl="0"/>
+              <a:t>. A backtest using today’s vintage of GDP gives your model information no forecaster had at the time.</a:t>
+            </a:r>
+          </a:p>
+          <a:p>
+            <a:pPr lvl="0" indent="0" marL="0">
+              <a:buNone/>
+            </a:pPr>
             <a:r>
               <a:rPr/>
-              <a:t>feature selection</a:t>
-            </a:r>
-          </a:p>
-          <a:p>
-            <a:pPr lvl="0"/>
+              <a:t>Use real-time vintages — ALFRED, the Philadelphia Fed real-time dataset — or state clearly that you have not.</a:t>
+            </a:r>
+          </a:p>
+          <a:p>
+            <a:pPr lvl="0" indent="0" marL="0">
+              <a:buNone/>
+            </a:pPr>
+            <a:r>
+              <a:rPr b="1"/>
+              <a:t>2 · Everything inside the loop.</a:t>
+            </a:r>
             <a:r>
               <a:rPr/>
-              <a:t>hyperparameter choice</a:t>
-            </a:r>
-          </a:p>
-          <a:p>
-            <a:pPr lvl="0" indent="0" marL="0">
-              <a:buNone/>
-            </a:pPr>
+              <a:t> Standardisation, factor extraction (</a:t>
+            </a:r>
+            <a:r>
+              <a:rPr b="1"/>
+              <a:t>Session 08</a:t>
+            </a:r>
             <a:r>
               <a:rPr/>
-              <a:t>Extracting factors from the full sample and then backtesting is look-ahead bias. It is the single most common flaw in student factor-model projects.</a:t>
+              <a:t>), feature selection, hyperparameter choice. Every one of them. Every origin.</a:t>
             </a:r>
           </a:p>
         </p:txBody>

--- a/11-forecasting-drift-and-governance/slides.pptx
+++ b/11-forecasting-drift-and-governance/slides.pptx
@@ -47,6 +47,12 @@
     <p:sldId id="295" r:id="rId41"/>
     <p:sldId id="296" r:id="rId42"/>
     <p:sldId id="297" r:id="rId43"/>
+    <p:sldId id="298" r:id="rId44"/>
+    <p:sldId id="299" r:id="rId45"/>
+    <p:sldId id="300" r:id="rId46"/>
+    <p:sldId id="301" r:id="rId47"/>
+    <p:sldId id="302" r:id="rId48"/>
+    <p:sldId id="303" r:id="rId49"/>
   </p:sldIdLst>
   <p:sldSz cx="9144000" cy="5143500" type="screen16x9"/>
   <p:notesSz cx="6858000" cy="9144000"/>
@@ -6092,7 +6098,7 @@
             </a:r>
             <a:r>
               <a:rPr/>
-              <a:t> That is a result. It is publishable. It is what most forecasting comparisons actually find.</a:t>
+              <a:t> That is a result, and it is what most forecasting comparisons actually find.</a:t>
             </a:r>
           </a:p>
         </p:txBody>
@@ -6139,7 +6145,7 @@
             </a:pPr>
             <a:r>
               <a:rPr/>
-              <a:t>Where the errors actually are</a:t>
+              <a:t>The test, drawn</a:t>
             </a:r>
           </a:p>
         </p:txBody>
@@ -6160,8 +6166,8 @@
         </p:blipFill>
         <p:spPr bwMode="auto">
           <a:xfrm>
-            <a:off x="533400" y="1193800"/>
-            <a:ext cx="8077200" cy="3390900"/>
+            <a:off x="457200" y="1358900"/>
+            <a:ext cx="8229600" cy="3048000"/>
           </a:xfrm>
           <a:prstGeom prst="rect">
             <a:avLst/>
@@ -6216,15 +6222,7 @@
             </a:pPr>
             <a:r>
               <a:rPr/>
-              <a:t>An average hides this. Both models get </a:t>
-            </a:r>
-            <a:r>
-              <a:rPr b="1"/>
-              <a:t>worse</a:t>
-            </a:r>
-            <a:r>
-              <a:rPr/>
-              <a:t> at the same moment — which is the signature of something changing in the world, not in the model.</a:t>
+              <a:t>Left: a cloud centred on nothing. Right: where that cloud’s mean lands on the null distribution.</a:t>
             </a:r>
           </a:p>
         </p:txBody>
@@ -6261,12 +6259,7 @@
             <p:ph type="title"/>
           </p:nvPr>
         </p:nvSpPr>
-        <p:spPr>
-          <a:xfrm>
-            <a:off x="722313" y="1850000"/>
-            <a:ext cx="7772400" cy="1300000"/>
-          </a:xfrm>
-        </p:spPr>
+        <p:spPr/>
         <p:txBody>
           <a:bodyPr/>
           <a:lstStyle/>
@@ -6276,17 +6269,99 @@
             </a:pPr>
             <a:r>
               <a:rPr/>
-              <a:t>3 · Distribution shift</a:t>
-            </a:r>
-          </a:p>
-        </p:txBody>
-      </p:sp>
+              <a:t>Where the errors actually are</a:t>
+            </a:r>
+          </a:p>
+        </p:txBody>
+      </p:sp>
+      <p:pic>
+        <p:nvPicPr>
+          <p:cNvPr descr="slides_files/figure-pptx/cell-7-output-1.png" id="0" name="Picture 1"/>
+          <p:cNvPicPr>
+            <a:picLocks noGrp="1" noChangeAspect="1"/>
+          </p:cNvPicPr>
+          <p:nvPr/>
+        </p:nvPicPr>
+        <p:blipFill>
+          <a:blip r:embed="rId2"/>
+          <a:stretch>
+            <a:fillRect/>
+          </a:stretch>
+        </p:blipFill>
+        <p:spPr bwMode="auto">
+          <a:xfrm>
+            <a:off x="533400" y="1193800"/>
+            <a:ext cx="8077200" cy="3390900"/>
+          </a:xfrm>
+          <a:prstGeom prst="rect">
+            <a:avLst/>
+          </a:prstGeom>
+          <a:noFill/>
+          <a:ln w="9525">
+            <a:noFill/>
+            <a:headEnd/>
+            <a:tailEnd/>
+          </a:ln>
+        </p:spPr>
+      </p:pic>
     </p:spTree>
   </p:cSld>
 </p:sld>
 </file>
 
-<file path=ppt/slides/slide18.xml><?xml version="1.0" encoding="UTF-8"?><p:sld xmlns:a="http://schemas.openxmlformats.org/drawingml/2006/main" xmlns:r="http://schemas.openxmlformats.org/officeDocument/2006/relationships" xmlns:p="http://schemas.openxmlformats.org/presentationml/2006/main"><p:cSld><p:spTree><p:nvGrpSpPr><p:cNvPr id="1" name="" /><p:cNvGrpSpPr /><p:nvPr /></p:nvGrpSpPr><p:grpSpPr><a:xfrm><a:off x="0" y="0" /><a:ext cx="0" cy="0" /><a:chOff x="0" y="0" /><a:chExt cx="0" cy="0" /></a:xfrm></p:grpSpPr><p:sp><p:nvSpPr><p:cNvPr id="2" name="Title 1" /><p:cNvSpPr><a:spLocks noGrp="1" /></p:cNvSpPr><p:nvPr><p:ph type="title" /></p:nvPr></p:nvSpPr><p:spPr /><p:txBody><a:bodyPr /><a:lstStyle /><a:p><a:pPr lvl="0" indent="0" marL="0"><a:buNone /></a:pPr><a:r><a:rPr /><a:t>Four kinds, and they need different answers</a:t></a:r></a:p></p:txBody></p:sp><p:graphicFrame><p:nvGraphicFramePr><p:cNvPr id="6" name="Content Placeholder 5" /><p:cNvGraphicFramePr><a:graphicFrameLocks noGrp="1" /></p:cNvGraphicFramePr><p:nvPr><p:ph idx="1" /></p:nvPr></p:nvGraphicFramePr><p:xfrm><a:off x="457200" y="1193800" /><a:ext cx="8229600" cy="3390900" /></p:xfrm><a:graphic><a:graphicData uri="http://schemas.openxmlformats.org/drawingml/2006/table"><a:tbl><a:tblPr firstRow="1" bandRow="1"><a:tableStyleId>{5C22544A-7EE6-4342-B048-85BDC9FD1C3A}</a:tableStyleId></a:tblPr><a:tblGrid><a:gridCol w="2057400" /><a:gridCol w="2057400" /><a:gridCol w="2057400" /><a:gridCol w="2057400" /></a:tblGrid><a:tr h="0"><a:tc><a:txBody><a:bodyPr /><a:lstStyle /><a:p><a:pPr lvl="0" indent="0" marL="0"><a:buNone /></a:pPr><a:r><a:rPr /><a:t>Type</a:t></a:r></a:p></a:txBody><a:tcPr /></a:tc><a:tc><a:txBody><a:bodyPr /><a:lstStyle /><a:p><a:pPr lvl="0" indent="0" marL="0"><a:buNone /></a:pPr><a:r><a:rPr /><a:t>What changes</a:t></a:r></a:p></a:txBody><a:tcPr /></a:tc><a:tc><a:txBody><a:bodyPr /><a:lstStyle /><a:p><a:pPr lvl="0" indent="0" marL="0"><a:buNone /></a:pPr><a:r><a:rPr /><a:t>Detection</a:t></a:r></a:p></a:txBody><a:tcPr /></a:tc><a:tc><a:txBody><a:bodyPr /><a:lstStyle /><a:p><a:pPr lvl="0" indent="0" marL="0"><a:buNone /></a:pPr><a:r><a:rPr /><a:t>Fix</a:t></a:r></a:p></a:txBody><a:tcPr /></a:tc></a:tr><a:tr h="0"><a:tc><a:txBody><a:bodyPr /><a:lstStyle /><a:p><a:pPr lvl="0" indent="0" marL="0"><a:buNone /></a:pPr><a:r><a:rPr b="1" /><a:t>Covariate shift</a:t></a:r></a:p></a:txBody></a:tc><a:tc><a:txBody><a:bodyPr /><a:lstStyle /><a:p><a:pPr lvl="0" indent="0" marL="0"><a:buNone /></a:pPr><a14:m><m:oMath xmlns:m="http://schemas.openxmlformats.org/officeDocument/2006/math"><m:r><m:t>P</m:t></m:r><m:d><m:dPr><m:begChr m:val="(" /><m:sepChr m:val="" /><m:endChr m:val=")" /><m:grow /></m:dPr><m:e><m:r><m:t>X</m:t></m:r></m:e></m:d></m:oMath></a14:m><a:r><a:rPr /><a:t>; </a:t></a:r><a14:m><m:oMath xmlns:m="http://schemas.openxmlformats.org/officeDocument/2006/math"><m:r><m:t>P</m:t></m:r><m:d><m:dPr><m:begChr m:val="(" /><m:sepChr m:val="" /><m:endChr m:val=")" /><m:grow /></m:dPr><m:e><m:r><m:t>Y</m:t></m:r><m:r><m:rPr><m:sty m:val="p" /></m:rPr><m:t>∣</m:t></m:r><m:r><m:t>X</m:t></m:r></m:e></m:d></m:oMath></a14:m><a:r><a:rPr /><a:t> stable</a:t></a:r></a:p></a:txBody></a:tc><a:tc><a:txBody><a:bodyPr /><a:lstStyle /><a:p><a:pPr lvl="0" indent="0" marL="0"><a:buNone /></a:pPr><a:r><a:rPr /><a:t>classifier: train vs deploy</a:t></a:r></a:p></a:txBody></a:tc><a:tc><a:txBody><a:bodyPr /><a:lstStyle /><a:p><a:pPr lvl="0" indent="0" marL="0"><a:buNone /></a:pPr><a:r><a:rPr /><a:t>reweight, or retrain</a:t></a:r></a:p></a:txBody></a:tc></a:tr><a:tr h="0"><a:tc><a:txBody><a:bodyPr /><a:lstStyle /><a:p><a:pPr lvl="0" indent="0" marL="0"><a:buNone /></a:pPr><a:r><a:rPr b="1" /><a:t>Label shift</a:t></a:r></a:p></a:txBody></a:tc><a:tc><a:txBody><a:bodyPr /><a:lstStyle /><a:p><a:pPr lvl="0" indent="0" marL="0"><a:buNone /></a:pPr><a14:m><m:oMath xmlns:m="http://schemas.openxmlformats.org/officeDocument/2006/math"><m:r><m:t>P</m:t></m:r><m:d><m:dPr><m:begChr m:val="(" /><m:sepChr m:val="" /><m:endChr m:val=")" /><m:grow /></m:dPr><m:e><m:r><m:t>Y</m:t></m:r></m:e></m:d></m:oMath></a14:m><a:r><a:rPr /><a:t>; </a:t></a:r><a14:m><m:oMath xmlns:m="http://schemas.openxmlformats.org/officeDocument/2006/math"><m:r><m:t>P</m:t></m:r><m:d><m:dPr><m:begChr m:val="(" /><m:sepChr m:val="" /><m:endChr m:val=")" /><m:grow /></m:dPr><m:e><m:r><m:t>X</m:t></m:r><m:r><m:rPr><m:sty m:val="p" /></m:rPr><m:t>∣</m:t></m:r><m:r><m:t>Y</m:t></m:r></m:e></m:d></m:oMath></a14:m><a:r><a:rPr /><a:t> stable</a:t></a:r></a:p></a:txBody></a:tc><a:tc><a:txBody><a:bodyPr /><a:lstStyle /><a:p><a:pPr lvl="0" indent="0" marL="0"><a:buNone /></a:pPr><a:r><a:rPr /><a:t>predicted vs observed marginal</a:t></a:r></a:p></a:txBody></a:tc><a:tc><a:txBody><a:bodyPr /><a:lstStyle /><a:p><a:pPr lvl="0" indent="0" marL="0"><a:buNone /></a:pPr><a:r><a:rPr /><a:t>reweight; correct the intercept (S06)</a:t></a:r></a:p></a:txBody></a:tc></a:tr><a:tr h="0"><a:tc><a:txBody><a:bodyPr /><a:lstStyle /><a:p><a:pPr lvl="0" indent="0" marL="0"><a:buNone /></a:pPr><a:r><a:rPr b="1" /><a:t>Concept drift</a:t></a:r></a:p></a:txBody></a:tc><a:tc><a:txBody><a:bodyPr /><a:lstStyle /><a:p><a:pPr lvl="0" indent="0" marL="0"><a:buNone /></a:pPr><a14:m><m:oMath xmlns:m="http://schemas.openxmlformats.org/officeDocument/2006/math"><m:r><m:t>P</m:t></m:r><m:d><m:dPr><m:begChr m:val="(" /><m:sepChr m:val="" /><m:endChr m:val=")" /><m:grow /></m:dPr><m:e><m:r><m:t>Y</m:t></m:r><m:r><m:rPr><m:sty m:val="p" /></m:rPr><m:t>∣</m:t></m:r><m:r><m:t>X</m:t></m:r></m:e></m:d></m:oMath></a14:m></a:p></a:txBody></a:tc><a:tc><a:txBody><a:bodyPr /><a:lstStyle /><a:p><a:pPr lvl="0" indent="0" marL="0"><a:buNone /></a:pPr><a:r><a:rPr /><a:t>only once outcomes arrive</a:t></a:r></a:p></a:txBody></a:tc><a:tc><a:txBody><a:bodyPr /><a:lstStyle /><a:p><a:pPr lvl="0" indent="0" marL="0"><a:buNone /></a:pPr><a:r><a:rPr /><a:t>retrain — necessary, not sufficient</a:t></a:r></a:p></a:txBody></a:tc></a:tr><a:tr h="0"><a:tc><a:txBody><a:bodyPr /><a:lstStyle /><a:p><a:pPr lvl="0" indent="0" marL="0"><a:buNone /></a:pPr><a:r><a:rPr b="1" /><a:t>Feedback</a:t></a:r></a:p></a:txBody></a:tc><a:tc><a:txBody><a:bodyPr /><a:lstStyle /><a:p><a:pPr lvl="0" indent="0" marL="0"><a:buNone /></a:pPr><a:r><a:rPr /><a:t>your model changes the world</a:t></a:r></a:p></a:txBody></a:tc><a:tc><a:txBody><a:bodyPr /><a:lstStyle /><a:p><a:pPr lvl="0" indent="0" marL="0"><a:buNone /></a:pPr><a:r><a:rPr /><a:t>causal reasoning, not monitoring</a:t></a:r></a:p></a:txBody></a:tc><a:tc><a:txBody><a:bodyPr /><a:lstStyle /><a:p><a:pPr lvl="0" indent="0" marL="0"><a:buNone /></a:pPr><a:r><a:rPr /><a:t>redesign</a:t></a:r></a:p></a:txBody></a:tc></a:tr></a:tbl></a:graphicData></a:graphic></p:graphicFrame></p:spTree></p:cSld></p:sld>
+<file path=ppt/slides/slide18.xml><?xml version="1.0" encoding="utf-8"?>
+<p:sld xmlns:a="http://schemas.openxmlformats.org/drawingml/2006/main" xmlns:r="http://schemas.openxmlformats.org/officeDocument/2006/relationships" xmlns:p="http://schemas.openxmlformats.org/presentationml/2006/main">
+  <p:cSld>
+    <p:spTree>
+      <p:nvGrpSpPr>
+        <p:cNvPr id="1" name=""/>
+        <p:cNvGrpSpPr/>
+        <p:nvPr/>
+      </p:nvGrpSpPr>
+      <p:grpSpPr>
+        <a:xfrm>
+          <a:off x="0" y="0"/>
+          <a:ext cx="0" cy="0"/>
+          <a:chOff x="0" y="0"/>
+          <a:chExt cx="0" cy="0"/>
+        </a:xfrm>
+      </p:grpSpPr>
+      <p:sp>
+        <p:nvSpPr>
+          <p:cNvPr id="3" name="Content Placeholder 2"/>
+          <p:cNvSpPr>
+            <a:spLocks noGrp="1"/>
+          </p:cNvSpPr>
+          <p:nvPr>
+            <p:ph idx="1"/>
+          </p:nvPr>
+        </p:nvSpPr>
+        <p:spPr/>
+        <p:txBody>
+          <a:bodyPr/>
+          <a:lstStyle/>
+          <a:p>
+            <a:pPr lvl="0" indent="0" marL="0">
+              <a:buNone/>
+            </a:pPr>
+            <a:r>
+              <a:rPr/>
+              <a:t>An average hides this. Both models get </a:t>
+            </a:r>
+            <a:r>
+              <a:rPr b="1"/>
+              <a:t>worse</a:t>
+            </a:r>
+            <a:r>
+              <a:rPr/>
+              <a:t> at the same moment — which is the signature of something changing in the world, not in the model.</a:t>
+            </a:r>
+          </a:p>
+        </p:txBody>
+      </p:sp>
+    </p:spTree>
+  </p:cSld>
+</p:sld>
 </file>
 
 <file path=ppt/slides/slide19.xml><?xml version="1.0" encoding="utf-8"?>
@@ -6308,15 +6383,20 @@
       </p:grpSpPr>
       <p:sp>
         <p:nvSpPr>
-          <p:cNvPr id="3" name="Content Placeholder 2"/>
-          <p:cNvSpPr>
-            <a:spLocks noGrp="1"/>
-          </p:cNvSpPr>
-          <p:nvPr>
-            <p:ph idx="1"/>
-          </p:nvPr>
-        </p:nvSpPr>
-        <p:spPr/>
+          <p:cNvPr id="2" name="Title 1"/>
+          <p:cNvSpPr>
+            <a:spLocks noGrp="1"/>
+          </p:cNvSpPr>
+          <p:nvPr>
+            <p:ph type="title"/>
+          </p:nvPr>
+        </p:nvSpPr>
+        <p:spPr>
+          <a:xfrm>
+            <a:off x="722313" y="1850000"/>
+            <a:ext cx="7772400" cy="1300000"/>
+          </a:xfrm>
+        </p:spPr>
         <p:txBody>
           <a:bodyPr/>
           <a:lstStyle/>
@@ -6326,15 +6406,7 @@
             </a:pPr>
             <a:r>
               <a:rPr/>
-              <a:t>Only the first is detectable </a:t>
-            </a:r>
-            <a:r>
-              <a:rPr b="1"/>
-              <a:t>before</a:t>
-            </a:r>
-            <a:r>
-              <a:rPr/>
-              <a:t> the damage. The last is not a monitoring problem at all.</a:t>
+              <a:t>3 · Distribution shift</a:t>
             </a:r>
           </a:p>
         </p:txBody>
@@ -6394,106 +6466,7 @@
 </p:sld>
 </file>
 
-<file path=ppt/slides/slide20.xml><?xml version="1.0" encoding="utf-8"?>
-<p:sld xmlns:a="http://schemas.openxmlformats.org/drawingml/2006/main" xmlns:r="http://schemas.openxmlformats.org/officeDocument/2006/relationships" xmlns:p="http://schemas.openxmlformats.org/presentationml/2006/main">
-  <p:cSld>
-    <p:spTree>
-      <p:nvGrpSpPr>
-        <p:cNvPr id="1" name=""/>
-        <p:cNvGrpSpPr/>
-        <p:nvPr/>
-      </p:nvGrpSpPr>
-      <p:grpSpPr>
-        <a:xfrm>
-          <a:off x="0" y="0"/>
-          <a:ext cx="0" cy="0"/>
-          <a:chOff x="0" y="0"/>
-          <a:chExt cx="0" cy="0"/>
-        </a:xfrm>
-      </p:grpSpPr>
-      <p:sp>
-        <p:nvSpPr>
-          <p:cNvPr id="2" name="Title 1"/>
-          <p:cNvSpPr>
-            <a:spLocks noGrp="1"/>
-          </p:cNvSpPr>
-          <p:nvPr>
-            <p:ph type="title"/>
-          </p:nvPr>
-        </p:nvSpPr>
-        <p:spPr/>
-        <p:txBody>
-          <a:bodyPr/>
-          <a:lstStyle/>
-          <a:p>
-            <a:pPr lvl="0" indent="0" marL="0">
-              <a:buNone/>
-            </a:pPr>
-            <a:r>
-              <a:rPr/>
-              <a:t>The classifier diagnostic</a:t>
-            </a:r>
-          </a:p>
-        </p:txBody>
-      </p:sp>
-      <p:sp>
-        <p:nvSpPr>
-          <p:cNvPr id="3" name="Content Placeholder 2"/>
-          <p:cNvSpPr>
-            <a:spLocks noGrp="1"/>
-          </p:cNvSpPr>
-          <p:nvPr>
-            <p:ph idx="1"/>
-          </p:nvPr>
-        </p:nvSpPr>
-        <p:spPr/>
-        <p:txBody>
-          <a:bodyPr/>
-          <a:lstStyle/>
-          <a:p>
-            <a:pPr lvl="0" indent="0" marL="0">
-              <a:buNone/>
-            </a:pPr>
-            <a:r>
-              <a:rPr/>
-              <a:t>Pool the training and deployment features, label each row by period, and try to </a:t>
-            </a:r>
-            <a:r>
-              <a:rPr b="1"/>
-              <a:t>predict the label</a:t>
-            </a:r>
-            <a:r>
-              <a:rPr/>
-              <a:t>.</a:t>
-            </a:r>
-          </a:p>
-          <a:p>
-            <a:pPr lvl="0" indent="0" marL="0">
-              <a:buNone/>
-            </a:pPr>
-            <a:r>
-              <a:rPr b="1"/>
-              <a:t>If a classifier can tell your two periods apart, so can your model’s errors.</a:t>
-            </a:r>
-            <a:r>
-              <a:rPr/>
-              <a:t> AUC near 0.5 is reassuring. Near 1.0 is an alarm.</a:t>
-            </a:r>
-          </a:p>
-          <a:p>
-            <a:pPr lvl="0" indent="0" marL="0">
-              <a:buNone/>
-            </a:pPr>
-            <a:r>
-              <a:rPr/>
-              <a:t>It costs four lines and it is the single highest-value monitoring check you can run.</a:t>
-            </a:r>
-          </a:p>
-        </p:txBody>
-      </p:sp>
-    </p:spTree>
-  </p:cSld>
-</p:sld>
+<file path=ppt/slides/slide20.xml><?xml version="1.0" encoding="UTF-8"?><p:sld xmlns:a="http://schemas.openxmlformats.org/drawingml/2006/main" xmlns:r="http://schemas.openxmlformats.org/officeDocument/2006/relationships" xmlns:p="http://schemas.openxmlformats.org/presentationml/2006/main"><p:cSld><p:spTree><p:nvGrpSpPr><p:cNvPr id="1" name="" /><p:cNvGrpSpPr /><p:nvPr /></p:nvGrpSpPr><p:grpSpPr><a:xfrm><a:off x="0" y="0" /><a:ext cx="0" cy="0" /><a:chOff x="0" y="0" /><a:chExt cx="0" cy="0" /></a:xfrm></p:grpSpPr><p:sp><p:nvSpPr><p:cNvPr id="2" name="Title 1" /><p:cNvSpPr><a:spLocks noGrp="1" /></p:cNvSpPr><p:nvPr><p:ph type="title" /></p:nvPr></p:nvSpPr><p:spPr /><p:txBody><a:bodyPr /><a:lstStyle /><a:p><a:pPr lvl="0" indent="0" marL="0"><a:buNone /></a:pPr><a:r><a:rPr /><a:t>Four kinds, and they need different answers</a:t></a:r></a:p></p:txBody></p:sp><p:graphicFrame><p:nvGraphicFramePr><p:cNvPr id="6" name="Content Placeholder 5" /><p:cNvGraphicFramePr><a:graphicFrameLocks noGrp="1" /></p:cNvGraphicFramePr><p:nvPr><p:ph idx="1" /></p:nvPr></p:nvGraphicFramePr><p:xfrm><a:off x="457200" y="1193800" /><a:ext cx="8229600" cy="3390900" /></p:xfrm><a:graphic><a:graphicData uri="http://schemas.openxmlformats.org/drawingml/2006/table"><a:tbl><a:tblPr firstRow="1" bandRow="1"><a:tableStyleId>{5C22544A-7EE6-4342-B048-85BDC9FD1C3A}</a:tableStyleId></a:tblPr><a:tblGrid><a:gridCol w="2057400" /><a:gridCol w="2057400" /><a:gridCol w="2057400" /><a:gridCol w="2057400" /></a:tblGrid><a:tr h="0"><a:tc><a:txBody><a:bodyPr /><a:lstStyle /><a:p><a:pPr lvl="0" indent="0" marL="0"><a:buNone /></a:pPr><a:r><a:rPr /><a:t>Type</a:t></a:r></a:p></a:txBody><a:tcPr /></a:tc><a:tc><a:txBody><a:bodyPr /><a:lstStyle /><a:p><a:pPr lvl="0" indent="0" marL="0"><a:buNone /></a:pPr><a:r><a:rPr /><a:t>What changes</a:t></a:r></a:p></a:txBody><a:tcPr /></a:tc><a:tc><a:txBody><a:bodyPr /><a:lstStyle /><a:p><a:pPr lvl="0" indent="0" marL="0"><a:buNone /></a:pPr><a:r><a:rPr /><a:t>Detection</a:t></a:r></a:p></a:txBody><a:tcPr /></a:tc><a:tc><a:txBody><a:bodyPr /><a:lstStyle /><a:p><a:pPr lvl="0" indent="0" marL="0"><a:buNone /></a:pPr><a:r><a:rPr /><a:t>Fix</a:t></a:r></a:p></a:txBody><a:tcPr /></a:tc></a:tr><a:tr h="0"><a:tc><a:txBody><a:bodyPr /><a:lstStyle /><a:p><a:pPr lvl="0" indent="0" marL="0"><a:buNone /></a:pPr><a:r><a:rPr b="1" /><a:t>Covariate shift</a:t></a:r></a:p></a:txBody></a:tc><a:tc><a:txBody><a:bodyPr /><a:lstStyle /><a:p><a:pPr lvl="0" indent="0" marL="0"><a:buNone /></a:pPr><a14:m><m:oMath xmlns:m="http://schemas.openxmlformats.org/officeDocument/2006/math"><m:r><m:t>P</m:t></m:r><m:d><m:dPr><m:begChr m:val="(" /><m:sepChr m:val="" /><m:endChr m:val=")" /><m:grow /></m:dPr><m:e><m:r><m:t>X</m:t></m:r></m:e></m:d></m:oMath></a14:m><a:r><a:rPr /><a:t>; </a:t></a:r><a14:m><m:oMath xmlns:m="http://schemas.openxmlformats.org/officeDocument/2006/math"><m:r><m:t>P</m:t></m:r><m:d><m:dPr><m:begChr m:val="(" /><m:sepChr m:val="" /><m:endChr m:val=")" /><m:grow /></m:dPr><m:e><m:r><m:t>Y</m:t></m:r><m:r><m:rPr><m:sty m:val="p" /></m:rPr><m:t>∣</m:t></m:r><m:r><m:t>X</m:t></m:r></m:e></m:d></m:oMath></a14:m><a:r><a:rPr /><a:t> stable</a:t></a:r></a:p></a:txBody></a:tc><a:tc><a:txBody><a:bodyPr /><a:lstStyle /><a:p><a:pPr lvl="0" indent="0" marL="0"><a:buNone /></a:pPr><a:r><a:rPr /><a:t>classifier: train vs deploy</a:t></a:r></a:p></a:txBody></a:tc><a:tc><a:txBody><a:bodyPr /><a:lstStyle /><a:p><a:pPr lvl="0" indent="0" marL="0"><a:buNone /></a:pPr><a:r><a:rPr /><a:t>reweight, or retrain</a:t></a:r></a:p></a:txBody></a:tc></a:tr><a:tr h="0"><a:tc><a:txBody><a:bodyPr /><a:lstStyle /><a:p><a:pPr lvl="0" indent="0" marL="0"><a:buNone /></a:pPr><a:r><a:rPr b="1" /><a:t>Label shift</a:t></a:r></a:p></a:txBody></a:tc><a:tc><a:txBody><a:bodyPr /><a:lstStyle /><a:p><a:pPr lvl="0" indent="0" marL="0"><a:buNone /></a:pPr><a14:m><m:oMath xmlns:m="http://schemas.openxmlformats.org/officeDocument/2006/math"><m:r><m:t>P</m:t></m:r><m:d><m:dPr><m:begChr m:val="(" /><m:sepChr m:val="" /><m:endChr m:val=")" /><m:grow /></m:dPr><m:e><m:r><m:t>Y</m:t></m:r></m:e></m:d></m:oMath></a14:m><a:r><a:rPr /><a:t>; </a:t></a:r><a14:m><m:oMath xmlns:m="http://schemas.openxmlformats.org/officeDocument/2006/math"><m:r><m:t>P</m:t></m:r><m:d><m:dPr><m:begChr m:val="(" /><m:sepChr m:val="" /><m:endChr m:val=")" /><m:grow /></m:dPr><m:e><m:r><m:t>X</m:t></m:r><m:r><m:rPr><m:sty m:val="p" /></m:rPr><m:t>∣</m:t></m:r><m:r><m:t>Y</m:t></m:r></m:e></m:d></m:oMath></a14:m><a:r><a:rPr /><a:t> stable</a:t></a:r></a:p></a:txBody></a:tc><a:tc><a:txBody><a:bodyPr /><a:lstStyle /><a:p><a:pPr lvl="0" indent="0" marL="0"><a:buNone /></a:pPr><a:r><a:rPr /><a:t>predicted vs observed marginal</a:t></a:r></a:p></a:txBody></a:tc><a:tc><a:txBody><a:bodyPr /><a:lstStyle /><a:p><a:pPr lvl="0" indent="0" marL="0"><a:buNone /></a:pPr><a:r><a:rPr /><a:t>reweight; correct the intercept (S06)</a:t></a:r></a:p></a:txBody></a:tc></a:tr><a:tr h="0"><a:tc><a:txBody><a:bodyPr /><a:lstStyle /><a:p><a:pPr lvl="0" indent="0" marL="0"><a:buNone /></a:pPr><a:r><a:rPr b="1" /><a:t>Concept drift</a:t></a:r></a:p></a:txBody></a:tc><a:tc><a:txBody><a:bodyPr /><a:lstStyle /><a:p><a:pPr lvl="0" indent="0" marL="0"><a:buNone /></a:pPr><a14:m><m:oMath xmlns:m="http://schemas.openxmlformats.org/officeDocument/2006/math"><m:r><m:t>P</m:t></m:r><m:d><m:dPr><m:begChr m:val="(" /><m:sepChr m:val="" /><m:endChr m:val=")" /><m:grow /></m:dPr><m:e><m:r><m:t>Y</m:t></m:r><m:r><m:rPr><m:sty m:val="p" /></m:rPr><m:t>∣</m:t></m:r><m:r><m:t>X</m:t></m:r></m:e></m:d></m:oMath></a14:m></a:p></a:txBody></a:tc><a:tc><a:txBody><a:bodyPr /><a:lstStyle /><a:p><a:pPr lvl="0" indent="0" marL="0"><a:buNone /></a:pPr><a:r><a:rPr /><a:t>only once outcomes arrive</a:t></a:r></a:p></a:txBody></a:tc><a:tc><a:txBody><a:bodyPr /><a:lstStyle /><a:p><a:pPr lvl="0" indent="0" marL="0"><a:buNone /></a:pPr><a:r><a:rPr /><a:t>retrain — necessary, not sufficient</a:t></a:r></a:p></a:txBody></a:tc></a:tr><a:tr h="0"><a:tc><a:txBody><a:bodyPr /><a:lstStyle /><a:p><a:pPr lvl="0" indent="0" marL="0"><a:buNone /></a:pPr><a:r><a:rPr b="1" /><a:t>Feedback</a:t></a:r></a:p></a:txBody></a:tc><a:tc><a:txBody><a:bodyPr /><a:lstStyle /><a:p><a:pPr lvl="0" indent="0" marL="0"><a:buNone /></a:pPr><a:r><a:rPr /><a:t>your model changes the world</a:t></a:r></a:p></a:txBody></a:tc><a:tc><a:txBody><a:bodyPr /><a:lstStyle /><a:p><a:pPr lvl="0" indent="0" marL="0"><a:buNone /></a:pPr><a:r><a:rPr /><a:t>causal reasoning, not monitoring</a:t></a:r></a:p></a:txBody></a:tc><a:tc><a:txBody><a:bodyPr /><a:lstStyle /><a:p><a:pPr lvl="0" indent="0" marL="0"><a:buNone /></a:pPr><a:r><a:rPr /><a:t>redesign</a:t></a:r></a:p></a:txBody></a:tc></a:tr></a:tbl></a:graphicData></a:graphic></p:graphicFrame></p:spTree></p:cSld></p:sld>
 </file>
 
 <file path=ppt/slides/slide21.xml><?xml version="1.0" encoding="utf-8"?>
@@ -6515,12 +6488,12 @@
       </p:grpSpPr>
       <p:sp>
         <p:nvSpPr>
-          <p:cNvPr id="2" name="Title 1"/>
-          <p:cNvSpPr>
-            <a:spLocks noGrp="1"/>
-          </p:cNvSpPr>
-          <p:nvPr>
-            <p:ph type="title"/>
+          <p:cNvPr id="3" name="Content Placeholder 2"/>
+          <p:cNvSpPr>
+            <a:spLocks noGrp="1"/>
+          </p:cNvSpPr>
+          <p:nvPr>
+            <p:ph idx="1"/>
           </p:nvPr>
         </p:nvSpPr>
         <p:spPr/>
@@ -6533,1154 +6506,15 @@
             </a:pPr>
             <a:r>
               <a:rPr/>
-              <a:t>Run it — and run a placebo</a:t>
-            </a:r>
-          </a:p>
-        </p:txBody>
-      </p:sp>
-      <p:sp>
-        <p:nvSpPr>
-          <p:cNvPr id="3" name="Content Placeholder 2"/>
-          <p:cNvSpPr>
-            <a:spLocks noGrp="1"/>
-          </p:cNvSpPr>
-          <p:nvPr>
-            <p:ph idx="1"/>
-          </p:nvPr>
-        </p:nvSpPr>
-        <p:spPr/>
-        <p:txBody>
-          <a:bodyPr/>
-          <a:lstStyle/>
-          <a:p>
-            <a:pPr lvl="0" indent="0">
-              <a:buNone/>
-            </a:pPr>
-            <a:r>
-              <a:rPr>
-                <a:latin typeface="Courier"/>
-              </a:rPr>
-              <a:t>X_lev </a:t>
-            </a:r>
-            <a:r>
-              <a:rPr>
-                <a:solidFill>
-                  <a:srgbClr val="666666"/>
-                </a:solidFill>
-                <a:latin typeface="Courier"/>
-              </a:rPr>
-              <a:t>=</a:t>
-            </a:r>
-            <a:r>
-              <a:rPr>
-                <a:latin typeface="Courier"/>
-              </a:rPr>
-              <a:t> m[FEAT].to_numpy(</a:t>
-            </a:r>
-            <a:r>
-              <a:rPr>
-                <a:solidFill>
-                  <a:srgbClr val="008000"/>
-                </a:solidFill>
-                <a:latin typeface="Courier"/>
-              </a:rPr>
-              <a:t>float</a:t>
-            </a:r>
-            <a:r>
-              <a:rPr>
-                <a:latin typeface="Courier"/>
-              </a:rPr>
-              <a:t>)</a:t>
-            </a:r>
-            <a:br/>
-            <a:r>
-              <a:rPr>
-                <a:latin typeface="Courier"/>
-              </a:rPr>
-              <a:t>chg </a:t>
-            </a:r>
-            <a:r>
-              <a:rPr>
-                <a:solidFill>
-                  <a:srgbClr val="666666"/>
-                </a:solidFill>
-                <a:latin typeface="Courier"/>
-              </a:rPr>
-              <a:t>=</a:t>
-            </a:r>
-            <a:r>
-              <a:rPr>
-                <a:latin typeface="Courier"/>
-              </a:rPr>
-              <a:t> m.groupby(</a:t>
-            </a:r>
-            <a:r>
-              <a:rPr>
-                <a:solidFill>
-                  <a:srgbClr val="4070A0"/>
-                </a:solidFill>
-                <a:latin typeface="Courier"/>
-              </a:rPr>
-              <a:t>"geo"</a:t>
-            </a:r>
-            <a:r>
-              <a:rPr>
-                <a:latin typeface="Courier"/>
-              </a:rPr>
-              <a:t>)[FEAT].pct_change().replace([np.inf, </a:t>
-            </a:r>
-            <a:r>
-              <a:rPr>
-                <a:solidFill>
-                  <a:srgbClr val="666666"/>
-                </a:solidFill>
-                <a:latin typeface="Courier"/>
-              </a:rPr>
-              <a:t>-</a:t>
-            </a:r>
-            <a:r>
-              <a:rPr>
-                <a:latin typeface="Courier"/>
-              </a:rPr>
-              <a:t>np.inf], np.nan)</a:t>
-            </a:r>
-            <a:br/>
-            <a:r>
-              <a:rPr>
-                <a:latin typeface="Courier"/>
-              </a:rPr>
-              <a:t>ok </a:t>
-            </a:r>
-            <a:r>
-              <a:rPr>
-                <a:solidFill>
-                  <a:srgbClr val="666666"/>
-                </a:solidFill>
-                <a:latin typeface="Courier"/>
-              </a:rPr>
-              <a:t>=</a:t>
-            </a:r>
-            <a:r>
-              <a:rPr>
-                <a:latin typeface="Courier"/>
-              </a:rPr>
-              <a:t> chg.notna().</a:t>
-            </a:r>
-            <a:r>
-              <a:rPr>
-                <a:solidFill>
-                  <a:srgbClr val="008000"/>
-                </a:solidFill>
-                <a:latin typeface="Courier"/>
-              </a:rPr>
-              <a:t>all</a:t>
-            </a:r>
-            <a:r>
-              <a:rPr>
-                <a:latin typeface="Courier"/>
-              </a:rPr>
-              <a:t>(axis</a:t>
-            </a:r>
-            <a:r>
-              <a:rPr>
-                <a:solidFill>
-                  <a:srgbClr val="666666"/>
-                </a:solidFill>
-                <a:latin typeface="Courier"/>
-              </a:rPr>
-              <a:t>=</a:t>
-            </a:r>
-            <a:r>
-              <a:rPr>
-                <a:solidFill>
-                  <a:srgbClr val="40A070"/>
-                </a:solidFill>
-                <a:latin typeface="Courier"/>
-              </a:rPr>
-              <a:t>1</a:t>
-            </a:r>
-            <a:r>
-              <a:rPr>
-                <a:latin typeface="Courier"/>
-              </a:rPr>
-              <a:t>)</a:t>
-            </a:r>
-            <a:br/>
-            <a:r>
-              <a:rPr>
-                <a:latin typeface="Courier"/>
-              </a:rPr>
-              <a:t>X_chg, t_chg </a:t>
-            </a:r>
-            <a:r>
-              <a:rPr>
-                <a:solidFill>
-                  <a:srgbClr val="666666"/>
-                </a:solidFill>
-                <a:latin typeface="Courier"/>
-              </a:rPr>
-              <a:t>=</a:t>
-            </a:r>
-            <a:r>
-              <a:rPr>
-                <a:latin typeface="Courier"/>
-              </a:rPr>
-              <a:t> chg[ok].to_numpy(</a:t>
-            </a:r>
-            <a:r>
-              <a:rPr>
-                <a:solidFill>
-                  <a:srgbClr val="008000"/>
-                </a:solidFill>
-                <a:latin typeface="Courier"/>
-              </a:rPr>
-              <a:t>float</a:t>
-            </a:r>
-            <a:r>
-              <a:rPr>
-                <a:latin typeface="Courier"/>
-              </a:rPr>
-              <a:t>), m.loc[ok, </a:t>
-            </a:r>
-            <a:r>
-              <a:rPr>
-                <a:solidFill>
-                  <a:srgbClr val="4070A0"/>
-                </a:solidFill>
-                <a:latin typeface="Courier"/>
-              </a:rPr>
-              <a:t>"time"</a:t>
-            </a:r>
-            <a:r>
-              <a:rPr>
-                <a:latin typeface="Courier"/>
-              </a:rPr>
-              <a:t>].to_numpy()</a:t>
-            </a:r>
-            <a:br/>
-            <a:br/>
-            <a:r>
-              <a:rPr b="1">
-                <a:solidFill>
-                  <a:srgbClr val="007020"/>
-                </a:solidFill>
-                <a:latin typeface="Courier"/>
-              </a:rPr>
-              <a:t>def</a:t>
-            </a:r>
-            <a:r>
-              <a:rPr>
-                <a:latin typeface="Courier"/>
-              </a:rPr>
-              <a:t> drift_auc(X, times, cut):</a:t>
-            </a:r>
-            <a:br/>
-            <a:r>
-              <a:rPr>
-                <a:latin typeface="Courier"/>
-              </a:rPr>
-              <a:t>    lab </a:t>
-            </a:r>
-            <a:r>
-              <a:rPr>
-                <a:solidFill>
-                  <a:srgbClr val="666666"/>
-                </a:solidFill>
-                <a:latin typeface="Courier"/>
-              </a:rPr>
-              <a:t>=</a:t>
-            </a:r>
-            <a:r>
-              <a:rPr>
-                <a:latin typeface="Courier"/>
-              </a:rPr>
-              <a:t> (times </a:t>
-            </a:r>
-            <a:r>
-              <a:rPr>
-                <a:solidFill>
-                  <a:srgbClr val="666666"/>
-                </a:solidFill>
-                <a:latin typeface="Courier"/>
-              </a:rPr>
-              <a:t>&gt;=</a:t>
-            </a:r>
-            <a:r>
-              <a:rPr>
-                <a:latin typeface="Courier"/>
-              </a:rPr>
-              <a:t> cut).astype(</a:t>
-            </a:r>
-            <a:r>
-              <a:rPr>
-                <a:solidFill>
-                  <a:srgbClr val="008000"/>
-                </a:solidFill>
-                <a:latin typeface="Courier"/>
-              </a:rPr>
-              <a:t>int</a:t>
-            </a:r>
-            <a:r>
-              <a:rPr>
-                <a:latin typeface="Courier"/>
-              </a:rPr>
-              <a:t>)</a:t>
-            </a:r>
-            <a:br/>
-            <a:r>
-              <a:rPr>
-                <a:latin typeface="Courier"/>
-              </a:rPr>
-              <a:t>    p </a:t>
-            </a:r>
-            <a:r>
-              <a:rPr>
-                <a:solidFill>
-                  <a:srgbClr val="666666"/>
-                </a:solidFill>
-                <a:latin typeface="Courier"/>
-              </a:rPr>
-              <a:t>=</a:t>
-            </a:r>
-            <a:r>
-              <a:rPr>
-                <a:latin typeface="Courier"/>
-              </a:rPr>
-              <a:t> cross_val_predict(</a:t>
-            </a:r>
-            <a:br/>
-            <a:r>
-              <a:rPr>
-                <a:latin typeface="Courier"/>
-              </a:rPr>
-              <a:t>        RandomForestClassifier(</a:t>
-            </a:r>
-            <a:r>
-              <a:rPr>
-                <a:solidFill>
-                  <a:srgbClr val="40A070"/>
-                </a:solidFill>
-                <a:latin typeface="Courier"/>
-              </a:rPr>
-              <a:t>400</a:t>
-            </a:r>
-            <a:r>
-              <a:rPr>
-                <a:latin typeface="Courier"/>
-              </a:rPr>
-              <a:t>, min_samples_leaf</a:t>
-            </a:r>
-            <a:r>
-              <a:rPr>
-                <a:solidFill>
-                  <a:srgbClr val="666666"/>
-                </a:solidFill>
-                <a:latin typeface="Courier"/>
-              </a:rPr>
-              <a:t>=</a:t>
-            </a:r>
-            <a:r>
-              <a:rPr>
-                <a:solidFill>
-                  <a:srgbClr val="40A070"/>
-                </a:solidFill>
-                <a:latin typeface="Courier"/>
-              </a:rPr>
-              <a:t>3</a:t>
-            </a:r>
-            <a:r>
-              <a:rPr>
-                <a:latin typeface="Courier"/>
-              </a:rPr>
-              <a:t>, random_state</a:t>
-            </a:r>
-            <a:r>
-              <a:rPr>
-                <a:solidFill>
-                  <a:srgbClr val="666666"/>
-                </a:solidFill>
-                <a:latin typeface="Courier"/>
-              </a:rPr>
-              <a:t>=</a:t>
-            </a:r>
-            <a:r>
-              <a:rPr>
-                <a:solidFill>
-                  <a:srgbClr val="40A070"/>
-                </a:solidFill>
-                <a:latin typeface="Courier"/>
-              </a:rPr>
-              <a:t>0</a:t>
-            </a:r>
-            <a:r>
-              <a:rPr>
-                <a:latin typeface="Courier"/>
-              </a:rPr>
-              <a:t>, n_jobs</a:t>
-            </a:r>
-            <a:r>
-              <a:rPr>
-                <a:solidFill>
-                  <a:srgbClr val="666666"/>
-                </a:solidFill>
-                <a:latin typeface="Courier"/>
-              </a:rPr>
-              <a:t>=-</a:t>
-            </a:r>
-            <a:r>
-              <a:rPr>
-                <a:solidFill>
-                  <a:srgbClr val="40A070"/>
-                </a:solidFill>
-                <a:latin typeface="Courier"/>
-              </a:rPr>
-              <a:t>1</a:t>
-            </a:r>
-            <a:r>
-              <a:rPr>
-                <a:latin typeface="Courier"/>
-              </a:rPr>
-              <a:t>),</a:t>
-            </a:r>
-            <a:br/>
-            <a:r>
-              <a:rPr>
-                <a:latin typeface="Courier"/>
-              </a:rPr>
-              <a:t>        X, lab, cv</a:t>
-            </a:r>
-            <a:r>
-              <a:rPr>
-                <a:solidFill>
-                  <a:srgbClr val="666666"/>
-                </a:solidFill>
-                <a:latin typeface="Courier"/>
-              </a:rPr>
-              <a:t>=</a:t>
-            </a:r>
-            <a:r>
-              <a:rPr>
-                <a:latin typeface="Courier"/>
-              </a:rPr>
-              <a:t>StratifiedKFold(</a:t>
-            </a:r>
-            <a:r>
-              <a:rPr>
-                <a:solidFill>
-                  <a:srgbClr val="40A070"/>
-                </a:solidFill>
-                <a:latin typeface="Courier"/>
-              </a:rPr>
-              <a:t>5</a:t>
-            </a:r>
-            <a:r>
-              <a:rPr>
-                <a:latin typeface="Courier"/>
-              </a:rPr>
-              <a:t>, shuffle</a:t>
-            </a:r>
-            <a:r>
-              <a:rPr>
-                <a:solidFill>
-                  <a:srgbClr val="666666"/>
-                </a:solidFill>
-                <a:latin typeface="Courier"/>
-              </a:rPr>
-              <a:t>=</a:t>
-            </a:r>
-            <a:r>
-              <a:rPr>
-                <a:solidFill>
-                  <a:srgbClr val="19177C"/>
-                </a:solidFill>
-                <a:latin typeface="Courier"/>
-              </a:rPr>
-              <a:t>True</a:t>
-            </a:r>
-            <a:r>
-              <a:rPr>
-                <a:latin typeface="Courier"/>
-              </a:rPr>
-              <a:t>, random_state</a:t>
-            </a:r>
-            <a:r>
-              <a:rPr>
-                <a:solidFill>
-                  <a:srgbClr val="666666"/>
-                </a:solidFill>
-                <a:latin typeface="Courier"/>
-              </a:rPr>
-              <a:t>=</a:t>
-            </a:r>
-            <a:r>
-              <a:rPr>
-                <a:solidFill>
-                  <a:srgbClr val="40A070"/>
-                </a:solidFill>
-                <a:latin typeface="Courier"/>
-              </a:rPr>
-              <a:t>0</a:t>
-            </a:r>
-            <a:r>
-              <a:rPr>
-                <a:latin typeface="Courier"/>
-              </a:rPr>
-              <a:t>),</a:t>
-            </a:r>
-            <a:br/>
-            <a:r>
-              <a:rPr>
-                <a:latin typeface="Courier"/>
-              </a:rPr>
-              <a:t>        method</a:t>
-            </a:r>
-            <a:r>
-              <a:rPr>
-                <a:solidFill>
-                  <a:srgbClr val="666666"/>
-                </a:solidFill>
-                <a:latin typeface="Courier"/>
-              </a:rPr>
-              <a:t>=</a:t>
-            </a:r>
-            <a:r>
-              <a:rPr>
-                <a:solidFill>
-                  <a:srgbClr val="4070A0"/>
-                </a:solidFill>
-                <a:latin typeface="Courier"/>
-              </a:rPr>
-              <a:t>"predict_proba"</a:t>
-            </a:r>
-            <a:r>
-              <a:rPr>
-                <a:latin typeface="Courier"/>
-              </a:rPr>
-              <a:t>)[:, </a:t>
-            </a:r>
-            <a:r>
-              <a:rPr>
-                <a:solidFill>
-                  <a:srgbClr val="40A070"/>
-                </a:solidFill>
-                <a:latin typeface="Courier"/>
-              </a:rPr>
-              <a:t>1</a:t>
-            </a:r>
-            <a:r>
-              <a:rPr>
-                <a:latin typeface="Courier"/>
-              </a:rPr>
-              <a:t>]</a:t>
-            </a:r>
-            <a:br/>
-            <a:r>
-              <a:rPr>
-                <a:latin typeface="Courier"/>
-              </a:rPr>
-              <a:t>    </a:t>
-            </a:r>
-            <a:r>
-              <a:rPr b="1">
-                <a:solidFill>
-                  <a:srgbClr val="007020"/>
-                </a:solidFill>
-                <a:latin typeface="Courier"/>
-              </a:rPr>
-              <a:t>return</a:t>
-            </a:r>
-            <a:r>
-              <a:rPr>
-                <a:latin typeface="Courier"/>
-              </a:rPr>
-              <a:t> roc_auc_score(lab, p)</a:t>
-            </a:r>
-            <a:br/>
-            <a:br/>
-            <a:r>
-              <a:rPr>
-                <a:latin typeface="Courier"/>
-              </a:rPr>
-              <a:t>CUTS </a:t>
-            </a:r>
-            <a:r>
-              <a:rPr>
-                <a:solidFill>
-                  <a:srgbClr val="666666"/>
-                </a:solidFill>
-                <a:latin typeface="Courier"/>
-              </a:rPr>
-              <a:t>=</a:t>
-            </a:r>
-            <a:r>
-              <a:rPr>
-                <a:latin typeface="Courier"/>
-              </a:rPr>
-              <a:t> [</a:t>
-            </a:r>
-            <a:r>
-              <a:rPr>
-                <a:solidFill>
-                  <a:srgbClr val="40A070"/>
-                </a:solidFill>
-                <a:latin typeface="Courier"/>
-              </a:rPr>
-              <a:t>2015</a:t>
-            </a:r>
-            <a:r>
-              <a:rPr>
-                <a:latin typeface="Courier"/>
-              </a:rPr>
-              <a:t>, </a:t>
-            </a:r>
-            <a:r>
-              <a:rPr>
-                <a:solidFill>
-                  <a:srgbClr val="40A070"/>
-                </a:solidFill>
-                <a:latin typeface="Courier"/>
-              </a:rPr>
-              <a:t>2017</a:t>
-            </a:r>
-            <a:r>
-              <a:rPr>
-                <a:latin typeface="Courier"/>
-              </a:rPr>
-              <a:t>, </a:t>
-            </a:r>
-            <a:r>
-              <a:rPr>
-                <a:solidFill>
-                  <a:srgbClr val="40A070"/>
-                </a:solidFill>
-                <a:latin typeface="Courier"/>
-              </a:rPr>
-              <a:t>2019</a:t>
-            </a:r>
-            <a:r>
-              <a:rPr>
-                <a:latin typeface="Courier"/>
-              </a:rPr>
-              <a:t>, </a:t>
-            </a:r>
-            <a:r>
-              <a:rPr>
-                <a:solidFill>
-                  <a:srgbClr val="40A070"/>
-                </a:solidFill>
-                <a:latin typeface="Courier"/>
-              </a:rPr>
-              <a:t>2021</a:t>
-            </a:r>
-            <a:r>
-              <a:rPr>
-                <a:latin typeface="Courier"/>
-              </a:rPr>
-              <a:t>]</a:t>
-            </a:r>
-            <a:br/>
-            <a:r>
-              <a:rPr>
-                <a:latin typeface="Courier"/>
-              </a:rPr>
-              <a:t>lev </a:t>
-            </a:r>
-            <a:r>
-              <a:rPr>
-                <a:solidFill>
-                  <a:srgbClr val="666666"/>
-                </a:solidFill>
-                <a:latin typeface="Courier"/>
-              </a:rPr>
-              <a:t>=</a:t>
-            </a:r>
-            <a:r>
-              <a:rPr>
-                <a:latin typeface="Courier"/>
-              </a:rPr>
-              <a:t> [drift_auc(X_lev, m[</a:t>
-            </a:r>
-            <a:r>
-              <a:rPr>
-                <a:solidFill>
-                  <a:srgbClr val="4070A0"/>
-                </a:solidFill>
-                <a:latin typeface="Courier"/>
-              </a:rPr>
-              <a:t>"time"</a:t>
-            </a:r>
-            <a:r>
-              <a:rPr>
-                <a:latin typeface="Courier"/>
-              </a:rPr>
-              <a:t>].to_numpy(), c) </a:t>
-            </a:r>
-            <a:r>
-              <a:rPr b="1">
-                <a:solidFill>
-                  <a:srgbClr val="007020"/>
-                </a:solidFill>
-                <a:latin typeface="Courier"/>
-              </a:rPr>
-              <a:t>for</a:t>
-            </a:r>
-            <a:r>
-              <a:rPr>
-                <a:latin typeface="Courier"/>
-              </a:rPr>
-              <a:t> c </a:t>
-            </a:r>
-            <a:r>
-              <a:rPr b="1">
-                <a:solidFill>
-                  <a:srgbClr val="007020"/>
-                </a:solidFill>
-                <a:latin typeface="Courier"/>
-              </a:rPr>
-              <a:t>in</a:t>
-            </a:r>
-            <a:r>
-              <a:rPr>
-                <a:latin typeface="Courier"/>
-              </a:rPr>
-              <a:t> CUTS]</a:t>
-            </a:r>
-            <a:br/>
-            <a:r>
-              <a:rPr>
-                <a:latin typeface="Courier"/>
-              </a:rPr>
-              <a:t>chgs </a:t>
-            </a:r>
-            <a:r>
-              <a:rPr>
-                <a:solidFill>
-                  <a:srgbClr val="666666"/>
-                </a:solidFill>
-                <a:latin typeface="Courier"/>
-              </a:rPr>
-              <a:t>=</a:t>
-            </a:r>
-            <a:r>
-              <a:rPr>
-                <a:latin typeface="Courier"/>
-              </a:rPr>
-              <a:t> [drift_auc(X_chg, t_chg, c) </a:t>
-            </a:r>
-            <a:r>
-              <a:rPr b="1">
-                <a:solidFill>
-                  <a:srgbClr val="007020"/>
-                </a:solidFill>
-                <a:latin typeface="Courier"/>
-              </a:rPr>
-              <a:t>for</a:t>
-            </a:r>
-            <a:r>
-              <a:rPr>
-                <a:latin typeface="Courier"/>
-              </a:rPr>
-              <a:t> c </a:t>
-            </a:r>
-            <a:r>
-              <a:rPr b="1">
-                <a:solidFill>
-                  <a:srgbClr val="007020"/>
-                </a:solidFill>
-                <a:latin typeface="Courier"/>
-              </a:rPr>
-              <a:t>in</a:t>
-            </a:r>
-            <a:r>
-              <a:rPr>
-                <a:latin typeface="Courier"/>
-              </a:rPr>
-              <a:t> CUTS]</a:t>
-            </a:r>
-            <a:br/>
-            <a:r>
-              <a:rPr>
-                <a:solidFill>
-                  <a:srgbClr val="008000"/>
-                </a:solidFill>
-                <a:latin typeface="Courier"/>
-              </a:rPr>
-              <a:t>print</a:t>
-            </a:r>
-            <a:r>
-              <a:rPr>
-                <a:latin typeface="Courier"/>
-              </a:rPr>
-              <a:t>(</a:t>
-            </a:r>
-            <a:r>
-              <a:rPr>
-                <a:solidFill>
-                  <a:srgbClr val="4070A0"/>
-                </a:solidFill>
-                <a:latin typeface="Courier"/>
-              </a:rPr>
-              <a:t>"cut year :"</a:t>
-            </a:r>
-            <a:r>
-              <a:rPr>
-                <a:latin typeface="Courier"/>
-              </a:rPr>
-              <a:t>, </a:t>
-            </a:r>
-            <a:r>
-              <a:rPr>
-                <a:solidFill>
-                  <a:srgbClr val="4070A0"/>
-                </a:solidFill>
-                <a:latin typeface="Courier"/>
-              </a:rPr>
-              <a:t>"  "</a:t>
-            </a:r>
-            <a:r>
-              <a:rPr>
-                <a:latin typeface="Courier"/>
-              </a:rPr>
-              <a:t>.join(</a:t>
-            </a:r>
-            <a:r>
-              <a:rPr>
-                <a:solidFill>
-                  <a:srgbClr val="BB6688"/>
-                </a:solidFill>
-                <a:latin typeface="Courier"/>
-              </a:rPr>
-              <a:t>f"</a:t>
-            </a:r>
-            <a:r>
-              <a:rPr>
-                <a:solidFill>
-                  <a:srgbClr val="4070A0"/>
-                </a:solidFill>
-                <a:latin typeface="Courier"/>
-              </a:rPr>
-              <a:t>{</a:t>
-            </a:r>
-            <a:r>
-              <a:rPr>
-                <a:latin typeface="Courier"/>
-              </a:rPr>
-              <a:t>c</a:t>
-            </a:r>
-            <a:r>
-              <a:rPr>
-                <a:solidFill>
-                  <a:srgbClr val="4070A0"/>
-                </a:solidFill>
-                <a:latin typeface="Courier"/>
-              </a:rPr>
-              <a:t>}</a:t>
-            </a:r>
-            <a:r>
-              <a:rPr>
-                <a:solidFill>
-                  <a:srgbClr val="BB6688"/>
-                </a:solidFill>
-                <a:latin typeface="Courier"/>
-              </a:rPr>
-              <a:t>"</a:t>
-            </a:r>
-            <a:r>
-              <a:rPr>
-                <a:latin typeface="Courier"/>
-              </a:rPr>
-              <a:t> </a:t>
-            </a:r>
-            <a:r>
-              <a:rPr b="1">
-                <a:solidFill>
-                  <a:srgbClr val="007020"/>
-                </a:solidFill>
-                <a:latin typeface="Courier"/>
-              </a:rPr>
-              <a:t>for</a:t>
-            </a:r>
-            <a:r>
-              <a:rPr>
-                <a:latin typeface="Courier"/>
-              </a:rPr>
-              <a:t> c </a:t>
-            </a:r>
-            <a:r>
-              <a:rPr b="1">
-                <a:solidFill>
-                  <a:srgbClr val="007020"/>
-                </a:solidFill>
-                <a:latin typeface="Courier"/>
-              </a:rPr>
-              <a:t>in</a:t>
-            </a:r>
-            <a:r>
-              <a:rPr>
-                <a:latin typeface="Courier"/>
-              </a:rPr>
-              <a:t> CUTS))</a:t>
-            </a:r>
-            <a:br/>
-            <a:r>
-              <a:rPr>
-                <a:solidFill>
-                  <a:srgbClr val="008000"/>
-                </a:solidFill>
-                <a:latin typeface="Courier"/>
-              </a:rPr>
-              <a:t>print</a:t>
-            </a:r>
-            <a:r>
-              <a:rPr>
-                <a:latin typeface="Courier"/>
-              </a:rPr>
-              <a:t>(</a:t>
-            </a:r>
-            <a:r>
-              <a:rPr>
-                <a:solidFill>
-                  <a:srgbClr val="4070A0"/>
-                </a:solidFill>
-                <a:latin typeface="Courier"/>
-              </a:rPr>
-              <a:t>"levels   :"</a:t>
-            </a:r>
-            <a:r>
-              <a:rPr>
-                <a:latin typeface="Courier"/>
-              </a:rPr>
-              <a:t>, </a:t>
-            </a:r>
-            <a:r>
-              <a:rPr>
-                <a:solidFill>
-                  <a:srgbClr val="4070A0"/>
-                </a:solidFill>
-                <a:latin typeface="Courier"/>
-              </a:rPr>
-              <a:t>"  "</a:t>
-            </a:r>
-            <a:r>
-              <a:rPr>
-                <a:latin typeface="Courier"/>
-              </a:rPr>
-              <a:t>.join(</a:t>
-            </a:r>
-            <a:r>
-              <a:rPr>
-                <a:solidFill>
-                  <a:srgbClr val="BB6688"/>
-                </a:solidFill>
-                <a:latin typeface="Courier"/>
-              </a:rPr>
-              <a:t>f"</a:t>
-            </a:r>
-            <a:r>
-              <a:rPr>
-                <a:solidFill>
-                  <a:srgbClr val="4070A0"/>
-                </a:solidFill>
-                <a:latin typeface="Courier"/>
-              </a:rPr>
-              <a:t>{</a:t>
-            </a:r>
-            <a:r>
-              <a:rPr>
-                <a:latin typeface="Courier"/>
-              </a:rPr>
-              <a:t>v</a:t>
-            </a:r>
-            <a:r>
-              <a:rPr>
-                <a:solidFill>
-                  <a:srgbClr val="4070A0"/>
-                </a:solidFill>
-                <a:latin typeface="Courier"/>
-              </a:rPr>
-              <a:t>:.2f}</a:t>
-            </a:r>
-            <a:r>
-              <a:rPr>
-                <a:solidFill>
-                  <a:srgbClr val="BB6688"/>
-                </a:solidFill>
-                <a:latin typeface="Courier"/>
-              </a:rPr>
-              <a:t>"</a:t>
-            </a:r>
-            <a:r>
-              <a:rPr>
-                <a:latin typeface="Courier"/>
-              </a:rPr>
-              <a:t> </a:t>
-            </a:r>
-            <a:r>
-              <a:rPr b="1">
-                <a:solidFill>
-                  <a:srgbClr val="007020"/>
-                </a:solidFill>
-                <a:latin typeface="Courier"/>
-              </a:rPr>
-              <a:t>for</a:t>
-            </a:r>
-            <a:r>
-              <a:rPr>
-                <a:latin typeface="Courier"/>
-              </a:rPr>
-              <a:t> v </a:t>
-            </a:r>
-            <a:r>
-              <a:rPr b="1">
-                <a:solidFill>
-                  <a:srgbClr val="007020"/>
-                </a:solidFill>
-                <a:latin typeface="Courier"/>
-              </a:rPr>
-              <a:t>in</a:t>
-            </a:r>
-            <a:r>
-              <a:rPr>
-                <a:latin typeface="Courier"/>
-              </a:rPr>
-              <a:t> lev))</a:t>
-            </a:r>
-            <a:br/>
-            <a:r>
-              <a:rPr>
-                <a:solidFill>
-                  <a:srgbClr val="008000"/>
-                </a:solidFill>
-                <a:latin typeface="Courier"/>
-              </a:rPr>
-              <a:t>print</a:t>
-            </a:r>
-            <a:r>
-              <a:rPr>
-                <a:latin typeface="Courier"/>
-              </a:rPr>
-              <a:t>(</a:t>
-            </a:r>
-            <a:r>
-              <a:rPr>
-                <a:solidFill>
-                  <a:srgbClr val="4070A0"/>
-                </a:solidFill>
-                <a:latin typeface="Courier"/>
-              </a:rPr>
-              <a:t>"changes  :"</a:t>
-            </a:r>
-            <a:r>
-              <a:rPr>
-                <a:latin typeface="Courier"/>
-              </a:rPr>
-              <a:t>, </a:t>
-            </a:r>
-            <a:r>
-              <a:rPr>
-                <a:solidFill>
-                  <a:srgbClr val="4070A0"/>
-                </a:solidFill>
-                <a:latin typeface="Courier"/>
-              </a:rPr>
-              <a:t>"  "</a:t>
-            </a:r>
-            <a:r>
-              <a:rPr>
-                <a:latin typeface="Courier"/>
-              </a:rPr>
-              <a:t>.join(</a:t>
-            </a:r>
-            <a:r>
-              <a:rPr>
-                <a:solidFill>
-                  <a:srgbClr val="BB6688"/>
-                </a:solidFill>
-                <a:latin typeface="Courier"/>
-              </a:rPr>
-              <a:t>f"</a:t>
-            </a:r>
-            <a:r>
-              <a:rPr>
-                <a:solidFill>
-                  <a:srgbClr val="4070A0"/>
-                </a:solidFill>
-                <a:latin typeface="Courier"/>
-              </a:rPr>
-              <a:t>{</a:t>
-            </a:r>
-            <a:r>
-              <a:rPr>
-                <a:latin typeface="Courier"/>
-              </a:rPr>
-              <a:t>v</a:t>
-            </a:r>
-            <a:r>
-              <a:rPr>
-                <a:solidFill>
-                  <a:srgbClr val="4070A0"/>
-                </a:solidFill>
-                <a:latin typeface="Courier"/>
-              </a:rPr>
-              <a:t>:.2f}</a:t>
-            </a:r>
-            <a:r>
-              <a:rPr>
-                <a:solidFill>
-                  <a:srgbClr val="BB6688"/>
-                </a:solidFill>
-                <a:latin typeface="Courier"/>
-              </a:rPr>
-              <a:t>"</a:t>
-            </a:r>
-            <a:r>
-              <a:rPr>
-                <a:latin typeface="Courier"/>
-              </a:rPr>
-              <a:t> </a:t>
-            </a:r>
-            <a:r>
-              <a:rPr b="1">
-                <a:solidFill>
-                  <a:srgbClr val="007020"/>
-                </a:solidFill>
-                <a:latin typeface="Courier"/>
-              </a:rPr>
-              <a:t>for</a:t>
-            </a:r>
-            <a:r>
-              <a:rPr>
-                <a:latin typeface="Courier"/>
-              </a:rPr>
-              <a:t> v </a:t>
-            </a:r>
-            <a:r>
-              <a:rPr b="1">
-                <a:solidFill>
-                  <a:srgbClr val="007020"/>
-                </a:solidFill>
-                <a:latin typeface="Courier"/>
-              </a:rPr>
-              <a:t>in</a:t>
-            </a:r>
-            <a:r>
-              <a:rPr>
-                <a:latin typeface="Courier"/>
-              </a:rPr>
-              <a:t> chgs))</a:t>
-            </a:r>
-          </a:p>
-          <a:p>
-            <a:pPr lvl="0" indent="0">
-              <a:buNone/>
-            </a:pPr>
-            <a:r>
-              <a:rPr>
-                <a:latin typeface="Courier"/>
-              </a:rPr>
-              <a:t>cut year : 2015  2017  2019  2021
-levels   : 0.82  0.85  0.84  0.87
-changes  : 0.65  0.63  0.65  0.68</a:t>
+              <a:t>Only the first is detectable </a:t>
+            </a:r>
+            <a:r>
+              <a:rPr b="1"/>
+              <a:t>before</a:t>
+            </a:r>
+            <a:r>
+              <a:rPr/>
+              <a:t> the damage. The last is not a monitoring problem at all.</a:t>
             </a:r>
           </a:p>
         </p:txBody>
@@ -7727,7 +6561,7 @@
             </a:pPr>
             <a:r>
               <a:rPr/>
-              <a:t>Read that carefully</a:t>
+              <a:t>What each one looks like</a:t>
             </a:r>
           </a:p>
         </p:txBody>
@@ -7748,8 +6582,8 @@
         </p:blipFill>
         <p:spPr bwMode="auto">
           <a:xfrm>
-            <a:off x="647700" y="1193800"/>
-            <a:ext cx="7835900" cy="3390900"/>
+            <a:off x="457200" y="1701800"/>
+            <a:ext cx="8229600" cy="2362200"/>
           </a:xfrm>
           <a:prstGeom prst="rect">
             <a:avLst/>
@@ -7804,23 +6638,7 @@
             </a:pPr>
             <a:r>
               <a:rPr/>
-              <a:t>In levels, the classifier separates </a:t>
-            </a:r>
-            <a:r>
-              <a:rPr b="1"/>
-              <a:t>every</a:t>
-            </a:r>
-            <a:r>
-              <a:rPr/>
-              <a:t> split at AUC 0.82–0.87 — including years with no documented break. It is detecting the </a:t>
-            </a:r>
-            <a:r>
-              <a:rPr b="1"/>
-              <a:t>trend</a:t>
-            </a:r>
-            <a:r>
-              <a:rPr/>
-              <a:t>, not the regime change.</a:t>
+              <a:t>Grey: training. Red: deployment. The black line is the model you fitted; only the third panel makes it wrong, and only the fourth is your fault.</a:t>
             </a:r>
           </a:p>
         </p:txBody>
@@ -7831,6 +6649,1442 @@
 </file>
 
 <file path=ppt/slides/slide24.xml><?xml version="1.0" encoding="utf-8"?>
+<p:sld xmlns:a="http://schemas.openxmlformats.org/drawingml/2006/main" xmlns:r="http://schemas.openxmlformats.org/officeDocument/2006/relationships" xmlns:p="http://schemas.openxmlformats.org/presentationml/2006/main">
+  <p:cSld>
+    <p:spTree>
+      <p:nvGrpSpPr>
+        <p:cNvPr id="1" name=""/>
+        <p:cNvGrpSpPr/>
+        <p:nvPr/>
+      </p:nvGrpSpPr>
+      <p:grpSpPr>
+        <a:xfrm>
+          <a:off x="0" y="0"/>
+          <a:ext cx="0" cy="0"/>
+          <a:chOff x="0" y="0"/>
+          <a:chExt cx="0" cy="0"/>
+        </a:xfrm>
+      </p:grpSpPr>
+      <p:sp>
+        <p:nvSpPr>
+          <p:cNvPr id="2" name="Title 1"/>
+          <p:cNvSpPr>
+            <a:spLocks noGrp="1"/>
+          </p:cNvSpPr>
+          <p:nvPr>
+            <p:ph type="title"/>
+          </p:nvPr>
+        </p:nvSpPr>
+        <p:spPr/>
+        <p:txBody>
+          <a:bodyPr/>
+          <a:lstStyle/>
+          <a:p>
+            <a:pPr lvl="0" indent="0" marL="0">
+              <a:buNone/>
+            </a:pPr>
+            <a:r>
+              <a:rPr/>
+              <a:t>The classifier diagnostic</a:t>
+            </a:r>
+          </a:p>
+        </p:txBody>
+      </p:sp>
+      <p:sp>
+        <p:nvSpPr>
+          <p:cNvPr id="3" name="Content Placeholder 2"/>
+          <p:cNvSpPr>
+            <a:spLocks noGrp="1"/>
+          </p:cNvSpPr>
+          <p:nvPr>
+            <p:ph idx="1"/>
+          </p:nvPr>
+        </p:nvSpPr>
+        <p:spPr/>
+        <p:txBody>
+          <a:bodyPr/>
+          <a:lstStyle/>
+          <a:p>
+            <a:pPr lvl="0" indent="0" marL="0">
+              <a:buNone/>
+            </a:pPr>
+            <a:r>
+              <a:rPr/>
+              <a:t>Pool the training and deployment features, label each row by period, and try to </a:t>
+            </a:r>
+            <a:r>
+              <a:rPr b="1"/>
+              <a:t>predict the label</a:t>
+            </a:r>
+            <a:r>
+              <a:rPr/>
+              <a:t>.</a:t>
+            </a:r>
+          </a:p>
+          <a:p>
+            <a:pPr lvl="0" indent="0" marL="0">
+              <a:buNone/>
+            </a:pPr>
+            <a:r>
+              <a:rPr b="1"/>
+              <a:t>If a classifier can tell your two periods apart, so can your model’s errors.</a:t>
+            </a:r>
+            <a:r>
+              <a:rPr/>
+              <a:t> AUC near 0.5 is reassuring. Near 1.0 is an alarm.</a:t>
+            </a:r>
+          </a:p>
+          <a:p>
+            <a:pPr lvl="0" indent="0" marL="0">
+              <a:buNone/>
+            </a:pPr>
+            <a:r>
+              <a:rPr/>
+              <a:t>It costs four lines and it is the single highest-value monitoring check you can run.</a:t>
+            </a:r>
+          </a:p>
+        </p:txBody>
+      </p:sp>
+    </p:spTree>
+  </p:cSld>
+</p:sld>
+</file>
+
+<file path=ppt/slides/slide25.xml><?xml version="1.0" encoding="utf-8"?>
+<p:sld xmlns:a="http://schemas.openxmlformats.org/drawingml/2006/main" xmlns:r="http://schemas.openxmlformats.org/officeDocument/2006/relationships" xmlns:p="http://schemas.openxmlformats.org/presentationml/2006/main">
+  <p:cSld>
+    <p:spTree>
+      <p:nvGrpSpPr>
+        <p:cNvPr id="1" name=""/>
+        <p:cNvGrpSpPr/>
+        <p:nvPr/>
+      </p:nvGrpSpPr>
+      <p:grpSpPr>
+        <a:xfrm>
+          <a:off x="0" y="0"/>
+          <a:ext cx="0" cy="0"/>
+          <a:chOff x="0" y="0"/>
+          <a:chExt cx="0" cy="0"/>
+        </a:xfrm>
+      </p:grpSpPr>
+      <p:sp>
+        <p:nvSpPr>
+          <p:cNvPr id="2" name="Title 1"/>
+          <p:cNvSpPr>
+            <a:spLocks noGrp="1"/>
+          </p:cNvSpPr>
+          <p:nvPr>
+            <p:ph type="title"/>
+          </p:nvPr>
+        </p:nvSpPr>
+        <p:spPr/>
+        <p:txBody>
+          <a:bodyPr/>
+          <a:lstStyle/>
+          <a:p>
+            <a:pPr lvl="0" indent="0" marL="0">
+              <a:buNone/>
+            </a:pPr>
+            <a:r>
+              <a:rPr/>
+              <a:t>Run it — and run a placebo</a:t>
+            </a:r>
+          </a:p>
+        </p:txBody>
+      </p:sp>
+      <p:sp>
+        <p:nvSpPr>
+          <p:cNvPr id="3" name="Content Placeholder 2"/>
+          <p:cNvSpPr>
+            <a:spLocks noGrp="1"/>
+          </p:cNvSpPr>
+          <p:nvPr>
+            <p:ph idx="1"/>
+          </p:nvPr>
+        </p:nvSpPr>
+        <p:spPr/>
+        <p:txBody>
+          <a:bodyPr/>
+          <a:lstStyle/>
+          <a:p>
+            <a:pPr lvl="0" indent="0">
+              <a:buNone/>
+            </a:pPr>
+            <a:r>
+              <a:rPr>
+                <a:latin typeface="Courier"/>
+              </a:rPr>
+              <a:t>X_lev </a:t>
+            </a:r>
+            <a:r>
+              <a:rPr>
+                <a:solidFill>
+                  <a:srgbClr val="666666"/>
+                </a:solidFill>
+                <a:latin typeface="Courier"/>
+              </a:rPr>
+              <a:t>=</a:t>
+            </a:r>
+            <a:r>
+              <a:rPr>
+                <a:latin typeface="Courier"/>
+              </a:rPr>
+              <a:t> m[FEAT].to_numpy(</a:t>
+            </a:r>
+            <a:r>
+              <a:rPr>
+                <a:solidFill>
+                  <a:srgbClr val="008000"/>
+                </a:solidFill>
+                <a:latin typeface="Courier"/>
+              </a:rPr>
+              <a:t>float</a:t>
+            </a:r>
+            <a:r>
+              <a:rPr>
+                <a:latin typeface="Courier"/>
+              </a:rPr>
+              <a:t>)</a:t>
+            </a:r>
+            <a:br/>
+            <a:r>
+              <a:rPr>
+                <a:latin typeface="Courier"/>
+              </a:rPr>
+              <a:t>chg </a:t>
+            </a:r>
+            <a:r>
+              <a:rPr>
+                <a:solidFill>
+                  <a:srgbClr val="666666"/>
+                </a:solidFill>
+                <a:latin typeface="Courier"/>
+              </a:rPr>
+              <a:t>=</a:t>
+            </a:r>
+            <a:r>
+              <a:rPr>
+                <a:latin typeface="Courier"/>
+              </a:rPr>
+              <a:t> m.groupby(</a:t>
+            </a:r>
+            <a:r>
+              <a:rPr>
+                <a:solidFill>
+                  <a:srgbClr val="4070A0"/>
+                </a:solidFill>
+                <a:latin typeface="Courier"/>
+              </a:rPr>
+              <a:t>"geo"</a:t>
+            </a:r>
+            <a:r>
+              <a:rPr>
+                <a:latin typeface="Courier"/>
+              </a:rPr>
+              <a:t>)[FEAT].pct_change().replace([np.inf, </a:t>
+            </a:r>
+            <a:r>
+              <a:rPr>
+                <a:solidFill>
+                  <a:srgbClr val="666666"/>
+                </a:solidFill>
+                <a:latin typeface="Courier"/>
+              </a:rPr>
+              <a:t>-</a:t>
+            </a:r>
+            <a:r>
+              <a:rPr>
+                <a:latin typeface="Courier"/>
+              </a:rPr>
+              <a:t>np.inf], np.nan)</a:t>
+            </a:r>
+            <a:br/>
+            <a:r>
+              <a:rPr>
+                <a:latin typeface="Courier"/>
+              </a:rPr>
+              <a:t>ok </a:t>
+            </a:r>
+            <a:r>
+              <a:rPr>
+                <a:solidFill>
+                  <a:srgbClr val="666666"/>
+                </a:solidFill>
+                <a:latin typeface="Courier"/>
+              </a:rPr>
+              <a:t>=</a:t>
+            </a:r>
+            <a:r>
+              <a:rPr>
+                <a:latin typeface="Courier"/>
+              </a:rPr>
+              <a:t> chg.notna().</a:t>
+            </a:r>
+            <a:r>
+              <a:rPr>
+                <a:solidFill>
+                  <a:srgbClr val="008000"/>
+                </a:solidFill>
+                <a:latin typeface="Courier"/>
+              </a:rPr>
+              <a:t>all</a:t>
+            </a:r>
+            <a:r>
+              <a:rPr>
+                <a:latin typeface="Courier"/>
+              </a:rPr>
+              <a:t>(axis</a:t>
+            </a:r>
+            <a:r>
+              <a:rPr>
+                <a:solidFill>
+                  <a:srgbClr val="666666"/>
+                </a:solidFill>
+                <a:latin typeface="Courier"/>
+              </a:rPr>
+              <a:t>=</a:t>
+            </a:r>
+            <a:r>
+              <a:rPr>
+                <a:solidFill>
+                  <a:srgbClr val="40A070"/>
+                </a:solidFill>
+                <a:latin typeface="Courier"/>
+              </a:rPr>
+              <a:t>1</a:t>
+            </a:r>
+            <a:r>
+              <a:rPr>
+                <a:latin typeface="Courier"/>
+              </a:rPr>
+              <a:t>)</a:t>
+            </a:r>
+            <a:br/>
+            <a:r>
+              <a:rPr>
+                <a:latin typeface="Courier"/>
+              </a:rPr>
+              <a:t>X_chg, t_chg </a:t>
+            </a:r>
+            <a:r>
+              <a:rPr>
+                <a:solidFill>
+                  <a:srgbClr val="666666"/>
+                </a:solidFill>
+                <a:latin typeface="Courier"/>
+              </a:rPr>
+              <a:t>=</a:t>
+            </a:r>
+            <a:r>
+              <a:rPr>
+                <a:latin typeface="Courier"/>
+              </a:rPr>
+              <a:t> chg[ok].to_numpy(</a:t>
+            </a:r>
+            <a:r>
+              <a:rPr>
+                <a:solidFill>
+                  <a:srgbClr val="008000"/>
+                </a:solidFill>
+                <a:latin typeface="Courier"/>
+              </a:rPr>
+              <a:t>float</a:t>
+            </a:r>
+            <a:r>
+              <a:rPr>
+                <a:latin typeface="Courier"/>
+              </a:rPr>
+              <a:t>), m.loc[ok, </a:t>
+            </a:r>
+            <a:r>
+              <a:rPr>
+                <a:solidFill>
+                  <a:srgbClr val="4070A0"/>
+                </a:solidFill>
+                <a:latin typeface="Courier"/>
+              </a:rPr>
+              <a:t>"time"</a:t>
+            </a:r>
+            <a:r>
+              <a:rPr>
+                <a:latin typeface="Courier"/>
+              </a:rPr>
+              <a:t>].to_numpy()</a:t>
+            </a:r>
+            <a:br/>
+            <a:br/>
+            <a:r>
+              <a:rPr b="1">
+                <a:solidFill>
+                  <a:srgbClr val="007020"/>
+                </a:solidFill>
+                <a:latin typeface="Courier"/>
+              </a:rPr>
+              <a:t>def</a:t>
+            </a:r>
+            <a:r>
+              <a:rPr>
+                <a:latin typeface="Courier"/>
+              </a:rPr>
+              <a:t> drift_auc(X, times, cut):</a:t>
+            </a:r>
+            <a:br/>
+            <a:r>
+              <a:rPr>
+                <a:latin typeface="Courier"/>
+              </a:rPr>
+              <a:t>    lab </a:t>
+            </a:r>
+            <a:r>
+              <a:rPr>
+                <a:solidFill>
+                  <a:srgbClr val="666666"/>
+                </a:solidFill>
+                <a:latin typeface="Courier"/>
+              </a:rPr>
+              <a:t>=</a:t>
+            </a:r>
+            <a:r>
+              <a:rPr>
+                <a:latin typeface="Courier"/>
+              </a:rPr>
+              <a:t> (times </a:t>
+            </a:r>
+            <a:r>
+              <a:rPr>
+                <a:solidFill>
+                  <a:srgbClr val="666666"/>
+                </a:solidFill>
+                <a:latin typeface="Courier"/>
+              </a:rPr>
+              <a:t>&gt;=</a:t>
+            </a:r>
+            <a:r>
+              <a:rPr>
+                <a:latin typeface="Courier"/>
+              </a:rPr>
+              <a:t> cut).astype(</a:t>
+            </a:r>
+            <a:r>
+              <a:rPr>
+                <a:solidFill>
+                  <a:srgbClr val="008000"/>
+                </a:solidFill>
+                <a:latin typeface="Courier"/>
+              </a:rPr>
+              <a:t>int</a:t>
+            </a:r>
+            <a:r>
+              <a:rPr>
+                <a:latin typeface="Courier"/>
+              </a:rPr>
+              <a:t>)</a:t>
+            </a:r>
+            <a:br/>
+            <a:r>
+              <a:rPr>
+                <a:latin typeface="Courier"/>
+              </a:rPr>
+              <a:t>    p </a:t>
+            </a:r>
+            <a:r>
+              <a:rPr>
+                <a:solidFill>
+                  <a:srgbClr val="666666"/>
+                </a:solidFill>
+                <a:latin typeface="Courier"/>
+              </a:rPr>
+              <a:t>=</a:t>
+            </a:r>
+            <a:r>
+              <a:rPr>
+                <a:latin typeface="Courier"/>
+              </a:rPr>
+              <a:t> cross_val_predict(</a:t>
+            </a:r>
+            <a:br/>
+            <a:r>
+              <a:rPr>
+                <a:latin typeface="Courier"/>
+              </a:rPr>
+              <a:t>        RandomForestClassifier(</a:t>
+            </a:r>
+            <a:r>
+              <a:rPr>
+                <a:solidFill>
+                  <a:srgbClr val="40A070"/>
+                </a:solidFill>
+                <a:latin typeface="Courier"/>
+              </a:rPr>
+              <a:t>400</a:t>
+            </a:r>
+            <a:r>
+              <a:rPr>
+                <a:latin typeface="Courier"/>
+              </a:rPr>
+              <a:t>, min_samples_leaf</a:t>
+            </a:r>
+            <a:r>
+              <a:rPr>
+                <a:solidFill>
+                  <a:srgbClr val="666666"/>
+                </a:solidFill>
+                <a:latin typeface="Courier"/>
+              </a:rPr>
+              <a:t>=</a:t>
+            </a:r>
+            <a:r>
+              <a:rPr>
+                <a:solidFill>
+                  <a:srgbClr val="40A070"/>
+                </a:solidFill>
+                <a:latin typeface="Courier"/>
+              </a:rPr>
+              <a:t>3</a:t>
+            </a:r>
+            <a:r>
+              <a:rPr>
+                <a:latin typeface="Courier"/>
+              </a:rPr>
+              <a:t>, random_state</a:t>
+            </a:r>
+            <a:r>
+              <a:rPr>
+                <a:solidFill>
+                  <a:srgbClr val="666666"/>
+                </a:solidFill>
+                <a:latin typeface="Courier"/>
+              </a:rPr>
+              <a:t>=</a:t>
+            </a:r>
+            <a:r>
+              <a:rPr>
+                <a:solidFill>
+                  <a:srgbClr val="40A070"/>
+                </a:solidFill>
+                <a:latin typeface="Courier"/>
+              </a:rPr>
+              <a:t>0</a:t>
+            </a:r>
+            <a:r>
+              <a:rPr>
+                <a:latin typeface="Courier"/>
+              </a:rPr>
+              <a:t>, n_jobs</a:t>
+            </a:r>
+            <a:r>
+              <a:rPr>
+                <a:solidFill>
+                  <a:srgbClr val="666666"/>
+                </a:solidFill>
+                <a:latin typeface="Courier"/>
+              </a:rPr>
+              <a:t>=-</a:t>
+            </a:r>
+            <a:r>
+              <a:rPr>
+                <a:solidFill>
+                  <a:srgbClr val="40A070"/>
+                </a:solidFill>
+                <a:latin typeface="Courier"/>
+              </a:rPr>
+              <a:t>1</a:t>
+            </a:r>
+            <a:r>
+              <a:rPr>
+                <a:latin typeface="Courier"/>
+              </a:rPr>
+              <a:t>),</a:t>
+            </a:r>
+            <a:br/>
+            <a:r>
+              <a:rPr>
+                <a:latin typeface="Courier"/>
+              </a:rPr>
+              <a:t>        X, lab, cv</a:t>
+            </a:r>
+            <a:r>
+              <a:rPr>
+                <a:solidFill>
+                  <a:srgbClr val="666666"/>
+                </a:solidFill>
+                <a:latin typeface="Courier"/>
+              </a:rPr>
+              <a:t>=</a:t>
+            </a:r>
+            <a:r>
+              <a:rPr>
+                <a:latin typeface="Courier"/>
+              </a:rPr>
+              <a:t>StratifiedKFold(</a:t>
+            </a:r>
+            <a:r>
+              <a:rPr>
+                <a:solidFill>
+                  <a:srgbClr val="40A070"/>
+                </a:solidFill>
+                <a:latin typeface="Courier"/>
+              </a:rPr>
+              <a:t>5</a:t>
+            </a:r>
+            <a:r>
+              <a:rPr>
+                <a:latin typeface="Courier"/>
+              </a:rPr>
+              <a:t>, shuffle</a:t>
+            </a:r>
+            <a:r>
+              <a:rPr>
+                <a:solidFill>
+                  <a:srgbClr val="666666"/>
+                </a:solidFill>
+                <a:latin typeface="Courier"/>
+              </a:rPr>
+              <a:t>=</a:t>
+            </a:r>
+            <a:r>
+              <a:rPr>
+                <a:solidFill>
+                  <a:srgbClr val="19177C"/>
+                </a:solidFill>
+                <a:latin typeface="Courier"/>
+              </a:rPr>
+              <a:t>True</a:t>
+            </a:r>
+            <a:r>
+              <a:rPr>
+                <a:latin typeface="Courier"/>
+              </a:rPr>
+              <a:t>, random_state</a:t>
+            </a:r>
+            <a:r>
+              <a:rPr>
+                <a:solidFill>
+                  <a:srgbClr val="666666"/>
+                </a:solidFill>
+                <a:latin typeface="Courier"/>
+              </a:rPr>
+              <a:t>=</a:t>
+            </a:r>
+            <a:r>
+              <a:rPr>
+                <a:solidFill>
+                  <a:srgbClr val="40A070"/>
+                </a:solidFill>
+                <a:latin typeface="Courier"/>
+              </a:rPr>
+              <a:t>0</a:t>
+            </a:r>
+            <a:r>
+              <a:rPr>
+                <a:latin typeface="Courier"/>
+              </a:rPr>
+              <a:t>),</a:t>
+            </a:r>
+            <a:br/>
+            <a:r>
+              <a:rPr>
+                <a:latin typeface="Courier"/>
+              </a:rPr>
+              <a:t>        method</a:t>
+            </a:r>
+            <a:r>
+              <a:rPr>
+                <a:solidFill>
+                  <a:srgbClr val="666666"/>
+                </a:solidFill>
+                <a:latin typeface="Courier"/>
+              </a:rPr>
+              <a:t>=</a:t>
+            </a:r>
+            <a:r>
+              <a:rPr>
+                <a:solidFill>
+                  <a:srgbClr val="4070A0"/>
+                </a:solidFill>
+                <a:latin typeface="Courier"/>
+              </a:rPr>
+              <a:t>"predict_proba"</a:t>
+            </a:r>
+            <a:r>
+              <a:rPr>
+                <a:latin typeface="Courier"/>
+              </a:rPr>
+              <a:t>)[:, </a:t>
+            </a:r>
+            <a:r>
+              <a:rPr>
+                <a:solidFill>
+                  <a:srgbClr val="40A070"/>
+                </a:solidFill>
+                <a:latin typeface="Courier"/>
+              </a:rPr>
+              <a:t>1</a:t>
+            </a:r>
+            <a:r>
+              <a:rPr>
+                <a:latin typeface="Courier"/>
+              </a:rPr>
+              <a:t>]</a:t>
+            </a:r>
+            <a:br/>
+            <a:r>
+              <a:rPr>
+                <a:latin typeface="Courier"/>
+              </a:rPr>
+              <a:t>    </a:t>
+            </a:r>
+            <a:r>
+              <a:rPr b="1">
+                <a:solidFill>
+                  <a:srgbClr val="007020"/>
+                </a:solidFill>
+                <a:latin typeface="Courier"/>
+              </a:rPr>
+              <a:t>return</a:t>
+            </a:r>
+            <a:r>
+              <a:rPr>
+                <a:latin typeface="Courier"/>
+              </a:rPr>
+              <a:t> roc_auc_score(lab, p)</a:t>
+            </a:r>
+            <a:br/>
+            <a:br/>
+            <a:r>
+              <a:rPr>
+                <a:latin typeface="Courier"/>
+              </a:rPr>
+              <a:t>CUTS </a:t>
+            </a:r>
+            <a:r>
+              <a:rPr>
+                <a:solidFill>
+                  <a:srgbClr val="666666"/>
+                </a:solidFill>
+                <a:latin typeface="Courier"/>
+              </a:rPr>
+              <a:t>=</a:t>
+            </a:r>
+            <a:r>
+              <a:rPr>
+                <a:latin typeface="Courier"/>
+              </a:rPr>
+              <a:t> [</a:t>
+            </a:r>
+            <a:r>
+              <a:rPr>
+                <a:solidFill>
+                  <a:srgbClr val="40A070"/>
+                </a:solidFill>
+                <a:latin typeface="Courier"/>
+              </a:rPr>
+              <a:t>2015</a:t>
+            </a:r>
+            <a:r>
+              <a:rPr>
+                <a:latin typeface="Courier"/>
+              </a:rPr>
+              <a:t>, </a:t>
+            </a:r>
+            <a:r>
+              <a:rPr>
+                <a:solidFill>
+                  <a:srgbClr val="40A070"/>
+                </a:solidFill>
+                <a:latin typeface="Courier"/>
+              </a:rPr>
+              <a:t>2017</a:t>
+            </a:r>
+            <a:r>
+              <a:rPr>
+                <a:latin typeface="Courier"/>
+              </a:rPr>
+              <a:t>, </a:t>
+            </a:r>
+            <a:r>
+              <a:rPr>
+                <a:solidFill>
+                  <a:srgbClr val="40A070"/>
+                </a:solidFill>
+                <a:latin typeface="Courier"/>
+              </a:rPr>
+              <a:t>2019</a:t>
+            </a:r>
+            <a:r>
+              <a:rPr>
+                <a:latin typeface="Courier"/>
+              </a:rPr>
+              <a:t>, </a:t>
+            </a:r>
+            <a:r>
+              <a:rPr>
+                <a:solidFill>
+                  <a:srgbClr val="40A070"/>
+                </a:solidFill>
+                <a:latin typeface="Courier"/>
+              </a:rPr>
+              <a:t>2021</a:t>
+            </a:r>
+            <a:r>
+              <a:rPr>
+                <a:latin typeface="Courier"/>
+              </a:rPr>
+              <a:t>]</a:t>
+            </a:r>
+            <a:br/>
+            <a:r>
+              <a:rPr>
+                <a:latin typeface="Courier"/>
+              </a:rPr>
+              <a:t>lev </a:t>
+            </a:r>
+            <a:r>
+              <a:rPr>
+                <a:solidFill>
+                  <a:srgbClr val="666666"/>
+                </a:solidFill>
+                <a:latin typeface="Courier"/>
+              </a:rPr>
+              <a:t>=</a:t>
+            </a:r>
+            <a:r>
+              <a:rPr>
+                <a:latin typeface="Courier"/>
+              </a:rPr>
+              <a:t> [drift_auc(X_lev, m[</a:t>
+            </a:r>
+            <a:r>
+              <a:rPr>
+                <a:solidFill>
+                  <a:srgbClr val="4070A0"/>
+                </a:solidFill>
+                <a:latin typeface="Courier"/>
+              </a:rPr>
+              <a:t>"time"</a:t>
+            </a:r>
+            <a:r>
+              <a:rPr>
+                <a:latin typeface="Courier"/>
+              </a:rPr>
+              <a:t>].to_numpy(), c) </a:t>
+            </a:r>
+            <a:r>
+              <a:rPr b="1">
+                <a:solidFill>
+                  <a:srgbClr val="007020"/>
+                </a:solidFill>
+                <a:latin typeface="Courier"/>
+              </a:rPr>
+              <a:t>for</a:t>
+            </a:r>
+            <a:r>
+              <a:rPr>
+                <a:latin typeface="Courier"/>
+              </a:rPr>
+              <a:t> c </a:t>
+            </a:r>
+            <a:r>
+              <a:rPr b="1">
+                <a:solidFill>
+                  <a:srgbClr val="007020"/>
+                </a:solidFill>
+                <a:latin typeface="Courier"/>
+              </a:rPr>
+              <a:t>in</a:t>
+            </a:r>
+            <a:r>
+              <a:rPr>
+                <a:latin typeface="Courier"/>
+              </a:rPr>
+              <a:t> CUTS]</a:t>
+            </a:r>
+            <a:br/>
+            <a:r>
+              <a:rPr>
+                <a:latin typeface="Courier"/>
+              </a:rPr>
+              <a:t>chgs </a:t>
+            </a:r>
+            <a:r>
+              <a:rPr>
+                <a:solidFill>
+                  <a:srgbClr val="666666"/>
+                </a:solidFill>
+                <a:latin typeface="Courier"/>
+              </a:rPr>
+              <a:t>=</a:t>
+            </a:r>
+            <a:r>
+              <a:rPr>
+                <a:latin typeface="Courier"/>
+              </a:rPr>
+              <a:t> [drift_auc(X_chg, t_chg, c) </a:t>
+            </a:r>
+            <a:r>
+              <a:rPr b="1">
+                <a:solidFill>
+                  <a:srgbClr val="007020"/>
+                </a:solidFill>
+                <a:latin typeface="Courier"/>
+              </a:rPr>
+              <a:t>for</a:t>
+            </a:r>
+            <a:r>
+              <a:rPr>
+                <a:latin typeface="Courier"/>
+              </a:rPr>
+              <a:t> c </a:t>
+            </a:r>
+            <a:r>
+              <a:rPr b="1">
+                <a:solidFill>
+                  <a:srgbClr val="007020"/>
+                </a:solidFill>
+                <a:latin typeface="Courier"/>
+              </a:rPr>
+              <a:t>in</a:t>
+            </a:r>
+            <a:r>
+              <a:rPr>
+                <a:latin typeface="Courier"/>
+              </a:rPr>
+              <a:t> CUTS]</a:t>
+            </a:r>
+            <a:br/>
+            <a:r>
+              <a:rPr>
+                <a:solidFill>
+                  <a:srgbClr val="008000"/>
+                </a:solidFill>
+                <a:latin typeface="Courier"/>
+              </a:rPr>
+              <a:t>print</a:t>
+            </a:r>
+            <a:r>
+              <a:rPr>
+                <a:latin typeface="Courier"/>
+              </a:rPr>
+              <a:t>(</a:t>
+            </a:r>
+            <a:r>
+              <a:rPr>
+                <a:solidFill>
+                  <a:srgbClr val="4070A0"/>
+                </a:solidFill>
+                <a:latin typeface="Courier"/>
+              </a:rPr>
+              <a:t>"cut year :"</a:t>
+            </a:r>
+            <a:r>
+              <a:rPr>
+                <a:latin typeface="Courier"/>
+              </a:rPr>
+              <a:t>, </a:t>
+            </a:r>
+            <a:r>
+              <a:rPr>
+                <a:solidFill>
+                  <a:srgbClr val="4070A0"/>
+                </a:solidFill>
+                <a:latin typeface="Courier"/>
+              </a:rPr>
+              <a:t>"  "</a:t>
+            </a:r>
+            <a:r>
+              <a:rPr>
+                <a:latin typeface="Courier"/>
+              </a:rPr>
+              <a:t>.join(</a:t>
+            </a:r>
+            <a:r>
+              <a:rPr>
+                <a:solidFill>
+                  <a:srgbClr val="BB6688"/>
+                </a:solidFill>
+                <a:latin typeface="Courier"/>
+              </a:rPr>
+              <a:t>f"</a:t>
+            </a:r>
+            <a:r>
+              <a:rPr>
+                <a:solidFill>
+                  <a:srgbClr val="4070A0"/>
+                </a:solidFill>
+                <a:latin typeface="Courier"/>
+              </a:rPr>
+              <a:t>{</a:t>
+            </a:r>
+            <a:r>
+              <a:rPr>
+                <a:latin typeface="Courier"/>
+              </a:rPr>
+              <a:t>c</a:t>
+            </a:r>
+            <a:r>
+              <a:rPr>
+                <a:solidFill>
+                  <a:srgbClr val="4070A0"/>
+                </a:solidFill>
+                <a:latin typeface="Courier"/>
+              </a:rPr>
+              <a:t>}</a:t>
+            </a:r>
+            <a:r>
+              <a:rPr>
+                <a:solidFill>
+                  <a:srgbClr val="BB6688"/>
+                </a:solidFill>
+                <a:latin typeface="Courier"/>
+              </a:rPr>
+              <a:t>"</a:t>
+            </a:r>
+            <a:r>
+              <a:rPr>
+                <a:latin typeface="Courier"/>
+              </a:rPr>
+              <a:t> </a:t>
+            </a:r>
+            <a:r>
+              <a:rPr b="1">
+                <a:solidFill>
+                  <a:srgbClr val="007020"/>
+                </a:solidFill>
+                <a:latin typeface="Courier"/>
+              </a:rPr>
+              <a:t>for</a:t>
+            </a:r>
+            <a:r>
+              <a:rPr>
+                <a:latin typeface="Courier"/>
+              </a:rPr>
+              <a:t> c </a:t>
+            </a:r>
+            <a:r>
+              <a:rPr b="1">
+                <a:solidFill>
+                  <a:srgbClr val="007020"/>
+                </a:solidFill>
+                <a:latin typeface="Courier"/>
+              </a:rPr>
+              <a:t>in</a:t>
+            </a:r>
+            <a:r>
+              <a:rPr>
+                <a:latin typeface="Courier"/>
+              </a:rPr>
+              <a:t> CUTS))</a:t>
+            </a:r>
+            <a:br/>
+            <a:r>
+              <a:rPr>
+                <a:solidFill>
+                  <a:srgbClr val="008000"/>
+                </a:solidFill>
+                <a:latin typeface="Courier"/>
+              </a:rPr>
+              <a:t>print</a:t>
+            </a:r>
+            <a:r>
+              <a:rPr>
+                <a:latin typeface="Courier"/>
+              </a:rPr>
+              <a:t>(</a:t>
+            </a:r>
+            <a:r>
+              <a:rPr>
+                <a:solidFill>
+                  <a:srgbClr val="4070A0"/>
+                </a:solidFill>
+                <a:latin typeface="Courier"/>
+              </a:rPr>
+              <a:t>"levels   :"</a:t>
+            </a:r>
+            <a:r>
+              <a:rPr>
+                <a:latin typeface="Courier"/>
+              </a:rPr>
+              <a:t>, </a:t>
+            </a:r>
+            <a:r>
+              <a:rPr>
+                <a:solidFill>
+                  <a:srgbClr val="4070A0"/>
+                </a:solidFill>
+                <a:latin typeface="Courier"/>
+              </a:rPr>
+              <a:t>"  "</a:t>
+            </a:r>
+            <a:r>
+              <a:rPr>
+                <a:latin typeface="Courier"/>
+              </a:rPr>
+              <a:t>.join(</a:t>
+            </a:r>
+            <a:r>
+              <a:rPr>
+                <a:solidFill>
+                  <a:srgbClr val="BB6688"/>
+                </a:solidFill>
+                <a:latin typeface="Courier"/>
+              </a:rPr>
+              <a:t>f"</a:t>
+            </a:r>
+            <a:r>
+              <a:rPr>
+                <a:solidFill>
+                  <a:srgbClr val="4070A0"/>
+                </a:solidFill>
+                <a:latin typeface="Courier"/>
+              </a:rPr>
+              <a:t>{</a:t>
+            </a:r>
+            <a:r>
+              <a:rPr>
+                <a:latin typeface="Courier"/>
+              </a:rPr>
+              <a:t>v</a:t>
+            </a:r>
+            <a:r>
+              <a:rPr>
+                <a:solidFill>
+                  <a:srgbClr val="4070A0"/>
+                </a:solidFill>
+                <a:latin typeface="Courier"/>
+              </a:rPr>
+              <a:t>:.2f}</a:t>
+            </a:r>
+            <a:r>
+              <a:rPr>
+                <a:solidFill>
+                  <a:srgbClr val="BB6688"/>
+                </a:solidFill>
+                <a:latin typeface="Courier"/>
+              </a:rPr>
+              <a:t>"</a:t>
+            </a:r>
+            <a:r>
+              <a:rPr>
+                <a:latin typeface="Courier"/>
+              </a:rPr>
+              <a:t> </a:t>
+            </a:r>
+            <a:r>
+              <a:rPr b="1">
+                <a:solidFill>
+                  <a:srgbClr val="007020"/>
+                </a:solidFill>
+                <a:latin typeface="Courier"/>
+              </a:rPr>
+              <a:t>for</a:t>
+            </a:r>
+            <a:r>
+              <a:rPr>
+                <a:latin typeface="Courier"/>
+              </a:rPr>
+              <a:t> v </a:t>
+            </a:r>
+            <a:r>
+              <a:rPr b="1">
+                <a:solidFill>
+                  <a:srgbClr val="007020"/>
+                </a:solidFill>
+                <a:latin typeface="Courier"/>
+              </a:rPr>
+              <a:t>in</a:t>
+            </a:r>
+            <a:r>
+              <a:rPr>
+                <a:latin typeface="Courier"/>
+              </a:rPr>
+              <a:t> lev))</a:t>
+            </a:r>
+            <a:br/>
+            <a:r>
+              <a:rPr>
+                <a:solidFill>
+                  <a:srgbClr val="008000"/>
+                </a:solidFill>
+                <a:latin typeface="Courier"/>
+              </a:rPr>
+              <a:t>print</a:t>
+            </a:r>
+            <a:r>
+              <a:rPr>
+                <a:latin typeface="Courier"/>
+              </a:rPr>
+              <a:t>(</a:t>
+            </a:r>
+            <a:r>
+              <a:rPr>
+                <a:solidFill>
+                  <a:srgbClr val="4070A0"/>
+                </a:solidFill>
+                <a:latin typeface="Courier"/>
+              </a:rPr>
+              <a:t>"changes  :"</a:t>
+            </a:r>
+            <a:r>
+              <a:rPr>
+                <a:latin typeface="Courier"/>
+              </a:rPr>
+              <a:t>, </a:t>
+            </a:r>
+            <a:r>
+              <a:rPr>
+                <a:solidFill>
+                  <a:srgbClr val="4070A0"/>
+                </a:solidFill>
+                <a:latin typeface="Courier"/>
+              </a:rPr>
+              <a:t>"  "</a:t>
+            </a:r>
+            <a:r>
+              <a:rPr>
+                <a:latin typeface="Courier"/>
+              </a:rPr>
+              <a:t>.join(</a:t>
+            </a:r>
+            <a:r>
+              <a:rPr>
+                <a:solidFill>
+                  <a:srgbClr val="BB6688"/>
+                </a:solidFill>
+                <a:latin typeface="Courier"/>
+              </a:rPr>
+              <a:t>f"</a:t>
+            </a:r>
+            <a:r>
+              <a:rPr>
+                <a:solidFill>
+                  <a:srgbClr val="4070A0"/>
+                </a:solidFill>
+                <a:latin typeface="Courier"/>
+              </a:rPr>
+              <a:t>{</a:t>
+            </a:r>
+            <a:r>
+              <a:rPr>
+                <a:latin typeface="Courier"/>
+              </a:rPr>
+              <a:t>v</a:t>
+            </a:r>
+            <a:r>
+              <a:rPr>
+                <a:solidFill>
+                  <a:srgbClr val="4070A0"/>
+                </a:solidFill>
+                <a:latin typeface="Courier"/>
+              </a:rPr>
+              <a:t>:.2f}</a:t>
+            </a:r>
+            <a:r>
+              <a:rPr>
+                <a:solidFill>
+                  <a:srgbClr val="BB6688"/>
+                </a:solidFill>
+                <a:latin typeface="Courier"/>
+              </a:rPr>
+              <a:t>"</a:t>
+            </a:r>
+            <a:r>
+              <a:rPr>
+                <a:latin typeface="Courier"/>
+              </a:rPr>
+              <a:t> </a:t>
+            </a:r>
+            <a:r>
+              <a:rPr b="1">
+                <a:solidFill>
+                  <a:srgbClr val="007020"/>
+                </a:solidFill>
+                <a:latin typeface="Courier"/>
+              </a:rPr>
+              <a:t>for</a:t>
+            </a:r>
+            <a:r>
+              <a:rPr>
+                <a:latin typeface="Courier"/>
+              </a:rPr>
+              <a:t> v </a:t>
+            </a:r>
+            <a:r>
+              <a:rPr b="1">
+                <a:solidFill>
+                  <a:srgbClr val="007020"/>
+                </a:solidFill>
+                <a:latin typeface="Courier"/>
+              </a:rPr>
+              <a:t>in</a:t>
+            </a:r>
+            <a:r>
+              <a:rPr>
+                <a:latin typeface="Courier"/>
+              </a:rPr>
+              <a:t> chgs))</a:t>
+            </a:r>
+          </a:p>
+          <a:p>
+            <a:pPr lvl="0" indent="0">
+              <a:buNone/>
+            </a:pPr>
+            <a:r>
+              <a:rPr>
+                <a:latin typeface="Courier"/>
+              </a:rPr>
+              <a:t>cut year : 2015  2017  2019  2021
+levels   : 0.82  0.85  0.84  0.87
+changes  : 0.65  0.63  0.65  0.68</a:t>
+            </a:r>
+          </a:p>
+        </p:txBody>
+      </p:sp>
+    </p:spTree>
+  </p:cSld>
+</p:sld>
+</file>
+
+<file path=ppt/slides/slide26.xml><?xml version="1.0" encoding="utf-8"?>
+<p:sld xmlns:a="http://schemas.openxmlformats.org/drawingml/2006/main" xmlns:r="http://schemas.openxmlformats.org/officeDocument/2006/relationships" xmlns:p="http://schemas.openxmlformats.org/presentationml/2006/main">
+  <p:cSld>
+    <p:spTree>
+      <p:nvGrpSpPr>
+        <p:cNvPr id="1" name=""/>
+        <p:cNvGrpSpPr/>
+        <p:nvPr/>
+      </p:nvGrpSpPr>
+      <p:grpSpPr>
+        <a:xfrm>
+          <a:off x="0" y="0"/>
+          <a:ext cx="0" cy="0"/>
+          <a:chOff x="0" y="0"/>
+          <a:chExt cx="0" cy="0"/>
+        </a:xfrm>
+      </p:grpSpPr>
+      <p:sp>
+        <p:nvSpPr>
+          <p:cNvPr id="2" name="Title 1"/>
+          <p:cNvSpPr>
+            <a:spLocks noGrp="1"/>
+          </p:cNvSpPr>
+          <p:nvPr>
+            <p:ph type="title"/>
+          </p:nvPr>
+        </p:nvSpPr>
+        <p:spPr/>
+        <p:txBody>
+          <a:bodyPr/>
+          <a:lstStyle/>
+          <a:p>
+            <a:pPr lvl="0" indent="0" marL="0">
+              <a:buNone/>
+            </a:pPr>
+            <a:r>
+              <a:rPr/>
+              <a:t>Read that carefully</a:t>
+            </a:r>
+          </a:p>
+        </p:txBody>
+      </p:sp>
+      <p:pic>
+        <p:nvPicPr>
+          <p:cNvPr descr="slides_files/figure-pptx/cell-10-output-1.png" id="0" name="Picture 1"/>
+          <p:cNvPicPr>
+            <a:picLocks noGrp="1" noChangeAspect="1"/>
+          </p:cNvPicPr>
+          <p:nvPr/>
+        </p:nvPicPr>
+        <p:blipFill>
+          <a:blip r:embed="rId2"/>
+          <a:stretch>
+            <a:fillRect/>
+          </a:stretch>
+        </p:blipFill>
+        <p:spPr bwMode="auto">
+          <a:xfrm>
+            <a:off x="647700" y="1193800"/>
+            <a:ext cx="7835900" cy="3390900"/>
+          </a:xfrm>
+          <a:prstGeom prst="rect">
+            <a:avLst/>
+          </a:prstGeom>
+          <a:noFill/>
+          <a:ln w="9525">
+            <a:noFill/>
+            <a:headEnd/>
+            <a:tailEnd/>
+          </a:ln>
+        </p:spPr>
+      </p:pic>
+    </p:spTree>
+  </p:cSld>
+</p:sld>
+</file>
+
+<file path=ppt/slides/slide27.xml><?xml version="1.0" encoding="utf-8"?>
+<p:sld xmlns:a="http://schemas.openxmlformats.org/drawingml/2006/main" xmlns:r="http://schemas.openxmlformats.org/officeDocument/2006/relationships" xmlns:p="http://schemas.openxmlformats.org/presentationml/2006/main">
+  <p:cSld>
+    <p:spTree>
+      <p:nvGrpSpPr>
+        <p:cNvPr id="1" name=""/>
+        <p:cNvGrpSpPr/>
+        <p:nvPr/>
+      </p:nvGrpSpPr>
+      <p:grpSpPr>
+        <a:xfrm>
+          <a:off x="0" y="0"/>
+          <a:ext cx="0" cy="0"/>
+          <a:chOff x="0" y="0"/>
+          <a:chExt cx="0" cy="0"/>
+        </a:xfrm>
+      </p:grpSpPr>
+      <p:sp>
+        <p:nvSpPr>
+          <p:cNvPr id="3" name="Content Placeholder 2"/>
+          <p:cNvSpPr>
+            <a:spLocks noGrp="1"/>
+          </p:cNvSpPr>
+          <p:nvPr>
+            <p:ph idx="1"/>
+          </p:nvPr>
+        </p:nvSpPr>
+        <p:spPr/>
+        <p:txBody>
+          <a:bodyPr/>
+          <a:lstStyle/>
+          <a:p>
+            <a:pPr lvl="0" indent="0" marL="0">
+              <a:buNone/>
+            </a:pPr>
+            <a:r>
+              <a:rPr/>
+              <a:t>In levels, the classifier separates </a:t>
+            </a:r>
+            <a:r>
+              <a:rPr b="1"/>
+              <a:t>every</a:t>
+            </a:r>
+            <a:r>
+              <a:rPr/>
+              <a:t> split at AUC 0.82–0.87 — including years with no documented break. It is detecting the </a:t>
+            </a:r>
+            <a:r>
+              <a:rPr b="1"/>
+              <a:t>trend</a:t>
+            </a:r>
+            <a:r>
+              <a:rPr/>
+              <a:t>, not the regime change.</a:t>
+            </a:r>
+          </a:p>
+        </p:txBody>
+      </p:sp>
+    </p:spTree>
+  </p:cSld>
+</p:sld>
+</file>
+
+<file path=ppt/slides/slide28.xml><?xml version="1.0" encoding="utf-8"?>
 <p:sld xmlns:a="http://schemas.openxmlformats.org/drawingml/2006/main" xmlns:r="http://schemas.openxmlformats.org/officeDocument/2006/relationships" xmlns:p="http://schemas.openxmlformats.org/presentationml/2006/main">
   <p:cSld>
     <p:spTree>
@@ -7951,394 +8205,6 @@
 </p:sld>
 </file>
 
-<file path=ppt/slides/slide25.xml><?xml version="1.0" encoding="utf-8"?>
-<p:sld xmlns:a="http://schemas.openxmlformats.org/drawingml/2006/main" xmlns:r="http://schemas.openxmlformats.org/officeDocument/2006/relationships" xmlns:p="http://schemas.openxmlformats.org/presentationml/2006/main">
-  <p:cSld>
-    <p:spTree>
-      <p:nvGrpSpPr>
-        <p:cNvPr id="1" name=""/>
-        <p:cNvGrpSpPr/>
-        <p:nvPr/>
-      </p:nvGrpSpPr>
-      <p:grpSpPr>
-        <a:xfrm>
-          <a:off x="0" y="0"/>
-          <a:ext cx="0" cy="0"/>
-          <a:chOff x="0" y="0"/>
-          <a:chExt cx="0" cy="0"/>
-        </a:xfrm>
-      </p:grpSpPr>
-      <p:sp>
-        <p:nvSpPr>
-          <p:cNvPr id="2" name="Title 1"/>
-          <p:cNvSpPr>
-            <a:spLocks noGrp="1"/>
-          </p:cNvSpPr>
-          <p:nvPr>
-            <p:ph type="title"/>
-          </p:nvPr>
-        </p:nvSpPr>
-        <p:spPr>
-          <a:xfrm>
-            <a:off x="722313" y="1850000"/>
-            <a:ext cx="7772400" cy="1300000"/>
-          </a:xfrm>
-        </p:spPr>
-        <p:txBody>
-          <a:bodyPr/>
-          <a:lstStyle/>
-          <a:p>
-            <a:pPr lvl="0" indent="0" marL="0">
-              <a:buNone/>
-            </a:pPr>
-            <a:r>
-              <a:rPr/>
-              <a:t>4 · Goodhart</a:t>
-            </a:r>
-          </a:p>
-        </p:txBody>
-      </p:sp>
-    </p:spTree>
-  </p:cSld>
-</p:sld>
-</file>
-
-<file path=ppt/slides/slide26.xml><?xml version="1.0" encoding="utf-8"?>
-<p:sld xmlns:a="http://schemas.openxmlformats.org/drawingml/2006/main" xmlns:r="http://schemas.openxmlformats.org/officeDocument/2006/relationships" xmlns:p="http://schemas.openxmlformats.org/presentationml/2006/main">
-  <p:cSld>
-    <p:spTree>
-      <p:nvGrpSpPr>
-        <p:cNvPr id="1" name=""/>
-        <p:cNvGrpSpPr/>
-        <p:nvPr/>
-      </p:nvGrpSpPr>
-      <p:grpSpPr>
-        <a:xfrm>
-          <a:off x="0" y="0"/>
-          <a:ext cx="0" cy="0"/>
-          <a:chOff x="0" y="0"/>
-          <a:chExt cx="0" cy="0"/>
-        </a:xfrm>
-      </p:grpSpPr>
-      <p:sp>
-        <p:nvSpPr>
-          <p:cNvPr id="2" name="Title 1"/>
-          <p:cNvSpPr>
-            <a:spLocks noGrp="1"/>
-          </p:cNvSpPr>
-          <p:nvPr>
-            <p:ph type="title"/>
-          </p:nvPr>
-        </p:nvSpPr>
-        <p:spPr/>
-        <p:txBody>
-          <a:bodyPr/>
-          <a:lstStyle/>
-          <a:p>
-            <a:pPr lvl="0" indent="0" marL="0">
-              <a:buNone/>
-            </a:pPr>
-            <a:r>
-              <a:rPr/>
-              <a:t>Stated precisely for this course</a:t>
-            </a:r>
-          </a:p>
-        </p:txBody>
-      </p:sp>
-      <p:sp>
-        <p:nvSpPr>
-          <p:cNvPr id="3" name="Content Placeholder 2"/>
-          <p:cNvSpPr>
-            <a:spLocks noGrp="1"/>
-          </p:cNvSpPr>
-          <p:nvPr>
-            <p:ph idx="1"/>
-          </p:nvPr>
-        </p:nvSpPr>
-        <p:spPr/>
-        <p:txBody>
-          <a:bodyPr/>
-          <a:lstStyle/>
-          <a:p>
-            <a:pPr lvl="0" indent="0" marL="1270000">
-              <a:buNone/>
-            </a:pPr>
-            <a:r>
-              <a:rPr sz="2000"/>
-              <a:t>When a measure becomes a target, the relationship the model learned between measure and outcome is </a:t>
-            </a:r>
-            <a:r>
-              <a:rPr sz="2000" b="1"/>
-              <a:t>exactly the relationship agents have an incentive to break</a:t>
-            </a:r>
-            <a:r>
-              <a:rPr sz="2000"/>
-              <a:t>.</a:t>
-            </a:r>
-          </a:p>
-          <a:p>
-            <a:pPr lvl="0" indent="0" marL="0">
-              <a:buNone/>
-            </a:pPr>
-            <a:r>
-              <a:rPr/>
-              <a:t>A credit-scoring feature that predicts default only until applicants learn it is used is not a stable feature. It was never a feature of the world; it was a feature of the world </a:t>
-            </a:r>
-            <a:r>
-              <a:rPr i="1"/>
-              <a:t>before your model existed in it</a:t>
-            </a:r>
-            <a:r>
-              <a:rPr/>
-              <a:t>.</a:t>
-            </a:r>
-          </a:p>
-          <a:p>
-            <a:pPr lvl="0" indent="0" marL="0">
-              <a:buNone/>
-            </a:pPr>
-            <a:r>
-              <a:rPr/>
-              <a:t>This is a </a:t>
-            </a:r>
-            <a:r>
-              <a:rPr b="1"/>
-              <a:t>causal</a:t>
-            </a:r>
-            <a:r>
-              <a:rPr/>
-              <a:t> problem (Session 10), not a monitoring problem. No amount of retraining solves it, because every retrain teaches the agents faster.</a:t>
-            </a:r>
-          </a:p>
-        </p:txBody>
-      </p:sp>
-    </p:spTree>
-  </p:cSld>
-</p:sld>
-</file>
-
-<file path=ppt/slides/slide27.xml><?xml version="1.0" encoding="utf-8"?>
-<p:sld xmlns:a="http://schemas.openxmlformats.org/drawingml/2006/main" xmlns:r="http://schemas.openxmlformats.org/officeDocument/2006/relationships" xmlns:p="http://schemas.openxmlformats.org/presentationml/2006/main">
-  <p:cSld>
-    <p:spTree>
-      <p:nvGrpSpPr>
-        <p:cNvPr id="1" name=""/>
-        <p:cNvGrpSpPr/>
-        <p:nvPr/>
-      </p:nvGrpSpPr>
-      <p:grpSpPr>
-        <a:xfrm>
-          <a:off x="0" y="0"/>
-          <a:ext cx="0" cy="0"/>
-          <a:chOff x="0" y="0"/>
-          <a:chExt cx="0" cy="0"/>
-        </a:xfrm>
-      </p:grpSpPr>
-      <p:sp>
-        <p:nvSpPr>
-          <p:cNvPr id="2" name="Title 1"/>
-          <p:cNvSpPr>
-            <a:spLocks noGrp="1"/>
-          </p:cNvSpPr>
-          <p:nvPr>
-            <p:ph type="title"/>
-          </p:nvPr>
-        </p:nvSpPr>
-        <p:spPr>
-          <a:xfrm>
-            <a:off x="722313" y="1850000"/>
-            <a:ext cx="7772400" cy="1300000"/>
-          </a:xfrm>
-        </p:spPr>
-        <p:txBody>
-          <a:bodyPr/>
-          <a:lstStyle/>
-          <a:p>
-            <a:pPr lvl="0" indent="0" marL="0">
-              <a:buNone/>
-            </a:pPr>
-            <a:r>
-              <a:rPr/>
-              <a:t>5 · Governance</a:t>
-            </a:r>
-          </a:p>
-        </p:txBody>
-      </p:sp>
-    </p:spTree>
-  </p:cSld>
-</p:sld>
-</file>
-
-<file path=ppt/slides/slide28.xml><?xml version="1.0" encoding="utf-8"?>
-<p:sld xmlns:a="http://schemas.openxmlformats.org/drawingml/2006/main" xmlns:r="http://schemas.openxmlformats.org/officeDocument/2006/relationships" xmlns:p="http://schemas.openxmlformats.org/presentationml/2006/main">
-  <p:cSld>
-    <p:spTree>
-      <p:nvGrpSpPr>
-        <p:cNvPr id="1" name=""/>
-        <p:cNvGrpSpPr/>
-        <p:nvPr/>
-      </p:nvGrpSpPr>
-      <p:grpSpPr>
-        <a:xfrm>
-          <a:off x="0" y="0"/>
-          <a:ext cx="0" cy="0"/>
-          <a:chOff x="0" y="0"/>
-          <a:chExt cx="0" cy="0"/>
-        </a:xfrm>
-      </p:grpSpPr>
-      <p:sp>
-        <p:nvSpPr>
-          <p:cNvPr id="2" name="Title 1"/>
-          <p:cNvSpPr>
-            <a:spLocks noGrp="1"/>
-          </p:cNvSpPr>
-          <p:nvPr>
-            <p:ph type="title"/>
-          </p:nvPr>
-        </p:nvSpPr>
-        <p:spPr/>
-        <p:txBody>
-          <a:bodyPr/>
-          <a:lstStyle/>
-          <a:p>
-            <a:pPr lvl="0" indent="0" marL="0">
-              <a:buNone/>
-            </a:pPr>
-            <a:r>
-              <a:rPr/>
-              <a:t>What a deployable model comes with</a:t>
-            </a:r>
-          </a:p>
-        </p:txBody>
-      </p:sp>
-      <p:sp>
-        <p:nvSpPr>
-          <p:cNvPr id="3" name="Content Placeholder 2"/>
-          <p:cNvSpPr>
-            <a:spLocks noGrp="1"/>
-          </p:cNvSpPr>
-          <p:nvPr>
-            <p:ph idx="1"/>
-          </p:nvPr>
-        </p:nvSpPr>
-        <p:spPr/>
-        <p:txBody>
-          <a:bodyPr/>
-          <a:lstStyle/>
-          <a:p>
-            <a:pPr lvl="0" indent="-342900" marL="342900">
-              <a:buAutoNum type="arabicPeriod"/>
-            </a:pPr>
-            <a:r>
-              <a:rPr b="1"/>
-              <a:t>Intended use, and out-of-scope uses</a:t>
-            </a:r>
-            <a:r>
-              <a:rPr/>
-              <a:t> — what decision, and what it must </a:t>
-            </a:r>
-            <a:r>
-              <a:rPr i="1"/>
-              <a:t>not</a:t>
-            </a:r>
-            <a:r>
-              <a:rPr/>
-              <a:t> be used for</a:t>
-            </a:r>
-          </a:p>
-          <a:p>
-            <a:pPr lvl="0" indent="-342900" marL="342900">
-              <a:buAutoNum type="arabicPeriod"/>
-            </a:pPr>
-            <a:r>
-              <a:rPr b="1"/>
-              <a:t>Data lineage</a:t>
-            </a:r>
-            <a:r>
-              <a:rPr/>
-              <a:t> — sources, vintages, collection dates, licences, quality issues, checksums</a:t>
-            </a:r>
-          </a:p>
-          <a:p>
-            <a:pPr lvl="0" indent="-342900" marL="342900">
-              <a:buAutoNum type="arabicPeriod"/>
-            </a:pPr>
-            <a:r>
-              <a:rPr b="1"/>
-              <a:t>Preprocessing</a:t>
-            </a:r>
-            <a:r>
-              <a:rPr/>
-              <a:t> — every transformation, in order, with the code</a:t>
-            </a:r>
-          </a:p>
-          <a:p>
-            <a:pPr lvl="0" indent="-342900" marL="342900">
-              <a:buAutoNum type="arabicPeriod"/>
-            </a:pPr>
-            <a:r>
-              <a:rPr b="1"/>
-              <a:t>Validation</a:t>
-            </a:r>
-            <a:r>
-              <a:rPr/>
-              <a:t> — the design, </a:t>
-            </a:r>
-            <a:r>
-              <a:rPr i="1"/>
-              <a:t>why it matches deployment</a:t>
-            </a:r>
-            <a:r>
-              <a:rPr/>
-              <a:t>, metrics, benchmark, subgroup performance</a:t>
-            </a:r>
-          </a:p>
-          <a:p>
-            <a:pPr lvl="0" indent="-342900" marL="342900">
-              <a:buAutoNum type="arabicPeriod"/>
-            </a:pPr>
-            <a:r>
-              <a:rPr b="1"/>
-              <a:t>Limitations</a:t>
-            </a:r>
-            <a:r>
-              <a:rPr/>
-              <a:t> — where it performs worst, who is under-represented, what is load-bearing</a:t>
-            </a:r>
-          </a:p>
-          <a:p>
-            <a:pPr lvl="0" indent="-342900" marL="342900">
-              <a:buAutoNum type="arabicPeriod"/>
-            </a:pPr>
-            <a:r>
-              <a:rPr b="1"/>
-              <a:t>Monitoring plan</a:t>
-            </a:r>
-            <a:r>
-              <a:rPr/>
-              <a:t> — which quantities, at what frequency, and what triggers review</a:t>
-            </a:r>
-          </a:p>
-          <a:p>
-            <a:pPr lvl="0" indent="-342900" marL="342900">
-              <a:buAutoNum type="arabicPeriod"/>
-            </a:pPr>
-            <a:r>
-              <a:rPr b="1"/>
-              <a:t>Ownership</a:t>
-            </a:r>
-            <a:r>
-              <a:rPr/>
-              <a:t> — who is accountable, and the retirement criterion</a:t>
-            </a:r>
-          </a:p>
-        </p:txBody>
-      </p:sp>
-    </p:spTree>
-  </p:cSld>
-</p:sld>
-</file>
-
 <file path=ppt/slides/slide29.xml><?xml version="1.0" encoding="utf-8"?>
 <p:sld xmlns:a="http://schemas.openxmlformats.org/drawingml/2006/main" xmlns:r="http://schemas.openxmlformats.org/officeDocument/2006/relationships" xmlns:p="http://schemas.openxmlformats.org/presentationml/2006/main">
   <p:cSld>
@@ -8366,7 +8232,12 @@
             <p:ph type="title"/>
           </p:nvPr>
         </p:nvSpPr>
-        <p:spPr/>
+        <p:spPr>
+          <a:xfrm>
+            <a:off x="722313" y="1850000"/>
+            <a:ext cx="7772400" cy="1300000"/>
+          </a:xfrm>
+        </p:spPr>
         <p:txBody>
           <a:bodyPr/>
           <a:lstStyle/>
@@ -8376,81 +8247,7 @@
             </a:pPr>
             <a:r>
               <a:rPr/>
-              <a:t>This is not bureaucracy</a:t>
-            </a:r>
-          </a:p>
-        </p:txBody>
-      </p:sp>
-      <p:sp>
-        <p:nvSpPr>
-          <p:cNvPr id="3" name="Content Placeholder 2"/>
-          <p:cNvSpPr>
-            <a:spLocks noGrp="1"/>
-          </p:cNvSpPr>
-          <p:nvPr>
-            <p:ph idx="1"/>
-          </p:nvPr>
-        </p:nvSpPr>
-        <p:spPr/>
-        <p:txBody>
-          <a:bodyPr/>
-          <a:lstStyle/>
-          <a:p>
-            <a:pPr lvl="0" indent="0" marL="0">
-              <a:buNone/>
-            </a:pPr>
-            <a:r>
-              <a:rPr/>
-              <a:t>Sections </a:t>
-            </a:r>
-            <a:r>
-              <a:rPr b="1"/>
-              <a:t>5</a:t>
-            </a:r>
-            <a:r>
-              <a:rPr/>
-              <a:t> and </a:t>
-            </a:r>
-            <a:r>
-              <a:rPr b="1"/>
-              <a:t>6</a:t>
-            </a:r>
-            <a:r>
-              <a:rPr/>
-              <a:t> are where the intellectual content of this entire course finally has to be written down for somebody else.</a:t>
-            </a:r>
-          </a:p>
-          <a:p>
-            <a:pPr lvl="0"/>
-            <a:r>
-              <a:rPr/>
-              <a:t>Section 5 is Sessions 03, 06 and 10: what is load-bearing, and where does it fail</a:t>
-            </a:r>
-          </a:p>
-          <a:p>
-            <a:pPr lvl="0"/>
-            <a:r>
-              <a:rPr/>
-              <a:t>Section 6 is Sessions 04, 08 and 11: what would tell you it has stopped working</a:t>
-            </a:r>
-          </a:p>
-          <a:p>
-            <a:pPr lvl="0" indent="0" marL="0">
-              <a:buNone/>
-            </a:pPr>
-            <a:r>
-              <a:rPr/>
-              <a:t>If you cannot fill in sections 5 and 6, you do not understand your own model well enough to deploy it. Template: </a:t>
-            </a:r>
-            <a:r>
-              <a:rPr>
-                <a:latin typeface="Courier"/>
-              </a:rPr>
-              <a:t>02-practice/governance-file-template.md</a:t>
-            </a:r>
-            <a:r>
-              <a:rPr/>
-              <a:t>.</a:t>
+              <a:t>4 · Goodhart</a:t>
             </a:r>
           </a:p>
         </p:txBody>
@@ -8800,14 +8597,595 @@
             </a:pPr>
             <a:r>
               <a:rPr/>
-              <a:t>A monitoring plan is a threshold, not a hope</a:t>
+              <a:t>Stated precisely for this course</a:t>
+            </a:r>
+          </a:p>
+        </p:txBody>
+      </p:sp>
+      <p:sp>
+        <p:nvSpPr>
+          <p:cNvPr id="3" name="Content Placeholder 2"/>
+          <p:cNvSpPr>
+            <a:spLocks noGrp="1"/>
+          </p:cNvSpPr>
+          <p:nvPr>
+            <p:ph idx="1"/>
+          </p:nvPr>
+        </p:nvSpPr>
+        <p:spPr/>
+        <p:txBody>
+          <a:bodyPr/>
+          <a:lstStyle/>
+          <a:p>
+            <a:pPr lvl="0" indent="0" marL="1270000">
+              <a:buNone/>
+            </a:pPr>
+            <a:r>
+              <a:rPr sz="2000"/>
+              <a:t>When a measure becomes a target, the relationship the model learned between measure and outcome is </a:t>
+            </a:r>
+            <a:r>
+              <a:rPr sz="2000" b="1"/>
+              <a:t>exactly the relationship agents have an incentive to break</a:t>
+            </a:r>
+            <a:r>
+              <a:rPr sz="2000"/>
+              <a:t>.</a:t>
+            </a:r>
+          </a:p>
+          <a:p>
+            <a:pPr lvl="0" indent="0" marL="0">
+              <a:buNone/>
+            </a:pPr>
+            <a:r>
+              <a:rPr/>
+              <a:t>A credit-scoring feature that predicts default only until applicants learn it is used is not a stable feature. It was never a feature of the world; it was a feature of the world </a:t>
+            </a:r>
+            <a:r>
+              <a:rPr i="1"/>
+              <a:t>before your model existed in it</a:t>
+            </a:r>
+            <a:r>
+              <a:rPr/>
+              <a:t>.</a:t>
+            </a:r>
+          </a:p>
+          <a:p>
+            <a:pPr lvl="0" indent="0" marL="0">
+              <a:buNone/>
+            </a:pPr>
+            <a:r>
+              <a:rPr/>
+              <a:t>This is a </a:t>
+            </a:r>
+            <a:r>
+              <a:rPr b="1"/>
+              <a:t>causal</a:t>
+            </a:r>
+            <a:r>
+              <a:rPr/>
+              <a:t> problem (Session 10), not a monitoring problem. No amount of retraining solves it, because every retrain teaches the agents faster.</a:t>
+            </a:r>
+          </a:p>
+        </p:txBody>
+      </p:sp>
+    </p:spTree>
+  </p:cSld>
+</p:sld>
+</file>
+
+<file path=ppt/slides/slide31.xml><?xml version="1.0" encoding="utf-8"?>
+<p:sld xmlns:a="http://schemas.openxmlformats.org/drawingml/2006/main" xmlns:r="http://schemas.openxmlformats.org/officeDocument/2006/relationships" xmlns:p="http://schemas.openxmlformats.org/presentationml/2006/main">
+  <p:cSld>
+    <p:spTree>
+      <p:nvGrpSpPr>
+        <p:cNvPr id="1" name=""/>
+        <p:cNvGrpSpPr/>
+        <p:nvPr/>
+      </p:nvGrpSpPr>
+      <p:grpSpPr>
+        <a:xfrm>
+          <a:off x="0" y="0"/>
+          <a:ext cx="0" cy="0"/>
+          <a:chOff x="0" y="0"/>
+          <a:chExt cx="0" cy="0"/>
+        </a:xfrm>
+      </p:grpSpPr>
+      <p:sp>
+        <p:nvSpPr>
+          <p:cNvPr id="2" name="Title 1"/>
+          <p:cNvSpPr>
+            <a:spLocks noGrp="1"/>
+          </p:cNvSpPr>
+          <p:nvPr>
+            <p:ph type="title"/>
+          </p:nvPr>
+        </p:nvSpPr>
+        <p:spPr/>
+        <p:txBody>
+          <a:bodyPr/>
+          <a:lstStyle/>
+          <a:p>
+            <a:pPr lvl="0" indent="0" marL="0">
+              <a:buNone/>
+            </a:pPr>
+            <a:r>
+              <a:rPr/>
+              <a:t>The shape of a feature that stops working</a:t>
             </a:r>
           </a:p>
         </p:txBody>
       </p:sp>
       <p:pic>
         <p:nvPicPr>
-          <p:cNvPr descr="slides_files/figure-pptx/cell-9-output-1.png" id="0" name="Picture 1"/>
+          <p:cNvPr descr="slides_files/figure-pptx/cell-11-output-1.png" id="0" name="Picture 1"/>
+          <p:cNvPicPr>
+            <a:picLocks noGrp="1" noChangeAspect="1"/>
+          </p:cNvPicPr>
+          <p:nvPr/>
+        </p:nvPicPr>
+        <p:blipFill>
+          <a:blip r:embed="rId2"/>
+          <a:stretch>
+            <a:fillRect/>
+          </a:stretch>
+        </p:blipFill>
+        <p:spPr bwMode="auto">
+          <a:xfrm>
+            <a:off x="508000" y="1193800"/>
+            <a:ext cx="8115300" cy="3390900"/>
+          </a:xfrm>
+          <a:prstGeom prst="rect">
+            <a:avLst/>
+          </a:prstGeom>
+          <a:noFill/>
+          <a:ln w="9525">
+            <a:noFill/>
+            <a:headEnd/>
+            <a:tailEnd/>
+          </a:ln>
+        </p:spPr>
+      </p:pic>
+    </p:spTree>
+  </p:cSld>
+</p:sld>
+</file>
+
+<file path=ppt/slides/slide32.xml><?xml version="1.0" encoding="utf-8"?>
+<p:sld xmlns:a="http://schemas.openxmlformats.org/drawingml/2006/main" xmlns:r="http://schemas.openxmlformats.org/officeDocument/2006/relationships" xmlns:p="http://schemas.openxmlformats.org/presentationml/2006/main">
+  <p:cSld>
+    <p:spTree>
+      <p:nvGrpSpPr>
+        <p:cNvPr id="1" name=""/>
+        <p:cNvGrpSpPr/>
+        <p:nvPr/>
+      </p:nvGrpSpPr>
+      <p:grpSpPr>
+        <a:xfrm>
+          <a:off x="0" y="0"/>
+          <a:ext cx="0" cy="0"/>
+          <a:chOff x="0" y="0"/>
+          <a:chExt cx="0" cy="0"/>
+        </a:xfrm>
+      </p:grpSpPr>
+      <p:sp>
+        <p:nvSpPr>
+          <p:cNvPr id="3" name="Content Placeholder 2"/>
+          <p:cNvSpPr>
+            <a:spLocks noGrp="1"/>
+          </p:cNvSpPr>
+          <p:nvPr>
+            <p:ph idx="1"/>
+          </p:nvPr>
+        </p:nvSpPr>
+        <p:spPr/>
+        <p:txBody>
+          <a:bodyPr/>
+          <a:lstStyle/>
+          <a:p>
+            <a:pPr lvl="0" indent="0" marL="0">
+              <a:buNone/>
+            </a:pPr>
+            <a:r>
+              <a:rPr/>
+              <a:t>Every retraining fits the decayed relationship and pushes agents to break it further. The monitoring plan will faithfully report the decline it cannot fix.</a:t>
+            </a:r>
+          </a:p>
+        </p:txBody>
+      </p:sp>
+    </p:spTree>
+  </p:cSld>
+</p:sld>
+</file>
+
+<file path=ppt/slides/slide33.xml><?xml version="1.0" encoding="utf-8"?>
+<p:sld xmlns:a="http://schemas.openxmlformats.org/drawingml/2006/main" xmlns:r="http://schemas.openxmlformats.org/officeDocument/2006/relationships" xmlns:p="http://schemas.openxmlformats.org/presentationml/2006/main">
+  <p:cSld>
+    <p:spTree>
+      <p:nvGrpSpPr>
+        <p:cNvPr id="1" name=""/>
+        <p:cNvGrpSpPr/>
+        <p:nvPr/>
+      </p:nvGrpSpPr>
+      <p:grpSpPr>
+        <a:xfrm>
+          <a:off x="0" y="0"/>
+          <a:ext cx="0" cy="0"/>
+          <a:chOff x="0" y="0"/>
+          <a:chExt cx="0" cy="0"/>
+        </a:xfrm>
+      </p:grpSpPr>
+      <p:sp>
+        <p:nvSpPr>
+          <p:cNvPr id="2" name="Title 1"/>
+          <p:cNvSpPr>
+            <a:spLocks noGrp="1"/>
+          </p:cNvSpPr>
+          <p:nvPr>
+            <p:ph type="title"/>
+          </p:nvPr>
+        </p:nvSpPr>
+        <p:spPr>
+          <a:xfrm>
+            <a:off x="722313" y="1850000"/>
+            <a:ext cx="7772400" cy="1300000"/>
+          </a:xfrm>
+        </p:spPr>
+        <p:txBody>
+          <a:bodyPr/>
+          <a:lstStyle/>
+          <a:p>
+            <a:pPr lvl="0" indent="0" marL="0">
+              <a:buNone/>
+            </a:pPr>
+            <a:r>
+              <a:rPr/>
+              <a:t>5 · Governance</a:t>
+            </a:r>
+          </a:p>
+        </p:txBody>
+      </p:sp>
+    </p:spTree>
+  </p:cSld>
+</p:sld>
+</file>
+
+<file path=ppt/slides/slide34.xml><?xml version="1.0" encoding="utf-8"?>
+<p:sld xmlns:a="http://schemas.openxmlformats.org/drawingml/2006/main" xmlns:r="http://schemas.openxmlformats.org/officeDocument/2006/relationships" xmlns:p="http://schemas.openxmlformats.org/presentationml/2006/main">
+  <p:cSld>
+    <p:spTree>
+      <p:nvGrpSpPr>
+        <p:cNvPr id="1" name=""/>
+        <p:cNvGrpSpPr/>
+        <p:nvPr/>
+      </p:nvGrpSpPr>
+      <p:grpSpPr>
+        <a:xfrm>
+          <a:off x="0" y="0"/>
+          <a:ext cx="0" cy="0"/>
+          <a:chOff x="0" y="0"/>
+          <a:chExt cx="0" cy="0"/>
+        </a:xfrm>
+      </p:grpSpPr>
+      <p:sp>
+        <p:nvSpPr>
+          <p:cNvPr id="2" name="Title 1"/>
+          <p:cNvSpPr>
+            <a:spLocks noGrp="1"/>
+          </p:cNvSpPr>
+          <p:nvPr>
+            <p:ph type="title"/>
+          </p:nvPr>
+        </p:nvSpPr>
+        <p:spPr/>
+        <p:txBody>
+          <a:bodyPr/>
+          <a:lstStyle/>
+          <a:p>
+            <a:pPr lvl="0" indent="0" marL="0">
+              <a:buNone/>
+            </a:pPr>
+            <a:r>
+              <a:rPr/>
+              <a:t>What a deployable model comes with</a:t>
+            </a:r>
+          </a:p>
+        </p:txBody>
+      </p:sp>
+      <p:sp>
+        <p:nvSpPr>
+          <p:cNvPr id="3" name="Content Placeholder 2"/>
+          <p:cNvSpPr>
+            <a:spLocks noGrp="1"/>
+          </p:cNvSpPr>
+          <p:nvPr>
+            <p:ph idx="1"/>
+          </p:nvPr>
+        </p:nvSpPr>
+        <p:spPr/>
+        <p:txBody>
+          <a:bodyPr/>
+          <a:lstStyle/>
+          <a:p>
+            <a:pPr lvl="0" indent="-342900" marL="342900">
+              <a:buAutoNum type="arabicPeriod"/>
+            </a:pPr>
+            <a:r>
+              <a:rPr b="1"/>
+              <a:t>Intended use, and out-of-scope uses</a:t>
+            </a:r>
+            <a:r>
+              <a:rPr/>
+              <a:t> — what decision, and what it must </a:t>
+            </a:r>
+            <a:r>
+              <a:rPr i="1"/>
+              <a:t>not</a:t>
+            </a:r>
+            <a:r>
+              <a:rPr/>
+              <a:t> be used for</a:t>
+            </a:r>
+          </a:p>
+          <a:p>
+            <a:pPr lvl="0" indent="-342900" marL="342900">
+              <a:buAutoNum type="arabicPeriod"/>
+            </a:pPr>
+            <a:r>
+              <a:rPr b="1"/>
+              <a:t>Data lineage</a:t>
+            </a:r>
+            <a:r>
+              <a:rPr/>
+              <a:t> — sources, vintages, collection dates, licences, quality issues, checksums</a:t>
+            </a:r>
+          </a:p>
+          <a:p>
+            <a:pPr lvl="0" indent="-342900" marL="342900">
+              <a:buAutoNum type="arabicPeriod"/>
+            </a:pPr>
+            <a:r>
+              <a:rPr b="1"/>
+              <a:t>Preprocessing</a:t>
+            </a:r>
+            <a:r>
+              <a:rPr/>
+              <a:t> — every transformation, in order, with the code</a:t>
+            </a:r>
+          </a:p>
+          <a:p>
+            <a:pPr lvl="0" indent="-342900" marL="342900">
+              <a:buAutoNum type="arabicPeriod"/>
+            </a:pPr>
+            <a:r>
+              <a:rPr b="1"/>
+              <a:t>Validation</a:t>
+            </a:r>
+            <a:r>
+              <a:rPr/>
+              <a:t> — the design, </a:t>
+            </a:r>
+            <a:r>
+              <a:rPr i="1"/>
+              <a:t>why it matches deployment</a:t>
+            </a:r>
+            <a:r>
+              <a:rPr/>
+              <a:t>, metrics, benchmark, subgroup performance</a:t>
+            </a:r>
+          </a:p>
+          <a:p>
+            <a:pPr lvl="0" indent="-342900" marL="342900">
+              <a:buAutoNum type="arabicPeriod"/>
+            </a:pPr>
+            <a:r>
+              <a:rPr b="1"/>
+              <a:t>Limitations</a:t>
+            </a:r>
+            <a:r>
+              <a:rPr/>
+              <a:t> — where it performs worst, who is under-represented, what is load-bearing</a:t>
+            </a:r>
+          </a:p>
+          <a:p>
+            <a:pPr lvl="0" indent="-342900" marL="342900">
+              <a:buAutoNum type="arabicPeriod"/>
+            </a:pPr>
+            <a:r>
+              <a:rPr b="1"/>
+              <a:t>Monitoring plan</a:t>
+            </a:r>
+            <a:r>
+              <a:rPr/>
+              <a:t> — which quantities, at what frequency, and what triggers review</a:t>
+            </a:r>
+          </a:p>
+          <a:p>
+            <a:pPr lvl="0" indent="-342900" marL="342900">
+              <a:buAutoNum type="arabicPeriod"/>
+            </a:pPr>
+            <a:r>
+              <a:rPr b="1"/>
+              <a:t>Ownership</a:t>
+            </a:r>
+            <a:r>
+              <a:rPr/>
+              <a:t> — who is accountable, and the retirement criterion</a:t>
+            </a:r>
+          </a:p>
+        </p:txBody>
+      </p:sp>
+    </p:spTree>
+  </p:cSld>
+</p:sld>
+</file>
+
+<file path=ppt/slides/slide35.xml><?xml version="1.0" encoding="utf-8"?>
+<p:sld xmlns:a="http://schemas.openxmlformats.org/drawingml/2006/main" xmlns:r="http://schemas.openxmlformats.org/officeDocument/2006/relationships" xmlns:p="http://schemas.openxmlformats.org/presentationml/2006/main">
+  <p:cSld>
+    <p:spTree>
+      <p:nvGrpSpPr>
+        <p:cNvPr id="1" name=""/>
+        <p:cNvGrpSpPr/>
+        <p:nvPr/>
+      </p:nvGrpSpPr>
+      <p:grpSpPr>
+        <a:xfrm>
+          <a:off x="0" y="0"/>
+          <a:ext cx="0" cy="0"/>
+          <a:chOff x="0" y="0"/>
+          <a:chExt cx="0" cy="0"/>
+        </a:xfrm>
+      </p:grpSpPr>
+      <p:sp>
+        <p:nvSpPr>
+          <p:cNvPr id="2" name="Title 1"/>
+          <p:cNvSpPr>
+            <a:spLocks noGrp="1"/>
+          </p:cNvSpPr>
+          <p:nvPr>
+            <p:ph type="title"/>
+          </p:nvPr>
+        </p:nvSpPr>
+        <p:spPr/>
+        <p:txBody>
+          <a:bodyPr/>
+          <a:lstStyle/>
+          <a:p>
+            <a:pPr lvl="0" indent="0" marL="0">
+              <a:buNone/>
+            </a:pPr>
+            <a:r>
+              <a:rPr/>
+              <a:t>This is not bureaucracy</a:t>
+            </a:r>
+          </a:p>
+        </p:txBody>
+      </p:sp>
+      <p:sp>
+        <p:nvSpPr>
+          <p:cNvPr id="3" name="Content Placeholder 2"/>
+          <p:cNvSpPr>
+            <a:spLocks noGrp="1"/>
+          </p:cNvSpPr>
+          <p:nvPr>
+            <p:ph idx="1"/>
+          </p:nvPr>
+        </p:nvSpPr>
+        <p:spPr/>
+        <p:txBody>
+          <a:bodyPr/>
+          <a:lstStyle/>
+          <a:p>
+            <a:pPr lvl="0" indent="0" marL="0">
+              <a:buNone/>
+            </a:pPr>
+            <a:r>
+              <a:rPr/>
+              <a:t>Sections </a:t>
+            </a:r>
+            <a:r>
+              <a:rPr b="1"/>
+              <a:t>5</a:t>
+            </a:r>
+            <a:r>
+              <a:rPr/>
+              <a:t> and </a:t>
+            </a:r>
+            <a:r>
+              <a:rPr b="1"/>
+              <a:t>6</a:t>
+            </a:r>
+            <a:r>
+              <a:rPr/>
+              <a:t> are where the intellectual content of this entire course finally has to be written down for somebody else.</a:t>
+            </a:r>
+          </a:p>
+          <a:p>
+            <a:pPr lvl="0"/>
+            <a:r>
+              <a:rPr/>
+              <a:t>Section 5 is Sessions 03, 06 and 10: what is load-bearing, and where does it fail</a:t>
+            </a:r>
+          </a:p>
+          <a:p>
+            <a:pPr lvl="0"/>
+            <a:r>
+              <a:rPr/>
+              <a:t>Section 6 is Sessions 04, 08 and 11: what would tell you it has stopped working</a:t>
+            </a:r>
+          </a:p>
+          <a:p>
+            <a:pPr lvl="0" indent="0" marL="0">
+              <a:buNone/>
+            </a:pPr>
+            <a:r>
+              <a:rPr/>
+              <a:t>If you cannot fill in sections 5 and 6, you do not understand your own model well enough to deploy it. Template: </a:t>
+            </a:r>
+            <a:r>
+              <a:rPr>
+                <a:latin typeface="Courier"/>
+              </a:rPr>
+              <a:t>02-practice/governance-file-template.md</a:t>
+            </a:r>
+            <a:r>
+              <a:rPr/>
+              <a:t>.</a:t>
+            </a:r>
+          </a:p>
+        </p:txBody>
+      </p:sp>
+    </p:spTree>
+  </p:cSld>
+</p:sld>
+</file>
+
+<file path=ppt/slides/slide36.xml><?xml version="1.0" encoding="utf-8"?>
+<p:sld xmlns:a="http://schemas.openxmlformats.org/drawingml/2006/main" xmlns:r="http://schemas.openxmlformats.org/officeDocument/2006/relationships" xmlns:p="http://schemas.openxmlformats.org/presentationml/2006/main">
+  <p:cSld>
+    <p:spTree>
+      <p:nvGrpSpPr>
+        <p:cNvPr id="1" name=""/>
+        <p:cNvGrpSpPr/>
+        <p:nvPr/>
+      </p:nvGrpSpPr>
+      <p:grpSpPr>
+        <a:xfrm>
+          <a:off x="0" y="0"/>
+          <a:ext cx="0" cy="0"/>
+          <a:chOff x="0" y="0"/>
+          <a:chExt cx="0" cy="0"/>
+        </a:xfrm>
+      </p:grpSpPr>
+      <p:sp>
+        <p:nvSpPr>
+          <p:cNvPr id="2" name="Title 1"/>
+          <p:cNvSpPr>
+            <a:spLocks noGrp="1"/>
+          </p:cNvSpPr>
+          <p:nvPr>
+            <p:ph type="title"/>
+          </p:nvPr>
+        </p:nvSpPr>
+        <p:spPr/>
+        <p:txBody>
+          <a:bodyPr/>
+          <a:lstStyle/>
+          <a:p>
+            <a:pPr lvl="0" indent="0" marL="0">
+              <a:buNone/>
+            </a:pPr>
+            <a:r>
+              <a:rPr/>
+              <a:t>A monitoring plan is a threshold, not a hope</a:t>
+            </a:r>
+          </a:p>
+        </p:txBody>
+      </p:sp>
+      <p:pic>
+        <p:nvPicPr>
+          <p:cNvPr descr="slides_files/figure-pptx/cell-12-output-1.png" id="0" name="Picture 1"/>
           <p:cNvPicPr>
             <a:picLocks noGrp="1" noChangeAspect="1"/>
           </p:cNvPicPr>
@@ -8840,7 +9218,7 @@
 </p:sld>
 </file>
 
-<file path=ppt/slides/slide31.xml><?xml version="1.0" encoding="utf-8"?>
+<file path=ppt/slides/slide37.xml><?xml version="1.0" encoding="utf-8"?>
 <p:sld xmlns:a="http://schemas.openxmlformats.org/drawingml/2006/main" xmlns:r="http://schemas.openxmlformats.org/officeDocument/2006/relationships" xmlns:p="http://schemas.openxmlformats.org/presentationml/2006/main">
   <p:cSld>
     <p:spTree>
@@ -8895,7 +9273,7 @@
 </p:sld>
 </file>
 
-<file path=ppt/slides/slide32.xml><?xml version="1.0" encoding="utf-8"?>
+<file path=ppt/slides/slide38.xml><?xml version="1.0" encoding="utf-8"?>
 <p:sld xmlns:a="http://schemas.openxmlformats.org/drawingml/2006/main" xmlns:r="http://schemas.openxmlformats.org/officeDocument/2006/relationships" xmlns:p="http://schemas.openxmlformats.org/presentationml/2006/main">
   <p:cSld>
     <p:spTree>
@@ -8947,13 +9325,10 @@
 </p:sld>
 </file>
 
-<file path=ppt/slides/slide33.xml><?xml version="1.0" encoding="UTF-8"?><p:sld xmlns:a="http://schemas.openxmlformats.org/drawingml/2006/main" xmlns:r="http://schemas.openxmlformats.org/officeDocument/2006/relationships" xmlns:p="http://schemas.openxmlformats.org/presentationml/2006/main"><p:cSld><p:spTree><p:nvGrpSpPr><p:cNvPr id="1" name="" /><p:cNvGrpSpPr /><p:nvPr /></p:nvGrpSpPr><p:grpSpPr><a:xfrm><a:off x="0" y="0" /><a:ext cx="0" cy="0" /><a:chOff x="0" y="0" /><a:chExt cx="0" cy="0" /></a:xfrm></p:grpSpPr><p:sp><p:nvSpPr><p:cNvPr id="2" name="Title 1" /><p:cNvSpPr><a:spLocks noGrp="1" /></p:cNvSpPr><p:nvPr><p:ph type="title" /></p:nvPr></p:nvSpPr><p:spPr /><p:txBody><a:bodyPr /><a:lstStyle /><a:p><a:pPr lvl="0" indent="0" marL="0"><a:buNone /></a:pPr><a:r><a:rPr /><a:t>Every session, one dial and one self-deception</a:t></a:r></a:p></p:txBody></p:sp><p:graphicFrame><p:nvGraphicFramePr><p:cNvPr id="6" name="Content Placeholder 5" /><p:cNvGraphicFramePr><a:graphicFrameLocks noGrp="1" /></p:cNvGraphicFramePr><p:nvPr><p:ph idx="1" /></p:nvPr></p:nvGraphicFramePr><p:xfrm><a:off x="457200" y="1193800" /><a:ext cx="8229600" cy="3390900" /></p:xfrm><a:graphic><a:graphicData uri="http://schemas.openxmlformats.org/drawingml/2006/table"><a:tbl><a:tblPr firstRow="1" bandRow="1"><a:tableStyleId>{5C22544A-7EE6-4342-B048-85BDC9FD1C3A}</a:tableStyleId></a:tblPr><a:tblGrid><a:gridCol w="2743200" /><a:gridCol w="2743200" /><a:gridCol w="2743200" /></a:tblGrid><a:tr h="0"><a:tc><a:txBody><a:bodyPr /><a:lstStyle /><a:p><a:pPr lvl="0" indent="0" marL="0"><a:buNone /></a:pPr><a:r><a:rPr /><a:t>Session</a:t></a:r></a:p></a:txBody><a:tcPr /></a:tc><a:tc><a:txBody><a:bodyPr /><a:lstStyle /><a:p><a:pPr lvl="0" indent="0" marL="0"><a:buNone /></a:pPr><a:r><a:rPr /><a:t>The dial</a:t></a:r></a:p></a:txBody><a:tcPr /></a:tc><a:tc><a:txBody><a:bodyPr /><a:lstStyle /><a:p><a:pPr lvl="0" indent="0" marL="0"><a:buNone /></a:pPr><a:r><a:rPr /><a:t>The self-deception it prevents</a:t></a:r></a:p></a:txBody><a:tcPr /></a:tc></a:tr><a:tr h="0"><a:tc><a:txBody><a:bodyPr /><a:lstStyle /><a:p><a:pPr lvl="0" indent="0" marL="0"><a:buNone /></a:pPr><a:r><a:rPr b="1" /><a:t>02–03</a:t></a:r></a:p></a:txBody></a:tc><a:tc><a:txBody><a:bodyPr /><a:lstStyle /><a:p><a:pPr lvl="0" indent="0" marL="0"><a:buNone /></a:pPr><a:r><a:rPr /><a:t>which variables enter, how errors are modelled</a:t></a:r></a:p></a:txBody></a:tc><a:tc><a:txBody><a:bodyPr /><a:lstStyle /><a:p><a:pPr lvl="0" indent="0" marL="0"><a:buNone /></a:pPr><a:r><a:rPr /><a:t>“my standard errors are right because the software printed them”</a:t></a:r></a:p></a:txBody></a:tc></a:tr><a:tr h="0"><a:tc><a:txBody><a:bodyPr /><a:lstStyle /><a:p><a:pPr lvl="0" indent="0" marL="0"><a:buNone /></a:pPr><a:r><a:rPr b="1" /><a:t>04</a:t></a:r></a:p></a:txBody></a:tc><a:tc><a:txBody><a:bodyPr /><a:lstStyle /><a:p><a:pPr lvl="0" indent="0" marL="0"><a:buNone /></a:pPr><a:r><a:rPr /><a:t>complexity, via CV</a:t></a:r></a:p></a:txBody></a:tc><a:tc><a:txBody><a:bodyPr /><a:lstStyle /><a:p><a:pPr lvl="0" indent="0" marL="0"><a:buNone /></a:pPr><a:r><a:rPr /><a:t>“it fits the data well”</a:t></a:r></a:p></a:txBody></a:tc></a:tr><a:tr h="0"><a:tc><a:txBody><a:bodyPr /><a:lstStyle /><a:p><a:pPr lvl="0" indent="0" marL="0"><a:buNone /></a:pPr><a:r><a:rPr b="1" /><a:t>05</a:t></a:r></a:p></a:txBody></a:tc><a:tc><a:txBody><a:bodyPr /><a:lstStyle /><a:p><a:pPr lvl="0" indent="0" marL="0"><a:buNone /></a:pPr><a14:m><m:oMath xmlns:m="http://schemas.openxmlformats.org/officeDocument/2006/math"><m:r><m:t>λ</m:t></m:r></m:oMath></a14:m><a:r><a:rPr /><a:t> and </a:t></a:r><a14:m><m:oMath xmlns:m="http://schemas.openxmlformats.org/officeDocument/2006/math"><m:r><m:t>α</m:t></m:r></m:oMath></a14:m></a:p></a:txBody></a:tc><a:tc><a:txBody><a:bodyPr /><a:lstStyle /><a:p><a:pPr lvl="0" indent="0" marL="0"><a:buNone /></a:pPr><a:r><a:rPr /><a:t>“the model identified the true drivers”</a:t></a:r></a:p></a:txBody></a:tc></a:tr><a:tr h="0"><a:tc><a:txBody><a:bodyPr /><a:lstStyle /><a:p><a:pPr lvl="0" indent="0" marL="0"><a:buNone /></a:pPr><a:r><a:rPr b="1" /><a:t>06</a:t></a:r></a:p></a:txBody></a:tc><a:tc><a:txBody><a:bodyPr /><a:lstStyle /><a:p><a:pPr lvl="0" indent="0" marL="0"><a:buNone /></a:pPr><a:r><a:rPr /><a:t>the decision threshold</a:t></a:r></a:p></a:txBody></a:tc><a:tc><a:txBody><a:bodyPr /><a:lstStyle /><a:p><a:pPr lvl="0" indent="0" marL="0"><a:buNone /></a:pPr><a:r><a:rPr /><a:t>“it is 97% accurate”</a:t></a:r></a:p></a:txBody></a:tc></a:tr><a:tr h="0"><a:tc><a:txBody><a:bodyPr /><a:lstStyle /><a:p><a:pPr lvl="0" indent="0" marL="0"><a:buNone /></a:pPr><a:r><a:rPr b="1" /><a:t>07</a:t></a:r></a:p></a:txBody></a:tc><a:tc><a:txBody><a:bodyPr /><a:lstStyle /><a:p><a:pPr lvl="0" indent="0" marL="0"><a:buNone /></a:pPr><a:r><a:rPr /><a:t>depth, learning rate, </a:t></a:r><a14:m><m:oMath xmlns:m="http://schemas.openxmlformats.org/officeDocument/2006/math"><m:r><m:t>m</m:t></m:r></m:oMath></a14:m></a:p></a:txBody></a:tc><a:tc><a:txBody><a:bodyPr /><a:lstStyle /><a:p><a:pPr lvl="0" indent="0" marL="0"><a:buNone /></a:pPr><a:r><a:rPr /><a:t>“the important feature is the cause”</a:t></a:r></a:p></a:txBody></a:tc></a:tr></a:tbl></a:graphicData></a:graphic></p:graphicFrame></p:spTree></p:cSld></p:sld>
+<file path=ppt/slides/slide39.xml><?xml version="1.0" encoding="UTF-8"?><p:sld xmlns:a="http://schemas.openxmlformats.org/drawingml/2006/main" xmlns:r="http://schemas.openxmlformats.org/officeDocument/2006/relationships" xmlns:p="http://schemas.openxmlformats.org/presentationml/2006/main"><p:cSld><p:spTree><p:nvGrpSpPr><p:cNvPr id="1" name="" /><p:cNvGrpSpPr /><p:nvPr /></p:nvGrpSpPr><p:grpSpPr><a:xfrm><a:off x="0" y="0" /><a:ext cx="0" cy="0" /><a:chOff x="0" y="0" /><a:chExt cx="0" cy="0" /></a:xfrm></p:grpSpPr><p:sp><p:nvSpPr><p:cNvPr id="2" name="Title 1" /><p:cNvSpPr><a:spLocks noGrp="1" /></p:cNvSpPr><p:nvPr><p:ph type="title" /></p:nvPr></p:nvSpPr><p:spPr /><p:txBody><a:bodyPr /><a:lstStyle /><a:p><a:pPr lvl="0" indent="0" marL="0"><a:buNone /></a:pPr><a:r><a:rPr /><a:t>Every session, one dial and one self-deception</a:t></a:r></a:p></p:txBody></p:sp><p:graphicFrame><p:nvGraphicFramePr><p:cNvPr id="6" name="Content Placeholder 5" /><p:cNvGraphicFramePr><a:graphicFrameLocks noGrp="1" /></p:cNvGraphicFramePr><p:nvPr><p:ph idx="1" /></p:nvPr></p:nvGraphicFramePr><p:xfrm><a:off x="457200" y="1193800" /><a:ext cx="8229600" cy="3390900" /></p:xfrm><a:graphic><a:graphicData uri="http://schemas.openxmlformats.org/drawingml/2006/table"><a:tbl><a:tblPr firstRow="1" bandRow="1"><a:tableStyleId>{5C22544A-7EE6-4342-B048-85BDC9FD1C3A}</a:tableStyleId></a:tblPr><a:tblGrid><a:gridCol w="2743200" /><a:gridCol w="2743200" /><a:gridCol w="2743200" /></a:tblGrid><a:tr h="0"><a:tc><a:txBody><a:bodyPr /><a:lstStyle /><a:p><a:pPr lvl="0" indent="0" marL="0"><a:buNone /></a:pPr><a:r><a:rPr /><a:t>Session</a:t></a:r></a:p></a:txBody><a:tcPr /></a:tc><a:tc><a:txBody><a:bodyPr /><a:lstStyle /><a:p><a:pPr lvl="0" indent="0" marL="0"><a:buNone /></a:pPr><a:r><a:rPr /><a:t>The dial</a:t></a:r></a:p></a:txBody><a:tcPr /></a:tc><a:tc><a:txBody><a:bodyPr /><a:lstStyle /><a:p><a:pPr lvl="0" indent="0" marL="0"><a:buNone /></a:pPr><a:r><a:rPr /><a:t>The self-deception it prevents</a:t></a:r></a:p></a:txBody><a:tcPr /></a:tc></a:tr><a:tr h="0"><a:tc><a:txBody><a:bodyPr /><a:lstStyle /><a:p><a:pPr lvl="0" indent="0" marL="0"><a:buNone /></a:pPr><a:r><a:rPr b="1" /><a:t>02–03</a:t></a:r></a:p></a:txBody></a:tc><a:tc><a:txBody><a:bodyPr /><a:lstStyle /><a:p><a:pPr lvl="0" indent="0" marL="0"><a:buNone /></a:pPr><a:r><a:rPr /><a:t>which variables enter, how errors are modelled</a:t></a:r></a:p></a:txBody></a:tc><a:tc><a:txBody><a:bodyPr /><a:lstStyle /><a:p><a:pPr lvl="0" indent="0" marL="0"><a:buNone /></a:pPr><a:r><a:rPr /><a:t>“my standard errors are right because the software printed them”</a:t></a:r></a:p></a:txBody></a:tc></a:tr><a:tr h="0"><a:tc><a:txBody><a:bodyPr /><a:lstStyle /><a:p><a:pPr lvl="0" indent="0" marL="0"><a:buNone /></a:pPr><a:r><a:rPr b="1" /><a:t>04</a:t></a:r></a:p></a:txBody></a:tc><a:tc><a:txBody><a:bodyPr /><a:lstStyle /><a:p><a:pPr lvl="0" indent="0" marL="0"><a:buNone /></a:pPr><a:r><a:rPr /><a:t>complexity, via CV</a:t></a:r></a:p></a:txBody></a:tc><a:tc><a:txBody><a:bodyPr /><a:lstStyle /><a:p><a:pPr lvl="0" indent="0" marL="0"><a:buNone /></a:pPr><a:r><a:rPr /><a:t>“it fits the data well”</a:t></a:r></a:p></a:txBody></a:tc></a:tr><a:tr h="0"><a:tc><a:txBody><a:bodyPr /><a:lstStyle /><a:p><a:pPr lvl="0" indent="0" marL="0"><a:buNone /></a:pPr><a:r><a:rPr b="1" /><a:t>05</a:t></a:r></a:p></a:txBody></a:tc><a:tc><a:txBody><a:bodyPr /><a:lstStyle /><a:p><a:pPr lvl="0" indent="0" marL="0"><a:buNone /></a:pPr><a14:m><m:oMath xmlns:m="http://schemas.openxmlformats.org/officeDocument/2006/math"><m:r><m:t>λ</m:t></m:r></m:oMath></a14:m><a:r><a:rPr /><a:t> and </a:t></a:r><a14:m><m:oMath xmlns:m="http://schemas.openxmlformats.org/officeDocument/2006/math"><m:r><m:t>α</m:t></m:r></m:oMath></a14:m></a:p></a:txBody></a:tc><a:tc><a:txBody><a:bodyPr /><a:lstStyle /><a:p><a:pPr lvl="0" indent="0" marL="0"><a:buNone /></a:pPr><a:r><a:rPr /><a:t>“the model identified the true drivers”</a:t></a:r></a:p></a:txBody></a:tc></a:tr><a:tr h="0"><a:tc><a:txBody><a:bodyPr /><a:lstStyle /><a:p><a:pPr lvl="0" indent="0" marL="0"><a:buNone /></a:pPr><a:r><a:rPr b="1" /><a:t>06</a:t></a:r></a:p></a:txBody></a:tc><a:tc><a:txBody><a:bodyPr /><a:lstStyle /><a:p><a:pPr lvl="0" indent="0" marL="0"><a:buNone /></a:pPr><a:r><a:rPr /><a:t>the decision threshold</a:t></a:r></a:p></a:txBody></a:tc><a:tc><a:txBody><a:bodyPr /><a:lstStyle /><a:p><a:pPr lvl="0" indent="0" marL="0"><a:buNone /></a:pPr><a:r><a:rPr /><a:t>“it is 97% accurate”</a:t></a:r></a:p></a:txBody></a:tc></a:tr><a:tr h="0"><a:tc><a:txBody><a:bodyPr /><a:lstStyle /><a:p><a:pPr lvl="0" indent="0" marL="0"><a:buNone /></a:pPr><a:r><a:rPr b="1" /><a:t>07</a:t></a:r></a:p></a:txBody></a:tc><a:tc><a:txBody><a:bodyPr /><a:lstStyle /><a:p><a:pPr lvl="0" indent="0" marL="0"><a:buNone /></a:pPr><a:r><a:rPr /><a:t>depth, learning rate, </a:t></a:r><a14:m><m:oMath xmlns:m="http://schemas.openxmlformats.org/officeDocument/2006/math"><m:r><m:t>m</m:t></m:r></m:oMath></a14:m></a:p></a:txBody></a:tc><a:tc><a:txBody><a:bodyPr /><a:lstStyle /><a:p><a:pPr lvl="0" indent="0" marL="0"><a:buNone /></a:pPr><a:r><a:rPr /><a:t>“the important feature is the cause”</a:t></a:r></a:p></a:txBody></a:tc></a:tr></a:tbl></a:graphicData></a:graphic></p:graphicFrame></p:spTree></p:cSld></p:sld>
 </file>
 
-<file path=ppt/slides/slide34.xml><?xml version="1.0" encoding="UTF-8"?><p:sld xmlns:a="http://schemas.openxmlformats.org/drawingml/2006/main" xmlns:r="http://schemas.openxmlformats.org/officeDocument/2006/relationships" xmlns:p="http://schemas.openxmlformats.org/presentationml/2006/main"><p:cSld><p:spTree><p:nvGrpSpPr><p:cNvPr id="1" name="" /><p:cNvGrpSpPr /><p:nvPr /></p:nvGrpSpPr><p:grpSpPr><a:xfrm><a:off x="0" y="0" /><a:ext cx="0" cy="0" /><a:chOff x="0" y="0" /><a:chExt cx="0" cy="0" /></a:xfrm></p:grpSpPr><p:sp><p:nvSpPr><p:cNvPr id="2" name="Title 1" /><p:cNvSpPr><a:spLocks noGrp="1" /></p:cNvSpPr><p:nvPr><p:ph type="title" /></p:nvPr></p:nvSpPr><p:spPr /><p:txBody><a:bodyPr /><a:lstStyle /><a:p><a:pPr lvl="0" indent="0" marL="0"><a:buNone /></a:pPr><a:r><a:rPr /><a:t>…continued</a:t></a:r></a:p></p:txBody></p:sp><p:graphicFrame><p:nvGraphicFramePr><p:cNvPr id="6" name="Content Placeholder 5" /><p:cNvGraphicFramePr><a:graphicFrameLocks noGrp="1" /></p:cNvGraphicFramePr><p:nvPr><p:ph idx="1" /></p:nvPr></p:nvGraphicFramePr><p:xfrm><a:off x="457200" y="1193800" /><a:ext cx="8229600" cy="3390900" /></p:xfrm><a:graphic><a:graphicData uri="http://schemas.openxmlformats.org/drawingml/2006/table"><a:tbl><a:tblPr firstRow="1" bandRow="1"><a:tableStyleId>{5C22544A-7EE6-4342-B048-85BDC9FD1C3A}</a:tableStyleId></a:tblPr><a:tblGrid><a:gridCol w="2743200" /><a:gridCol w="2743200" /><a:gridCol w="2743200" /></a:tblGrid><a:tr h="0"><a:tc><a:txBody><a:bodyPr /><a:lstStyle /><a:p><a:pPr lvl="0" indent="0" marL="0"><a:buNone /></a:pPr><a:r><a:rPr /><a:t>Session</a:t></a:r></a:p></a:txBody><a:tcPr /></a:tc><a:tc><a:txBody><a:bodyPr /><a:lstStyle /><a:p><a:pPr lvl="0" indent="0" marL="0"><a:buNone /></a:pPr><a:r><a:rPr /><a:t>The dial</a:t></a:r></a:p></a:txBody><a:tcPr /></a:tc><a:tc><a:txBody><a:bodyPr /><a:lstStyle /><a:p><a:pPr lvl="0" indent="0" marL="0"><a:buNone /></a:pPr><a:r><a:rPr /><a:t>The self-deception it prevents</a:t></a:r></a:p></a:txBody><a:tcPr /></a:tc></a:tr><a:tr h="0"><a:tc><a:txBody><a:bodyPr /><a:lstStyle /><a:p><a:pPr lvl="0" indent="0" marL="0"><a:buNone /></a:pPr><a:r><a:rPr b="1" /><a:t>08</a:t></a:r></a:p></a:txBody></a:tc><a:tc><a:txBody><a:bodyPr /><a:lstStyle /><a:p><a:pPr lvl="0" indent="0" marL="0"><a:buNone /></a:pPr><a:r><a:rPr /><a:t>the number of factors</a:t></a:r></a:p></a:txBody></a:tc><a:tc><a:txBody><a:bodyPr /><a:lstStyle /><a:p><a:pPr lvl="0" indent="0" marL="0"><a:buNone /></a:pPr><a:r><a:rPr /><a:t>“I extracted factors, then backtested”</a:t></a:r></a:p></a:txBody></a:tc></a:tr><a:tr h="0"><a:tc><a:txBody><a:bodyPr /><a:lstStyle /><a:p><a:pPr lvl="0" indent="0" marL="0"><a:buNone /></a:pPr><a:r><a:rPr b="1" /><a:t>09</a:t></a:r></a:p></a:txBody></a:tc><a:tc><a:txBody><a:bodyPr /><a:lstStyle /><a:p><a:pPr lvl="0" indent="0" marL="0"><a:buNone /></a:pPr><a14:m><m:oMath xmlns:m="http://schemas.openxmlformats.org/officeDocument/2006/math"><m:r><m:t>k</m:t></m:r></m:oMath></a14:m><a:r><a:rPr /><a:t>, and the text representation</a:t></a:r></a:p></a:txBody></a:tc><a:tc><a:txBody><a:bodyPr /><a:lstStyle /><a:p><a:pPr lvl="0" indent="0" marL="0"><a:buNone /></a:pPr><a:r><a:rPr /><a:t>“the algorithm found clusters, so clusters exist”</a:t></a:r></a:p></a:txBody></a:tc></a:tr><a:tr h="0"><a:tc><a:txBody><a:bodyPr /><a:lstStyle /><a:p><a:pPr lvl="0" indent="0" marL="0"><a:buNone /></a:pPr><a:r><a:rPr b="1" /><a:t>10</a:t></a:r></a:p></a:txBody></a:tc><a:tc><a:txBody><a:bodyPr /><a:lstStyle /><a:p><a:pPr lvl="0" indent="0" marL="0"><a:buNone /></a:pPr><a:r><a:rPr b="1" /><a:t>nothing</a:t></a:r><a:r><a:rPr /><a:t> — identification is not a dial</a:t></a:r></a:p></a:txBody></a:tc><a:tc><a:txBody><a:bodyPr /><a:lstStyle /><a:p><a:pPr lvl="0" indent="0" marL="0"><a:buNone /></a:pPr><a:r><a:rPr /><a:t>“a better predictor is a better policy guide”</a:t></a:r></a:p></a:txBody></a:tc></a:tr><a:tr h="0"><a:tc><a:txBody><a:bodyPr /><a:lstStyle /><a:p><a:pPr lvl="0" indent="0" marL="0"><a:buNone /></a:pPr><a:r><a:rPr b="1" /><a:t>11</a:t></a:r></a:p></a:txBody></a:tc><a:tc><a:txBody><a:bodyPr /><a:lstStyle /><a:p><a:pPr lvl="0" indent="0" marL="0"><a:buNone /></a:pPr><a:r><a:rPr /><a:t>the monitoring threshold</a:t></a:r></a:p></a:txBody></a:tc><a:tc><a:txBody><a:bodyPr /><a:lstStyle /><a:p><a:pPr lvl="0" indent="0" marL="0"><a:buNone /></a:pPr><a:r><a:rPr /><a:t>“it worked last year”</a:t></a:r></a:p></a:txBody></a:tc></a:tr></a:tbl></a:graphicData></a:graphic></p:graphicFrame></p:spTree></p:cSld></p:sld>
-</file>
-
-<file path=ppt/slides/slide35.xml><?xml version="1.0" encoding="utf-8"?>
+<file path=ppt/slides/slide4.xml><?xml version="1.0" encoding="utf-8"?>
 <p:sld xmlns:a="http://schemas.openxmlformats.org/drawingml/2006/main" xmlns:r="http://schemas.openxmlformats.org/officeDocument/2006/relationships" xmlns:p="http://schemas.openxmlformats.org/presentationml/2006/main">
   <p:cSld>
     <p:spTree>
@@ -8972,12 +9347,12 @@
       </p:grpSpPr>
       <p:sp>
         <p:nvSpPr>
-          <p:cNvPr id="3" name="Content Placeholder 2"/>
-          <p:cNvSpPr>
-            <a:spLocks noGrp="1"/>
-          </p:cNvSpPr>
-          <p:nvPr>
-            <p:ph idx="1"/>
+          <p:cNvPr id="2" name="Title 1"/>
+          <p:cNvSpPr>
+            <a:spLocks noGrp="1"/>
+          </p:cNvSpPr>
+          <p:nvPr>
+            <p:ph type="title"/>
           </p:nvPr>
         </p:nvSpPr>
         <p:spPr/>
@@ -8990,11 +9365,82 @@
             </a:pPr>
             <a:r>
               <a:rPr/>
-              <a:t>Session 10 is the exception that defines the course: </a:t>
+              <a:t>Learning objectives</a:t>
+            </a:r>
+          </a:p>
+        </p:txBody>
+      </p:sp>
+      <p:sp>
+        <p:nvSpPr>
+          <p:cNvPr id="3" name="Content Placeholder 2"/>
+          <p:cNvSpPr>
+            <a:spLocks noGrp="1"/>
+          </p:cNvSpPr>
+          <p:nvPr>
+            <p:ph idx="1"/>
+          </p:nvPr>
+        </p:nvSpPr>
+        <p:spPr/>
+        <p:txBody>
+          <a:bodyPr/>
+          <a:lstStyle/>
+          <a:p>
+            <a:pPr lvl="0"/>
+            <a:r>
+              <a:rPr/>
+              <a:t>Choose among expanding, fixed-window and </a:t>
             </a:r>
             <a:r>
               <a:rPr b="1"/>
-              <a:t>no tuning parameter buys you identification.</a:t>
+              <a:t>purged blocked</a:t>
+            </a:r>
+            <a:r>
+              <a:rPr/>
+              <a:t> designs, and say why</a:t>
+            </a:r>
+          </a:p>
+          <a:p>
+            <a:pPr lvl="0"/>
+            <a:r>
+              <a:rPr/>
+              <a:t>Compare against a benchmark with a </a:t>
+            </a:r>
+            <a:r>
+              <a:rPr b="1"/>
+              <a:t>Diebold–Mariano</a:t>
+            </a:r>
+            <a:r>
+              <a:rPr/>
+              <a:t> statistic, not an eyeball</a:t>
+            </a:r>
+          </a:p>
+          <a:p>
+            <a:pPr lvl="0"/>
+            <a:r>
+              <a:rPr/>
+              <a:t>Detect covariate shift with a classifier — and interpret the number against a </a:t>
+            </a:r>
+            <a:r>
+              <a:rPr b="1"/>
+              <a:t>placebo</a:t>
+            </a:r>
+          </a:p>
+          <a:p>
+            <a:pPr lvl="0"/>
+            <a:r>
+              <a:rPr/>
+              <a:t>Distinguish covariate shift, label shift, concept drift and </a:t>
+            </a:r>
+            <a:r>
+              <a:rPr b="1"/>
+              <a:t>feedback</a:t>
+            </a:r>
+          </a:p>
+          <a:p>
+            <a:pPr lvl="0"/>
+            <a:r>
+              <a:rPr/>
+              <a:t>Write a governance file a competent successor could act on</a:t>
             </a:r>
           </a:p>
         </p:txBody>
@@ -9004,7 +9450,10 @@
 </p:sld>
 </file>
 
-<file path=ppt/slides/slide36.xml><?xml version="1.0" encoding="utf-8"?>
+<file path=ppt/slides/slide40.xml><?xml version="1.0" encoding="UTF-8"?><p:sld xmlns:a="http://schemas.openxmlformats.org/drawingml/2006/main" xmlns:r="http://schemas.openxmlformats.org/officeDocument/2006/relationships" xmlns:p="http://schemas.openxmlformats.org/presentationml/2006/main"><p:cSld><p:spTree><p:nvGrpSpPr><p:cNvPr id="1" name="" /><p:cNvGrpSpPr /><p:nvPr /></p:nvGrpSpPr><p:grpSpPr><a:xfrm><a:off x="0" y="0" /><a:ext cx="0" cy="0" /><a:chOff x="0" y="0" /><a:chExt cx="0" cy="0" /></a:xfrm></p:grpSpPr><p:sp><p:nvSpPr><p:cNvPr id="2" name="Title 1" /><p:cNvSpPr><a:spLocks noGrp="1" /></p:cNvSpPr><p:nvPr><p:ph type="title" /></p:nvPr></p:nvSpPr><p:spPr /><p:txBody><a:bodyPr /><a:lstStyle /><a:p><a:pPr lvl="0" indent="0" marL="0"><a:buNone /></a:pPr><a:r><a:rPr /><a:t>…continued</a:t></a:r></a:p></p:txBody></p:sp><p:graphicFrame><p:nvGraphicFramePr><p:cNvPr id="6" name="Content Placeholder 5" /><p:cNvGraphicFramePr><a:graphicFrameLocks noGrp="1" /></p:cNvGraphicFramePr><p:nvPr><p:ph idx="1" /></p:nvPr></p:nvGraphicFramePr><p:xfrm><a:off x="457200" y="1193800" /><a:ext cx="8229600" cy="3390900" /></p:xfrm><a:graphic><a:graphicData uri="http://schemas.openxmlformats.org/drawingml/2006/table"><a:tbl><a:tblPr firstRow="1" bandRow="1"><a:tableStyleId>{5C22544A-7EE6-4342-B048-85BDC9FD1C3A}</a:tableStyleId></a:tblPr><a:tblGrid><a:gridCol w="2743200" /><a:gridCol w="2743200" /><a:gridCol w="2743200" /></a:tblGrid><a:tr h="0"><a:tc><a:txBody><a:bodyPr /><a:lstStyle /><a:p><a:pPr lvl="0" indent="0" marL="0"><a:buNone /></a:pPr><a:r><a:rPr /><a:t>Session</a:t></a:r></a:p></a:txBody><a:tcPr /></a:tc><a:tc><a:txBody><a:bodyPr /><a:lstStyle /><a:p><a:pPr lvl="0" indent="0" marL="0"><a:buNone /></a:pPr><a:r><a:rPr /><a:t>The dial</a:t></a:r></a:p></a:txBody><a:tcPr /></a:tc><a:tc><a:txBody><a:bodyPr /><a:lstStyle /><a:p><a:pPr lvl="0" indent="0" marL="0"><a:buNone /></a:pPr><a:r><a:rPr /><a:t>The self-deception it prevents</a:t></a:r></a:p></a:txBody><a:tcPr /></a:tc></a:tr><a:tr h="0"><a:tc><a:txBody><a:bodyPr /><a:lstStyle /><a:p><a:pPr lvl="0" indent="0" marL="0"><a:buNone /></a:pPr><a:r><a:rPr b="1" /><a:t>08</a:t></a:r></a:p></a:txBody></a:tc><a:tc><a:txBody><a:bodyPr /><a:lstStyle /><a:p><a:pPr lvl="0" indent="0" marL="0"><a:buNone /></a:pPr><a:r><a:rPr /><a:t>the number of factors</a:t></a:r></a:p></a:txBody></a:tc><a:tc><a:txBody><a:bodyPr /><a:lstStyle /><a:p><a:pPr lvl="0" indent="0" marL="0"><a:buNone /></a:pPr><a:r><a:rPr /><a:t>“I extracted factors, then backtested”</a:t></a:r></a:p></a:txBody></a:tc></a:tr><a:tr h="0"><a:tc><a:txBody><a:bodyPr /><a:lstStyle /><a:p><a:pPr lvl="0" indent="0" marL="0"><a:buNone /></a:pPr><a:r><a:rPr b="1" /><a:t>09</a:t></a:r></a:p></a:txBody></a:tc><a:tc><a:txBody><a:bodyPr /><a:lstStyle /><a:p><a:pPr lvl="0" indent="0" marL="0"><a:buNone /></a:pPr><a14:m><m:oMath xmlns:m="http://schemas.openxmlformats.org/officeDocument/2006/math"><m:r><m:t>k</m:t></m:r></m:oMath></a14:m><a:r><a:rPr /><a:t>, and the text representation</a:t></a:r></a:p></a:txBody></a:tc><a:tc><a:txBody><a:bodyPr /><a:lstStyle /><a:p><a:pPr lvl="0" indent="0" marL="0"><a:buNone /></a:pPr><a:r><a:rPr /><a:t>“the algorithm found clusters, so clusters exist”</a:t></a:r></a:p></a:txBody></a:tc></a:tr><a:tr h="0"><a:tc><a:txBody><a:bodyPr /><a:lstStyle /><a:p><a:pPr lvl="0" indent="0" marL="0"><a:buNone /></a:pPr><a:r><a:rPr b="1" /><a:t>10</a:t></a:r></a:p></a:txBody></a:tc><a:tc><a:txBody><a:bodyPr /><a:lstStyle /><a:p><a:pPr lvl="0" indent="0" marL="0"><a:buNone /></a:pPr><a:r><a:rPr b="1" /><a:t>nothing</a:t></a:r><a:r><a:rPr /><a:t> — identification is not a dial</a:t></a:r></a:p></a:txBody></a:tc><a:tc><a:txBody><a:bodyPr /><a:lstStyle /><a:p><a:pPr lvl="0" indent="0" marL="0"><a:buNone /></a:pPr><a:r><a:rPr /><a:t>“a better predictor is a better policy guide”</a:t></a:r></a:p></a:txBody></a:tc></a:tr><a:tr h="0"><a:tc><a:txBody><a:bodyPr /><a:lstStyle /><a:p><a:pPr lvl="0" indent="0" marL="0"><a:buNone /></a:pPr><a:r><a:rPr b="1" /><a:t>11</a:t></a:r></a:p></a:txBody></a:tc><a:tc><a:txBody><a:bodyPr /><a:lstStyle /><a:p><a:pPr lvl="0" indent="0" marL="0"><a:buNone /></a:pPr><a:r><a:rPr /><a:t>the monitoring threshold</a:t></a:r></a:p></a:txBody></a:tc><a:tc><a:txBody><a:bodyPr /><a:lstStyle /><a:p><a:pPr lvl="0" indent="0" marL="0"><a:buNone /></a:pPr><a:r><a:rPr /><a:t>“it worked last year”</a:t></a:r></a:p></a:txBody></a:tc></a:tr></a:tbl></a:graphicData></a:graphic></p:graphicFrame></p:spTree></p:cSld></p:sld>
+</file>
+
+<file path=ppt/slides/slide41.xml><?xml version="1.0" encoding="utf-8"?>
 <p:sld xmlns:a="http://schemas.openxmlformats.org/drawingml/2006/main" xmlns:r="http://schemas.openxmlformats.org/officeDocument/2006/relationships" xmlns:p="http://schemas.openxmlformats.org/presentationml/2006/main">
   <p:cSld>
     <p:spTree>
@@ -9023,6 +9472,57 @@
       </p:grpSpPr>
       <p:sp>
         <p:nvSpPr>
+          <p:cNvPr id="3" name="Content Placeholder 2"/>
+          <p:cNvSpPr>
+            <a:spLocks noGrp="1"/>
+          </p:cNvSpPr>
+          <p:nvPr>
+            <p:ph idx="1"/>
+          </p:nvPr>
+        </p:nvSpPr>
+        <p:spPr/>
+        <p:txBody>
+          <a:bodyPr/>
+          <a:lstStyle/>
+          <a:p>
+            <a:pPr lvl="0" indent="0" marL="0">
+              <a:buNone/>
+            </a:pPr>
+            <a:r>
+              <a:rPr/>
+              <a:t>Session 10 is the exception that defines the course: </a:t>
+            </a:r>
+            <a:r>
+              <a:rPr b="1"/>
+              <a:t>no tuning parameter buys you identification.</a:t>
+            </a:r>
+          </a:p>
+        </p:txBody>
+      </p:sp>
+    </p:spTree>
+  </p:cSld>
+</p:sld>
+</file>
+
+<file path=ppt/slides/slide42.xml><?xml version="1.0" encoding="utf-8"?>
+<p:sld xmlns:a="http://schemas.openxmlformats.org/drawingml/2006/main" xmlns:r="http://schemas.openxmlformats.org/officeDocument/2006/relationships" xmlns:p="http://schemas.openxmlformats.org/presentationml/2006/main">
+  <p:cSld>
+    <p:spTree>
+      <p:nvGrpSpPr>
+        <p:cNvPr id="1" name=""/>
+        <p:cNvGrpSpPr/>
+        <p:nvPr/>
+      </p:nvGrpSpPr>
+      <p:grpSpPr>
+        <a:xfrm>
+          <a:off x="0" y="0"/>
+          <a:ext cx="0" cy="0"/>
+          <a:chOff x="0" y="0"/>
+          <a:chExt cx="0" cy="0"/>
+        </a:xfrm>
+      </p:grpSpPr>
+      <p:sp>
+        <p:nvSpPr>
           <p:cNvPr id="2" name="Title 1"/>
           <p:cNvSpPr>
             <a:spLocks noGrp="1"/>
@@ -9060,7 +9560,7 @@
 </p:sld>
 </file>
 
-<file path=ppt/slides/slide37.xml><?xml version="1.0" encoding="utf-8"?>
+<file path=ppt/slides/slide43.xml><?xml version="1.0" encoding="utf-8"?>
 <p:sld xmlns:a="http://schemas.openxmlformats.org/drawingml/2006/main" xmlns:r="http://schemas.openxmlformats.org/officeDocument/2006/relationships" xmlns:p="http://schemas.openxmlformats.org/presentationml/2006/main">
   <p:cSld>
     <p:spTree>
@@ -9277,7 +9777,7 @@
 </p:sld>
 </file>
 
-<file path=ppt/slides/slide38.xml><?xml version="1.0" encoding="utf-8"?>
+<file path=ppt/slides/slide44.xml><?xml version="1.0" encoding="utf-8"?>
 <p:sld xmlns:a="http://schemas.openxmlformats.org/drawingml/2006/main" xmlns:r="http://schemas.openxmlformats.org/officeDocument/2006/relationships" xmlns:p="http://schemas.openxmlformats.org/presentationml/2006/main">
   <p:cSld>
     <p:spTree>
@@ -9366,7 +9866,7 @@
 </p:sld>
 </file>
 
-<file path=ppt/slides/slide39.xml><?xml version="1.0" encoding="utf-8"?>
+<file path=ppt/slides/slide45.xml><?xml version="1.0" encoding="utf-8"?>
 <p:sld xmlns:a="http://schemas.openxmlformats.org/drawingml/2006/main" xmlns:r="http://schemas.openxmlformats.org/officeDocument/2006/relationships" xmlns:p="http://schemas.openxmlformats.org/presentationml/2006/main">
   <p:cSld>
     <p:spTree>
@@ -9418,7 +9918,7 @@
 </p:sld>
 </file>
 
-<file path=ppt/slides/slide4.xml><?xml version="1.0" encoding="utf-8"?>
+<file path=ppt/slides/slide46.xml><?xml version="1.0" encoding="utf-8"?>
 <p:sld xmlns:a="http://schemas.openxmlformats.org/drawingml/2006/main" xmlns:r="http://schemas.openxmlformats.org/officeDocument/2006/relationships" xmlns:p="http://schemas.openxmlformats.org/presentationml/2006/main">
   <p:cSld>
     <p:spTree>
@@ -9455,7 +9955,7 @@
             </a:pPr>
             <a:r>
               <a:rPr/>
-              <a:t>Learning objectives</a:t>
+              <a:t>Key takeaways</a:t>
             </a:r>
           </a:p>
         </p:txBody>
@@ -9475,62 +9975,78 @@
           <a:bodyPr/>
           <a:lstStyle/>
           <a:p>
-            <a:pPr lvl="0"/>
+            <a:pPr lvl="0" indent="-342900" marL="342900">
+              <a:buAutoNum type="arabicPeriod"/>
+            </a:pPr>
             <a:r>
               <a:rPr/>
-              <a:t>Choose among expanding, fixed-window and </a:t>
-            </a:r>
-            <a:r>
-              <a:rPr b="1"/>
-              <a:t>purged blocked</a:t>
-            </a:r>
+              <a:t>Match the backtest design to the deployment: expanding, fixed, or blocked with a purge</a:t>
+            </a:r>
+          </a:p>
+          <a:p>
+            <a:pPr lvl="0" indent="-342900" marL="342900">
+              <a:buAutoNum type="arabicPeriod"/>
+            </a:pPr>
             <a:r>
               <a:rPr/>
-              <a:t> designs, and say why</a:t>
-            </a:r>
-          </a:p>
-          <a:p>
-            <a:pPr lvl="0"/>
+              <a:t>Everything inside the loop. Including the unsupervised steps</a:t>
+            </a:r>
+          </a:p>
+          <a:p>
+            <a:pPr lvl="0" indent="-342900" marL="342900">
+              <a:buAutoNum type="arabicPeriod"/>
+            </a:pPr>
             <a:r>
               <a:rPr/>
-              <a:t>Compare against a benchmark with a </a:t>
+              <a:t>Benchmark against something hard, and test the difference with </a:t>
             </a:r>
             <a:r>
               <a:rPr b="1"/>
               <a:t>Diebold–Mariano</a:t>
             </a:r>
+          </a:p>
+          <a:p>
+            <a:pPr lvl="0" indent="-342900" marL="342900">
+              <a:buAutoNum type="arabicPeriod"/>
+            </a:pPr>
             <a:r>
               <a:rPr/>
-              <a:t> statistic, not an eyeball</a:t>
-            </a:r>
-          </a:p>
-          <a:p>
-            <a:pPr lvl="0"/>
+              <a:t>Four kinds of shift, four different responses. Only one is detectable in advance</a:t>
+            </a:r>
+          </a:p>
+          <a:p>
+            <a:pPr lvl="0" indent="-342900" marL="342900">
+              <a:buAutoNum type="arabicPeriod"/>
+            </a:pPr>
             <a:r>
               <a:rPr/>
-              <a:t>Detect covariate shift with a classifier — and interpret the number against a </a:t>
+              <a:t>A drift diagnostic needs a </a:t>
             </a:r>
             <a:r>
               <a:rPr b="1"/>
               <a:t>placebo</a:t>
             </a:r>
-          </a:p>
-          <a:p>
-            <a:pPr lvl="0"/>
             <a:r>
               <a:rPr/>
-              <a:t>Distinguish covariate shift, label shift, concept drift and </a:t>
-            </a:r>
-            <a:r>
-              <a:rPr b="1"/>
-              <a:t>feedback</a:t>
-            </a:r>
-          </a:p>
-          <a:p>
-            <a:pPr lvl="0"/>
+              <a:t> to be interpretable</a:t>
+            </a:r>
+          </a:p>
+          <a:p>
+            <a:pPr lvl="0" indent="-342900" marL="342900">
+              <a:buAutoNum type="arabicPeriod"/>
+            </a:pPr>
             <a:r>
               <a:rPr/>
-              <a:t>Write a governance file a competent successor could act on</a:t>
+              <a:t>Goodhart is causal, not statistical. Retraining makes it worse</a:t>
+            </a:r>
+          </a:p>
+          <a:p>
+            <a:pPr lvl="0" indent="-342900" marL="342900">
+              <a:buAutoNum type="arabicPeriod"/>
+            </a:pPr>
+            <a:r>
+              <a:rPr/>
+              <a:t>If you cannot write the limitations and the monitoring plan, do not deploy</a:t>
             </a:r>
           </a:p>
         </p:txBody>
@@ -9540,7 +10056,7 @@
 </p:sld>
 </file>
 
-<file path=ppt/slides/slide40.xml><?xml version="1.0" encoding="utf-8"?>
+<file path=ppt/slides/slide47.xml><?xml version="1.0" encoding="utf-8"?>
 <p:sld xmlns:a="http://schemas.openxmlformats.org/drawingml/2006/main" xmlns:r="http://schemas.openxmlformats.org/officeDocument/2006/relationships" xmlns:p="http://schemas.openxmlformats.org/presentationml/2006/main">
   <p:cSld>
     <p:spTree>
@@ -9577,7 +10093,7 @@
             </a:pPr>
             <a:r>
               <a:rPr/>
-              <a:t>Key takeaways</a:t>
+              <a:t>What loses marks</a:t>
             </a:r>
           </a:p>
         </p:txBody>
@@ -9597,78 +10113,38 @@
           <a:bodyPr/>
           <a:lstStyle/>
           <a:p>
-            <a:pPr lvl="0" indent="-342900" marL="342900">
-              <a:buAutoNum type="arabicPeriod"/>
-            </a:pPr>
+            <a:pPr lvl="0"/>
             <a:r>
               <a:rPr/>
-              <a:t>Match the backtest design to the deployment: expanding, fixed, or blocked with a purge</a:t>
-            </a:r>
-          </a:p>
-          <a:p>
-            <a:pPr lvl="0" indent="-342900" marL="342900">
-              <a:buAutoNum type="arabicPeriod"/>
-            </a:pPr>
+              <a:t>Random K-fold on time-ordered data — after eleven weeks, there is no excuse</a:t>
+            </a:r>
+          </a:p>
+          <a:p>
+            <a:pPr lvl="0"/>
             <a:r>
               <a:rPr/>
-              <a:t>Everything inside the loop. Including the unsupervised steps</a:t>
-            </a:r>
-          </a:p>
-          <a:p>
-            <a:pPr lvl="0" indent="-342900" marL="342900">
-              <a:buAutoNum type="arabicPeriod"/>
-            </a:pPr>
+              <a:t>Standardising or extracting factors outside the backtest loop</a:t>
+            </a:r>
+          </a:p>
+          <a:p>
+            <a:pPr lvl="0"/>
             <a:r>
               <a:rPr/>
-              <a:t>Benchmark against something hard, and test the difference with </a:t>
-            </a:r>
-            <a:r>
-              <a:rPr b="1"/>
-              <a:t>Diebold–Mariano</a:t>
-            </a:r>
-          </a:p>
-          <a:p>
-            <a:pPr lvl="0" indent="-342900" marL="342900">
-              <a:buAutoNum type="arabicPeriod"/>
-            </a:pPr>
+              <a:t>“Our model beats the benchmark” with no DM statistic</a:t>
+            </a:r>
+          </a:p>
+          <a:p>
+            <a:pPr lvl="0"/>
             <a:r>
               <a:rPr/>
-              <a:t>Four kinds of shift, four different responses. Only one is detectable in advance</a:t>
-            </a:r>
-          </a:p>
-          <a:p>
-            <a:pPr lvl="0" indent="-342900" marL="342900">
-              <a:buAutoNum type="arabicPeriod"/>
-            </a:pPr>
+              <a:t>A drift AUC with no placebo cut</a:t>
+            </a:r>
+          </a:p>
+          <a:p>
+            <a:pPr lvl="0"/>
             <a:r>
               <a:rPr/>
-              <a:t>A drift diagnostic needs a </a:t>
-            </a:r>
-            <a:r>
-              <a:rPr b="1"/>
-              <a:t>placebo</a:t>
-            </a:r>
-            <a:r>
-              <a:rPr/>
-              <a:t> to be interpretable</a:t>
-            </a:r>
-          </a:p>
-          <a:p>
-            <a:pPr lvl="0" indent="-342900" marL="342900">
-              <a:buAutoNum type="arabicPeriod"/>
-            </a:pPr>
-            <a:r>
-              <a:rPr/>
-              <a:t>Goodhart is causal, not statistical. Retraining makes it worse</a:t>
-            </a:r>
-          </a:p>
-          <a:p>
-            <a:pPr lvl="0" indent="-342900" marL="342900">
-              <a:buAutoNum type="arabicPeriod"/>
-            </a:pPr>
-            <a:r>
-              <a:rPr/>
-              <a:t>If you cannot write the limitations and the monitoring plan, do not deploy</a:t>
+              <a:t>A governance file whose limitations section says “none identified”</a:t>
             </a:r>
           </a:p>
         </p:txBody>
@@ -9678,105 +10154,7 @@
 </p:sld>
 </file>
 
-<file path=ppt/slides/slide41.xml><?xml version="1.0" encoding="utf-8"?>
-<p:sld xmlns:a="http://schemas.openxmlformats.org/drawingml/2006/main" xmlns:r="http://schemas.openxmlformats.org/officeDocument/2006/relationships" xmlns:p="http://schemas.openxmlformats.org/presentationml/2006/main">
-  <p:cSld>
-    <p:spTree>
-      <p:nvGrpSpPr>
-        <p:cNvPr id="1" name=""/>
-        <p:cNvGrpSpPr/>
-        <p:nvPr/>
-      </p:nvGrpSpPr>
-      <p:grpSpPr>
-        <a:xfrm>
-          <a:off x="0" y="0"/>
-          <a:ext cx="0" cy="0"/>
-          <a:chOff x="0" y="0"/>
-          <a:chExt cx="0" cy="0"/>
-        </a:xfrm>
-      </p:grpSpPr>
-      <p:sp>
-        <p:nvSpPr>
-          <p:cNvPr id="2" name="Title 1"/>
-          <p:cNvSpPr>
-            <a:spLocks noGrp="1"/>
-          </p:cNvSpPr>
-          <p:nvPr>
-            <p:ph type="title"/>
-          </p:nvPr>
-        </p:nvSpPr>
-        <p:spPr/>
-        <p:txBody>
-          <a:bodyPr/>
-          <a:lstStyle/>
-          <a:p>
-            <a:pPr lvl="0" indent="0" marL="0">
-              <a:buNone/>
-            </a:pPr>
-            <a:r>
-              <a:rPr/>
-              <a:t>What loses marks</a:t>
-            </a:r>
-          </a:p>
-        </p:txBody>
-      </p:sp>
-      <p:sp>
-        <p:nvSpPr>
-          <p:cNvPr id="3" name="Content Placeholder 2"/>
-          <p:cNvSpPr>
-            <a:spLocks noGrp="1"/>
-          </p:cNvSpPr>
-          <p:nvPr>
-            <p:ph idx="1"/>
-          </p:nvPr>
-        </p:nvSpPr>
-        <p:spPr/>
-        <p:txBody>
-          <a:bodyPr/>
-          <a:lstStyle/>
-          <a:p>
-            <a:pPr lvl="0"/>
-            <a:r>
-              <a:rPr/>
-              <a:t>Random K-fold on time-ordered data — after eleven weeks, there is no excuse</a:t>
-            </a:r>
-          </a:p>
-          <a:p>
-            <a:pPr lvl="0"/>
-            <a:r>
-              <a:rPr/>
-              <a:t>Standardising or extracting factors outside the backtest loop</a:t>
-            </a:r>
-          </a:p>
-          <a:p>
-            <a:pPr lvl="0"/>
-            <a:r>
-              <a:rPr/>
-              <a:t>“Our model beats the benchmark” with no DM statistic</a:t>
-            </a:r>
-          </a:p>
-          <a:p>
-            <a:pPr lvl="0"/>
-            <a:r>
-              <a:rPr/>
-              <a:t>A drift AUC with no placebo cut</a:t>
-            </a:r>
-          </a:p>
-          <a:p>
-            <a:pPr lvl="0"/>
-            <a:r>
-              <a:rPr/>
-              <a:t>A governance file whose limitations section says “none identified”</a:t>
-            </a:r>
-          </a:p>
-        </p:txBody>
-      </p:sp>
-    </p:spTree>
-  </p:cSld>
-</p:sld>
-</file>
-
-<file path=ppt/slides/slide42.xml><?xml version="1.0" encoding="utf-8"?>
+<file path=ppt/slides/slide48.xml><?xml version="1.0" encoding="utf-8"?>
 <p:sld xmlns:a="http://schemas.openxmlformats.org/drawingml/2006/main" xmlns:r="http://schemas.openxmlformats.org/officeDocument/2006/relationships" xmlns:p="http://schemas.openxmlformats.org/presentationml/2006/main">
   <p:cSld>
     <p:spTree>
